--- a/Programacion II/Clases/Clase 4 - Mapas conjuntos e interfaces graficas GUI/Presentacion.pptx
+++ b/Programacion II/Clases/Clase 4 - Mapas conjuntos e interfaces graficas GUI/Presentacion.pptx
@@ -18,6 +18,10 @@
     <p:sldId id="266" r:id="rId17"/>
     <p:sldId id="267" r:id="rId18"/>
     <p:sldId id="268" r:id="rId19"/>
+    <p:sldId id="269" r:id="rId20"/>
+    <p:sldId id="270" r:id="rId21"/>
+    <p:sldId id="271" r:id="rId22"/>
+    <p:sldId id="272" r:id="rId23"/>
   </p:sldIdLst>
   <p:sldSz cx="12191695" cy="6858000" type="screen4x3"/>
   <p:notesSz cx="6858000" cy="9144000"/>
@@ -3618,154 +3622,21 @@
                 </a:solidFill>
                 <a:latin typeface="Calibri"/>
               </a:rPr>
-              <a:t>Antes de entregar — autochequeo</a:t>
-            </a:r>
-          </a:p>
-        </p:txBody>
-      </p:sp>
-      <p:sp>
-        <p:nvSpPr>
-          <p:cNvPr id="5" name="Rounded Rectangle 4"/>
-          <p:cNvSpPr/>
-          <p:nvPr/>
-        </p:nvSpPr>
-        <p:spPr>
-          <a:xfrm>
-            <a:off x="457200" y="1261872"/>
-            <a:ext cx="11277295" cy="566928"/>
-          </a:xfrm>
-          <a:prstGeom prst="roundRect">
-            <a:avLst>
-              <a:gd name="adj" fmla="val 12000"/>
-            </a:avLst>
-          </a:prstGeom>
-          <a:solidFill>
-            <a:srgbClr val="F2F2F2"/>
-          </a:solidFill>
-          <a:ln>
-            <a:noFill/>
-          </a:ln>
-        </p:spPr>
-        <p:style>
-          <a:lnRef idx="1">
-            <a:schemeClr val="accent1"/>
-          </a:lnRef>
-          <a:fillRef idx="3">
-            <a:schemeClr val="accent1"/>
-          </a:fillRef>
-          <a:effectRef idx="2">
-            <a:schemeClr val="accent1"/>
-          </a:effectRef>
-          <a:fontRef idx="minor">
-            <a:schemeClr val="lt1"/>
-          </a:fontRef>
-        </p:style>
-        <p:txBody>
-          <a:bodyPr rtlCol="0" anchor="ctr"/>
-          <a:lstStyle/>
-          <a:p>
-            <a:pPr algn="ctr"/>
-          </a:p>
-        </p:txBody>
-      </p:sp>
-      <p:sp>
-        <p:nvSpPr>
-          <p:cNvPr id="6" name="Rectangle 5"/>
-          <p:cNvSpPr/>
-          <p:nvPr/>
-        </p:nvSpPr>
-        <p:spPr>
-          <a:xfrm>
-            <a:off x="640080" y="1408175"/>
-            <a:ext cx="274320" cy="274320"/>
-          </a:xfrm>
-          <a:prstGeom prst="rect">
-            <a:avLst/>
-          </a:prstGeom>
-          <a:solidFill>
-            <a:srgbClr val="FFFFFF"/>
-          </a:solidFill>
-          <a:ln>
-            <a:solidFill>
-              <a:srgbClr val="333333"/>
-            </a:solidFill>
-          </a:ln>
-        </p:spPr>
-        <p:style>
-          <a:lnRef idx="1">
-            <a:schemeClr val="accent1"/>
-          </a:lnRef>
-          <a:fillRef idx="3">
-            <a:schemeClr val="accent1"/>
-          </a:fillRef>
-          <a:effectRef idx="2">
-            <a:schemeClr val="accent1"/>
-          </a:effectRef>
-          <a:fontRef idx="minor">
-            <a:schemeClr val="lt1"/>
-          </a:fontRef>
-        </p:style>
-        <p:txBody>
-          <a:bodyPr rtlCol="0" anchor="ctr"/>
-          <a:lstStyle/>
-          <a:p>
-            <a:pPr algn="ctr"/>
-          </a:p>
-        </p:txBody>
-      </p:sp>
-      <p:sp>
-        <p:nvSpPr>
-          <p:cNvPr id="7" name="Rectangle 6"/>
-          <p:cNvSpPr/>
-          <p:nvPr/>
-        </p:nvSpPr>
-        <p:spPr>
-          <a:xfrm>
-            <a:off x="640080" y="1408175"/>
-            <a:ext cx="73152" cy="274320"/>
-          </a:xfrm>
-          <a:prstGeom prst="rect">
-            <a:avLst/>
-          </a:prstGeom>
-          <a:solidFill>
-            <a:srgbClr val="269CCB"/>
-          </a:solidFill>
-          <a:ln>
-            <a:noFill/>
-          </a:ln>
-        </p:spPr>
-        <p:style>
-          <a:lnRef idx="1">
-            <a:schemeClr val="accent1"/>
-          </a:lnRef>
-          <a:fillRef idx="3">
-            <a:schemeClr val="accent1"/>
-          </a:fillRef>
-          <a:effectRef idx="2">
-            <a:schemeClr val="accent1"/>
-          </a:effectRef>
-          <a:fontRef idx="minor">
-            <a:schemeClr val="lt1"/>
-          </a:fontRef>
-        </p:style>
-        <p:txBody>
-          <a:bodyPr rtlCol="0" anchor="ctr"/>
-          <a:lstStyle/>
-          <a:p>
-            <a:pPr algn="ctr"/>
-          </a:p>
-        </p:txBody>
-      </p:sp>
-      <p:sp>
-        <p:nvSpPr>
-          <p:cNvPr id="8" name="TextBox 7"/>
+              <a:t>Demo del dia</a:t>
+            </a:r>
+          </a:p>
+        </p:txBody>
+      </p:sp>
+      <p:sp>
+        <p:nvSpPr>
+          <p:cNvPr id="5" name="TextBox 4"/>
           <p:cNvSpPr txBox="1"/>
           <p:nvPr/>
         </p:nvSpPr>
         <p:spPr>
           <a:xfrm>
-            <a:off x="1097280" y="1353312"/>
-            <a:ext cx="10362895" cy="402336"/>
+            <a:off x="457200" y="1170432"/>
+            <a:ext cx="11277295" cy="5230368"/>
           </a:xfrm>
           <a:prstGeom prst="rect">
             <a:avLst/>
@@ -3773,354 +3644,99 @@
           <a:noFill/>
         </p:spPr>
         <p:txBody>
-          <a:bodyPr wrap="square" anchor="ctr"/>
-          <a:lstStyle/>
-          <a:p>
-            <a:r>
-              <a:rPr sz="1500" b="0" i="0">
+          <a:bodyPr wrap="square">
+            <a:spAutoFit/>
+          </a:bodyPr>
+          <a:lstStyle/>
+          <a:p>
+            <a:pPr>
+              <a:spcAft>
+                <a:spcPts val="800"/>
+              </a:spcAft>
+            </a:pPr>
+            <a:r>
+              <a:rPr sz="2000" b="0" i="0">
                 <a:solidFill>
                   <a:srgbClr val="333333"/>
                 </a:solidFill>
                 <a:latin typeface="Calibri"/>
               </a:rPr>
-              <a:t>Si al guardar dos veces el mismo ID el mapa sigue teniendo el mismo tamano y nadie aviso nada, que hace put cuando la clave ya existe y con que metodo pudo haberlo detectado antes?</a:t>
-            </a:r>
-          </a:p>
-        </p:txBody>
-      </p:sp>
-      <p:sp>
-        <p:nvSpPr>
-          <p:cNvPr id="9" name="Rounded Rectangle 8"/>
-          <p:cNvSpPr/>
-          <p:nvPr/>
-        </p:nvSpPr>
-        <p:spPr>
-          <a:xfrm>
-            <a:off x="457200" y="1938528"/>
-            <a:ext cx="11277295" cy="566928"/>
-          </a:xfrm>
-          <a:prstGeom prst="roundRect">
-            <a:avLst>
-              <a:gd name="adj" fmla="val 12000"/>
-            </a:avLst>
-          </a:prstGeom>
-          <a:solidFill>
-            <a:srgbClr val="F2F2F2"/>
-          </a:solidFill>
-          <a:ln>
-            <a:noFill/>
-          </a:ln>
-        </p:spPr>
-        <p:style>
-          <a:lnRef idx="1">
-            <a:schemeClr val="accent1"/>
-          </a:lnRef>
-          <a:fillRef idx="3">
-            <a:schemeClr val="accent1"/>
-          </a:fillRef>
-          <a:effectRef idx="2">
-            <a:schemeClr val="accent1"/>
-          </a:effectRef>
-          <a:fontRef idx="minor">
-            <a:schemeClr val="lt1"/>
-          </a:fontRef>
-        </p:style>
-        <p:txBody>
-          <a:bodyPr rtlCol="0" anchor="ctr"/>
-          <a:lstStyle/>
-          <a:p>
-            <a:pPr algn="ctr"/>
-          </a:p>
-        </p:txBody>
-      </p:sp>
-      <p:sp>
-        <p:nvSpPr>
-          <p:cNvPr id="10" name="Rectangle 9"/>
-          <p:cNvSpPr/>
-          <p:nvPr/>
-        </p:nvSpPr>
-        <p:spPr>
-          <a:xfrm>
-            <a:off x="640080" y="2084832"/>
-            <a:ext cx="274320" cy="274320"/>
-          </a:xfrm>
-          <a:prstGeom prst="rect">
-            <a:avLst/>
-          </a:prstGeom>
-          <a:solidFill>
-            <a:srgbClr val="FFFFFF"/>
-          </a:solidFill>
-          <a:ln>
-            <a:solidFill>
-              <a:srgbClr val="333333"/>
-            </a:solidFill>
-          </a:ln>
-        </p:spPr>
-        <p:style>
-          <a:lnRef idx="1">
-            <a:schemeClr val="accent1"/>
-          </a:lnRef>
-          <a:fillRef idx="3">
-            <a:schemeClr val="accent1"/>
-          </a:fillRef>
-          <a:effectRef idx="2">
-            <a:schemeClr val="accent1"/>
-          </a:effectRef>
-          <a:fontRef idx="minor">
-            <a:schemeClr val="lt1"/>
-          </a:fontRef>
-        </p:style>
-        <p:txBody>
-          <a:bodyPr rtlCol="0" anchor="ctr"/>
-          <a:lstStyle/>
-          <a:p>
-            <a:pPr algn="ctr"/>
-          </a:p>
-        </p:txBody>
-      </p:sp>
-      <p:sp>
-        <p:nvSpPr>
-          <p:cNvPr id="11" name="Rectangle 10"/>
-          <p:cNvSpPr/>
-          <p:nvPr/>
-        </p:nvSpPr>
-        <p:spPr>
-          <a:xfrm>
-            <a:off x="640080" y="2084832"/>
-            <a:ext cx="73152" cy="274320"/>
-          </a:xfrm>
-          <a:prstGeom prst="rect">
-            <a:avLst/>
-          </a:prstGeom>
-          <a:solidFill>
-            <a:srgbClr val="269CCB"/>
-          </a:solidFill>
-          <a:ln>
-            <a:noFill/>
-          </a:ln>
-        </p:spPr>
-        <p:style>
-          <a:lnRef idx="1">
-            <a:schemeClr val="accent1"/>
-          </a:lnRef>
-          <a:fillRef idx="3">
-            <a:schemeClr val="accent1"/>
-          </a:fillRef>
-          <a:effectRef idx="2">
-            <a:schemeClr val="accent1"/>
-          </a:effectRef>
-          <a:fontRef idx="minor">
-            <a:schemeClr val="lt1"/>
-          </a:fontRef>
-        </p:style>
-        <p:txBody>
-          <a:bodyPr rtlCol="0" anchor="ctr"/>
-          <a:lstStyle/>
-          <a:p>
-            <a:pPr algn="ctr"/>
-          </a:p>
-        </p:txBody>
-      </p:sp>
-      <p:sp>
-        <p:nvSpPr>
-          <p:cNvPr id="12" name="TextBox 11"/>
-          <p:cNvSpPr txBox="1"/>
-          <p:nvPr/>
-        </p:nvSpPr>
-        <p:spPr>
-          <a:xfrm>
-            <a:off x="1097280" y="2029968"/>
-            <a:ext cx="10362895" cy="402336"/>
-          </a:xfrm>
-          <a:prstGeom prst="rect">
-            <a:avLst/>
-          </a:prstGeom>
-          <a:noFill/>
-        </p:spPr>
-        <p:txBody>
-          <a:bodyPr wrap="square" anchor="ctr"/>
-          <a:lstStyle/>
-          <a:p>
-            <a:r>
-              <a:rPr sz="1500" b="0" i="0">
+              <a:t>–   </a:t>
+            </a:r>
+            <a:r>
+              <a:rPr sz="2000" b="1" i="0">
                 <a:solidFill>
                   <a:srgbClr val="333333"/>
                 </a:solidFill>
                 <a:latin typeface="Calibri"/>
               </a:rPr>
-              <a:t>Si compila sin errores pero no aparece ninguna ventana en pantalla, cual es la ultima linea que suele faltar despues de construir el JFrame?</a:t>
-            </a:r>
-          </a:p>
-        </p:txBody>
-      </p:sp>
-      <p:sp>
-        <p:nvSpPr>
-          <p:cNvPr id="13" name="Rounded Rectangle 12"/>
-          <p:cNvSpPr/>
-          <p:nvPr/>
-        </p:nvSpPr>
-        <p:spPr>
-          <a:xfrm>
-            <a:off x="457200" y="2615184"/>
-            <a:ext cx="11277295" cy="566928"/>
-          </a:xfrm>
-          <a:prstGeom prst="roundRect">
-            <a:avLst>
-              <a:gd name="adj" fmla="val 12000"/>
-            </a:avLst>
-          </a:prstGeom>
-          <a:solidFill>
-            <a:srgbClr val="F2F2F2"/>
-          </a:solidFill>
-          <a:ln>
-            <a:noFill/>
-          </a:ln>
-        </p:spPr>
-        <p:style>
-          <a:lnRef idx="1">
-            <a:schemeClr val="accent1"/>
-          </a:lnRef>
-          <a:fillRef idx="3">
-            <a:schemeClr val="accent1"/>
-          </a:fillRef>
-          <a:effectRef idx="2">
-            <a:schemeClr val="accent1"/>
-          </a:effectRef>
-          <a:fontRef idx="minor">
-            <a:schemeClr val="lt1"/>
-          </a:fontRef>
-        </p:style>
-        <p:txBody>
-          <a:bodyPr rtlCol="0" anchor="ctr"/>
-          <a:lstStyle/>
-          <a:p>
-            <a:pPr algn="ctr"/>
-          </a:p>
-        </p:txBody>
-      </p:sp>
-      <p:sp>
-        <p:nvSpPr>
-          <p:cNvPr id="14" name="Rectangle 13"/>
-          <p:cNvSpPr/>
-          <p:nvPr/>
-        </p:nvSpPr>
-        <p:spPr>
-          <a:xfrm>
-            <a:off x="640080" y="2761488"/>
-            <a:ext cx="274320" cy="274320"/>
-          </a:xfrm>
-          <a:prstGeom prst="rect">
-            <a:avLst/>
-          </a:prstGeom>
-          <a:solidFill>
-            <a:srgbClr val="FFFFFF"/>
-          </a:solidFill>
-          <a:ln>
-            <a:solidFill>
-              <a:srgbClr val="333333"/>
-            </a:solidFill>
-          </a:ln>
-        </p:spPr>
-        <p:style>
-          <a:lnRef idx="1">
-            <a:schemeClr val="accent1"/>
-          </a:lnRef>
-          <a:fillRef idx="3">
-            <a:schemeClr val="accent1"/>
-          </a:fillRef>
-          <a:effectRef idx="2">
-            <a:schemeClr val="accent1"/>
-          </a:effectRef>
-          <a:fontRef idx="minor">
-            <a:schemeClr val="lt1"/>
-          </a:fontRef>
-        </p:style>
-        <p:txBody>
-          <a:bodyPr rtlCol="0" anchor="ctr"/>
-          <a:lstStyle/>
-          <a:p>
-            <a:pPr algn="ctr"/>
-          </a:p>
-        </p:txBody>
-      </p:sp>
-      <p:sp>
-        <p:nvSpPr>
-          <p:cNvPr id="15" name="Rectangle 14"/>
-          <p:cNvSpPr/>
-          <p:nvPr/>
-        </p:nvSpPr>
-        <p:spPr>
-          <a:xfrm>
-            <a:off x="640080" y="2761488"/>
-            <a:ext cx="73152" cy="274320"/>
-          </a:xfrm>
-          <a:prstGeom prst="rect">
-            <a:avLst/>
-          </a:prstGeom>
-          <a:solidFill>
-            <a:srgbClr val="269CCB"/>
-          </a:solidFill>
-          <a:ln>
-            <a:noFill/>
-          </a:ln>
-        </p:spPr>
-        <p:style>
-          <a:lnRef idx="1">
-            <a:schemeClr val="accent1"/>
-          </a:lnRef>
-          <a:fillRef idx="3">
-            <a:schemeClr val="accent1"/>
-          </a:fillRef>
-          <a:effectRef idx="2">
-            <a:schemeClr val="accent1"/>
-          </a:effectRef>
-          <a:fontRef idx="minor">
-            <a:schemeClr val="lt1"/>
-          </a:fontRef>
-        </p:style>
-        <p:txBody>
-          <a:bodyPr rtlCol="0" anchor="ctr"/>
-          <a:lstStyle/>
-          <a:p>
-            <a:pPr algn="ctr"/>
-          </a:p>
-        </p:txBody>
-      </p:sp>
-      <p:sp>
-        <p:nvSpPr>
-          <p:cNvPr id="16" name="TextBox 15"/>
-          <p:cNvSpPr txBox="1"/>
-          <p:nvPr/>
-        </p:nvSpPr>
-        <p:spPr>
-          <a:xfrm>
-            <a:off x="1097280" y="2706624"/>
-            <a:ext cx="10362895" cy="402336"/>
-          </a:xfrm>
-          <a:prstGeom prst="rect">
-            <a:avLst/>
-          </a:prstGeom>
-          <a:noFill/>
-        </p:spPr>
-        <p:txBody>
-          <a:bodyPr wrap="square" anchor="ctr"/>
-          <a:lstStyle/>
-          <a:p>
-            <a:r>
-              <a:rPr sz="1500" b="0" i="0">
+              <a:t>Herramienta:</a:t>
+            </a:r>
+            <a:r>
+              <a:rPr sz="2000" b="0" i="0">
                 <a:solidFill>
                   <a:srgbClr val="333333"/>
                 </a:solidFill>
                 <a:latin typeface="Calibri"/>
               </a:rPr>
-              <a:t>Si el resultado sale correcto en la consola pero el JLabel no cambia, esta llamando al metodo que actualiza el texto del componente o solo esta imprimiendo?</a:t>
-            </a:r>
-          </a:p>
-        </p:txBody>
-      </p:sp>
-      <p:sp>
-        <p:nvSpPr>
-          <p:cNvPr id="17" name="TextBox 16"/>
+              <a:t> Visual Studio Code (Java)</a:t>
+            </a:r>
+          </a:p>
+          <a:p>
+            <a:pPr>
+              <a:spcAft>
+                <a:spcPts val="800"/>
+              </a:spcAft>
+            </a:pPr>
+            <a:r>
+              <a:rPr sz="2000" b="0" i="0">
+                <a:solidFill>
+                  <a:srgbClr val="333333"/>
+                </a:solidFill>
+                <a:latin typeface="Calibri"/>
+              </a:rPr>
+              <a:t>–   </a:t>
+            </a:r>
+            <a:r>
+              <a:rPr sz="2000" b="1" i="0">
+                <a:solidFill>
+                  <a:srgbClr val="333333"/>
+                </a:solidFill>
+                <a:latin typeface="Calibri"/>
+              </a:rPr>
+              <a:t>Demo:</a:t>
+            </a:r>
+            <a:r>
+              <a:rPr sz="2000" b="0" i="0">
+                <a:solidFill>
+                  <a:srgbClr val="333333"/>
+                </a:solidFill>
+                <a:latin typeface="Calibri"/>
+              </a:rPr>
+              <a:t> El docente busca la ficha H-5000 dentro de un archivo historico de 5.000 expedientes, primero recorriendo un ArrayList y luego con get() sobre un HashMap comparando los nanosegundos, y despues ejecuta la misma busqueda desde una ventana Swing escrita linea por linea.</a:t>
+            </a:r>
+          </a:p>
+          <a:p>
+            <a:pPr>
+              <a:spcAft>
+                <a:spcPts val="800"/>
+              </a:spcAft>
+            </a:pPr>
+            <a:r>
+              <a:rPr sz="2000" b="0" i="0">
+                <a:solidFill>
+                  <a:srgbClr val="333333"/>
+                </a:solidFill>
+                <a:latin typeface="Calibri"/>
+              </a:rPr>
+              <a:t>–   Mismo dominio VetCare — no otro ejemplo.</a:t>
+            </a:r>
+          </a:p>
+        </p:txBody>
+      </p:sp>
+      <p:sp>
+        <p:nvSpPr>
+          <p:cNvPr id="6" name="TextBox 5"/>
           <p:cNvSpPr txBox="1"/>
           <p:nvPr/>
         </p:nvSpPr>
@@ -4294,7 +3910,7 @@
                 </a:solidFill>
                 <a:latin typeface="Calibri"/>
               </a:rPr>
-              <a:t>Criterios de exito / entregable</a:t>
+              <a:t>Taller PI — por que importa</a:t>
             </a:r>
           </a:p>
         </p:txBody>
@@ -4342,7 +3958,7 @@
                 </a:solidFill>
                 <a:latin typeface="Calibri"/>
               </a:rPr>
-              <a:t>Entregable:</a:t>
+              <a:t>Por que importa al PI:</a:t>
             </a:r>
             <a:r>
               <a:rPr sz="2000" b="0" i="0">
@@ -4351,7 +3967,7 @@
                 </a:solidFill>
                 <a:latin typeface="Calibri"/>
               </a:rPr>
-              <a:t> Clase RegistroExpedientes con HashMap y HashSet mas la ventana VentanaBuscarExpediente construida a mano (sin arrastrar componentes) que busca por ID y muestra el resultado o un mensaje de error controlado; comprimido y subido a la plataforma del curso.</a:t>
+              <a:t> el enunciado del proyecto exige buscar expedientes por ID y tener interfaz grafica, y hoy quedan resueltos los dos requisitos con la misma pieza de codigo.</a:t>
             </a:r>
           </a:p>
           <a:p>
@@ -4367,25 +3983,7 @@
                 </a:solidFill>
                 <a:latin typeface="Calibri"/>
               </a:rPr>
-              <a:t>–   </a:t>
-            </a:r>
-            <a:r>
-              <a:rPr sz="2000" b="1" i="0">
-                <a:solidFill>
-                  <a:srgbClr val="333333"/>
-                </a:solidFill>
-                <a:latin typeface="Calibri"/>
-              </a:rPr>
-              <a:t>Exito:</a:t>
-            </a:r>
-            <a:r>
-              <a:rPr sz="2000" b="0" i="0">
-                <a:solidFill>
-                  <a:srgbClr val="333333"/>
-                </a:solidFill>
-                <a:latin typeface="Calibri"/>
-              </a:rPr>
-              <a:t> La busqueda por ID usa get() del HashMap y no un recorrido de lista, y responde correctamente tanto para un ID existente como para uno inexistente.</a:t>
+              <a:t>–   El HashMap sera el indice en memoria que se reconstruye al cargar el archivo CSV en las clases de persistencia, y el HashSet garantizara que no entren IDs repetidos.</a:t>
             </a:r>
           </a:p>
           <a:p>
@@ -4401,127 +3999,7 @@
                 </a:solidFill>
                 <a:latin typeface="Calibri"/>
               </a:rPr>
-              <a:t>–   </a:t>
-            </a:r>
-            <a:r>
-              <a:rPr sz="2000" b="1" i="0">
-                <a:solidFill>
-                  <a:srgbClr val="333333"/>
-                </a:solidFill>
-                <a:latin typeface="Calibri"/>
-              </a:rPr>
-              <a:t>Exito:</a:t>
-            </a:r>
-            <a:r>
-              <a:rPr sz="2000" b="0" i="0">
-                <a:solidFill>
-                  <a:srgbClr val="333333"/>
-                </a:solidFill>
-                <a:latin typeface="Calibri"/>
-              </a:rPr>
-              <a:t> Intentar registrar un ID ya existente produce un aviso explicito y el tamano del mapa no cambia por accidente.</a:t>
-            </a:r>
-          </a:p>
-          <a:p>
-            <a:pPr>
-              <a:spcAft>
-                <a:spcPts val="800"/>
-              </a:spcAft>
-            </a:pPr>
-            <a:r>
-              <a:rPr sz="2000" b="0" i="0">
-                <a:solidFill>
-                  <a:srgbClr val="333333"/>
-                </a:solidFill>
-                <a:latin typeface="Calibri"/>
-              </a:rPr>
-              <a:t>–   </a:t>
-            </a:r>
-            <a:r>
-              <a:rPr sz="2000" b="1" i="0">
-                <a:solidFill>
-                  <a:srgbClr val="333333"/>
-                </a:solidFill>
-                <a:latin typeface="Calibri"/>
-              </a:rPr>
-              <a:t>Exito:</a:t>
-            </a:r>
-            <a:r>
-              <a:rPr sz="2000" b="0" i="0">
-                <a:solidFill>
-                  <a:srgbClr val="333333"/>
-                </a:solidFill>
-                <a:latin typeface="Calibri"/>
-              </a:rPr>
-              <a:t> La ventana abre centrada, con titulo, con el boton funcionando y termina el programa al cerrarse (setDefaultCloseOperation configurado).</a:t>
-            </a:r>
-          </a:p>
-          <a:p>
-            <a:pPr>
-              <a:spcAft>
-                <a:spcPts val="800"/>
-              </a:spcAft>
-            </a:pPr>
-            <a:r>
-              <a:rPr sz="2000" b="0" i="0">
-                <a:solidFill>
-                  <a:srgbClr val="333333"/>
-                </a:solidFill>
-                <a:latin typeface="Calibri"/>
-              </a:rPr>
-              <a:t>–   </a:t>
-            </a:r>
-            <a:r>
-              <a:rPr sz="2000" b="1" i="0">
-                <a:solidFill>
-                  <a:srgbClr val="333333"/>
-                </a:solidFill>
-                <a:latin typeface="Calibri"/>
-              </a:rPr>
-              <a:t>Exito:</a:t>
-            </a:r>
-            <a:r>
-              <a:rPr sz="2000" b="0" i="0">
-                <a:solidFill>
-                  <a:srgbClr val="333333"/>
-                </a:solidFill>
-                <a:latin typeface="Calibri"/>
-              </a:rPr>
-              <a:t> El evento del boton solo lee la entrada y llama al registro: ninguna estructura de datos ni regla de negocio esta escrita dentro del ActionListener.</a:t>
-            </a:r>
-          </a:p>
-          <a:p>
-            <a:pPr>
-              <a:spcAft>
-                <a:spcPts val="800"/>
-              </a:spcAft>
-            </a:pPr>
-            <a:r>
-              <a:rPr sz="2000" b="0" i="0">
-                <a:solidFill>
-                  <a:srgbClr val="333333"/>
-                </a:solidFill>
-                <a:latin typeface="Calibri"/>
-              </a:rPr>
-              <a:t>–   </a:t>
-            </a:r>
-            <a:r>
-              <a:rPr sz="2000" b="1" i="0">
-                <a:solidFill>
-                  <a:srgbClr val="333333"/>
-                </a:solidFill>
-                <a:latin typeface="Calibri"/>
-              </a:rPr>
-              <a:t>Entrega en la plataforma del curso</a:t>
-            </a:r>
-            <a:r>
-              <a:rPr sz="2000" b="0" i="0">
-                <a:solidFill>
-                  <a:srgbClr val="333333"/>
-                </a:solidFill>
-                <a:latin typeface="Calibri"/>
-              </a:rPr>
-              <a:t> — en la fecha que indique el docente.</a:t>
+              <a:t>–   Esta primera ventana es el esqueleto sobre el que se montaran despues el formulario de registro de mascotas y la agenda de citas, por eso se escribe a mano y con la logica separada.</a:t>
             </a:r>
           </a:p>
         </p:txBody>
@@ -4702,109 +4180,21 @@
                 </a:solidFill>
                 <a:latin typeface="Calibri"/>
               </a:rPr>
-              <a:t>Para el PI esta semana</a:t>
-            </a:r>
-          </a:p>
-        </p:txBody>
-      </p:sp>
-      <p:sp>
-        <p:nvSpPr>
-          <p:cNvPr id="5" name="Rounded Rectangle 4"/>
-          <p:cNvSpPr/>
-          <p:nvPr/>
-        </p:nvSpPr>
-        <p:spPr>
-          <a:xfrm>
-            <a:off x="457200" y="1261872"/>
-            <a:ext cx="11277295" cy="1051560"/>
-          </a:xfrm>
-          <a:prstGeom prst="roundRect">
-            <a:avLst>
-              <a:gd name="adj" fmla="val 12000"/>
-            </a:avLst>
-          </a:prstGeom>
-          <a:solidFill>
-            <a:srgbClr val="E8F4FA"/>
-          </a:solidFill>
-          <a:ln>
-            <a:noFill/>
-          </a:ln>
-        </p:spPr>
-        <p:style>
-          <a:lnRef idx="1">
-            <a:schemeClr val="accent1"/>
-          </a:lnRef>
-          <a:fillRef idx="3">
-            <a:schemeClr val="accent1"/>
-          </a:fillRef>
-          <a:effectRef idx="2">
-            <a:schemeClr val="accent1"/>
-          </a:effectRef>
-          <a:fontRef idx="minor">
-            <a:schemeClr val="lt1"/>
-          </a:fontRef>
-        </p:style>
-        <p:txBody>
-          <a:bodyPr rtlCol="0" anchor="ctr"/>
-          <a:lstStyle/>
-          <a:p>
-            <a:pPr algn="ctr"/>
-          </a:p>
-        </p:txBody>
-      </p:sp>
-      <p:sp>
-        <p:nvSpPr>
-          <p:cNvPr id="6" name="Rectangle 5"/>
-          <p:cNvSpPr/>
-          <p:nvPr/>
-        </p:nvSpPr>
-        <p:spPr>
-          <a:xfrm>
-            <a:off x="457200" y="1261872"/>
-            <a:ext cx="128016" cy="1051560"/>
-          </a:xfrm>
-          <a:prstGeom prst="rect">
-            <a:avLst/>
-          </a:prstGeom>
-          <a:solidFill>
-            <a:srgbClr val="269CCB"/>
-          </a:solidFill>
-          <a:ln>
-            <a:noFill/>
-          </a:ln>
-        </p:spPr>
-        <p:style>
-          <a:lnRef idx="1">
-            <a:schemeClr val="accent1"/>
-          </a:lnRef>
-          <a:fillRef idx="3">
-            <a:schemeClr val="accent1"/>
-          </a:fillRef>
-          <a:effectRef idx="2">
-            <a:schemeClr val="accent1"/>
-          </a:effectRef>
-          <a:fontRef idx="minor">
-            <a:schemeClr val="lt1"/>
-          </a:fontRef>
-        </p:style>
-        <p:txBody>
-          <a:bodyPr rtlCol="0" anchor="ctr"/>
-          <a:lstStyle/>
-          <a:p>
-            <a:pPr algn="ctr"/>
-          </a:p>
-        </p:txBody>
-      </p:sp>
-      <p:sp>
-        <p:nvSpPr>
-          <p:cNvPr id="7" name="TextBox 6"/>
+              <a:t>Taller PI — punto de partida</a:t>
+            </a:r>
+          </a:p>
+        </p:txBody>
+      </p:sp>
+      <p:sp>
+        <p:nvSpPr>
+          <p:cNvPr id="5" name="TextBox 4"/>
           <p:cNvSpPr txBox="1"/>
           <p:nvPr/>
         </p:nvSpPr>
         <p:spPr>
           <a:xfrm>
-            <a:off x="777240" y="1399031"/>
-            <a:ext cx="10774375" cy="822959"/>
+            <a:off x="457200" y="1170432"/>
+            <a:ext cx="11277295" cy="5230368"/>
           </a:xfrm>
           <a:prstGeom prst="rect">
             <a:avLst/>
@@ -4817,313 +4207,74 @@
           </a:bodyPr>
           <a:lstStyle/>
           <a:p>
-            <a:r>
-              <a:rPr sz="1200" b="1" i="0">
-                <a:solidFill>
-                  <a:srgbClr val="269CCB"/>
-                </a:solidFill>
-                <a:latin typeface="Calibri"/>
-              </a:rPr>
-              <a:t>Info</a:t>
-            </a:r>
-          </a:p>
-          <a:p>
             <a:pPr>
-              <a:spcBef>
-                <a:spcPts val="400"/>
-              </a:spcBef>
+              <a:spcAft>
+                <a:spcPts val="800"/>
+              </a:spcAft>
             </a:pPr>
             <a:r>
-              <a:rPr sz="1400" b="0" i="0">
+              <a:rPr sz="2000" b="0" i="0">
                 <a:solidFill>
                   <a:srgbClr val="333333"/>
                 </a:solidFill>
                 <a:latin typeface="Calibri"/>
               </a:rPr>
-              <a:t>Hito: VetCare encuentra cualquier expediente por ID en tiempo constante con HashMap y estrena su primera ventana Swing para consultarlo.</a:t>
-            </a:r>
-          </a:p>
-        </p:txBody>
-      </p:sp>
-      <p:sp>
-        <p:nvSpPr>
-          <p:cNvPr id="8" name="Rounded Rectangle 7"/>
-          <p:cNvSpPr/>
-          <p:nvPr/>
-        </p:nvSpPr>
-        <p:spPr>
-          <a:xfrm>
-            <a:off x="457200" y="2478024"/>
-            <a:ext cx="11277295" cy="1051560"/>
-          </a:xfrm>
-          <a:prstGeom prst="roundRect">
-            <a:avLst>
-              <a:gd name="adj" fmla="val 12000"/>
-            </a:avLst>
-          </a:prstGeom>
-          <a:solidFill>
-            <a:srgbClr val="FFF8E1"/>
-          </a:solidFill>
-          <a:ln>
-            <a:noFill/>
-          </a:ln>
-        </p:spPr>
-        <p:style>
-          <a:lnRef idx="1">
-            <a:schemeClr val="accent1"/>
-          </a:lnRef>
-          <a:fillRef idx="3">
-            <a:schemeClr val="accent1"/>
-          </a:fillRef>
-          <a:effectRef idx="2">
-            <a:schemeClr val="accent1"/>
-          </a:effectRef>
-          <a:fontRef idx="minor">
-            <a:schemeClr val="lt1"/>
-          </a:fontRef>
-        </p:style>
-        <p:txBody>
-          <a:bodyPr rtlCol="0" anchor="ctr"/>
-          <a:lstStyle/>
-          <a:p>
-            <a:pPr algn="ctr"/>
-          </a:p>
-        </p:txBody>
-      </p:sp>
-      <p:sp>
-        <p:nvSpPr>
-          <p:cNvPr id="9" name="Rectangle 8"/>
-          <p:cNvSpPr/>
-          <p:nvPr/>
-        </p:nvSpPr>
-        <p:spPr>
-          <a:xfrm>
-            <a:off x="457200" y="2478024"/>
-            <a:ext cx="128016" cy="1051560"/>
-          </a:xfrm>
-          <a:prstGeom prst="rect">
-            <a:avLst/>
-          </a:prstGeom>
-          <a:solidFill>
-            <a:srgbClr val="FFD000"/>
-          </a:solidFill>
-          <a:ln>
-            <a:noFill/>
-          </a:ln>
-        </p:spPr>
-        <p:style>
-          <a:lnRef idx="1">
-            <a:schemeClr val="accent1"/>
-          </a:lnRef>
-          <a:fillRef idx="3">
-            <a:schemeClr val="accent1"/>
-          </a:fillRef>
-          <a:effectRef idx="2">
-            <a:schemeClr val="accent1"/>
-          </a:effectRef>
-          <a:fontRef idx="minor">
-            <a:schemeClr val="lt1"/>
-          </a:fontRef>
-        </p:style>
-        <p:txBody>
-          <a:bodyPr rtlCol="0" anchor="ctr"/>
-          <a:lstStyle/>
-          <a:p>
-            <a:pPr algn="ctr"/>
-          </a:p>
-        </p:txBody>
-      </p:sp>
-      <p:sp>
-        <p:nvSpPr>
-          <p:cNvPr id="10" name="TextBox 9"/>
-          <p:cNvSpPr txBox="1"/>
-          <p:nvPr/>
-        </p:nvSpPr>
-        <p:spPr>
-          <a:xfrm>
-            <a:off x="777240" y="2615184"/>
-            <a:ext cx="10774375" cy="822959"/>
-          </a:xfrm>
-          <a:prstGeom prst="rect">
-            <a:avLst/>
-          </a:prstGeom>
-          <a:noFill/>
-        </p:spPr>
-        <p:txBody>
-          <a:bodyPr wrap="square">
-            <a:spAutoFit/>
-          </a:bodyPr>
-          <a:lstStyle/>
-          <a:p>
-            <a:r>
-              <a:rPr sz="1200" b="1" i="0">
-                <a:solidFill>
-                  <a:srgbClr val="FFD000"/>
-                </a:solidFill>
-                <a:latin typeface="Calibri"/>
-              </a:rPr>
-              <a:t>Aclaración</a:t>
+              <a:t>–   El registro arranca precargado con cinco expedientes: M-001 Firulais labrador de Ana Gomez, M-002 Michi criollo de Luis Perez, M-003 Rocky pastor aleman de Ana Gomez, M-004 Nieve persa de Sara Diaz y M-005 Toby labrador de Sara Diaz.</a:t>
             </a:r>
           </a:p>
           <a:p>
             <a:pPr>
-              <a:spcBef>
-                <a:spcPts val="400"/>
-              </a:spcBef>
+              <a:spcAft>
+                <a:spcPts val="800"/>
+              </a:spcAft>
             </a:pPr>
             <a:r>
-              <a:rPr sz="1400" b="0" i="0">
+              <a:rPr sz="2000" b="0" i="0">
                 <a:solidFill>
                   <a:srgbClr val="333333"/>
                 </a:solidFill>
                 <a:latin typeface="Calibri"/>
               </a:rPr>
-              <a:t>Enunciado completo: Clases/Proyecto Integrador/ (VetCare).</a:t>
-            </a:r>
-          </a:p>
-        </p:txBody>
-      </p:sp>
-      <p:sp>
-        <p:nvSpPr>
-          <p:cNvPr id="11" name="Rounded Rectangle 10"/>
-          <p:cNvSpPr/>
-          <p:nvPr/>
-        </p:nvSpPr>
-        <p:spPr>
-          <a:xfrm>
-            <a:off x="457200" y="3694176"/>
-            <a:ext cx="11277295" cy="1051560"/>
-          </a:xfrm>
-          <a:prstGeom prst="roundRect">
-            <a:avLst>
-              <a:gd name="adj" fmla="val 12000"/>
-            </a:avLst>
-          </a:prstGeom>
-          <a:solidFill>
-            <a:srgbClr val="FBE4E4"/>
-          </a:solidFill>
-          <a:ln>
-            <a:noFill/>
-          </a:ln>
-        </p:spPr>
-        <p:style>
-          <a:lnRef idx="1">
-            <a:schemeClr val="accent1"/>
-          </a:lnRef>
-          <a:fillRef idx="3">
-            <a:schemeClr val="accent1"/>
-          </a:fillRef>
-          <a:effectRef idx="2">
-            <a:schemeClr val="accent1"/>
-          </a:effectRef>
-          <a:fontRef idx="minor">
-            <a:schemeClr val="lt1"/>
-          </a:fontRef>
-        </p:style>
-        <p:txBody>
-          <a:bodyPr rtlCol="0" anchor="ctr"/>
-          <a:lstStyle/>
-          <a:p>
-            <a:pPr algn="ctr"/>
-          </a:p>
-        </p:txBody>
-      </p:sp>
-      <p:sp>
-        <p:nvSpPr>
-          <p:cNvPr id="12" name="Rectangle 11"/>
-          <p:cNvSpPr/>
-          <p:nvPr/>
-        </p:nvSpPr>
-        <p:spPr>
-          <a:xfrm>
-            <a:off x="457200" y="3694176"/>
-            <a:ext cx="128016" cy="1051560"/>
-          </a:xfrm>
-          <a:prstGeom prst="rect">
-            <a:avLst/>
-          </a:prstGeom>
-          <a:solidFill>
-            <a:srgbClr val="A02030"/>
-          </a:solidFill>
-          <a:ln>
-            <a:noFill/>
-          </a:ln>
-        </p:spPr>
-        <p:style>
-          <a:lnRef idx="1">
-            <a:schemeClr val="accent1"/>
-          </a:lnRef>
-          <a:fillRef idx="3">
-            <a:schemeClr val="accent1"/>
-          </a:fillRef>
-          <a:effectRef idx="2">
-            <a:schemeClr val="accent1"/>
-          </a:effectRef>
-          <a:fontRef idx="minor">
-            <a:schemeClr val="lt1"/>
-          </a:fontRef>
-        </p:style>
-        <p:txBody>
-          <a:bodyPr rtlCol="0" anchor="ctr"/>
-          <a:lstStyle/>
-          <a:p>
-            <a:pPr algn="ctr"/>
-          </a:p>
-        </p:txBody>
-      </p:sp>
-      <p:sp>
-        <p:nvSpPr>
-          <p:cNvPr id="13" name="TextBox 12"/>
-          <p:cNvSpPr txBox="1"/>
-          <p:nvPr/>
-        </p:nvSpPr>
-        <p:spPr>
-          <a:xfrm>
-            <a:off x="777240" y="3831336"/>
-            <a:ext cx="10774375" cy="822959"/>
-          </a:xfrm>
-          <a:prstGeom prst="rect">
-            <a:avLst/>
-          </a:prstGeom>
-          <a:noFill/>
-        </p:spPr>
-        <p:txBody>
-          <a:bodyPr wrap="square">
-            <a:spAutoFit/>
-          </a:bodyPr>
-          <a:lstStyle/>
-          <a:p>
-            <a:r>
-              <a:rPr sz="1200" b="1" i="0">
-                <a:solidFill>
-                  <a:srgbClr val="A02030"/>
-                </a:solidFill>
-                <a:latin typeface="Calibri"/>
-              </a:rPr>
-              <a:t>Atención</a:t>
+              <a:t>–   Ademas hay un archivo historico de 5.000 fichas viejas (H-0001 a H-5000) que se usa solo para comparar la busqueda lineal del ArrayList contra el get() del HashMap.</a:t>
             </a:r>
           </a:p>
           <a:p>
             <a:pPr>
-              <a:spcBef>
-                <a:spcPts val="400"/>
-              </a:spcBef>
+              <a:spcAft>
+                <a:spcPts val="800"/>
+              </a:spcAft>
             </a:pPr>
             <a:r>
-              <a:rPr sz="1400" b="0" i="0">
+              <a:rPr sz="2000" b="0" i="0">
                 <a:solidFill>
                   <a:srgbClr val="333333"/>
                 </a:solidFill>
                 <a:latin typeface="Calibri"/>
               </a:rPr>
-              <a:t>Entrega del taller, si el docente lo asigna · en la fecha que indique el docente.</a:t>
-            </a:r>
-          </a:p>
-        </p:txBody>
-      </p:sp>
-      <p:sp>
-        <p:nvSpPr>
-          <p:cNvPr id="14" name="TextBox 13"/>
+              <a:t>–   La recepcionista busca por ID escrito en minusculas o con espacios sobrantes, asi que el texto que entra debe limpiarse con trim() y toUpperCase() antes de consultar el mapa.</a:t>
+            </a:r>
+          </a:p>
+          <a:p>
+            <a:pPr>
+              <a:spcAft>
+                <a:spcPts val="800"/>
+              </a:spcAft>
+            </a:pPr>
+            <a:r>
+              <a:rPr sz="2000" b="0" i="0">
+                <a:solidFill>
+                  <a:srgbClr val="333333"/>
+                </a:solidFill>
+                <a:latin typeface="Calibri"/>
+              </a:rPr>
+              <a:t>–   Nadie pega una ventana ya hecha en esta clase: se escribe linea por linea para entender la jerarquia frame, panel y componente. VS Code no tiene disenador visual, asi que la tentacion no esta a un clic.</a:t>
+            </a:r>
+          </a:p>
+        </p:txBody>
+      </p:sp>
+      <p:sp>
+        <p:nvSpPr>
+          <p:cNvPr id="6" name="TextBox 5"/>
           <p:cNvSpPr txBox="1"/>
           <p:nvPr/>
         </p:nvSpPr>
@@ -5191,6 +4342,2641 @@
         <p:spPr>
           <a:xfrm>
             <a:off x="0" y="0"/>
+            <a:ext cx="12191695" cy="960120"/>
+          </a:xfrm>
+          <a:prstGeom prst="rect">
+            <a:avLst/>
+          </a:prstGeom>
+          <a:solidFill>
+            <a:srgbClr val="095292"/>
+          </a:solidFill>
+          <a:ln>
+            <a:noFill/>
+          </a:ln>
+        </p:spPr>
+        <p:style>
+          <a:lnRef idx="1">
+            <a:schemeClr val="accent1"/>
+          </a:lnRef>
+          <a:fillRef idx="3">
+            <a:schemeClr val="accent1"/>
+          </a:fillRef>
+          <a:effectRef idx="2">
+            <a:schemeClr val="accent1"/>
+          </a:effectRef>
+          <a:fontRef idx="minor">
+            <a:schemeClr val="lt1"/>
+          </a:fontRef>
+        </p:style>
+        <p:txBody>
+          <a:bodyPr rtlCol="0" anchor="ctr"/>
+          <a:lstStyle/>
+          <a:p>
+            <a:pPr algn="ctr"/>
+          </a:p>
+        </p:txBody>
+      </p:sp>
+      <p:sp>
+        <p:nvSpPr>
+          <p:cNvPr id="3" name="Rectangle 2"/>
+          <p:cNvSpPr/>
+          <p:nvPr/>
+        </p:nvSpPr>
+        <p:spPr>
+          <a:xfrm>
+            <a:off x="0" y="960120"/>
+            <a:ext cx="12191695" cy="41148"/>
+          </a:xfrm>
+          <a:prstGeom prst="rect">
+            <a:avLst/>
+          </a:prstGeom>
+          <a:solidFill>
+            <a:srgbClr val="FFD000"/>
+          </a:solidFill>
+          <a:ln>
+            <a:noFill/>
+          </a:ln>
+        </p:spPr>
+        <p:style>
+          <a:lnRef idx="1">
+            <a:schemeClr val="accent1"/>
+          </a:lnRef>
+          <a:fillRef idx="3">
+            <a:schemeClr val="accent1"/>
+          </a:fillRef>
+          <a:effectRef idx="2">
+            <a:schemeClr val="accent1"/>
+          </a:effectRef>
+          <a:fontRef idx="minor">
+            <a:schemeClr val="lt1"/>
+          </a:fontRef>
+        </p:style>
+        <p:txBody>
+          <a:bodyPr rtlCol="0" anchor="ctr"/>
+          <a:lstStyle/>
+          <a:p>
+            <a:pPr algn="ctr"/>
+          </a:p>
+        </p:txBody>
+      </p:sp>
+      <p:sp>
+        <p:nvSpPr>
+          <p:cNvPr id="4" name="TextBox 3"/>
+          <p:cNvSpPr txBox="1"/>
+          <p:nvPr/>
+        </p:nvSpPr>
+        <p:spPr>
+          <a:xfrm>
+            <a:off x="457200" y="164592"/>
+            <a:ext cx="11277295" cy="502920"/>
+          </a:xfrm>
+          <a:prstGeom prst="rect">
+            <a:avLst/>
+          </a:prstGeom>
+          <a:noFill/>
+        </p:spPr>
+        <p:txBody>
+          <a:bodyPr wrap="square">
+            <a:spAutoFit/>
+          </a:bodyPr>
+          <a:lstStyle/>
+          <a:p>
+            <a:r>
+              <a:rPr sz="2600" b="1" i="0">
+                <a:solidFill>
+                  <a:srgbClr val="FFFFFF"/>
+                </a:solidFill>
+                <a:latin typeface="Calibri"/>
+              </a:rPr>
+              <a:t>Taller PI — pasos guiados</a:t>
+            </a:r>
+          </a:p>
+        </p:txBody>
+      </p:sp>
+      <p:sp>
+        <p:nvSpPr>
+          <p:cNvPr id="5" name="Rounded Rectangle 4"/>
+          <p:cNvSpPr/>
+          <p:nvPr/>
+        </p:nvSpPr>
+        <p:spPr>
+          <a:xfrm>
+            <a:off x="457200" y="1234440"/>
+            <a:ext cx="11277295" cy="950976"/>
+          </a:xfrm>
+          <a:prstGeom prst="roundRect">
+            <a:avLst>
+              <a:gd name="adj" fmla="val 12000"/>
+            </a:avLst>
+          </a:prstGeom>
+          <a:solidFill>
+            <a:srgbClr val="F2F2F2"/>
+          </a:solidFill>
+          <a:ln>
+            <a:noFill/>
+          </a:ln>
+        </p:spPr>
+        <p:style>
+          <a:lnRef idx="1">
+            <a:schemeClr val="accent1"/>
+          </a:lnRef>
+          <a:fillRef idx="3">
+            <a:schemeClr val="accent1"/>
+          </a:fillRef>
+          <a:effectRef idx="2">
+            <a:schemeClr val="accent1"/>
+          </a:effectRef>
+          <a:fontRef idx="minor">
+            <a:schemeClr val="lt1"/>
+          </a:fontRef>
+        </p:style>
+        <p:txBody>
+          <a:bodyPr rtlCol="0" anchor="ctr"/>
+          <a:lstStyle/>
+          <a:p>
+            <a:pPr algn="ctr"/>
+          </a:p>
+        </p:txBody>
+      </p:sp>
+      <p:sp>
+        <p:nvSpPr>
+          <p:cNvPr id="6" name="Rounded Rectangle 5"/>
+          <p:cNvSpPr/>
+          <p:nvPr/>
+        </p:nvSpPr>
+        <p:spPr>
+          <a:xfrm>
+            <a:off x="594360" y="1490472"/>
+            <a:ext cx="438912" cy="438912"/>
+          </a:xfrm>
+          <a:prstGeom prst="roundRect">
+            <a:avLst>
+              <a:gd name="adj" fmla="val 12000"/>
+            </a:avLst>
+          </a:prstGeom>
+          <a:solidFill>
+            <a:srgbClr val="095292"/>
+          </a:solidFill>
+          <a:ln>
+            <a:noFill/>
+          </a:ln>
+        </p:spPr>
+        <p:style>
+          <a:lnRef idx="1">
+            <a:schemeClr val="accent1"/>
+          </a:lnRef>
+          <a:fillRef idx="3">
+            <a:schemeClr val="accent1"/>
+          </a:fillRef>
+          <a:effectRef idx="2">
+            <a:schemeClr val="accent1"/>
+          </a:effectRef>
+          <a:fontRef idx="minor">
+            <a:schemeClr val="lt1"/>
+          </a:fontRef>
+        </p:style>
+        <p:txBody>
+          <a:bodyPr rtlCol="0" anchor="ctr"/>
+          <a:lstStyle/>
+          <a:p>
+            <a:pPr algn="ctr"/>
+          </a:p>
+        </p:txBody>
+      </p:sp>
+      <p:sp>
+        <p:nvSpPr>
+          <p:cNvPr id="7" name="TextBox 6"/>
+          <p:cNvSpPr txBox="1"/>
+          <p:nvPr/>
+        </p:nvSpPr>
+        <p:spPr>
+          <a:xfrm>
+            <a:off x="594360" y="1490472"/>
+            <a:ext cx="438912" cy="438912"/>
+          </a:xfrm>
+          <a:prstGeom prst="rect">
+            <a:avLst/>
+          </a:prstGeom>
+          <a:noFill/>
+        </p:spPr>
+        <p:txBody>
+          <a:bodyPr wrap="square" anchor="ctr"/>
+          <a:lstStyle/>
+          <a:p>
+            <a:pPr algn="ctr"/>
+            <a:r>
+              <a:rPr sz="1600" b="1" i="0">
+                <a:solidFill>
+                  <a:srgbClr val="FFFFFF"/>
+                </a:solidFill>
+                <a:latin typeface="Calibri"/>
+              </a:rPr>
+              <a:t>1</a:t>
+            </a:r>
+          </a:p>
+        </p:txBody>
+      </p:sp>
+      <p:sp>
+        <p:nvSpPr>
+          <p:cNvPr id="8" name="TextBox 7"/>
+          <p:cNvSpPr txBox="1"/>
+          <p:nvPr/>
+        </p:nvSpPr>
+        <p:spPr>
+          <a:xfrm>
+            <a:off x="1188720" y="1325880"/>
+            <a:ext cx="10271455" cy="786384"/>
+          </a:xfrm>
+          <a:prstGeom prst="rect">
+            <a:avLst/>
+          </a:prstGeom>
+          <a:noFill/>
+        </p:spPr>
+        <p:txBody>
+          <a:bodyPr wrap="square" anchor="ctr"/>
+          <a:lstStyle/>
+          <a:p>
+            <a:r>
+              <a:rPr sz="1400" b="1" i="0">
+                <a:solidFill>
+                  <a:srgbClr val="095292"/>
+                </a:solidFill>
+                <a:latin typeface="Calibri"/>
+              </a:rPr>
+              <a:t>Bloque de mapas (minutos 10 a 30): cree la clase Expediente con id, nombre, raza, dueno y nota clinica, y la clase RegistroExpedientes con private final Map&lt;String, Expediente&gt; expedientes = new HashMap&lt;&gt;(); verifique guardando los cinco expedientes del escenario e imprimiendo expedientes.size().</a:t>
+            </a:r>
+          </a:p>
+        </p:txBody>
+      </p:sp>
+      <p:sp>
+        <p:nvSpPr>
+          <p:cNvPr id="9" name="Rounded Rectangle 8"/>
+          <p:cNvSpPr/>
+          <p:nvPr/>
+        </p:nvSpPr>
+        <p:spPr>
+          <a:xfrm>
+            <a:off x="457200" y="2276856"/>
+            <a:ext cx="11277295" cy="950976"/>
+          </a:xfrm>
+          <a:prstGeom prst="roundRect">
+            <a:avLst>
+              <a:gd name="adj" fmla="val 12000"/>
+            </a:avLst>
+          </a:prstGeom>
+          <a:solidFill>
+            <a:srgbClr val="E8F4FA"/>
+          </a:solidFill>
+          <a:ln>
+            <a:noFill/>
+          </a:ln>
+        </p:spPr>
+        <p:style>
+          <a:lnRef idx="1">
+            <a:schemeClr val="accent1"/>
+          </a:lnRef>
+          <a:fillRef idx="3">
+            <a:schemeClr val="accent1"/>
+          </a:fillRef>
+          <a:effectRef idx="2">
+            <a:schemeClr val="accent1"/>
+          </a:effectRef>
+          <a:fontRef idx="minor">
+            <a:schemeClr val="lt1"/>
+          </a:fontRef>
+        </p:style>
+        <p:txBody>
+          <a:bodyPr rtlCol="0" anchor="ctr"/>
+          <a:lstStyle/>
+          <a:p>
+            <a:pPr algn="ctr"/>
+          </a:p>
+        </p:txBody>
+      </p:sp>
+      <p:sp>
+        <p:nvSpPr>
+          <p:cNvPr id="10" name="Rounded Rectangle 9"/>
+          <p:cNvSpPr/>
+          <p:nvPr/>
+        </p:nvSpPr>
+        <p:spPr>
+          <a:xfrm>
+            <a:off x="594360" y="2532888"/>
+            <a:ext cx="438912" cy="438912"/>
+          </a:xfrm>
+          <a:prstGeom prst="roundRect">
+            <a:avLst>
+              <a:gd name="adj" fmla="val 12000"/>
+            </a:avLst>
+          </a:prstGeom>
+          <a:solidFill>
+            <a:srgbClr val="095292"/>
+          </a:solidFill>
+          <a:ln>
+            <a:noFill/>
+          </a:ln>
+        </p:spPr>
+        <p:style>
+          <a:lnRef idx="1">
+            <a:schemeClr val="accent1"/>
+          </a:lnRef>
+          <a:fillRef idx="3">
+            <a:schemeClr val="accent1"/>
+          </a:fillRef>
+          <a:effectRef idx="2">
+            <a:schemeClr val="accent1"/>
+          </a:effectRef>
+          <a:fontRef idx="minor">
+            <a:schemeClr val="lt1"/>
+          </a:fontRef>
+        </p:style>
+        <p:txBody>
+          <a:bodyPr rtlCol="0" anchor="ctr"/>
+          <a:lstStyle/>
+          <a:p>
+            <a:pPr algn="ctr"/>
+          </a:p>
+        </p:txBody>
+      </p:sp>
+      <p:sp>
+        <p:nvSpPr>
+          <p:cNvPr id="11" name="TextBox 10"/>
+          <p:cNvSpPr txBox="1"/>
+          <p:nvPr/>
+        </p:nvSpPr>
+        <p:spPr>
+          <a:xfrm>
+            <a:off x="594360" y="2532888"/>
+            <a:ext cx="438912" cy="438912"/>
+          </a:xfrm>
+          <a:prstGeom prst="rect">
+            <a:avLst/>
+          </a:prstGeom>
+          <a:noFill/>
+        </p:spPr>
+        <p:txBody>
+          <a:bodyPr wrap="square" anchor="ctr"/>
+          <a:lstStyle/>
+          <a:p>
+            <a:pPr algn="ctr"/>
+            <a:r>
+              <a:rPr sz="1600" b="1" i="0">
+                <a:solidFill>
+                  <a:srgbClr val="FFFFFF"/>
+                </a:solidFill>
+                <a:latin typeface="Calibri"/>
+              </a:rPr>
+              <a:t>2</a:t>
+            </a:r>
+          </a:p>
+        </p:txBody>
+      </p:sp>
+      <p:sp>
+        <p:nvSpPr>
+          <p:cNvPr id="12" name="TextBox 11"/>
+          <p:cNvSpPr txBox="1"/>
+          <p:nvPr/>
+        </p:nvSpPr>
+        <p:spPr>
+          <a:xfrm>
+            <a:off x="1188720" y="2368296"/>
+            <a:ext cx="10271455" cy="786384"/>
+          </a:xfrm>
+          <a:prstGeom prst="rect">
+            <a:avLst/>
+          </a:prstGeom>
+          <a:noFill/>
+        </p:spPr>
+        <p:txBody>
+          <a:bodyPr wrap="square" anchor="ctr"/>
+          <a:lstStyle/>
+          <a:p>
+            <a:r>
+              <a:rPr sz="1400" b="1" i="0">
+                <a:solidFill>
+                  <a:srgbClr val="095292"/>
+                </a:solidFill>
+                <a:latin typeface="Calibri"/>
+              </a:rPr>
+              <a:t>Bloque de mapas (minutos 30 a 45): implemente buscar(String id) con get y validacion de null, y guardar(Expediente e) que use containsKey para avisar cuando un ID ya existe antes de que put lo reemplace en silencio; verifique guardando dos veces M-001 y confirmando que el mapa sigue en cinco expedientes y aparece el aviso.</a:t>
+            </a:r>
+          </a:p>
+        </p:txBody>
+      </p:sp>
+      <p:sp>
+        <p:nvSpPr>
+          <p:cNvPr id="13" name="Rounded Rectangle 12"/>
+          <p:cNvSpPr/>
+          <p:nvPr/>
+        </p:nvSpPr>
+        <p:spPr>
+          <a:xfrm>
+            <a:off x="457200" y="3319272"/>
+            <a:ext cx="11277295" cy="950976"/>
+          </a:xfrm>
+          <a:prstGeom prst="roundRect">
+            <a:avLst>
+              <a:gd name="adj" fmla="val 12000"/>
+            </a:avLst>
+          </a:prstGeom>
+          <a:solidFill>
+            <a:srgbClr val="F2F2F2"/>
+          </a:solidFill>
+          <a:ln>
+            <a:noFill/>
+          </a:ln>
+        </p:spPr>
+        <p:style>
+          <a:lnRef idx="1">
+            <a:schemeClr val="accent1"/>
+          </a:lnRef>
+          <a:fillRef idx="3">
+            <a:schemeClr val="accent1"/>
+          </a:fillRef>
+          <a:effectRef idx="2">
+            <a:schemeClr val="accent1"/>
+          </a:effectRef>
+          <a:fontRef idx="minor">
+            <a:schemeClr val="lt1"/>
+          </a:fontRef>
+        </p:style>
+        <p:txBody>
+          <a:bodyPr rtlCol="0" anchor="ctr"/>
+          <a:lstStyle/>
+          <a:p>
+            <a:pPr algn="ctr"/>
+          </a:p>
+        </p:txBody>
+      </p:sp>
+      <p:sp>
+        <p:nvSpPr>
+          <p:cNvPr id="14" name="Rounded Rectangle 13"/>
+          <p:cNvSpPr/>
+          <p:nvPr/>
+        </p:nvSpPr>
+        <p:spPr>
+          <a:xfrm>
+            <a:off x="594360" y="3575304"/>
+            <a:ext cx="438912" cy="438912"/>
+          </a:xfrm>
+          <a:prstGeom prst="roundRect">
+            <a:avLst>
+              <a:gd name="adj" fmla="val 12000"/>
+            </a:avLst>
+          </a:prstGeom>
+          <a:solidFill>
+            <a:srgbClr val="095292"/>
+          </a:solidFill>
+          <a:ln>
+            <a:noFill/>
+          </a:ln>
+        </p:spPr>
+        <p:style>
+          <a:lnRef idx="1">
+            <a:schemeClr val="accent1"/>
+          </a:lnRef>
+          <a:fillRef idx="3">
+            <a:schemeClr val="accent1"/>
+          </a:fillRef>
+          <a:effectRef idx="2">
+            <a:schemeClr val="accent1"/>
+          </a:effectRef>
+          <a:fontRef idx="minor">
+            <a:schemeClr val="lt1"/>
+          </a:fontRef>
+        </p:style>
+        <p:txBody>
+          <a:bodyPr rtlCol="0" anchor="ctr"/>
+          <a:lstStyle/>
+          <a:p>
+            <a:pPr algn="ctr"/>
+          </a:p>
+        </p:txBody>
+      </p:sp>
+      <p:sp>
+        <p:nvSpPr>
+          <p:cNvPr id="15" name="TextBox 14"/>
+          <p:cNvSpPr txBox="1"/>
+          <p:nvPr/>
+        </p:nvSpPr>
+        <p:spPr>
+          <a:xfrm>
+            <a:off x="594360" y="3575304"/>
+            <a:ext cx="438912" cy="438912"/>
+          </a:xfrm>
+          <a:prstGeom prst="rect">
+            <a:avLst/>
+          </a:prstGeom>
+          <a:noFill/>
+        </p:spPr>
+        <p:txBody>
+          <a:bodyPr wrap="square" anchor="ctr"/>
+          <a:lstStyle/>
+          <a:p>
+            <a:pPr algn="ctr"/>
+            <a:r>
+              <a:rPr sz="1600" b="1" i="0">
+                <a:solidFill>
+                  <a:srgbClr val="FFFFFF"/>
+                </a:solidFill>
+                <a:latin typeface="Calibri"/>
+              </a:rPr>
+              <a:t>3</a:t>
+            </a:r>
+          </a:p>
+        </p:txBody>
+      </p:sp>
+      <p:sp>
+        <p:nvSpPr>
+          <p:cNvPr id="16" name="TextBox 15"/>
+          <p:cNvSpPr txBox="1"/>
+          <p:nvPr/>
+        </p:nvSpPr>
+        <p:spPr>
+          <a:xfrm>
+            <a:off x="1188720" y="3410712"/>
+            <a:ext cx="10271455" cy="786384"/>
+          </a:xfrm>
+          <a:prstGeom prst="rect">
+            <a:avLst/>
+          </a:prstGeom>
+          <a:noFill/>
+        </p:spPr>
+        <p:txBody>
+          <a:bodyPr wrap="square" anchor="ctr"/>
+          <a:lstStyle/>
+          <a:p>
+            <a:r>
+              <a:rPr sz="1400" b="1" i="0">
+                <a:solidFill>
+                  <a:srgbClr val="095292"/>
+                </a:solidFill>
+                <a:latin typeface="Calibri"/>
+              </a:rPr>
+              <a:t>Bloque de conjuntos (minutos 45 a 55): agregue private final Set&lt;String&gt; razas = new HashSet&lt;&gt;(); que se llene automaticamente en cada guardar y aproveche el boolean que devuelve add para avisar cuando la raza ya estaba; verifique que al cargar a Firulais y a Toby, ambos labradores, el conjunto reporta la raza repetida y razas.size() cuenta una sola vez Labrador.</a:t>
+            </a:r>
+          </a:p>
+        </p:txBody>
+      </p:sp>
+      <p:sp>
+        <p:nvSpPr>
+          <p:cNvPr id="17" name="Rounded Rectangle 16"/>
+          <p:cNvSpPr/>
+          <p:nvPr/>
+        </p:nvSpPr>
+        <p:spPr>
+          <a:xfrm>
+            <a:off x="457200" y="4361688"/>
+            <a:ext cx="11277295" cy="950976"/>
+          </a:xfrm>
+          <a:prstGeom prst="roundRect">
+            <a:avLst>
+              <a:gd name="adj" fmla="val 12000"/>
+            </a:avLst>
+          </a:prstGeom>
+          <a:solidFill>
+            <a:srgbClr val="E8F4FA"/>
+          </a:solidFill>
+          <a:ln>
+            <a:noFill/>
+          </a:ln>
+        </p:spPr>
+        <p:style>
+          <a:lnRef idx="1">
+            <a:schemeClr val="accent1"/>
+          </a:lnRef>
+          <a:fillRef idx="3">
+            <a:schemeClr val="accent1"/>
+          </a:fillRef>
+          <a:effectRef idx="2">
+            <a:schemeClr val="accent1"/>
+          </a:effectRef>
+          <a:fontRef idx="minor">
+            <a:schemeClr val="lt1"/>
+          </a:fontRef>
+        </p:style>
+        <p:txBody>
+          <a:bodyPr rtlCol="0" anchor="ctr"/>
+          <a:lstStyle/>
+          <a:p>
+            <a:pPr algn="ctr"/>
+          </a:p>
+        </p:txBody>
+      </p:sp>
+      <p:sp>
+        <p:nvSpPr>
+          <p:cNvPr id="18" name="Rounded Rectangle 17"/>
+          <p:cNvSpPr/>
+          <p:nvPr/>
+        </p:nvSpPr>
+        <p:spPr>
+          <a:xfrm>
+            <a:off x="594360" y="4617720"/>
+            <a:ext cx="438912" cy="438912"/>
+          </a:xfrm>
+          <a:prstGeom prst="roundRect">
+            <a:avLst>
+              <a:gd name="adj" fmla="val 12000"/>
+            </a:avLst>
+          </a:prstGeom>
+          <a:solidFill>
+            <a:srgbClr val="095292"/>
+          </a:solidFill>
+          <a:ln>
+            <a:noFill/>
+          </a:ln>
+        </p:spPr>
+        <p:style>
+          <a:lnRef idx="1">
+            <a:schemeClr val="accent1"/>
+          </a:lnRef>
+          <a:fillRef idx="3">
+            <a:schemeClr val="accent1"/>
+          </a:fillRef>
+          <a:effectRef idx="2">
+            <a:schemeClr val="accent1"/>
+          </a:effectRef>
+          <a:fontRef idx="minor">
+            <a:schemeClr val="lt1"/>
+          </a:fontRef>
+        </p:style>
+        <p:txBody>
+          <a:bodyPr rtlCol="0" anchor="ctr"/>
+          <a:lstStyle/>
+          <a:p>
+            <a:pPr algn="ctr"/>
+          </a:p>
+        </p:txBody>
+      </p:sp>
+      <p:sp>
+        <p:nvSpPr>
+          <p:cNvPr id="19" name="TextBox 18"/>
+          <p:cNvSpPr txBox="1"/>
+          <p:nvPr/>
+        </p:nvSpPr>
+        <p:spPr>
+          <a:xfrm>
+            <a:off x="594360" y="4617720"/>
+            <a:ext cx="438912" cy="438912"/>
+          </a:xfrm>
+          <a:prstGeom prst="rect">
+            <a:avLst/>
+          </a:prstGeom>
+          <a:noFill/>
+        </p:spPr>
+        <p:txBody>
+          <a:bodyPr wrap="square" anchor="ctr"/>
+          <a:lstStyle/>
+          <a:p>
+            <a:pPr algn="ctr"/>
+            <a:r>
+              <a:rPr sz="1600" b="1" i="0">
+                <a:solidFill>
+                  <a:srgbClr val="FFFFFF"/>
+                </a:solidFill>
+                <a:latin typeface="Calibri"/>
+              </a:rPr>
+              <a:t>4</a:t>
+            </a:r>
+          </a:p>
+        </p:txBody>
+      </p:sp>
+      <p:sp>
+        <p:nvSpPr>
+          <p:cNvPr id="20" name="TextBox 19"/>
+          <p:cNvSpPr txBox="1"/>
+          <p:nvPr/>
+        </p:nvSpPr>
+        <p:spPr>
+          <a:xfrm>
+            <a:off x="1188720" y="4453128"/>
+            <a:ext cx="10271455" cy="786384"/>
+          </a:xfrm>
+          <a:prstGeom prst="rect">
+            <a:avLst/>
+          </a:prstGeom>
+          <a:noFill/>
+        </p:spPr>
+        <p:txBody>
+          <a:bodyPr wrap="square" anchor="ctr"/>
+          <a:lstStyle/>
+          <a:p>
+            <a:r>
+              <a:rPr sz="1400" b="1" i="0">
+                <a:solidFill>
+                  <a:srgbClr val="095292"/>
+                </a:solidFill>
+                <a:latin typeface="Calibri"/>
+              </a:rPr>
+              <a:t>Bloque Swing (minutos 65 a 95): escriba a mano la clase VentanaBuscarExpediente que extiende JFrame, con un JPanel superior que contenga un JLabel, un JTextField y un JButton, y un JLabel central para el resultado; verifique que la ventana abre centrada, con titulo VetCare y que al cerrarla el programa termina.</a:t>
+            </a:r>
+          </a:p>
+        </p:txBody>
+      </p:sp>
+      <p:sp>
+        <p:nvSpPr>
+          <p:cNvPr id="21" name="Rounded Rectangle 20"/>
+          <p:cNvSpPr/>
+          <p:nvPr/>
+        </p:nvSpPr>
+        <p:spPr>
+          <a:xfrm>
+            <a:off x="457200" y="5404104"/>
+            <a:ext cx="11277295" cy="950976"/>
+          </a:xfrm>
+          <a:prstGeom prst="roundRect">
+            <a:avLst>
+              <a:gd name="adj" fmla="val 12000"/>
+            </a:avLst>
+          </a:prstGeom>
+          <a:solidFill>
+            <a:srgbClr val="F2F2F2"/>
+          </a:solidFill>
+          <a:ln>
+            <a:noFill/>
+          </a:ln>
+        </p:spPr>
+        <p:style>
+          <a:lnRef idx="1">
+            <a:schemeClr val="accent1"/>
+          </a:lnRef>
+          <a:fillRef idx="3">
+            <a:schemeClr val="accent1"/>
+          </a:fillRef>
+          <a:effectRef idx="2">
+            <a:schemeClr val="accent1"/>
+          </a:effectRef>
+          <a:fontRef idx="minor">
+            <a:schemeClr val="lt1"/>
+          </a:fontRef>
+        </p:style>
+        <p:txBody>
+          <a:bodyPr rtlCol="0" anchor="ctr"/>
+          <a:lstStyle/>
+          <a:p>
+            <a:pPr algn="ctr"/>
+          </a:p>
+        </p:txBody>
+      </p:sp>
+      <p:sp>
+        <p:nvSpPr>
+          <p:cNvPr id="22" name="Rounded Rectangle 21"/>
+          <p:cNvSpPr/>
+          <p:nvPr/>
+        </p:nvSpPr>
+        <p:spPr>
+          <a:xfrm>
+            <a:off x="594360" y="5660136"/>
+            <a:ext cx="438912" cy="438912"/>
+          </a:xfrm>
+          <a:prstGeom prst="roundRect">
+            <a:avLst>
+              <a:gd name="adj" fmla="val 12000"/>
+            </a:avLst>
+          </a:prstGeom>
+          <a:solidFill>
+            <a:srgbClr val="095292"/>
+          </a:solidFill>
+          <a:ln>
+            <a:noFill/>
+          </a:ln>
+        </p:spPr>
+        <p:style>
+          <a:lnRef idx="1">
+            <a:schemeClr val="accent1"/>
+          </a:lnRef>
+          <a:fillRef idx="3">
+            <a:schemeClr val="accent1"/>
+          </a:fillRef>
+          <a:effectRef idx="2">
+            <a:schemeClr val="accent1"/>
+          </a:effectRef>
+          <a:fontRef idx="minor">
+            <a:schemeClr val="lt1"/>
+          </a:fontRef>
+        </p:style>
+        <p:txBody>
+          <a:bodyPr rtlCol="0" anchor="ctr"/>
+          <a:lstStyle/>
+          <a:p>
+            <a:pPr algn="ctr"/>
+          </a:p>
+        </p:txBody>
+      </p:sp>
+      <p:sp>
+        <p:nvSpPr>
+          <p:cNvPr id="23" name="TextBox 22"/>
+          <p:cNvSpPr txBox="1"/>
+          <p:nvPr/>
+        </p:nvSpPr>
+        <p:spPr>
+          <a:xfrm>
+            <a:off x="594360" y="5660136"/>
+            <a:ext cx="438912" cy="438912"/>
+          </a:xfrm>
+          <a:prstGeom prst="rect">
+            <a:avLst/>
+          </a:prstGeom>
+          <a:noFill/>
+        </p:spPr>
+        <p:txBody>
+          <a:bodyPr wrap="square" anchor="ctr"/>
+          <a:lstStyle/>
+          <a:p>
+            <a:pPr algn="ctr"/>
+            <a:r>
+              <a:rPr sz="1600" b="1" i="0">
+                <a:solidFill>
+                  <a:srgbClr val="FFFFFF"/>
+                </a:solidFill>
+                <a:latin typeface="Calibri"/>
+              </a:rPr>
+              <a:t>5</a:t>
+            </a:r>
+          </a:p>
+        </p:txBody>
+      </p:sp>
+      <p:sp>
+        <p:nvSpPr>
+          <p:cNvPr id="24" name="TextBox 23"/>
+          <p:cNvSpPr txBox="1"/>
+          <p:nvPr/>
+        </p:nvSpPr>
+        <p:spPr>
+          <a:xfrm>
+            <a:off x="1188720" y="5495544"/>
+            <a:ext cx="10271455" cy="786384"/>
+          </a:xfrm>
+          <a:prstGeom prst="rect">
+            <a:avLst/>
+          </a:prstGeom>
+          <a:noFill/>
+        </p:spPr>
+        <p:txBody>
+          <a:bodyPr wrap="square" anchor="ctr"/>
+          <a:lstStyle/>
+          <a:p>
+            <a:r>
+              <a:rPr sz="1400" b="1" i="0">
+                <a:solidFill>
+                  <a:srgbClr val="095292"/>
+                </a:solidFill>
+                <a:latin typeface="Calibri"/>
+              </a:rPr>
+              <a:t>Integracion (minutos 95 a 115): conecte el boton con addActionListener usando lambda para que lea el ID del JTextField, lo normalice con trim() y toUpperCase(), consulte el HashMap y muestre el expediente en el JLabel central o un JOptionPane de advertencia si no existe, todo dentro de try-catch; capture la ventana con una busqueda exitosa y una fallida y suba el proyecto a la plataforma del curso.</a:t>
+            </a:r>
+          </a:p>
+        </p:txBody>
+      </p:sp>
+      <p:sp>
+        <p:nvSpPr>
+          <p:cNvPr id="25" name="TextBox 24"/>
+          <p:cNvSpPr txBox="1"/>
+          <p:nvPr/>
+        </p:nvSpPr>
+        <p:spPr>
+          <a:xfrm>
+            <a:off x="11185855" y="6473952"/>
+            <a:ext cx="640080" cy="274320"/>
+          </a:xfrm>
+          <a:prstGeom prst="rect">
+            <a:avLst/>
+          </a:prstGeom>
+          <a:noFill/>
+        </p:spPr>
+        <p:txBody>
+          <a:bodyPr wrap="square">
+            <a:spAutoFit/>
+          </a:bodyPr>
+          <a:lstStyle/>
+          <a:p>
+            <a:pPr algn="r"/>
+            <a:r>
+              <a:rPr sz="1100" b="0" i="0">
+                <a:solidFill>
+                  <a:srgbClr val="666666"/>
+                </a:solidFill>
+                <a:latin typeface="Calibri"/>
+              </a:rPr>
+              <a:t>13</a:t>
+            </a:r>
+          </a:p>
+        </p:txBody>
+      </p:sp>
+    </p:spTree>
+  </p:cSld>
+  <p:clrMapOvr>
+    <a:masterClrMapping/>
+  </p:clrMapOvr>
+</p:sld>
+</file>
+
+<file path=ppt/slides/slide14.xml><?xml version="1.0" encoding="utf-8"?>
+<p:sld xmlns:a="http://schemas.openxmlformats.org/drawingml/2006/main" xmlns:p="http://schemas.openxmlformats.org/presentationml/2006/main" xmlns:r="http://schemas.openxmlformats.org/officeDocument/2006/relationships">
+  <p:cSld>
+    <p:bg>
+      <p:bgPr>
+        <a:solidFill>
+          <a:srgbClr val="FFFFFF"/>
+        </a:solidFill>
+        <a:effectLst/>
+      </p:bgPr>
+    </p:bg>
+    <p:spTree>
+      <p:nvGrpSpPr>
+        <p:cNvPr id="1" name=""/>
+        <p:cNvGrpSpPr/>
+        <p:nvPr/>
+      </p:nvGrpSpPr>
+      <p:grpSpPr/>
+      <p:sp>
+        <p:nvSpPr>
+          <p:cNvPr id="2" name="Rectangle 1"/>
+          <p:cNvSpPr/>
+          <p:nvPr/>
+        </p:nvSpPr>
+        <p:spPr>
+          <a:xfrm>
+            <a:off x="0" y="0"/>
+            <a:ext cx="12191695" cy="960120"/>
+          </a:xfrm>
+          <a:prstGeom prst="rect">
+            <a:avLst/>
+          </a:prstGeom>
+          <a:solidFill>
+            <a:srgbClr val="095292"/>
+          </a:solidFill>
+          <a:ln>
+            <a:noFill/>
+          </a:ln>
+        </p:spPr>
+        <p:style>
+          <a:lnRef idx="1">
+            <a:schemeClr val="accent1"/>
+          </a:lnRef>
+          <a:fillRef idx="3">
+            <a:schemeClr val="accent1"/>
+          </a:fillRef>
+          <a:effectRef idx="2">
+            <a:schemeClr val="accent1"/>
+          </a:effectRef>
+          <a:fontRef idx="minor">
+            <a:schemeClr val="lt1"/>
+          </a:fontRef>
+        </p:style>
+        <p:txBody>
+          <a:bodyPr rtlCol="0" anchor="ctr"/>
+          <a:lstStyle/>
+          <a:p>
+            <a:pPr algn="ctr"/>
+          </a:p>
+        </p:txBody>
+      </p:sp>
+      <p:sp>
+        <p:nvSpPr>
+          <p:cNvPr id="3" name="Rectangle 2"/>
+          <p:cNvSpPr/>
+          <p:nvPr/>
+        </p:nvSpPr>
+        <p:spPr>
+          <a:xfrm>
+            <a:off x="0" y="960120"/>
+            <a:ext cx="12191695" cy="41148"/>
+          </a:xfrm>
+          <a:prstGeom prst="rect">
+            <a:avLst/>
+          </a:prstGeom>
+          <a:solidFill>
+            <a:srgbClr val="FFD000"/>
+          </a:solidFill>
+          <a:ln>
+            <a:noFill/>
+          </a:ln>
+        </p:spPr>
+        <p:style>
+          <a:lnRef idx="1">
+            <a:schemeClr val="accent1"/>
+          </a:lnRef>
+          <a:fillRef idx="3">
+            <a:schemeClr val="accent1"/>
+          </a:fillRef>
+          <a:effectRef idx="2">
+            <a:schemeClr val="accent1"/>
+          </a:effectRef>
+          <a:fontRef idx="minor">
+            <a:schemeClr val="lt1"/>
+          </a:fontRef>
+        </p:style>
+        <p:txBody>
+          <a:bodyPr rtlCol="0" anchor="ctr"/>
+          <a:lstStyle/>
+          <a:p>
+            <a:pPr algn="ctr"/>
+          </a:p>
+        </p:txBody>
+      </p:sp>
+      <p:sp>
+        <p:nvSpPr>
+          <p:cNvPr id="4" name="TextBox 3"/>
+          <p:cNvSpPr txBox="1"/>
+          <p:nvPr/>
+        </p:nvSpPr>
+        <p:spPr>
+          <a:xfrm>
+            <a:off x="457200" y="164592"/>
+            <a:ext cx="11277295" cy="502920"/>
+          </a:xfrm>
+          <a:prstGeom prst="rect">
+            <a:avLst/>
+          </a:prstGeom>
+          <a:noFill/>
+        </p:spPr>
+        <p:txBody>
+          <a:bodyPr wrap="square">
+            <a:spAutoFit/>
+          </a:bodyPr>
+          <a:lstStyle/>
+          <a:p>
+            <a:r>
+              <a:rPr sz="2600" b="1" i="0">
+                <a:solidFill>
+                  <a:srgbClr val="FFFFFF"/>
+                </a:solidFill>
+                <a:latin typeface="Calibri"/>
+              </a:rPr>
+              <a:t>Antes de entregar — autochequeo</a:t>
+            </a:r>
+          </a:p>
+        </p:txBody>
+      </p:sp>
+      <p:sp>
+        <p:nvSpPr>
+          <p:cNvPr id="5" name="Rounded Rectangle 4"/>
+          <p:cNvSpPr/>
+          <p:nvPr/>
+        </p:nvSpPr>
+        <p:spPr>
+          <a:xfrm>
+            <a:off x="457200" y="1261872"/>
+            <a:ext cx="11277295" cy="566928"/>
+          </a:xfrm>
+          <a:prstGeom prst="roundRect">
+            <a:avLst>
+              <a:gd name="adj" fmla="val 12000"/>
+            </a:avLst>
+          </a:prstGeom>
+          <a:solidFill>
+            <a:srgbClr val="F2F2F2"/>
+          </a:solidFill>
+          <a:ln>
+            <a:noFill/>
+          </a:ln>
+        </p:spPr>
+        <p:style>
+          <a:lnRef idx="1">
+            <a:schemeClr val="accent1"/>
+          </a:lnRef>
+          <a:fillRef idx="3">
+            <a:schemeClr val="accent1"/>
+          </a:fillRef>
+          <a:effectRef idx="2">
+            <a:schemeClr val="accent1"/>
+          </a:effectRef>
+          <a:fontRef idx="minor">
+            <a:schemeClr val="lt1"/>
+          </a:fontRef>
+        </p:style>
+        <p:txBody>
+          <a:bodyPr rtlCol="0" anchor="ctr"/>
+          <a:lstStyle/>
+          <a:p>
+            <a:pPr algn="ctr"/>
+          </a:p>
+        </p:txBody>
+      </p:sp>
+      <p:sp>
+        <p:nvSpPr>
+          <p:cNvPr id="6" name="Rectangle 5"/>
+          <p:cNvSpPr/>
+          <p:nvPr/>
+        </p:nvSpPr>
+        <p:spPr>
+          <a:xfrm>
+            <a:off x="640080" y="1408175"/>
+            <a:ext cx="274320" cy="274320"/>
+          </a:xfrm>
+          <a:prstGeom prst="rect">
+            <a:avLst/>
+          </a:prstGeom>
+          <a:solidFill>
+            <a:srgbClr val="FFFFFF"/>
+          </a:solidFill>
+          <a:ln>
+            <a:solidFill>
+              <a:srgbClr val="333333"/>
+            </a:solidFill>
+          </a:ln>
+        </p:spPr>
+        <p:style>
+          <a:lnRef idx="1">
+            <a:schemeClr val="accent1"/>
+          </a:lnRef>
+          <a:fillRef idx="3">
+            <a:schemeClr val="accent1"/>
+          </a:fillRef>
+          <a:effectRef idx="2">
+            <a:schemeClr val="accent1"/>
+          </a:effectRef>
+          <a:fontRef idx="minor">
+            <a:schemeClr val="lt1"/>
+          </a:fontRef>
+        </p:style>
+        <p:txBody>
+          <a:bodyPr rtlCol="0" anchor="ctr"/>
+          <a:lstStyle/>
+          <a:p>
+            <a:pPr algn="ctr"/>
+          </a:p>
+        </p:txBody>
+      </p:sp>
+      <p:sp>
+        <p:nvSpPr>
+          <p:cNvPr id="7" name="Rectangle 6"/>
+          <p:cNvSpPr/>
+          <p:nvPr/>
+        </p:nvSpPr>
+        <p:spPr>
+          <a:xfrm>
+            <a:off x="640080" y="1408175"/>
+            <a:ext cx="73152" cy="274320"/>
+          </a:xfrm>
+          <a:prstGeom prst="rect">
+            <a:avLst/>
+          </a:prstGeom>
+          <a:solidFill>
+            <a:srgbClr val="269CCB"/>
+          </a:solidFill>
+          <a:ln>
+            <a:noFill/>
+          </a:ln>
+        </p:spPr>
+        <p:style>
+          <a:lnRef idx="1">
+            <a:schemeClr val="accent1"/>
+          </a:lnRef>
+          <a:fillRef idx="3">
+            <a:schemeClr val="accent1"/>
+          </a:fillRef>
+          <a:effectRef idx="2">
+            <a:schemeClr val="accent1"/>
+          </a:effectRef>
+          <a:fontRef idx="minor">
+            <a:schemeClr val="lt1"/>
+          </a:fontRef>
+        </p:style>
+        <p:txBody>
+          <a:bodyPr rtlCol="0" anchor="ctr"/>
+          <a:lstStyle/>
+          <a:p>
+            <a:pPr algn="ctr"/>
+          </a:p>
+        </p:txBody>
+      </p:sp>
+      <p:sp>
+        <p:nvSpPr>
+          <p:cNvPr id="8" name="TextBox 7"/>
+          <p:cNvSpPr txBox="1"/>
+          <p:nvPr/>
+        </p:nvSpPr>
+        <p:spPr>
+          <a:xfrm>
+            <a:off x="1097280" y="1353312"/>
+            <a:ext cx="10362895" cy="402336"/>
+          </a:xfrm>
+          <a:prstGeom prst="rect">
+            <a:avLst/>
+          </a:prstGeom>
+          <a:noFill/>
+        </p:spPr>
+        <p:txBody>
+          <a:bodyPr wrap="square" anchor="ctr"/>
+          <a:lstStyle/>
+          <a:p>
+            <a:r>
+              <a:rPr sz="1500" b="0" i="0">
+                <a:solidFill>
+                  <a:srgbClr val="333333"/>
+                </a:solidFill>
+                <a:latin typeface="Calibri"/>
+              </a:rPr>
+              <a:t>Si al guardar dos veces el mismo ID el mapa sigue teniendo el mismo tamano y nadie aviso nada, que hace put cuando la clave ya existe y con que metodo pudo haberlo detectado antes?</a:t>
+            </a:r>
+          </a:p>
+        </p:txBody>
+      </p:sp>
+      <p:sp>
+        <p:nvSpPr>
+          <p:cNvPr id="9" name="Rounded Rectangle 8"/>
+          <p:cNvSpPr/>
+          <p:nvPr/>
+        </p:nvSpPr>
+        <p:spPr>
+          <a:xfrm>
+            <a:off x="457200" y="1938528"/>
+            <a:ext cx="11277295" cy="566928"/>
+          </a:xfrm>
+          <a:prstGeom prst="roundRect">
+            <a:avLst>
+              <a:gd name="adj" fmla="val 12000"/>
+            </a:avLst>
+          </a:prstGeom>
+          <a:solidFill>
+            <a:srgbClr val="F2F2F2"/>
+          </a:solidFill>
+          <a:ln>
+            <a:noFill/>
+          </a:ln>
+        </p:spPr>
+        <p:style>
+          <a:lnRef idx="1">
+            <a:schemeClr val="accent1"/>
+          </a:lnRef>
+          <a:fillRef idx="3">
+            <a:schemeClr val="accent1"/>
+          </a:fillRef>
+          <a:effectRef idx="2">
+            <a:schemeClr val="accent1"/>
+          </a:effectRef>
+          <a:fontRef idx="minor">
+            <a:schemeClr val="lt1"/>
+          </a:fontRef>
+        </p:style>
+        <p:txBody>
+          <a:bodyPr rtlCol="0" anchor="ctr"/>
+          <a:lstStyle/>
+          <a:p>
+            <a:pPr algn="ctr"/>
+          </a:p>
+        </p:txBody>
+      </p:sp>
+      <p:sp>
+        <p:nvSpPr>
+          <p:cNvPr id="10" name="Rectangle 9"/>
+          <p:cNvSpPr/>
+          <p:nvPr/>
+        </p:nvSpPr>
+        <p:spPr>
+          <a:xfrm>
+            <a:off x="640080" y="2084832"/>
+            <a:ext cx="274320" cy="274320"/>
+          </a:xfrm>
+          <a:prstGeom prst="rect">
+            <a:avLst/>
+          </a:prstGeom>
+          <a:solidFill>
+            <a:srgbClr val="FFFFFF"/>
+          </a:solidFill>
+          <a:ln>
+            <a:solidFill>
+              <a:srgbClr val="333333"/>
+            </a:solidFill>
+          </a:ln>
+        </p:spPr>
+        <p:style>
+          <a:lnRef idx="1">
+            <a:schemeClr val="accent1"/>
+          </a:lnRef>
+          <a:fillRef idx="3">
+            <a:schemeClr val="accent1"/>
+          </a:fillRef>
+          <a:effectRef idx="2">
+            <a:schemeClr val="accent1"/>
+          </a:effectRef>
+          <a:fontRef idx="minor">
+            <a:schemeClr val="lt1"/>
+          </a:fontRef>
+        </p:style>
+        <p:txBody>
+          <a:bodyPr rtlCol="0" anchor="ctr"/>
+          <a:lstStyle/>
+          <a:p>
+            <a:pPr algn="ctr"/>
+          </a:p>
+        </p:txBody>
+      </p:sp>
+      <p:sp>
+        <p:nvSpPr>
+          <p:cNvPr id="11" name="Rectangle 10"/>
+          <p:cNvSpPr/>
+          <p:nvPr/>
+        </p:nvSpPr>
+        <p:spPr>
+          <a:xfrm>
+            <a:off x="640080" y="2084832"/>
+            <a:ext cx="73152" cy="274320"/>
+          </a:xfrm>
+          <a:prstGeom prst="rect">
+            <a:avLst/>
+          </a:prstGeom>
+          <a:solidFill>
+            <a:srgbClr val="269CCB"/>
+          </a:solidFill>
+          <a:ln>
+            <a:noFill/>
+          </a:ln>
+        </p:spPr>
+        <p:style>
+          <a:lnRef idx="1">
+            <a:schemeClr val="accent1"/>
+          </a:lnRef>
+          <a:fillRef idx="3">
+            <a:schemeClr val="accent1"/>
+          </a:fillRef>
+          <a:effectRef idx="2">
+            <a:schemeClr val="accent1"/>
+          </a:effectRef>
+          <a:fontRef idx="minor">
+            <a:schemeClr val="lt1"/>
+          </a:fontRef>
+        </p:style>
+        <p:txBody>
+          <a:bodyPr rtlCol="0" anchor="ctr"/>
+          <a:lstStyle/>
+          <a:p>
+            <a:pPr algn="ctr"/>
+          </a:p>
+        </p:txBody>
+      </p:sp>
+      <p:sp>
+        <p:nvSpPr>
+          <p:cNvPr id="12" name="TextBox 11"/>
+          <p:cNvSpPr txBox="1"/>
+          <p:nvPr/>
+        </p:nvSpPr>
+        <p:spPr>
+          <a:xfrm>
+            <a:off x="1097280" y="2029968"/>
+            <a:ext cx="10362895" cy="402336"/>
+          </a:xfrm>
+          <a:prstGeom prst="rect">
+            <a:avLst/>
+          </a:prstGeom>
+          <a:noFill/>
+        </p:spPr>
+        <p:txBody>
+          <a:bodyPr wrap="square" anchor="ctr"/>
+          <a:lstStyle/>
+          <a:p>
+            <a:r>
+              <a:rPr sz="1500" b="0" i="0">
+                <a:solidFill>
+                  <a:srgbClr val="333333"/>
+                </a:solidFill>
+                <a:latin typeface="Calibri"/>
+              </a:rPr>
+              <a:t>Si compila sin errores pero no aparece ninguna ventana en pantalla, cual es la ultima linea que suele faltar despues de construir el JFrame?</a:t>
+            </a:r>
+          </a:p>
+        </p:txBody>
+      </p:sp>
+      <p:sp>
+        <p:nvSpPr>
+          <p:cNvPr id="13" name="Rounded Rectangle 12"/>
+          <p:cNvSpPr/>
+          <p:nvPr/>
+        </p:nvSpPr>
+        <p:spPr>
+          <a:xfrm>
+            <a:off x="457200" y="2615184"/>
+            <a:ext cx="11277295" cy="566928"/>
+          </a:xfrm>
+          <a:prstGeom prst="roundRect">
+            <a:avLst>
+              <a:gd name="adj" fmla="val 12000"/>
+            </a:avLst>
+          </a:prstGeom>
+          <a:solidFill>
+            <a:srgbClr val="F2F2F2"/>
+          </a:solidFill>
+          <a:ln>
+            <a:noFill/>
+          </a:ln>
+        </p:spPr>
+        <p:style>
+          <a:lnRef idx="1">
+            <a:schemeClr val="accent1"/>
+          </a:lnRef>
+          <a:fillRef idx="3">
+            <a:schemeClr val="accent1"/>
+          </a:fillRef>
+          <a:effectRef idx="2">
+            <a:schemeClr val="accent1"/>
+          </a:effectRef>
+          <a:fontRef idx="minor">
+            <a:schemeClr val="lt1"/>
+          </a:fontRef>
+        </p:style>
+        <p:txBody>
+          <a:bodyPr rtlCol="0" anchor="ctr"/>
+          <a:lstStyle/>
+          <a:p>
+            <a:pPr algn="ctr"/>
+          </a:p>
+        </p:txBody>
+      </p:sp>
+      <p:sp>
+        <p:nvSpPr>
+          <p:cNvPr id="14" name="Rectangle 13"/>
+          <p:cNvSpPr/>
+          <p:nvPr/>
+        </p:nvSpPr>
+        <p:spPr>
+          <a:xfrm>
+            <a:off x="640080" y="2761488"/>
+            <a:ext cx="274320" cy="274320"/>
+          </a:xfrm>
+          <a:prstGeom prst="rect">
+            <a:avLst/>
+          </a:prstGeom>
+          <a:solidFill>
+            <a:srgbClr val="FFFFFF"/>
+          </a:solidFill>
+          <a:ln>
+            <a:solidFill>
+              <a:srgbClr val="333333"/>
+            </a:solidFill>
+          </a:ln>
+        </p:spPr>
+        <p:style>
+          <a:lnRef idx="1">
+            <a:schemeClr val="accent1"/>
+          </a:lnRef>
+          <a:fillRef idx="3">
+            <a:schemeClr val="accent1"/>
+          </a:fillRef>
+          <a:effectRef idx="2">
+            <a:schemeClr val="accent1"/>
+          </a:effectRef>
+          <a:fontRef idx="minor">
+            <a:schemeClr val="lt1"/>
+          </a:fontRef>
+        </p:style>
+        <p:txBody>
+          <a:bodyPr rtlCol="0" anchor="ctr"/>
+          <a:lstStyle/>
+          <a:p>
+            <a:pPr algn="ctr"/>
+          </a:p>
+        </p:txBody>
+      </p:sp>
+      <p:sp>
+        <p:nvSpPr>
+          <p:cNvPr id="15" name="Rectangle 14"/>
+          <p:cNvSpPr/>
+          <p:nvPr/>
+        </p:nvSpPr>
+        <p:spPr>
+          <a:xfrm>
+            <a:off x="640080" y="2761488"/>
+            <a:ext cx="73152" cy="274320"/>
+          </a:xfrm>
+          <a:prstGeom prst="rect">
+            <a:avLst/>
+          </a:prstGeom>
+          <a:solidFill>
+            <a:srgbClr val="269CCB"/>
+          </a:solidFill>
+          <a:ln>
+            <a:noFill/>
+          </a:ln>
+        </p:spPr>
+        <p:style>
+          <a:lnRef idx="1">
+            <a:schemeClr val="accent1"/>
+          </a:lnRef>
+          <a:fillRef idx="3">
+            <a:schemeClr val="accent1"/>
+          </a:fillRef>
+          <a:effectRef idx="2">
+            <a:schemeClr val="accent1"/>
+          </a:effectRef>
+          <a:fontRef idx="minor">
+            <a:schemeClr val="lt1"/>
+          </a:fontRef>
+        </p:style>
+        <p:txBody>
+          <a:bodyPr rtlCol="0" anchor="ctr"/>
+          <a:lstStyle/>
+          <a:p>
+            <a:pPr algn="ctr"/>
+          </a:p>
+        </p:txBody>
+      </p:sp>
+      <p:sp>
+        <p:nvSpPr>
+          <p:cNvPr id="16" name="TextBox 15"/>
+          <p:cNvSpPr txBox="1"/>
+          <p:nvPr/>
+        </p:nvSpPr>
+        <p:spPr>
+          <a:xfrm>
+            <a:off x="1097280" y="2706624"/>
+            <a:ext cx="10362895" cy="402336"/>
+          </a:xfrm>
+          <a:prstGeom prst="rect">
+            <a:avLst/>
+          </a:prstGeom>
+          <a:noFill/>
+        </p:spPr>
+        <p:txBody>
+          <a:bodyPr wrap="square" anchor="ctr"/>
+          <a:lstStyle/>
+          <a:p>
+            <a:r>
+              <a:rPr sz="1500" b="0" i="0">
+                <a:solidFill>
+                  <a:srgbClr val="333333"/>
+                </a:solidFill>
+                <a:latin typeface="Calibri"/>
+              </a:rPr>
+              <a:t>Si el resultado sale correcto en la consola pero el JLabel no cambia, esta llamando al metodo que actualiza el texto del componente o solo esta imprimiendo?</a:t>
+            </a:r>
+          </a:p>
+        </p:txBody>
+      </p:sp>
+      <p:sp>
+        <p:nvSpPr>
+          <p:cNvPr id="17" name="TextBox 16"/>
+          <p:cNvSpPr txBox="1"/>
+          <p:nvPr/>
+        </p:nvSpPr>
+        <p:spPr>
+          <a:xfrm>
+            <a:off x="11185855" y="6473952"/>
+            <a:ext cx="640080" cy="274320"/>
+          </a:xfrm>
+          <a:prstGeom prst="rect">
+            <a:avLst/>
+          </a:prstGeom>
+          <a:noFill/>
+        </p:spPr>
+        <p:txBody>
+          <a:bodyPr wrap="square">
+            <a:spAutoFit/>
+          </a:bodyPr>
+          <a:lstStyle/>
+          <a:p>
+            <a:pPr algn="r"/>
+            <a:r>
+              <a:rPr sz="1100" b="0" i="0">
+                <a:solidFill>
+                  <a:srgbClr val="666666"/>
+                </a:solidFill>
+                <a:latin typeface="Calibri"/>
+              </a:rPr>
+              <a:t>14</a:t>
+            </a:r>
+          </a:p>
+        </p:txBody>
+      </p:sp>
+    </p:spTree>
+  </p:cSld>
+  <p:clrMapOvr>
+    <a:masterClrMapping/>
+  </p:clrMapOvr>
+</p:sld>
+</file>
+
+<file path=ppt/slides/slide15.xml><?xml version="1.0" encoding="utf-8"?>
+<p:sld xmlns:a="http://schemas.openxmlformats.org/drawingml/2006/main" xmlns:p="http://schemas.openxmlformats.org/presentationml/2006/main" xmlns:r="http://schemas.openxmlformats.org/officeDocument/2006/relationships">
+  <p:cSld>
+    <p:bg>
+      <p:bgPr>
+        <a:solidFill>
+          <a:srgbClr val="FFFFFF"/>
+        </a:solidFill>
+        <a:effectLst/>
+      </p:bgPr>
+    </p:bg>
+    <p:spTree>
+      <p:nvGrpSpPr>
+        <p:cNvPr id="1" name=""/>
+        <p:cNvGrpSpPr/>
+        <p:nvPr/>
+      </p:nvGrpSpPr>
+      <p:grpSpPr/>
+      <p:sp>
+        <p:nvSpPr>
+          <p:cNvPr id="2" name="Rectangle 1"/>
+          <p:cNvSpPr/>
+          <p:nvPr/>
+        </p:nvSpPr>
+        <p:spPr>
+          <a:xfrm>
+            <a:off x="0" y="0"/>
+            <a:ext cx="12191695" cy="960120"/>
+          </a:xfrm>
+          <a:prstGeom prst="rect">
+            <a:avLst/>
+          </a:prstGeom>
+          <a:solidFill>
+            <a:srgbClr val="095292"/>
+          </a:solidFill>
+          <a:ln>
+            <a:noFill/>
+          </a:ln>
+        </p:spPr>
+        <p:style>
+          <a:lnRef idx="1">
+            <a:schemeClr val="accent1"/>
+          </a:lnRef>
+          <a:fillRef idx="3">
+            <a:schemeClr val="accent1"/>
+          </a:fillRef>
+          <a:effectRef idx="2">
+            <a:schemeClr val="accent1"/>
+          </a:effectRef>
+          <a:fontRef idx="minor">
+            <a:schemeClr val="lt1"/>
+          </a:fontRef>
+        </p:style>
+        <p:txBody>
+          <a:bodyPr rtlCol="0" anchor="ctr"/>
+          <a:lstStyle/>
+          <a:p>
+            <a:pPr algn="ctr"/>
+          </a:p>
+        </p:txBody>
+      </p:sp>
+      <p:sp>
+        <p:nvSpPr>
+          <p:cNvPr id="3" name="Rectangle 2"/>
+          <p:cNvSpPr/>
+          <p:nvPr/>
+        </p:nvSpPr>
+        <p:spPr>
+          <a:xfrm>
+            <a:off x="0" y="960120"/>
+            <a:ext cx="12191695" cy="41148"/>
+          </a:xfrm>
+          <a:prstGeom prst="rect">
+            <a:avLst/>
+          </a:prstGeom>
+          <a:solidFill>
+            <a:srgbClr val="FFD000"/>
+          </a:solidFill>
+          <a:ln>
+            <a:noFill/>
+          </a:ln>
+        </p:spPr>
+        <p:style>
+          <a:lnRef idx="1">
+            <a:schemeClr val="accent1"/>
+          </a:lnRef>
+          <a:fillRef idx="3">
+            <a:schemeClr val="accent1"/>
+          </a:fillRef>
+          <a:effectRef idx="2">
+            <a:schemeClr val="accent1"/>
+          </a:effectRef>
+          <a:fontRef idx="minor">
+            <a:schemeClr val="lt1"/>
+          </a:fontRef>
+        </p:style>
+        <p:txBody>
+          <a:bodyPr rtlCol="0" anchor="ctr"/>
+          <a:lstStyle/>
+          <a:p>
+            <a:pPr algn="ctr"/>
+          </a:p>
+        </p:txBody>
+      </p:sp>
+      <p:sp>
+        <p:nvSpPr>
+          <p:cNvPr id="4" name="TextBox 3"/>
+          <p:cNvSpPr txBox="1"/>
+          <p:nvPr/>
+        </p:nvSpPr>
+        <p:spPr>
+          <a:xfrm>
+            <a:off x="457200" y="164592"/>
+            <a:ext cx="11277295" cy="502920"/>
+          </a:xfrm>
+          <a:prstGeom prst="rect">
+            <a:avLst/>
+          </a:prstGeom>
+          <a:noFill/>
+        </p:spPr>
+        <p:txBody>
+          <a:bodyPr wrap="square">
+            <a:spAutoFit/>
+          </a:bodyPr>
+          <a:lstStyle/>
+          <a:p>
+            <a:r>
+              <a:rPr sz="2600" b="1" i="0">
+                <a:solidFill>
+                  <a:srgbClr val="FFFFFF"/>
+                </a:solidFill>
+                <a:latin typeface="Calibri"/>
+              </a:rPr>
+              <a:t>Criterios de exito / entregable</a:t>
+            </a:r>
+          </a:p>
+        </p:txBody>
+      </p:sp>
+      <p:sp>
+        <p:nvSpPr>
+          <p:cNvPr id="5" name="TextBox 4"/>
+          <p:cNvSpPr txBox="1"/>
+          <p:nvPr/>
+        </p:nvSpPr>
+        <p:spPr>
+          <a:xfrm>
+            <a:off x="457200" y="1170432"/>
+            <a:ext cx="11277295" cy="5230368"/>
+          </a:xfrm>
+          <a:prstGeom prst="rect">
+            <a:avLst/>
+          </a:prstGeom>
+          <a:noFill/>
+        </p:spPr>
+        <p:txBody>
+          <a:bodyPr wrap="square">
+            <a:spAutoFit/>
+          </a:bodyPr>
+          <a:lstStyle/>
+          <a:p>
+            <a:pPr>
+              <a:spcAft>
+                <a:spcPts val="800"/>
+              </a:spcAft>
+            </a:pPr>
+            <a:r>
+              <a:rPr sz="2000" b="0" i="0">
+                <a:solidFill>
+                  <a:srgbClr val="333333"/>
+                </a:solidFill>
+                <a:latin typeface="Calibri"/>
+              </a:rPr>
+              <a:t>–   </a:t>
+            </a:r>
+            <a:r>
+              <a:rPr sz="2000" b="1" i="0">
+                <a:solidFill>
+                  <a:srgbClr val="333333"/>
+                </a:solidFill>
+                <a:latin typeface="Calibri"/>
+              </a:rPr>
+              <a:t>Entregable:</a:t>
+            </a:r>
+            <a:r>
+              <a:rPr sz="2000" b="0" i="0">
+                <a:solidFill>
+                  <a:srgbClr val="333333"/>
+                </a:solidFill>
+                <a:latin typeface="Calibri"/>
+              </a:rPr>
+              <a:t> Clase RegistroExpedientes con HashMap y HashSet mas la ventana VentanaBuscarExpediente construida a mano (sin arrastrar componentes) que busca por ID y muestra el resultado o un mensaje de error controlado; comprimido y subido a la plataforma del curso.</a:t>
+            </a:r>
+          </a:p>
+          <a:p>
+            <a:pPr>
+              <a:spcAft>
+                <a:spcPts val="800"/>
+              </a:spcAft>
+            </a:pPr>
+            <a:r>
+              <a:rPr sz="2000" b="0" i="0">
+                <a:solidFill>
+                  <a:srgbClr val="333333"/>
+                </a:solidFill>
+                <a:latin typeface="Calibri"/>
+              </a:rPr>
+              <a:t>–   </a:t>
+            </a:r>
+            <a:r>
+              <a:rPr sz="2000" b="1" i="0">
+                <a:solidFill>
+                  <a:srgbClr val="333333"/>
+                </a:solidFill>
+                <a:latin typeface="Calibri"/>
+              </a:rPr>
+              <a:t>Exito:</a:t>
+            </a:r>
+            <a:r>
+              <a:rPr sz="2000" b="0" i="0">
+                <a:solidFill>
+                  <a:srgbClr val="333333"/>
+                </a:solidFill>
+                <a:latin typeface="Calibri"/>
+              </a:rPr>
+              <a:t> La busqueda por ID usa get() del HashMap y no un recorrido de lista, y responde correctamente tanto para un ID existente como para uno inexistente.</a:t>
+            </a:r>
+          </a:p>
+          <a:p>
+            <a:pPr>
+              <a:spcAft>
+                <a:spcPts val="800"/>
+              </a:spcAft>
+            </a:pPr>
+            <a:r>
+              <a:rPr sz="2000" b="0" i="0">
+                <a:solidFill>
+                  <a:srgbClr val="333333"/>
+                </a:solidFill>
+                <a:latin typeface="Calibri"/>
+              </a:rPr>
+              <a:t>–   </a:t>
+            </a:r>
+            <a:r>
+              <a:rPr sz="2000" b="1" i="0">
+                <a:solidFill>
+                  <a:srgbClr val="333333"/>
+                </a:solidFill>
+                <a:latin typeface="Calibri"/>
+              </a:rPr>
+              <a:t>Exito:</a:t>
+            </a:r>
+            <a:r>
+              <a:rPr sz="2000" b="0" i="0">
+                <a:solidFill>
+                  <a:srgbClr val="333333"/>
+                </a:solidFill>
+                <a:latin typeface="Calibri"/>
+              </a:rPr>
+              <a:t> Intentar registrar un ID ya existente produce un aviso explicito y el tamano del mapa no cambia por accidente.</a:t>
+            </a:r>
+          </a:p>
+          <a:p>
+            <a:pPr>
+              <a:spcAft>
+                <a:spcPts val="800"/>
+              </a:spcAft>
+            </a:pPr>
+            <a:r>
+              <a:rPr sz="2000" b="0" i="0">
+                <a:solidFill>
+                  <a:srgbClr val="333333"/>
+                </a:solidFill>
+                <a:latin typeface="Calibri"/>
+              </a:rPr>
+              <a:t>–   </a:t>
+            </a:r>
+            <a:r>
+              <a:rPr sz="2000" b="1" i="0">
+                <a:solidFill>
+                  <a:srgbClr val="333333"/>
+                </a:solidFill>
+                <a:latin typeface="Calibri"/>
+              </a:rPr>
+              <a:t>Exito:</a:t>
+            </a:r>
+            <a:r>
+              <a:rPr sz="2000" b="0" i="0">
+                <a:solidFill>
+                  <a:srgbClr val="333333"/>
+                </a:solidFill>
+                <a:latin typeface="Calibri"/>
+              </a:rPr>
+              <a:t> La ventana abre centrada, con titulo, con el boton funcionando y termina el programa al cerrarse (setDefaultCloseOperation configurado).</a:t>
+            </a:r>
+          </a:p>
+          <a:p>
+            <a:pPr>
+              <a:spcAft>
+                <a:spcPts val="800"/>
+              </a:spcAft>
+            </a:pPr>
+            <a:r>
+              <a:rPr sz="2000" b="0" i="0">
+                <a:solidFill>
+                  <a:srgbClr val="333333"/>
+                </a:solidFill>
+                <a:latin typeface="Calibri"/>
+              </a:rPr>
+              <a:t>–   </a:t>
+            </a:r>
+            <a:r>
+              <a:rPr sz="2000" b="1" i="0">
+                <a:solidFill>
+                  <a:srgbClr val="333333"/>
+                </a:solidFill>
+                <a:latin typeface="Calibri"/>
+              </a:rPr>
+              <a:t>Exito:</a:t>
+            </a:r>
+            <a:r>
+              <a:rPr sz="2000" b="0" i="0">
+                <a:solidFill>
+                  <a:srgbClr val="333333"/>
+                </a:solidFill>
+                <a:latin typeface="Calibri"/>
+              </a:rPr>
+              <a:t> El evento del boton solo lee la entrada y llama al registro: ninguna estructura de datos ni regla de negocio esta escrita dentro del ActionListener.</a:t>
+            </a:r>
+          </a:p>
+          <a:p>
+            <a:pPr>
+              <a:spcAft>
+                <a:spcPts val="800"/>
+              </a:spcAft>
+            </a:pPr>
+            <a:r>
+              <a:rPr sz="2000" b="0" i="0">
+                <a:solidFill>
+                  <a:srgbClr val="333333"/>
+                </a:solidFill>
+                <a:latin typeface="Calibri"/>
+              </a:rPr>
+              <a:t>–   </a:t>
+            </a:r>
+            <a:r>
+              <a:rPr sz="2000" b="1" i="0">
+                <a:solidFill>
+                  <a:srgbClr val="333333"/>
+                </a:solidFill>
+                <a:latin typeface="Calibri"/>
+              </a:rPr>
+              <a:t>Entrega en la plataforma del curso</a:t>
+            </a:r>
+            <a:r>
+              <a:rPr sz="2000" b="0" i="0">
+                <a:solidFill>
+                  <a:srgbClr val="333333"/>
+                </a:solidFill>
+                <a:latin typeface="Calibri"/>
+              </a:rPr>
+              <a:t> — en la fecha que indique el docente.</a:t>
+            </a:r>
+          </a:p>
+        </p:txBody>
+      </p:sp>
+      <p:sp>
+        <p:nvSpPr>
+          <p:cNvPr id="6" name="TextBox 5"/>
+          <p:cNvSpPr txBox="1"/>
+          <p:nvPr/>
+        </p:nvSpPr>
+        <p:spPr>
+          <a:xfrm>
+            <a:off x="11185855" y="6473952"/>
+            <a:ext cx="640080" cy="274320"/>
+          </a:xfrm>
+          <a:prstGeom prst="rect">
+            <a:avLst/>
+          </a:prstGeom>
+          <a:noFill/>
+        </p:spPr>
+        <p:txBody>
+          <a:bodyPr wrap="square">
+            <a:spAutoFit/>
+          </a:bodyPr>
+          <a:lstStyle/>
+          <a:p>
+            <a:pPr algn="r"/>
+            <a:r>
+              <a:rPr sz="1100" b="0" i="0">
+                <a:solidFill>
+                  <a:srgbClr val="666666"/>
+                </a:solidFill>
+                <a:latin typeface="Calibri"/>
+              </a:rPr>
+              <a:t>15</a:t>
+            </a:r>
+          </a:p>
+        </p:txBody>
+      </p:sp>
+    </p:spTree>
+  </p:cSld>
+  <p:clrMapOvr>
+    <a:masterClrMapping/>
+  </p:clrMapOvr>
+</p:sld>
+</file>
+
+<file path=ppt/slides/slide16.xml><?xml version="1.0" encoding="utf-8"?>
+<p:sld xmlns:a="http://schemas.openxmlformats.org/drawingml/2006/main" xmlns:p="http://schemas.openxmlformats.org/presentationml/2006/main" xmlns:r="http://schemas.openxmlformats.org/officeDocument/2006/relationships">
+  <p:cSld>
+    <p:bg>
+      <p:bgPr>
+        <a:solidFill>
+          <a:srgbClr val="FFFFFF"/>
+        </a:solidFill>
+        <a:effectLst/>
+      </p:bgPr>
+    </p:bg>
+    <p:spTree>
+      <p:nvGrpSpPr>
+        <p:cNvPr id="1" name=""/>
+        <p:cNvGrpSpPr/>
+        <p:nvPr/>
+      </p:nvGrpSpPr>
+      <p:grpSpPr/>
+      <p:sp>
+        <p:nvSpPr>
+          <p:cNvPr id="2" name="Rectangle 1"/>
+          <p:cNvSpPr/>
+          <p:nvPr/>
+        </p:nvSpPr>
+        <p:spPr>
+          <a:xfrm>
+            <a:off x="0" y="0"/>
+            <a:ext cx="12191695" cy="960120"/>
+          </a:xfrm>
+          <a:prstGeom prst="rect">
+            <a:avLst/>
+          </a:prstGeom>
+          <a:solidFill>
+            <a:srgbClr val="095292"/>
+          </a:solidFill>
+          <a:ln>
+            <a:noFill/>
+          </a:ln>
+        </p:spPr>
+        <p:style>
+          <a:lnRef idx="1">
+            <a:schemeClr val="accent1"/>
+          </a:lnRef>
+          <a:fillRef idx="3">
+            <a:schemeClr val="accent1"/>
+          </a:fillRef>
+          <a:effectRef idx="2">
+            <a:schemeClr val="accent1"/>
+          </a:effectRef>
+          <a:fontRef idx="minor">
+            <a:schemeClr val="lt1"/>
+          </a:fontRef>
+        </p:style>
+        <p:txBody>
+          <a:bodyPr rtlCol="0" anchor="ctr"/>
+          <a:lstStyle/>
+          <a:p>
+            <a:pPr algn="ctr"/>
+          </a:p>
+        </p:txBody>
+      </p:sp>
+      <p:sp>
+        <p:nvSpPr>
+          <p:cNvPr id="3" name="Rectangle 2"/>
+          <p:cNvSpPr/>
+          <p:nvPr/>
+        </p:nvSpPr>
+        <p:spPr>
+          <a:xfrm>
+            <a:off x="0" y="960120"/>
+            <a:ext cx="12191695" cy="41148"/>
+          </a:xfrm>
+          <a:prstGeom prst="rect">
+            <a:avLst/>
+          </a:prstGeom>
+          <a:solidFill>
+            <a:srgbClr val="FFD000"/>
+          </a:solidFill>
+          <a:ln>
+            <a:noFill/>
+          </a:ln>
+        </p:spPr>
+        <p:style>
+          <a:lnRef idx="1">
+            <a:schemeClr val="accent1"/>
+          </a:lnRef>
+          <a:fillRef idx="3">
+            <a:schemeClr val="accent1"/>
+          </a:fillRef>
+          <a:effectRef idx="2">
+            <a:schemeClr val="accent1"/>
+          </a:effectRef>
+          <a:fontRef idx="minor">
+            <a:schemeClr val="lt1"/>
+          </a:fontRef>
+        </p:style>
+        <p:txBody>
+          <a:bodyPr rtlCol="0" anchor="ctr"/>
+          <a:lstStyle/>
+          <a:p>
+            <a:pPr algn="ctr"/>
+          </a:p>
+        </p:txBody>
+      </p:sp>
+      <p:sp>
+        <p:nvSpPr>
+          <p:cNvPr id="4" name="TextBox 3"/>
+          <p:cNvSpPr txBox="1"/>
+          <p:nvPr/>
+        </p:nvSpPr>
+        <p:spPr>
+          <a:xfrm>
+            <a:off x="457200" y="164592"/>
+            <a:ext cx="11277295" cy="502920"/>
+          </a:xfrm>
+          <a:prstGeom prst="rect">
+            <a:avLst/>
+          </a:prstGeom>
+          <a:noFill/>
+        </p:spPr>
+        <p:txBody>
+          <a:bodyPr wrap="square">
+            <a:spAutoFit/>
+          </a:bodyPr>
+          <a:lstStyle/>
+          <a:p>
+            <a:r>
+              <a:rPr sz="2600" b="1" i="0">
+                <a:solidFill>
+                  <a:srgbClr val="FFFFFF"/>
+                </a:solidFill>
+                <a:latin typeface="Calibri"/>
+              </a:rPr>
+              <a:t>Para el PI esta semana</a:t>
+            </a:r>
+          </a:p>
+        </p:txBody>
+      </p:sp>
+      <p:sp>
+        <p:nvSpPr>
+          <p:cNvPr id="5" name="Rounded Rectangle 4"/>
+          <p:cNvSpPr/>
+          <p:nvPr/>
+        </p:nvSpPr>
+        <p:spPr>
+          <a:xfrm>
+            <a:off x="457200" y="1261872"/>
+            <a:ext cx="11277295" cy="1051560"/>
+          </a:xfrm>
+          <a:prstGeom prst="roundRect">
+            <a:avLst>
+              <a:gd name="adj" fmla="val 12000"/>
+            </a:avLst>
+          </a:prstGeom>
+          <a:solidFill>
+            <a:srgbClr val="E8F4FA"/>
+          </a:solidFill>
+          <a:ln>
+            <a:noFill/>
+          </a:ln>
+        </p:spPr>
+        <p:style>
+          <a:lnRef idx="1">
+            <a:schemeClr val="accent1"/>
+          </a:lnRef>
+          <a:fillRef idx="3">
+            <a:schemeClr val="accent1"/>
+          </a:fillRef>
+          <a:effectRef idx="2">
+            <a:schemeClr val="accent1"/>
+          </a:effectRef>
+          <a:fontRef idx="minor">
+            <a:schemeClr val="lt1"/>
+          </a:fontRef>
+        </p:style>
+        <p:txBody>
+          <a:bodyPr rtlCol="0" anchor="ctr"/>
+          <a:lstStyle/>
+          <a:p>
+            <a:pPr algn="ctr"/>
+          </a:p>
+        </p:txBody>
+      </p:sp>
+      <p:sp>
+        <p:nvSpPr>
+          <p:cNvPr id="6" name="Rectangle 5"/>
+          <p:cNvSpPr/>
+          <p:nvPr/>
+        </p:nvSpPr>
+        <p:spPr>
+          <a:xfrm>
+            <a:off x="457200" y="1261872"/>
+            <a:ext cx="128016" cy="1051560"/>
+          </a:xfrm>
+          <a:prstGeom prst="rect">
+            <a:avLst/>
+          </a:prstGeom>
+          <a:solidFill>
+            <a:srgbClr val="269CCB"/>
+          </a:solidFill>
+          <a:ln>
+            <a:noFill/>
+          </a:ln>
+        </p:spPr>
+        <p:style>
+          <a:lnRef idx="1">
+            <a:schemeClr val="accent1"/>
+          </a:lnRef>
+          <a:fillRef idx="3">
+            <a:schemeClr val="accent1"/>
+          </a:fillRef>
+          <a:effectRef idx="2">
+            <a:schemeClr val="accent1"/>
+          </a:effectRef>
+          <a:fontRef idx="minor">
+            <a:schemeClr val="lt1"/>
+          </a:fontRef>
+        </p:style>
+        <p:txBody>
+          <a:bodyPr rtlCol="0" anchor="ctr"/>
+          <a:lstStyle/>
+          <a:p>
+            <a:pPr algn="ctr"/>
+          </a:p>
+        </p:txBody>
+      </p:sp>
+      <p:sp>
+        <p:nvSpPr>
+          <p:cNvPr id="7" name="TextBox 6"/>
+          <p:cNvSpPr txBox="1"/>
+          <p:nvPr/>
+        </p:nvSpPr>
+        <p:spPr>
+          <a:xfrm>
+            <a:off x="777240" y="1399031"/>
+            <a:ext cx="10774375" cy="822959"/>
+          </a:xfrm>
+          <a:prstGeom prst="rect">
+            <a:avLst/>
+          </a:prstGeom>
+          <a:noFill/>
+        </p:spPr>
+        <p:txBody>
+          <a:bodyPr wrap="square">
+            <a:spAutoFit/>
+          </a:bodyPr>
+          <a:lstStyle/>
+          <a:p>
+            <a:r>
+              <a:rPr sz="1200" b="1" i="0">
+                <a:solidFill>
+                  <a:srgbClr val="269CCB"/>
+                </a:solidFill>
+                <a:latin typeface="Calibri"/>
+              </a:rPr>
+              <a:t>Info</a:t>
+            </a:r>
+          </a:p>
+          <a:p>
+            <a:pPr>
+              <a:spcBef>
+                <a:spcPts val="400"/>
+              </a:spcBef>
+            </a:pPr>
+            <a:r>
+              <a:rPr sz="1400" b="0" i="0">
+                <a:solidFill>
+                  <a:srgbClr val="333333"/>
+                </a:solidFill>
+                <a:latin typeface="Calibri"/>
+              </a:rPr>
+              <a:t>Hito: VetCare encuentra cualquier expediente por ID en tiempo constante con HashMap y estrena su primera ventana Swing para consultarlo.</a:t>
+            </a:r>
+          </a:p>
+        </p:txBody>
+      </p:sp>
+      <p:sp>
+        <p:nvSpPr>
+          <p:cNvPr id="8" name="Rounded Rectangle 7"/>
+          <p:cNvSpPr/>
+          <p:nvPr/>
+        </p:nvSpPr>
+        <p:spPr>
+          <a:xfrm>
+            <a:off x="457200" y="2478024"/>
+            <a:ext cx="11277295" cy="1051560"/>
+          </a:xfrm>
+          <a:prstGeom prst="roundRect">
+            <a:avLst>
+              <a:gd name="adj" fmla="val 12000"/>
+            </a:avLst>
+          </a:prstGeom>
+          <a:solidFill>
+            <a:srgbClr val="FFF8E1"/>
+          </a:solidFill>
+          <a:ln>
+            <a:noFill/>
+          </a:ln>
+        </p:spPr>
+        <p:style>
+          <a:lnRef idx="1">
+            <a:schemeClr val="accent1"/>
+          </a:lnRef>
+          <a:fillRef idx="3">
+            <a:schemeClr val="accent1"/>
+          </a:fillRef>
+          <a:effectRef idx="2">
+            <a:schemeClr val="accent1"/>
+          </a:effectRef>
+          <a:fontRef idx="minor">
+            <a:schemeClr val="lt1"/>
+          </a:fontRef>
+        </p:style>
+        <p:txBody>
+          <a:bodyPr rtlCol="0" anchor="ctr"/>
+          <a:lstStyle/>
+          <a:p>
+            <a:pPr algn="ctr"/>
+          </a:p>
+        </p:txBody>
+      </p:sp>
+      <p:sp>
+        <p:nvSpPr>
+          <p:cNvPr id="9" name="Rectangle 8"/>
+          <p:cNvSpPr/>
+          <p:nvPr/>
+        </p:nvSpPr>
+        <p:spPr>
+          <a:xfrm>
+            <a:off x="457200" y="2478024"/>
+            <a:ext cx="128016" cy="1051560"/>
+          </a:xfrm>
+          <a:prstGeom prst="rect">
+            <a:avLst/>
+          </a:prstGeom>
+          <a:solidFill>
+            <a:srgbClr val="FFD000"/>
+          </a:solidFill>
+          <a:ln>
+            <a:noFill/>
+          </a:ln>
+        </p:spPr>
+        <p:style>
+          <a:lnRef idx="1">
+            <a:schemeClr val="accent1"/>
+          </a:lnRef>
+          <a:fillRef idx="3">
+            <a:schemeClr val="accent1"/>
+          </a:fillRef>
+          <a:effectRef idx="2">
+            <a:schemeClr val="accent1"/>
+          </a:effectRef>
+          <a:fontRef idx="minor">
+            <a:schemeClr val="lt1"/>
+          </a:fontRef>
+        </p:style>
+        <p:txBody>
+          <a:bodyPr rtlCol="0" anchor="ctr"/>
+          <a:lstStyle/>
+          <a:p>
+            <a:pPr algn="ctr"/>
+          </a:p>
+        </p:txBody>
+      </p:sp>
+      <p:sp>
+        <p:nvSpPr>
+          <p:cNvPr id="10" name="TextBox 9"/>
+          <p:cNvSpPr txBox="1"/>
+          <p:nvPr/>
+        </p:nvSpPr>
+        <p:spPr>
+          <a:xfrm>
+            <a:off x="777240" y="2615184"/>
+            <a:ext cx="10774375" cy="822959"/>
+          </a:xfrm>
+          <a:prstGeom prst="rect">
+            <a:avLst/>
+          </a:prstGeom>
+          <a:noFill/>
+        </p:spPr>
+        <p:txBody>
+          <a:bodyPr wrap="square">
+            <a:spAutoFit/>
+          </a:bodyPr>
+          <a:lstStyle/>
+          <a:p>
+            <a:r>
+              <a:rPr sz="1200" b="1" i="0">
+                <a:solidFill>
+                  <a:srgbClr val="FFD000"/>
+                </a:solidFill>
+                <a:latin typeface="Calibri"/>
+              </a:rPr>
+              <a:t>Aclaración</a:t>
+            </a:r>
+          </a:p>
+          <a:p>
+            <a:pPr>
+              <a:spcBef>
+                <a:spcPts val="400"/>
+              </a:spcBef>
+            </a:pPr>
+            <a:r>
+              <a:rPr sz="1400" b="0" i="0">
+                <a:solidFill>
+                  <a:srgbClr val="333333"/>
+                </a:solidFill>
+                <a:latin typeface="Calibri"/>
+              </a:rPr>
+              <a:t>Enunciado completo: Clases/Proyecto Integrador/ (VetCare).</a:t>
+            </a:r>
+          </a:p>
+        </p:txBody>
+      </p:sp>
+      <p:sp>
+        <p:nvSpPr>
+          <p:cNvPr id="11" name="Rounded Rectangle 10"/>
+          <p:cNvSpPr/>
+          <p:nvPr/>
+        </p:nvSpPr>
+        <p:spPr>
+          <a:xfrm>
+            <a:off x="457200" y="3694176"/>
+            <a:ext cx="11277295" cy="1051560"/>
+          </a:xfrm>
+          <a:prstGeom prst="roundRect">
+            <a:avLst>
+              <a:gd name="adj" fmla="val 12000"/>
+            </a:avLst>
+          </a:prstGeom>
+          <a:solidFill>
+            <a:srgbClr val="FBE4E4"/>
+          </a:solidFill>
+          <a:ln>
+            <a:noFill/>
+          </a:ln>
+        </p:spPr>
+        <p:style>
+          <a:lnRef idx="1">
+            <a:schemeClr val="accent1"/>
+          </a:lnRef>
+          <a:fillRef idx="3">
+            <a:schemeClr val="accent1"/>
+          </a:fillRef>
+          <a:effectRef idx="2">
+            <a:schemeClr val="accent1"/>
+          </a:effectRef>
+          <a:fontRef idx="minor">
+            <a:schemeClr val="lt1"/>
+          </a:fontRef>
+        </p:style>
+        <p:txBody>
+          <a:bodyPr rtlCol="0" anchor="ctr"/>
+          <a:lstStyle/>
+          <a:p>
+            <a:pPr algn="ctr"/>
+          </a:p>
+        </p:txBody>
+      </p:sp>
+      <p:sp>
+        <p:nvSpPr>
+          <p:cNvPr id="12" name="Rectangle 11"/>
+          <p:cNvSpPr/>
+          <p:nvPr/>
+        </p:nvSpPr>
+        <p:spPr>
+          <a:xfrm>
+            <a:off x="457200" y="3694176"/>
+            <a:ext cx="128016" cy="1051560"/>
+          </a:xfrm>
+          <a:prstGeom prst="rect">
+            <a:avLst/>
+          </a:prstGeom>
+          <a:solidFill>
+            <a:srgbClr val="A02030"/>
+          </a:solidFill>
+          <a:ln>
+            <a:noFill/>
+          </a:ln>
+        </p:spPr>
+        <p:style>
+          <a:lnRef idx="1">
+            <a:schemeClr val="accent1"/>
+          </a:lnRef>
+          <a:fillRef idx="3">
+            <a:schemeClr val="accent1"/>
+          </a:fillRef>
+          <a:effectRef idx="2">
+            <a:schemeClr val="accent1"/>
+          </a:effectRef>
+          <a:fontRef idx="minor">
+            <a:schemeClr val="lt1"/>
+          </a:fontRef>
+        </p:style>
+        <p:txBody>
+          <a:bodyPr rtlCol="0" anchor="ctr"/>
+          <a:lstStyle/>
+          <a:p>
+            <a:pPr algn="ctr"/>
+          </a:p>
+        </p:txBody>
+      </p:sp>
+      <p:sp>
+        <p:nvSpPr>
+          <p:cNvPr id="13" name="TextBox 12"/>
+          <p:cNvSpPr txBox="1"/>
+          <p:nvPr/>
+        </p:nvSpPr>
+        <p:spPr>
+          <a:xfrm>
+            <a:off x="777240" y="3831336"/>
+            <a:ext cx="10774375" cy="822959"/>
+          </a:xfrm>
+          <a:prstGeom prst="rect">
+            <a:avLst/>
+          </a:prstGeom>
+          <a:noFill/>
+        </p:spPr>
+        <p:txBody>
+          <a:bodyPr wrap="square">
+            <a:spAutoFit/>
+          </a:bodyPr>
+          <a:lstStyle/>
+          <a:p>
+            <a:r>
+              <a:rPr sz="1200" b="1" i="0">
+                <a:solidFill>
+                  <a:srgbClr val="A02030"/>
+                </a:solidFill>
+                <a:latin typeface="Calibri"/>
+              </a:rPr>
+              <a:t>Atención</a:t>
+            </a:r>
+          </a:p>
+          <a:p>
+            <a:pPr>
+              <a:spcBef>
+                <a:spcPts val="400"/>
+              </a:spcBef>
+            </a:pPr>
+            <a:r>
+              <a:rPr sz="1400" b="0" i="0">
+                <a:solidFill>
+                  <a:srgbClr val="333333"/>
+                </a:solidFill>
+                <a:latin typeface="Calibri"/>
+              </a:rPr>
+              <a:t>Entrega del taller, si el docente lo asigna · en la fecha que indique el docente.</a:t>
+            </a:r>
+          </a:p>
+        </p:txBody>
+      </p:sp>
+      <p:sp>
+        <p:nvSpPr>
+          <p:cNvPr id="14" name="TextBox 13"/>
+          <p:cNvSpPr txBox="1"/>
+          <p:nvPr/>
+        </p:nvSpPr>
+        <p:spPr>
+          <a:xfrm>
+            <a:off x="11185855" y="6473952"/>
+            <a:ext cx="640080" cy="274320"/>
+          </a:xfrm>
+          <a:prstGeom prst="rect">
+            <a:avLst/>
+          </a:prstGeom>
+          <a:noFill/>
+        </p:spPr>
+        <p:txBody>
+          <a:bodyPr wrap="square">
+            <a:spAutoFit/>
+          </a:bodyPr>
+          <a:lstStyle/>
+          <a:p>
+            <a:pPr algn="r"/>
+            <a:r>
+              <a:rPr sz="1100" b="0" i="0">
+                <a:solidFill>
+                  <a:srgbClr val="666666"/>
+                </a:solidFill>
+                <a:latin typeface="Calibri"/>
+              </a:rPr>
+              <a:t>16</a:t>
+            </a:r>
+          </a:p>
+        </p:txBody>
+      </p:sp>
+    </p:spTree>
+  </p:cSld>
+  <p:clrMapOvr>
+    <a:masterClrMapping/>
+  </p:clrMapOvr>
+</p:sld>
+</file>
+
+<file path=ppt/slides/slide17.xml><?xml version="1.0" encoding="utf-8"?>
+<p:sld xmlns:a="http://schemas.openxmlformats.org/drawingml/2006/main" xmlns:p="http://schemas.openxmlformats.org/presentationml/2006/main" xmlns:r="http://schemas.openxmlformats.org/officeDocument/2006/relationships">
+  <p:cSld>
+    <p:bg>
+      <p:bgPr>
+        <a:solidFill>
+          <a:srgbClr val="FFFFFF"/>
+        </a:solidFill>
+        <a:effectLst/>
+      </p:bgPr>
+    </p:bg>
+    <p:spTree>
+      <p:nvGrpSpPr>
+        <p:cNvPr id="1" name=""/>
+        <p:cNvGrpSpPr/>
+        <p:nvPr/>
+      </p:nvGrpSpPr>
+      <p:grpSpPr/>
+      <p:sp>
+        <p:nvSpPr>
+          <p:cNvPr id="2" name="Rectangle 1"/>
+          <p:cNvSpPr/>
+          <p:nvPr/>
+        </p:nvSpPr>
+        <p:spPr>
+          <a:xfrm>
+            <a:off x="0" y="0"/>
             <a:ext cx="12191695" cy="164592"/>
           </a:xfrm>
           <a:prstGeom prst="rect">
@@ -6712,7 +8498,7 @@
                 </a:solidFill>
                 <a:latin typeface="Calibri"/>
               </a:rPr>
-              <a:t>Teoria Core</a:t>
+              <a:t>Antes de entrar en materia, el reparto del tiempo, porque hoy son dos...</a:t>
             </a:r>
           </a:p>
         </p:txBody>
@@ -6751,7 +8537,7 @@
                 </a:solidFill>
                 <a:latin typeface="Calibri"/>
               </a:rPr>
-              <a:t>–   Antes de entrar en materia, el reparto del tiempo, porque hoy son dos temas en un solo bloque de 120 minutos y hay…</a:t>
+              <a:t>–   Antes de entrar en materia, el reparto del tiempo, porque hoy son dos temas en un solo bloque de 120 minutos y hay que ser estricto: minutos 0 a 10 encuadre y repaso rapido de cola y pila; minutos 10 a 55 mapas y conjuntos con demo en consola</a:t>
             </a:r>
           </a:p>
           <a:p>
@@ -6767,7 +8553,7 @@
                 </a:solidFill>
                 <a:latin typeface="Calibri"/>
               </a:rPr>
-              <a:t>–   El problema tecnico es este: con un ArrayList, buscar por ID obliga a recorrer la lista comparando uno por uno, lo…</a:t>
+              <a:t>–   Minutos 55 a 65 pausa; minutos 65 a 95 introduccion a Swing con la ventana construida en vivo; minutos 95 a 115 taller integrado donde la ventana consulta el HashMap; minutos 115 a 120 cierre y entrega en la plataforma del curso.</a:t>
             </a:r>
           </a:p>
           <a:p>
@@ -6783,7 +8569,7 @@
                 </a:solidFill>
                 <a:latin typeface="Calibri"/>
               </a:rPr>
-              <a:t>–   La API de Map es corta pero tiene trampas que hay que nombrar en voz alta</a:t>
+              <a:t>–   Si el primer bloque se alarga, la ventana queda sin terminar y la clase se pierde, asi que ponga un cronometro visible.</a:t>
             </a:r>
           </a:p>
           <a:p>
@@ -6799,7 +8585,7 @@
                 </a:solidFill>
                 <a:latin typeface="Calibri"/>
               </a:rPr>
-              <a:t>–   El HashSet es el hermano del HashMap: por dentro es literalmente un HashMap donde solo importan las claves</a:t>
+              <a:t>–   El hilo que une los dos temas es uno solo: hoy le damos a VetCare la capacidad de responder en un instante la pregunta que mas hace la recepcionista de Huellitas, que es dame el expediente de la mascota M-004</a:t>
             </a:r>
           </a:p>
           <a:p>
@@ -6815,7 +8601,7 @@
                 </a:solidFill>
                 <a:latin typeface="Calibri"/>
               </a:rPr>
-              <a:t>–   Ahora la parte grafica, y aqui empieza el segundo bloque de la clase</a:t>
+              <a:t>–   Y ademas le damos una pantalla para hacerla sin abrir el editor de codigo.</a:t>
             </a:r>
           </a:p>
         </p:txBody>
@@ -6996,141 +8782,21 @@
                 </a:solidFill>
                 <a:latin typeface="Calibri"/>
               </a:rPr>
-              <a:t>El mapa busca; la ventana solo pregunta</a:t>
-            </a:r>
-          </a:p>
-        </p:txBody>
-      </p:sp>
-      <p:sp>
-        <p:nvSpPr>
-          <p:cNvPr id="5" name="Rounded Rectangle 4"/>
-          <p:cNvSpPr/>
-          <p:nvPr/>
-        </p:nvSpPr>
-        <p:spPr>
-          <a:xfrm>
-            <a:off x="457200" y="1261872"/>
-            <a:ext cx="11277295" cy="4773168"/>
-          </a:xfrm>
-          <a:prstGeom prst="roundRect">
-            <a:avLst>
-              <a:gd name="adj" fmla="val 12000"/>
-            </a:avLst>
-          </a:prstGeom>
-          <a:solidFill>
-            <a:srgbClr val="1E2A38"/>
-          </a:solidFill>
-          <a:ln>
-            <a:noFill/>
-          </a:ln>
-        </p:spPr>
-        <p:style>
-          <a:lnRef idx="1">
-            <a:schemeClr val="accent1"/>
-          </a:lnRef>
-          <a:fillRef idx="3">
-            <a:schemeClr val="accent1"/>
-          </a:fillRef>
-          <a:effectRef idx="2">
-            <a:schemeClr val="accent1"/>
-          </a:effectRef>
-          <a:fontRef idx="minor">
-            <a:schemeClr val="lt1"/>
-          </a:fontRef>
-        </p:style>
-        <p:txBody>
-          <a:bodyPr rtlCol="0" anchor="ctr"/>
-          <a:lstStyle/>
-          <a:p>
-            <a:pPr algn="ctr"/>
-          </a:p>
-        </p:txBody>
-      </p:sp>
-      <p:sp>
-        <p:nvSpPr>
-          <p:cNvPr id="6" name="Rectangle 5"/>
-          <p:cNvSpPr/>
-          <p:nvPr/>
-        </p:nvSpPr>
-        <p:spPr>
-          <a:xfrm>
-            <a:off x="457200" y="1261872"/>
-            <a:ext cx="11277295" cy="320040"/>
-          </a:xfrm>
-          <a:prstGeom prst="rect">
-            <a:avLst/>
-          </a:prstGeom>
-          <a:solidFill>
-            <a:srgbClr val="095292"/>
-          </a:solidFill>
-          <a:ln>
-            <a:noFill/>
-          </a:ln>
-        </p:spPr>
-        <p:style>
-          <a:lnRef idx="1">
-            <a:schemeClr val="accent1"/>
-          </a:lnRef>
-          <a:fillRef idx="3">
-            <a:schemeClr val="accent1"/>
-          </a:fillRef>
-          <a:effectRef idx="2">
-            <a:schemeClr val="accent1"/>
-          </a:effectRef>
-          <a:fontRef idx="minor">
-            <a:schemeClr val="lt1"/>
-          </a:fontRef>
-        </p:style>
-        <p:txBody>
-          <a:bodyPr rtlCol="0" anchor="ctr"/>
-          <a:lstStyle/>
-          <a:p>
-            <a:pPr algn="ctr"/>
-          </a:p>
-        </p:txBody>
-      </p:sp>
-      <p:sp>
-        <p:nvSpPr>
-          <p:cNvPr id="7" name="TextBox 6"/>
+              <a:t>El problema tecnico es este: con un ArrayList, buscar por ID obliga a...</a:t>
+            </a:r>
+          </a:p>
+        </p:txBody>
+      </p:sp>
+      <p:sp>
+        <p:nvSpPr>
+          <p:cNvPr id="5" name="TextBox 4"/>
           <p:cNvSpPr txBox="1"/>
           <p:nvPr/>
         </p:nvSpPr>
         <p:spPr>
           <a:xfrm>
-            <a:off x="685800" y="1307592"/>
-            <a:ext cx="10820095" cy="256032"/>
-          </a:xfrm>
-          <a:prstGeom prst="rect">
-            <a:avLst/>
-          </a:prstGeom>
-          <a:noFill/>
-        </p:spPr>
-        <p:txBody>
-          <a:bodyPr wrap="square" anchor="ctr"/>
-          <a:lstStyle/>
-          <a:p>
-            <a:r>
-              <a:rPr sz="1000" b="1" i="0">
-                <a:solidFill>
-                  <a:srgbClr val="269CCB"/>
-                </a:solidFill>
-                <a:latin typeface="Calibri"/>
-              </a:rPr>
-              <a:t>● ● ●</a:t>
-            </a:r>
-          </a:p>
-        </p:txBody>
-      </p:sp>
-      <p:sp>
-        <p:nvSpPr>
-          <p:cNvPr id="8" name="TextBox 7"/>
-          <p:cNvSpPr txBox="1"/>
-          <p:nvPr/>
-        </p:nvSpPr>
-        <p:spPr>
-          <a:xfrm>
-            <a:off x="777240" y="1719072"/>
-            <a:ext cx="10637215" cy="4133087"/>
+            <a:off x="457200" y="1170432"/>
+            <a:ext cx="11277295" cy="5230368"/>
           </a:xfrm>
           <a:prstGeom prst="rect">
             <a:avLst/>
@@ -7145,315 +8811,104 @@
           <a:p>
             <a:pPr>
               <a:spcAft>
-                <a:spcPts val="342"/>
+                <a:spcPts val="800"/>
               </a:spcAft>
             </a:pPr>
             <a:r>
-              <a:rPr sz="1200" b="0" i="0">
-                <a:solidFill>
-                  <a:srgbClr val="FFFFFF"/>
-                </a:solidFill>
-                <a:latin typeface="Calibri"/>
-              </a:rPr>
-              <a:t>Map&lt;String, Expediente&gt; fichas = new HashMap&lt;&gt;();   // clave = ID unico</a:t>
+              <a:rPr sz="2000" b="0" i="0">
+                <a:solidFill>
+                  <a:srgbClr val="333333"/>
+                </a:solidFill>
+                <a:latin typeface="Calibri"/>
+              </a:rPr>
+              <a:t>–   El problema tecnico es este: con un ArrayList, buscar por ID obliga a recorrer la lista comparando uno por uno, lo que se llama busqueda lineal y en el peor caso revisa los 5.000 elementos del archivo historico.</a:t>
             </a:r>
           </a:p>
           <a:p>
             <a:pPr>
               <a:spcAft>
-                <a:spcPts val="342"/>
+                <a:spcPts val="800"/>
               </a:spcAft>
             </a:pPr>
             <a:r>
-              <a:rPr sz="1200" b="0" i="0">
-                <a:solidFill>
-                  <a:srgbClr val="FFFFFF"/>
-                </a:solidFill>
-                <a:latin typeface="Calibri"/>
-              </a:rPr>
-              <a:t>fichas.put("M-001", firulais);                      // put REEMPLAZA si la clave existe</a:t>
+              <a:rPr sz="2000" b="0" i="0">
+                <a:solidFill>
+                  <a:srgbClr val="333333"/>
+                </a:solidFill>
+                <a:latin typeface="Calibri"/>
+              </a:rPr>
+              <a:t>–   Un HashMap resuelve eso con una idea distinta: en vez de guardar solo el objeto, guarda parejas clave-valor, y usa la clave para calcular directamente en que casilla del arreglo interno esta el valor.</a:t>
             </a:r>
           </a:p>
           <a:p>
             <a:pPr>
               <a:spcAft>
-                <a:spcPts val="342"/>
+                <a:spcPts val="800"/>
               </a:spcAft>
             </a:pPr>
             <a:r>
-              <a:rPr sz="1200" b="0" i="0">
-                <a:solidFill>
-                  <a:srgbClr val="FFFFFF"/>
-                </a:solidFill>
-                <a:latin typeface="Calibri"/>
-              </a:rPr>
-              <a:t>Expediente e = fichas.get("M-004");                 // O(1) promedio: no recorre nada</a:t>
+              <a:rPr sz="2000" b="0" i="0">
+                <a:solidFill>
+                  <a:srgbClr val="333333"/>
+                </a:solidFill>
+                <a:latin typeface="Calibri"/>
+              </a:rPr>
+              <a:t>–   Ese calculo lo hace el metodo hashCode() del objeto clave: convierte el texto M-004 en un numero, ese numero se transforma en una posicion del arreglo interno, y ahi mismo queda el expediente.</a:t>
             </a:r>
           </a:p>
           <a:p>
             <a:pPr>
               <a:spcAft>
-                <a:spcPts val="342"/>
+                <a:spcPts val="800"/>
               </a:spcAft>
             </a:pPr>
             <a:r>
-              <a:rPr sz="1200" b="0" i="0">
-                <a:solidFill>
-                  <a:srgbClr val="FFFFFF"/>
-                </a:solidFill>
-                <a:latin typeface="Calibri"/>
-              </a:rPr>
-              <a:t>if (e == null) { /* la clave no existe: validar SIEMPRE */ }</a:t>
+              <a:rPr sz="2000" b="0" i="0">
+                <a:solidFill>
+                  <a:srgbClr val="333333"/>
+                </a:solidFill>
+                <a:latin typeface="Calibri"/>
+              </a:rPr>
+              <a:t>–   Cuando dos claves distintas caen en la misma casilla (una colision), el mapa guarda ambas en esa casilla y usa equals() para distinguirlas al leer.</a:t>
             </a:r>
           </a:p>
           <a:p>
             <a:pPr>
               <a:spcAft>
-                <a:spcPts val="342"/>
+                <a:spcPts val="800"/>
               </a:spcAft>
             </a:pPr>
             <a:r>
-              <a:rPr sz="1200" b="0" i="0">
-                <a:solidFill>
-                  <a:srgbClr val="FFFFFF"/>
-                </a:solidFill>
-                <a:latin typeface="Calibri"/>
-              </a:rPr>
-              <a:t/>
+              <a:rPr sz="2000" b="0" i="0">
+                <a:solidFill>
+                  <a:srgbClr val="333333"/>
+                </a:solidFill>
+                <a:latin typeface="Calibri"/>
+              </a:rPr>
+              <a:t>–   El resultado practico es que get("M-004") no depende de cuantas mascotas haya: con 10 o con 100.000 tarda basicamente lo mismo, y eso es lo que vamos a medir en vivo con System.nanoTime().</a:t>
             </a:r>
           </a:p>
           <a:p>
             <a:pPr>
               <a:spcAft>
-                <a:spcPts val="342"/>
+                <a:spcPts val="800"/>
               </a:spcAft>
             </a:pPr>
             <a:r>
-              <a:rPr sz="1200" b="0" i="0">
-                <a:solidFill>
-                  <a:srgbClr val="FFFFFF"/>
-                </a:solidFill>
-                <a:latin typeface="Calibri"/>
-              </a:rPr>
-              <a:t>Set&lt;String&gt; razas = new HashSet&lt;&gt;();</a:t>
-            </a:r>
-          </a:p>
-          <a:p>
-            <a:pPr>
-              <a:spcAft>
-                <a:spcPts val="342"/>
-              </a:spcAft>
-            </a:pPr>
-            <a:r>
-              <a:rPr sz="1200" b="0" i="0">
-                <a:solidFill>
-                  <a:srgbClr val="FFFFFF"/>
-                </a:solidFill>
-                <a:latin typeface="Calibri"/>
-              </a:rPr>
-              <a:t>boolean nueva = razas.add("Labrador");              // false si ya estaba: sin duplicados</a:t>
-            </a:r>
-          </a:p>
-          <a:p>
-            <a:pPr>
-              <a:spcAft>
-                <a:spcPts val="342"/>
-              </a:spcAft>
-            </a:pPr>
-            <a:r>
-              <a:rPr sz="1200" b="0" i="0">
-                <a:solidFill>
-                  <a:srgbClr val="FFFFFF"/>
-                </a:solidFill>
-                <a:latin typeface="Calibri"/>
-              </a:rPr>
-              <a:t/>
-            </a:r>
-          </a:p>
-          <a:p>
-            <a:pPr>
-              <a:spcAft>
-                <a:spcPts val="342"/>
-              </a:spcAft>
-            </a:pPr>
-            <a:r>
-              <a:rPr sz="1200" b="0" i="0">
-                <a:solidFill>
-                  <a:srgbClr val="FFFFFF"/>
-                </a:solidFill>
-                <a:latin typeface="Calibri"/>
-              </a:rPr>
-              <a:t>JFrame v = new JFrame("VetCare");                   // 1) la ventana</a:t>
-            </a:r>
-          </a:p>
-          <a:p>
-            <a:pPr>
-              <a:spcAft>
-                <a:spcPts val="342"/>
-              </a:spcAft>
-            </a:pPr>
-            <a:r>
-              <a:rPr sz="1200" b="0" i="0">
-                <a:solidFill>
-                  <a:srgbClr val="FFFFFF"/>
-                </a:solidFill>
-                <a:latin typeface="Calibri"/>
-              </a:rPr>
-              <a:t>JPanel p = new JPanel();                            // 2) el panel contenedor</a:t>
-            </a:r>
-          </a:p>
-          <a:p>
-            <a:pPr>
-              <a:spcAft>
-                <a:spcPts val="342"/>
-              </a:spcAft>
-            </a:pPr>
-            <a:r>
-              <a:rPr sz="1200" b="0" i="0">
-                <a:solidFill>
-                  <a:srgbClr val="FFFFFF"/>
-                </a:solidFill>
-                <a:latin typeface="Calibri"/>
-              </a:rPr>
-              <a:t>JTextField txtId = new JTextField(12);              // 3) los componentes</a:t>
-            </a:r>
-          </a:p>
-          <a:p>
-            <a:pPr>
-              <a:spcAft>
-                <a:spcPts val="342"/>
-              </a:spcAft>
-            </a:pPr>
-            <a:r>
-              <a:rPr sz="1200" b="0" i="0">
-                <a:solidFill>
-                  <a:srgbClr val="FFFFFF"/>
-                </a:solidFill>
-                <a:latin typeface="Calibri"/>
-              </a:rPr>
-              <a:t>JButton btn = new JButton("Buscar");</a:t>
-            </a:r>
-          </a:p>
-          <a:p>
-            <a:pPr>
-              <a:spcAft>
-                <a:spcPts val="342"/>
-              </a:spcAft>
-            </a:pPr>
-            <a:r>
-              <a:rPr sz="1200" b="0" i="0">
-                <a:solidFill>
-                  <a:srgbClr val="FFFFFF"/>
-                </a:solidFill>
-                <a:latin typeface="Calibri"/>
-              </a:rPr>
-              <a:t>p.add(new JLabel("ID:")); p.add(txtId); p.add(btn);</a:t>
-            </a:r>
-          </a:p>
-          <a:p>
-            <a:pPr>
-              <a:spcAft>
-                <a:spcPts val="342"/>
-              </a:spcAft>
-            </a:pPr>
-            <a:r>
-              <a:rPr sz="1200" b="0" i="0">
-                <a:solidFill>
-                  <a:srgbClr val="FFFFFF"/>
-                </a:solidFill>
-                <a:latin typeface="Calibri"/>
-              </a:rPr>
-              <a:t>v.add(p, BorderLayout.NORTH);</a:t>
-            </a:r>
-          </a:p>
-          <a:p>
-            <a:pPr>
-              <a:spcAft>
-                <a:spcPts val="342"/>
-              </a:spcAft>
-            </a:pPr>
-            <a:r>
-              <a:rPr sz="1200" b="0" i="0">
-                <a:solidFill>
-                  <a:srgbClr val="FFFFFF"/>
-                </a:solidFill>
-                <a:latin typeface="Calibri"/>
-              </a:rPr>
-              <a:t>btn.addActionListener(ev -&gt; buscar());              // la GUI llama, NO calcula</a:t>
-            </a:r>
-          </a:p>
-          <a:p>
-            <a:pPr>
-              <a:spcAft>
-                <a:spcPts val="342"/>
-              </a:spcAft>
-            </a:pPr>
-            <a:r>
-              <a:rPr sz="1200" b="0" i="0">
-                <a:solidFill>
-                  <a:srgbClr val="FFFFFF"/>
-                </a:solidFill>
-                <a:latin typeface="Calibri"/>
-              </a:rPr>
-              <a:t>v.setDefaultCloseOperation(JFrame.EXIT_ON_CLOSE);</a:t>
-            </a:r>
-          </a:p>
-          <a:p>
-            <a:pPr>
-              <a:spcAft>
-                <a:spcPts val="342"/>
-              </a:spcAft>
-            </a:pPr>
-            <a:r>
-              <a:rPr sz="1200" b="0" i="0">
-                <a:solidFill>
-                  <a:srgbClr val="FFFFFF"/>
-                </a:solidFill>
-                <a:latin typeface="Calibri"/>
-              </a:rPr>
-              <a:t>v.setVisible(true);                                 // sin esta linea no aparece nada</a:t>
-            </a:r>
-          </a:p>
-        </p:txBody>
-      </p:sp>
-      <p:sp>
-        <p:nvSpPr>
-          <p:cNvPr id="9" name="TextBox 8"/>
-          <p:cNvSpPr txBox="1"/>
-          <p:nvPr/>
-        </p:nvSpPr>
-        <p:spPr>
-          <a:xfrm>
-            <a:off x="457200" y="6080760"/>
-            <a:ext cx="11277295" cy="320040"/>
-          </a:xfrm>
-          <a:prstGeom prst="rect">
-            <a:avLst/>
-          </a:prstGeom>
-          <a:noFill/>
-        </p:spPr>
-        <p:txBody>
-          <a:bodyPr wrap="square">
-            <a:spAutoFit/>
-          </a:bodyPr>
-          <a:lstStyle/>
-          <a:p>
-            <a:pPr algn="ctr"/>
-            <a:r>
-              <a:rPr sz="1200" b="0" i="1">
-                <a:solidFill>
-                  <a:srgbClr val="666666"/>
-                </a:solidFill>
-                <a:latin typeface="Calibri"/>
-              </a:rPr>
-              <a:t>El HashMap guarda la inteligencia y la ventana solo pregunta: si la logica se le mete al boton, el sistema deja de ser reutilizable.</a:t>
-            </a:r>
-          </a:p>
-        </p:txBody>
-      </p:sp>
-      <p:sp>
-        <p:nvSpPr>
-          <p:cNvPr id="10" name="TextBox 9"/>
+              <a:rPr sz="2000" b="0" i="0">
+                <a:solidFill>
+                  <a:srgbClr val="333333"/>
+                </a:solidFill>
+                <a:latin typeface="Calibri"/>
+              </a:rPr>
+              <a:t>–   En VetCare declaramos Map&lt;String, Expediente&gt; expedientes = new HashMap&lt;&gt;(); y la clave es el ID, que es unico por definicion.</a:t>
+            </a:r>
+          </a:p>
+        </p:txBody>
+      </p:sp>
+      <p:sp>
+        <p:nvSpPr>
+          <p:cNvPr id="6" name="TextBox 5"/>
           <p:cNvSpPr txBox="1"/>
           <p:nvPr/>
         </p:nvSpPr>
@@ -7627,7 +9082,7 @@
                 </a:solidFill>
                 <a:latin typeface="Calibri"/>
               </a:rPr>
-              <a:t>Demo del dia</a:t>
+              <a:t>La API de Map es corta pero tiene trampas que hay que nombrar en voz...</a:t>
             </a:r>
           </a:p>
         </p:txBody>
@@ -7666,25 +9121,7 @@
                 </a:solidFill>
                 <a:latin typeface="Calibri"/>
               </a:rPr>
-              <a:t>–   </a:t>
-            </a:r>
-            <a:r>
-              <a:rPr sz="2000" b="1" i="0">
-                <a:solidFill>
-                  <a:srgbClr val="333333"/>
-                </a:solidFill>
-                <a:latin typeface="Calibri"/>
-              </a:rPr>
-              <a:t>Herramienta:</a:t>
-            </a:r>
-            <a:r>
-              <a:rPr sz="2000" b="0" i="0">
-                <a:solidFill>
-                  <a:srgbClr val="333333"/>
-                </a:solidFill>
-                <a:latin typeface="Calibri"/>
-              </a:rPr>
-              <a:t> Visual Studio Code (Java)</a:t>
+              <a:t>–   La API de Map es corta pero tiene trampas que hay que nombrar en voz alta. put(clave, valor) agrega, pero si la clave ya existia reemplaza el valor anterior en silencio y devuelve el que estaba: eso significa que un HashMap nunca tiene claves repetidas</a:t>
             </a:r>
           </a:p>
           <a:p>
@@ -7700,25 +9137,7 @@
                 </a:solidFill>
                 <a:latin typeface="Calibri"/>
               </a:rPr>
-              <a:t>–   </a:t>
-            </a:r>
-            <a:r>
-              <a:rPr sz="2000" b="1" i="0">
-                <a:solidFill>
-                  <a:srgbClr val="333333"/>
-                </a:solidFill>
-                <a:latin typeface="Calibri"/>
-              </a:rPr>
-              <a:t>Demo:</a:t>
-            </a:r>
-            <a:r>
-              <a:rPr sz="2000" b="0" i="0">
-                <a:solidFill>
-                  <a:srgbClr val="333333"/>
-                </a:solidFill>
-                <a:latin typeface="Calibri"/>
-              </a:rPr>
-              <a:t> El docente busca la ficha H-5000 dentro de un archivo historico de 5.000 expedientes, primero recorriendo un ArrayList y luego con get() sobre un HashMap comparando los nanosegundos, y despues ejecuta la misma busqueda desde una ventana Swing escrita linea por linea.</a:t>
+              <a:t>–   Y que guardar dos veces M-001 no da error, simplemente pisa el expediente anterior</a:t>
             </a:r>
           </a:p>
           <a:p>
@@ -7734,7 +9153,55 @@
                 </a:solidFill>
                 <a:latin typeface="Calibri"/>
               </a:rPr>
-              <a:t>–   Mismo dominio VetCare — no otro ejemplo.</a:t>
+              <a:t>–   Lo cual puede ser exactamente lo que usted quiere o un bug grave si no lo controla. get(clave) devuelve el valor o null si la clave no existe, por eso siempre hay que validar antes de usar el resultado</a:t>
+            </a:r>
+          </a:p>
+          <a:p>
+            <a:pPr>
+              <a:spcAft>
+                <a:spcPts val="800"/>
+              </a:spcAft>
+            </a:pPr>
+            <a:r>
+              <a:rPr sz="2000" b="0" i="0">
+                <a:solidFill>
+                  <a:srgbClr val="333333"/>
+                </a:solidFill>
+                <a:latin typeface="Calibri"/>
+              </a:rPr>
+              <a:t>–   GetOrDefault(clave, valorPorDefecto) es la version comoda. containsKey pregunta por la clave y containsValue por el valor, siendo esta ultima lenta porque esa si recorre todo el mapa.</a:t>
+            </a:r>
+          </a:p>
+          <a:p>
+            <a:pPr>
+              <a:spcAft>
+                <a:spcPts val="800"/>
+              </a:spcAft>
+            </a:pPr>
+            <a:r>
+              <a:rPr sz="2000" b="0" i="0">
+                <a:solidFill>
+                  <a:srgbClr val="333333"/>
+                </a:solidFill>
+                <a:latin typeface="Calibri"/>
+              </a:rPr>
+              <a:t>–   Para recorrer se usa for (Map.Entry&lt;String, Expediente&gt; e: expedientes.entrySet()) y dentro se leen e.getKey() y e.getValue(); tambien existen keySet() para las claves y values() para los valores.</a:t>
+            </a:r>
+          </a:p>
+          <a:p>
+            <a:pPr>
+              <a:spcAft>
+                <a:spcPts val="800"/>
+              </a:spcAft>
+            </a:pPr>
+            <a:r>
+              <a:rPr sz="2000" b="0" i="0">
+                <a:solidFill>
+                  <a:srgbClr val="333333"/>
+                </a:solidFill>
+                <a:latin typeface="Calibri"/>
+              </a:rPr>
+              <a:t>–   Y algo crucial: si algun dia usted usa un objeto propio como clave, esta obligado a sobreescribir equals() y hashCode() juntos, porque si no, el mapa guardara duplicados que a los ojos del negocio son el mismo.</a:t>
             </a:r>
           </a:p>
         </p:txBody>
@@ -7915,7 +9382,7 @@
                 </a:solidFill>
                 <a:latin typeface="Calibri"/>
               </a:rPr>
-              <a:t>Taller PI — por que importa</a:t>
+              <a:t>El HashSet es el hermano del HashMap: por dentro es literalmente un...</a:t>
             </a:r>
           </a:p>
         </p:txBody>
@@ -7948,31 +9415,13 @@
               </a:spcAft>
             </a:pPr>
             <a:r>
-              <a:rPr sz="2000" b="0" i="0">
+              <a:rPr sz="1800" b="0" i="0">
                 <a:solidFill>
                   <a:srgbClr val="333333"/>
                 </a:solidFill>
                 <a:latin typeface="Calibri"/>
               </a:rPr>
-              <a:t>–   </a:t>
-            </a:r>
-            <a:r>
-              <a:rPr sz="2000" b="1" i="0">
-                <a:solidFill>
-                  <a:srgbClr val="333333"/>
-                </a:solidFill>
-                <a:latin typeface="Calibri"/>
-              </a:rPr>
-              <a:t>Por que importa al PI:</a:t>
-            </a:r>
-            <a:r>
-              <a:rPr sz="2000" b="0" i="0">
-                <a:solidFill>
-                  <a:srgbClr val="333333"/>
-                </a:solidFill>
-                <a:latin typeface="Calibri"/>
-              </a:rPr>
-              <a:t> el enunciado del proyecto exige buscar expedientes por ID y tener interfaz grafica, y hoy quedan resueltos los dos requisitos con la misma pieza de codigo.</a:t>
+              <a:t>–   El HashSet es el hermano del HashMap: por dentro es literalmente un HashMap donde solo importan las claves.</a:t>
             </a:r>
           </a:p>
           <a:p>
@@ -7982,13 +9431,13 @@
               </a:spcAft>
             </a:pPr>
             <a:r>
-              <a:rPr sz="2000" b="0" i="0">
+              <a:rPr sz="1800" b="0" i="0">
                 <a:solidFill>
                   <a:srgbClr val="333333"/>
                 </a:solidFill>
                 <a:latin typeface="Calibri"/>
               </a:rPr>
-              <a:t>–   El HashMap sera el indice en memoria que se reconstruye al cargar el archivo CSV en las clases de persistencia, y el HashSet garantizara que no entren IDs repetidos.</a:t>
+              <a:t>–   Su promesa es una sola y es potente: no admite duplicados y responde en tiempo constante a la pregunta esto ya esta.</a:t>
             </a:r>
           </a:p>
           <a:p>
@@ -7998,13 +9447,93 @@
               </a:spcAft>
             </a:pPr>
             <a:r>
-              <a:rPr sz="2000" b="0" i="0">
+              <a:rPr sz="1800" b="0" i="0">
                 <a:solidFill>
                   <a:srgbClr val="333333"/>
                 </a:solidFill>
                 <a:latin typeface="Calibri"/>
               </a:rPr>
-              <a:t>–   Esta primera ventana es el esqueleto sobre el que se montaran despues el formulario de registro de mascotas y la agenda de citas, por eso se escribe a mano y con la logica separada.</a:t>
+              <a:t>–   Su metodo add devuelve un boolean que casi nadie mira y que vale oro: devuelve false si el elemento ya estaba.</a:t>
+            </a:r>
+          </a:p>
+          <a:p>
+            <a:pPr>
+              <a:spcAft>
+                <a:spcPts val="800"/>
+              </a:spcAft>
+            </a:pPr>
+            <a:r>
+              <a:rPr sz="1800" b="0" i="0">
+                <a:solidFill>
+                  <a:srgbClr val="333333"/>
+                </a:solidFill>
+                <a:latin typeface="Calibri"/>
+              </a:rPr>
+              <a:t>–   En VetCare lo usamos para dos cosas concretas: un Set&lt;String&gt; de IDs ya usados, para rechazar un registro duplicado sin recorrer nada</a:t>
+            </a:r>
+          </a:p>
+          <a:p>
+            <a:pPr>
+              <a:spcAft>
+                <a:spcPts val="800"/>
+              </a:spcAft>
+            </a:pPr>
+            <a:r>
+              <a:rPr sz="1800" b="0" i="0">
+                <a:solidFill>
+                  <a:srgbClr val="333333"/>
+                </a:solidFill>
+                <a:latin typeface="Calibri"/>
+              </a:rPr>
+              <a:t>–   Y un Set&lt;String&gt; de razas atendidas, que se llena solo y nos dice cuantas razas distintas ha visto la clinica sin que nadie las cuente a mano</a:t>
+            </a:r>
+          </a:p>
+          <a:p>
+            <a:pPr>
+              <a:spcAft>
+                <a:spcPts val="800"/>
+              </a:spcAft>
+            </a:pPr>
+            <a:r>
+              <a:rPr sz="1800" b="0" i="0">
+                <a:solidFill>
+                  <a:srgbClr val="333333"/>
+                </a:solidFill>
+                <a:latin typeface="Calibri"/>
+              </a:rPr>
+              <a:t>–   Como Firulais y Toby son los dos labradores, al guardar el segundo el conjunto responde false y sigue reportando una sola vez esa raza.</a:t>
+            </a:r>
+          </a:p>
+          <a:p>
+            <a:pPr>
+              <a:spcAft>
+                <a:spcPts val="800"/>
+              </a:spcAft>
+            </a:pPr>
+            <a:r>
+              <a:rPr sz="1800" b="0" i="0">
+                <a:solidFill>
+                  <a:srgbClr val="333333"/>
+                </a:solidFill>
+                <a:latin typeface="Calibri"/>
+              </a:rPr>
+              <a:t>–   Lo que un HashSet no le garantiza es el orden: si usted agrega Labrador, Criollo y Persa y luego imprime el conjunto, pueden salir en cualquier orden, porque la posicion la decide el hash.</a:t>
+            </a:r>
+          </a:p>
+          <a:p>
+            <a:pPr>
+              <a:spcAft>
+                <a:spcPts val="800"/>
+              </a:spcAft>
+            </a:pPr>
+            <a:r>
+              <a:rPr sz="1800" b="0" i="0">
+                <a:solidFill>
+                  <a:srgbClr val="333333"/>
+                </a:solidFill>
+                <a:latin typeface="Calibri"/>
+              </a:rPr>
+              <a:t>–   Si necesita conservar el orden de insercion use LinkedHashSet o LinkedHashMap, y si necesita orden alfabetico use TreeSet o TreeMap, que ordenan pero cuestan un poco mas.</a:t>
             </a:r>
           </a:p>
         </p:txBody>
@@ -8185,7 +9714,7 @@
                 </a:solidFill>
                 <a:latin typeface="Calibri"/>
               </a:rPr>
-              <a:t>Taller PI — punto de partida</a:t>
+              <a:t>Ahora la parte grafica, y aqui empieza el segundo bloque de la clase</a:t>
             </a:r>
           </a:p>
         </p:txBody>
@@ -8224,7 +9753,7 @@
                 </a:solidFill>
                 <a:latin typeface="Calibri"/>
               </a:rPr>
-              <a:t>–   El registro arranca precargado con cinco expedientes: M-001 Firulais labrador de Ana Gomez, M-002 Michi criollo de Luis Perez, M-003 Rocky pastor aleman de Ana Gomez, M-004 Nieve persa de Sara Diaz y M-005 Toby labrador de Sara Diaz.</a:t>
+              <a:t>–   Ahora la parte grafica, y aqui empieza el segundo bloque de la clase.</a:t>
             </a:r>
           </a:p>
           <a:p>
@@ -8240,7 +9769,7 @@
                 </a:solidFill>
                 <a:latin typeface="Calibri"/>
               </a:rPr>
-              <a:t>–   Ademas hay un archivo historico de 5.000 fichas viejas (H-0001 a H-5000) que se usa solo para comparar la busqueda lineal del ArrayList contra el get() del HashMap.</a:t>
+              <a:t>–   Swing es la biblioteca de escritorio de Java y funciona por anidamiento: la ventana es un JFrame, dentro del frame hay un contenedor donde se ponen paneles JPanel</a:t>
             </a:r>
           </a:p>
           <a:p>
@@ -8256,7 +9785,7 @@
                 </a:solidFill>
                 <a:latin typeface="Calibri"/>
               </a:rPr>
-              <a:t>–   La recepcionista busca por ID escrito en minusculas o con espacios sobrantes, asi que el texto que entra debe limpiarse con trim() y toUpperCase() antes de consultar el mapa.</a:t>
+              <a:t>–   Y dentro de los paneles van los componentes visibles como JLabel (texto fijo), JTextField (caja donde el usuario escribe) y JButton (boton).</a:t>
             </a:r>
           </a:p>
           <a:p>
@@ -8272,7 +9801,71 @@
                 </a:solidFill>
                 <a:latin typeface="Calibri"/>
               </a:rPr>
-              <a:t>–   Nadie pega una ventana ya hecha en esta clase: se escribe linea por linea para entender la jerarquia frame, panel y componente. VS Code no tiene disenador visual, asi que la tentacion no esta a un clic.</a:t>
+              <a:t>–   Como se acomodan esos componentes lo decide un layout manager: el JFrame usa BorderLayout por defecto</a:t>
+            </a:r>
+          </a:p>
+          <a:p>
+            <a:pPr>
+              <a:spcAft>
+                <a:spcPts val="800"/>
+              </a:spcAft>
+            </a:pPr>
+            <a:r>
+              <a:rPr sz="2000" b="0" i="0">
+                <a:solidFill>
+                  <a:srgbClr val="333333"/>
+                </a:solidFill>
+                <a:latin typeface="Calibri"/>
+              </a:rPr>
+              <a:t>–   Que reparte la ventana en NORTH, SOUTH, EAST, WEST y CENTER; el JPanel usa FlowLayout, que va poniendo los componentes en fila; y GridLayout arma una cuadricula de filas y columnas.</a:t>
+            </a:r>
+          </a:p>
+          <a:p>
+            <a:pPr>
+              <a:spcAft>
+                <a:spcPts val="800"/>
+              </a:spcAft>
+            </a:pPr>
+            <a:r>
+              <a:rPr sz="2000" b="0" i="0">
+                <a:solidFill>
+                  <a:srgbClr val="333333"/>
+                </a:solidFill>
+                <a:latin typeface="Calibri"/>
+              </a:rPr>
+              <a:t>–   Todo JFrame necesita tres lineas obligatorias o el estudiante creera que su programa no sirve: setDefaultCloseOperation(JFrame.EXIT_ON_CLOSE) para que cerrar la ventana termine el programa</a:t>
+            </a:r>
+          </a:p>
+          <a:p>
+            <a:pPr>
+              <a:spcAft>
+                <a:spcPts val="800"/>
+              </a:spcAft>
+            </a:pPr>
+            <a:r>
+              <a:rPr sz="2000" b="0" i="0">
+                <a:solidFill>
+                  <a:srgbClr val="333333"/>
+                </a:solidFill>
+                <a:latin typeface="Calibri"/>
+              </a:rPr>
+              <a:t>–   SetSize o pack para darle tamano, y setVisible(true) para que aparezca.</a:t>
+            </a:r>
+          </a:p>
+          <a:p>
+            <a:pPr>
+              <a:spcAft>
+                <a:spcPts val="800"/>
+              </a:spcAft>
+            </a:pPr>
+            <a:r>
+              <a:rPr sz="2000" b="0" i="0">
+                <a:solidFill>
+                  <a:srgbClr val="333333"/>
+                </a:solidFill>
+                <a:latin typeface="Calibri"/>
+              </a:rPr>
+              <a:t>–   Ademas, la ventana debe crearse dentro de SwingUtilities.invokeLater porque toda la interfaz de Swing vive en un hilo especial llamado EDT; hacerlo bien desde hoy evita cuelgues raros mas adelante.</a:t>
             </a:r>
           </a:p>
         </p:txBody>
@@ -8453,7 +10046,7 @@
                 </a:solidFill>
                 <a:latin typeface="Calibri"/>
               </a:rPr>
-              <a:t>Taller PI — pasos guiados</a:t>
+              <a:t>El mapa busca; la ventana solo pregunta</a:t>
             </a:r>
           </a:p>
         </p:txBody>
@@ -8466,8 +10059,8 @@
         </p:nvSpPr>
         <p:spPr>
           <a:xfrm>
-            <a:off x="457200" y="1234440"/>
-            <a:ext cx="11277295" cy="950976"/>
+            <a:off x="457200" y="1261872"/>
+            <a:ext cx="11277295" cy="4773168"/>
           </a:xfrm>
           <a:prstGeom prst="roundRect">
             <a:avLst>
@@ -8475,7 +10068,7 @@
             </a:avLst>
           </a:prstGeom>
           <a:solidFill>
-            <a:srgbClr val="F2F2F2"/>
+            <a:srgbClr val="1E2A38"/>
           </a:solidFill>
           <a:ln>
             <a:noFill/>
@@ -8505,19 +10098,17 @@
       </p:sp>
       <p:sp>
         <p:nvSpPr>
-          <p:cNvPr id="6" name="Rounded Rectangle 5"/>
+          <p:cNvPr id="6" name="Rectangle 5"/>
           <p:cNvSpPr/>
           <p:nvPr/>
         </p:nvSpPr>
         <p:spPr>
           <a:xfrm>
-            <a:off x="594360" y="1490472"/>
-            <a:ext cx="438912" cy="438912"/>
-          </a:xfrm>
-          <a:prstGeom prst="roundRect">
-            <a:avLst>
-              <a:gd name="adj" fmla="val 12000"/>
-            </a:avLst>
+            <a:off x="457200" y="1261872"/>
+            <a:ext cx="11277295" cy="320040"/>
+          </a:xfrm>
+          <a:prstGeom prst="rect">
+            <a:avLst/>
           </a:prstGeom>
           <a:solidFill>
             <a:srgbClr val="095292"/>
@@ -8556,8 +10147,8 @@
         </p:nvSpPr>
         <p:spPr>
           <a:xfrm>
-            <a:off x="594360" y="1490472"/>
-            <a:ext cx="438912" cy="438912"/>
+            <a:off x="685800" y="1307592"/>
+            <a:ext cx="10820095" cy="256032"/>
           </a:xfrm>
           <a:prstGeom prst="rect">
             <a:avLst/>
@@ -8568,15 +10159,14 @@
           <a:bodyPr wrap="square" anchor="ctr"/>
           <a:lstStyle/>
           <a:p>
-            <a:pPr algn="ctr"/>
-            <a:r>
-              <a:rPr sz="1600" b="1" i="0">
-                <a:solidFill>
-                  <a:srgbClr val="FFFFFF"/>
-                </a:solidFill>
-                <a:latin typeface="Calibri"/>
-              </a:rPr>
-              <a:t>1</a:t>
+            <a:r>
+              <a:rPr sz="1000" b="1" i="0">
+                <a:solidFill>
+                  <a:srgbClr val="269CCB"/>
+                </a:solidFill>
+                <a:latin typeface="Calibri"/>
+              </a:rPr>
+              <a:t>● ● ●</a:t>
             </a:r>
           </a:p>
         </p:txBody>
@@ -8589,8 +10179,8 @@
         </p:nvSpPr>
         <p:spPr>
           <a:xfrm>
-            <a:off x="1188720" y="1325880"/>
-            <a:ext cx="10271455" cy="786384"/>
+            <a:off x="777240" y="1719072"/>
+            <a:ext cx="10637215" cy="4133087"/>
           </a:xfrm>
           <a:prstGeom prst="rect">
             <a:avLst/>
@@ -8598,644 +10188,322 @@
           <a:noFill/>
         </p:spPr>
         <p:txBody>
-          <a:bodyPr wrap="square" anchor="ctr"/>
-          <a:lstStyle/>
-          <a:p>
-            <a:r>
-              <a:rPr sz="1400" b="1" i="0">
-                <a:solidFill>
-                  <a:srgbClr val="095292"/>
-                </a:solidFill>
-                <a:latin typeface="Calibri"/>
-              </a:rPr>
-              <a:t>Bloque de mapas (minutos 10 a 30): cree la clase Expediente con id, nombre, raza, dueno y nota clinica, y la clase RegistroExpedientes con private final Map&lt;String, Expediente&gt; expedientes = new HashMap&lt;&gt;(); verifique guardando los cinco expedientes del escenario e imprimiendo expedientes.size().</a:t>
-            </a:r>
-          </a:p>
-        </p:txBody>
-      </p:sp>
-      <p:sp>
-        <p:nvSpPr>
-          <p:cNvPr id="9" name="Rounded Rectangle 8"/>
-          <p:cNvSpPr/>
-          <p:nvPr/>
-        </p:nvSpPr>
-        <p:spPr>
-          <a:xfrm>
-            <a:off x="457200" y="2276856"/>
-            <a:ext cx="11277295" cy="950976"/>
-          </a:xfrm>
-          <a:prstGeom prst="roundRect">
-            <a:avLst>
-              <a:gd name="adj" fmla="val 12000"/>
-            </a:avLst>
-          </a:prstGeom>
-          <a:solidFill>
-            <a:srgbClr val="E8F4FA"/>
-          </a:solidFill>
-          <a:ln>
-            <a:noFill/>
-          </a:ln>
-        </p:spPr>
-        <p:style>
-          <a:lnRef idx="1">
-            <a:schemeClr val="accent1"/>
-          </a:lnRef>
-          <a:fillRef idx="3">
-            <a:schemeClr val="accent1"/>
-          </a:fillRef>
-          <a:effectRef idx="2">
-            <a:schemeClr val="accent1"/>
-          </a:effectRef>
-          <a:fontRef idx="minor">
-            <a:schemeClr val="lt1"/>
-          </a:fontRef>
-        </p:style>
-        <p:txBody>
-          <a:bodyPr rtlCol="0" anchor="ctr"/>
+          <a:bodyPr wrap="square">
+            <a:spAutoFit/>
+          </a:bodyPr>
+          <a:lstStyle/>
+          <a:p>
+            <a:pPr>
+              <a:spcAft>
+                <a:spcPts val="342"/>
+              </a:spcAft>
+            </a:pPr>
+            <a:r>
+              <a:rPr sz="1200" b="0" i="0">
+                <a:solidFill>
+                  <a:srgbClr val="FFFFFF"/>
+                </a:solidFill>
+                <a:latin typeface="Calibri"/>
+              </a:rPr>
+              <a:t>Map&lt;String, Expediente&gt; fichas = new HashMap&lt;&gt;();   // clave = ID unico</a:t>
+            </a:r>
+          </a:p>
+          <a:p>
+            <a:pPr>
+              <a:spcAft>
+                <a:spcPts val="342"/>
+              </a:spcAft>
+            </a:pPr>
+            <a:r>
+              <a:rPr sz="1200" b="0" i="0">
+                <a:solidFill>
+                  <a:srgbClr val="FFFFFF"/>
+                </a:solidFill>
+                <a:latin typeface="Calibri"/>
+              </a:rPr>
+              <a:t>fichas.put("M-001", firulais);                      // put REEMPLAZA si la clave existe</a:t>
+            </a:r>
+          </a:p>
+          <a:p>
+            <a:pPr>
+              <a:spcAft>
+                <a:spcPts val="342"/>
+              </a:spcAft>
+            </a:pPr>
+            <a:r>
+              <a:rPr sz="1200" b="0" i="0">
+                <a:solidFill>
+                  <a:srgbClr val="FFFFFF"/>
+                </a:solidFill>
+                <a:latin typeface="Calibri"/>
+              </a:rPr>
+              <a:t>Expediente e = fichas.get("M-004");                 // O(1) promedio: no recorre nada</a:t>
+            </a:r>
+          </a:p>
+          <a:p>
+            <a:pPr>
+              <a:spcAft>
+                <a:spcPts val="342"/>
+              </a:spcAft>
+            </a:pPr>
+            <a:r>
+              <a:rPr sz="1200" b="0" i="0">
+                <a:solidFill>
+                  <a:srgbClr val="FFFFFF"/>
+                </a:solidFill>
+                <a:latin typeface="Calibri"/>
+              </a:rPr>
+              <a:t>if (e == null) { /* la clave no existe: validar SIEMPRE */ }</a:t>
+            </a:r>
+          </a:p>
+          <a:p>
+            <a:pPr>
+              <a:spcAft>
+                <a:spcPts val="342"/>
+              </a:spcAft>
+            </a:pPr>
+            <a:r>
+              <a:rPr sz="1200" b="0" i="0">
+                <a:solidFill>
+                  <a:srgbClr val="FFFFFF"/>
+                </a:solidFill>
+                <a:latin typeface="Calibri"/>
+              </a:rPr>
+              <a:t/>
+            </a:r>
+          </a:p>
+          <a:p>
+            <a:pPr>
+              <a:spcAft>
+                <a:spcPts val="342"/>
+              </a:spcAft>
+            </a:pPr>
+            <a:r>
+              <a:rPr sz="1200" b="0" i="0">
+                <a:solidFill>
+                  <a:srgbClr val="FFFFFF"/>
+                </a:solidFill>
+                <a:latin typeface="Calibri"/>
+              </a:rPr>
+              <a:t>Set&lt;String&gt; razas = new HashSet&lt;&gt;();</a:t>
+            </a:r>
+          </a:p>
+          <a:p>
+            <a:pPr>
+              <a:spcAft>
+                <a:spcPts val="342"/>
+              </a:spcAft>
+            </a:pPr>
+            <a:r>
+              <a:rPr sz="1200" b="0" i="0">
+                <a:solidFill>
+                  <a:srgbClr val="FFFFFF"/>
+                </a:solidFill>
+                <a:latin typeface="Calibri"/>
+              </a:rPr>
+              <a:t>boolean nueva = razas.add("Labrador");              // false si ya estaba: sin duplicados</a:t>
+            </a:r>
+          </a:p>
+          <a:p>
+            <a:pPr>
+              <a:spcAft>
+                <a:spcPts val="342"/>
+              </a:spcAft>
+            </a:pPr>
+            <a:r>
+              <a:rPr sz="1200" b="0" i="0">
+                <a:solidFill>
+                  <a:srgbClr val="FFFFFF"/>
+                </a:solidFill>
+                <a:latin typeface="Calibri"/>
+              </a:rPr>
+              <a:t/>
+            </a:r>
+          </a:p>
+          <a:p>
+            <a:pPr>
+              <a:spcAft>
+                <a:spcPts val="342"/>
+              </a:spcAft>
+            </a:pPr>
+            <a:r>
+              <a:rPr sz="1200" b="0" i="0">
+                <a:solidFill>
+                  <a:srgbClr val="FFFFFF"/>
+                </a:solidFill>
+                <a:latin typeface="Calibri"/>
+              </a:rPr>
+              <a:t>JFrame v = new JFrame("VetCare");                   // 1) la ventana</a:t>
+            </a:r>
+          </a:p>
+          <a:p>
+            <a:pPr>
+              <a:spcAft>
+                <a:spcPts val="342"/>
+              </a:spcAft>
+            </a:pPr>
+            <a:r>
+              <a:rPr sz="1200" b="0" i="0">
+                <a:solidFill>
+                  <a:srgbClr val="FFFFFF"/>
+                </a:solidFill>
+                <a:latin typeface="Calibri"/>
+              </a:rPr>
+              <a:t>JPanel p = new JPanel();                            // 2) el panel contenedor</a:t>
+            </a:r>
+          </a:p>
+          <a:p>
+            <a:pPr>
+              <a:spcAft>
+                <a:spcPts val="342"/>
+              </a:spcAft>
+            </a:pPr>
+            <a:r>
+              <a:rPr sz="1200" b="0" i="0">
+                <a:solidFill>
+                  <a:srgbClr val="FFFFFF"/>
+                </a:solidFill>
+                <a:latin typeface="Calibri"/>
+              </a:rPr>
+              <a:t>JTextField txtId = new JTextField(12);              // 3) los componentes</a:t>
+            </a:r>
+          </a:p>
+          <a:p>
+            <a:pPr>
+              <a:spcAft>
+                <a:spcPts val="342"/>
+              </a:spcAft>
+            </a:pPr>
+            <a:r>
+              <a:rPr sz="1200" b="0" i="0">
+                <a:solidFill>
+                  <a:srgbClr val="FFFFFF"/>
+                </a:solidFill>
+                <a:latin typeface="Calibri"/>
+              </a:rPr>
+              <a:t>JButton btn = new JButton("Buscar");</a:t>
+            </a:r>
+          </a:p>
+          <a:p>
+            <a:pPr>
+              <a:spcAft>
+                <a:spcPts val="342"/>
+              </a:spcAft>
+            </a:pPr>
+            <a:r>
+              <a:rPr sz="1200" b="0" i="0">
+                <a:solidFill>
+                  <a:srgbClr val="FFFFFF"/>
+                </a:solidFill>
+                <a:latin typeface="Calibri"/>
+              </a:rPr>
+              <a:t>p.add(new JLabel("ID:")); p.add(txtId); p.add(btn);</a:t>
+            </a:r>
+          </a:p>
+          <a:p>
+            <a:pPr>
+              <a:spcAft>
+                <a:spcPts val="342"/>
+              </a:spcAft>
+            </a:pPr>
+            <a:r>
+              <a:rPr sz="1200" b="0" i="0">
+                <a:solidFill>
+                  <a:srgbClr val="FFFFFF"/>
+                </a:solidFill>
+                <a:latin typeface="Calibri"/>
+              </a:rPr>
+              <a:t>v.add(p, BorderLayout.NORTH);</a:t>
+            </a:r>
+          </a:p>
+          <a:p>
+            <a:pPr>
+              <a:spcAft>
+                <a:spcPts val="342"/>
+              </a:spcAft>
+            </a:pPr>
+            <a:r>
+              <a:rPr sz="1200" b="0" i="0">
+                <a:solidFill>
+                  <a:srgbClr val="FFFFFF"/>
+                </a:solidFill>
+                <a:latin typeface="Calibri"/>
+              </a:rPr>
+              <a:t>btn.addActionListener(ev -&gt; buscar());              // la GUI llama, NO calcula</a:t>
+            </a:r>
+          </a:p>
+          <a:p>
+            <a:pPr>
+              <a:spcAft>
+                <a:spcPts val="342"/>
+              </a:spcAft>
+            </a:pPr>
+            <a:r>
+              <a:rPr sz="1200" b="0" i="0">
+                <a:solidFill>
+                  <a:srgbClr val="FFFFFF"/>
+                </a:solidFill>
+                <a:latin typeface="Calibri"/>
+              </a:rPr>
+              <a:t>v.setDefaultCloseOperation(JFrame.EXIT_ON_CLOSE);</a:t>
+            </a:r>
+          </a:p>
+          <a:p>
+            <a:pPr>
+              <a:spcAft>
+                <a:spcPts val="342"/>
+              </a:spcAft>
+            </a:pPr>
+            <a:r>
+              <a:rPr sz="1200" b="0" i="0">
+                <a:solidFill>
+                  <a:srgbClr val="FFFFFF"/>
+                </a:solidFill>
+                <a:latin typeface="Calibri"/>
+              </a:rPr>
+              <a:t>v.setVisible(true);                                 // sin esta linea no aparece nada</a:t>
+            </a:r>
+          </a:p>
+        </p:txBody>
+      </p:sp>
+      <p:sp>
+        <p:nvSpPr>
+          <p:cNvPr id="9" name="TextBox 8"/>
+          <p:cNvSpPr txBox="1"/>
+          <p:nvPr/>
+        </p:nvSpPr>
+        <p:spPr>
+          <a:xfrm>
+            <a:off x="457200" y="6080760"/>
+            <a:ext cx="11277295" cy="320040"/>
+          </a:xfrm>
+          <a:prstGeom prst="rect">
+            <a:avLst/>
+          </a:prstGeom>
+          <a:noFill/>
+        </p:spPr>
+        <p:txBody>
+          <a:bodyPr wrap="square">
+            <a:spAutoFit/>
+          </a:bodyPr>
           <a:lstStyle/>
           <a:p>
             <a:pPr algn="ctr"/>
-          </a:p>
-        </p:txBody>
-      </p:sp>
-      <p:sp>
-        <p:nvSpPr>
-          <p:cNvPr id="10" name="Rounded Rectangle 9"/>
-          <p:cNvSpPr/>
-          <p:nvPr/>
-        </p:nvSpPr>
-        <p:spPr>
-          <a:xfrm>
-            <a:off x="594360" y="2532888"/>
-            <a:ext cx="438912" cy="438912"/>
-          </a:xfrm>
-          <a:prstGeom prst="roundRect">
-            <a:avLst>
-              <a:gd name="adj" fmla="val 12000"/>
-            </a:avLst>
-          </a:prstGeom>
-          <a:solidFill>
-            <a:srgbClr val="095292"/>
-          </a:solidFill>
-          <a:ln>
-            <a:noFill/>
-          </a:ln>
-        </p:spPr>
-        <p:style>
-          <a:lnRef idx="1">
-            <a:schemeClr val="accent1"/>
-          </a:lnRef>
-          <a:fillRef idx="3">
-            <a:schemeClr val="accent1"/>
-          </a:fillRef>
-          <a:effectRef idx="2">
-            <a:schemeClr val="accent1"/>
-          </a:effectRef>
-          <a:fontRef idx="minor">
-            <a:schemeClr val="lt1"/>
-          </a:fontRef>
-        </p:style>
-        <p:txBody>
-          <a:bodyPr rtlCol="0" anchor="ctr"/>
-          <a:lstStyle/>
-          <a:p>
-            <a:pPr algn="ctr"/>
-          </a:p>
-        </p:txBody>
-      </p:sp>
-      <p:sp>
-        <p:nvSpPr>
-          <p:cNvPr id="11" name="TextBox 10"/>
-          <p:cNvSpPr txBox="1"/>
-          <p:nvPr/>
-        </p:nvSpPr>
-        <p:spPr>
-          <a:xfrm>
-            <a:off x="594360" y="2532888"/>
-            <a:ext cx="438912" cy="438912"/>
-          </a:xfrm>
-          <a:prstGeom prst="rect">
-            <a:avLst/>
-          </a:prstGeom>
-          <a:noFill/>
-        </p:spPr>
-        <p:txBody>
-          <a:bodyPr wrap="square" anchor="ctr"/>
-          <a:lstStyle/>
-          <a:p>
-            <a:pPr algn="ctr"/>
-            <a:r>
-              <a:rPr sz="1600" b="1" i="0">
-                <a:solidFill>
-                  <a:srgbClr val="FFFFFF"/>
-                </a:solidFill>
-                <a:latin typeface="Calibri"/>
-              </a:rPr>
-              <a:t>2</a:t>
-            </a:r>
-          </a:p>
-        </p:txBody>
-      </p:sp>
-      <p:sp>
-        <p:nvSpPr>
-          <p:cNvPr id="12" name="TextBox 11"/>
-          <p:cNvSpPr txBox="1"/>
-          <p:nvPr/>
-        </p:nvSpPr>
-        <p:spPr>
-          <a:xfrm>
-            <a:off x="1188720" y="2368296"/>
-            <a:ext cx="10271455" cy="786384"/>
-          </a:xfrm>
-          <a:prstGeom prst="rect">
-            <a:avLst/>
-          </a:prstGeom>
-          <a:noFill/>
-        </p:spPr>
-        <p:txBody>
-          <a:bodyPr wrap="square" anchor="ctr"/>
-          <a:lstStyle/>
-          <a:p>
-            <a:r>
-              <a:rPr sz="1400" b="1" i="0">
-                <a:solidFill>
-                  <a:srgbClr val="095292"/>
-                </a:solidFill>
-                <a:latin typeface="Calibri"/>
-              </a:rPr>
-              <a:t>Bloque de mapas (minutos 30 a 45): implemente buscar(String id) con get y validacion de null, y guardar(Expediente e) que use containsKey para avisar cuando un ID ya existe antes de que put lo reemplace en silencio; verifique guardando dos veces M-001 y confirmando que el mapa sigue en cinco expedientes y aparece el aviso.</a:t>
-            </a:r>
-          </a:p>
-        </p:txBody>
-      </p:sp>
-      <p:sp>
-        <p:nvSpPr>
-          <p:cNvPr id="13" name="Rounded Rectangle 12"/>
-          <p:cNvSpPr/>
-          <p:nvPr/>
-        </p:nvSpPr>
-        <p:spPr>
-          <a:xfrm>
-            <a:off x="457200" y="3319272"/>
-            <a:ext cx="11277295" cy="950976"/>
-          </a:xfrm>
-          <a:prstGeom prst="roundRect">
-            <a:avLst>
-              <a:gd name="adj" fmla="val 12000"/>
-            </a:avLst>
-          </a:prstGeom>
-          <a:solidFill>
-            <a:srgbClr val="F2F2F2"/>
-          </a:solidFill>
-          <a:ln>
-            <a:noFill/>
-          </a:ln>
-        </p:spPr>
-        <p:style>
-          <a:lnRef idx="1">
-            <a:schemeClr val="accent1"/>
-          </a:lnRef>
-          <a:fillRef idx="3">
-            <a:schemeClr val="accent1"/>
-          </a:fillRef>
-          <a:effectRef idx="2">
-            <a:schemeClr val="accent1"/>
-          </a:effectRef>
-          <a:fontRef idx="minor">
-            <a:schemeClr val="lt1"/>
-          </a:fontRef>
-        </p:style>
-        <p:txBody>
-          <a:bodyPr rtlCol="0" anchor="ctr"/>
-          <a:lstStyle/>
-          <a:p>
-            <a:pPr algn="ctr"/>
-          </a:p>
-        </p:txBody>
-      </p:sp>
-      <p:sp>
-        <p:nvSpPr>
-          <p:cNvPr id="14" name="Rounded Rectangle 13"/>
-          <p:cNvSpPr/>
-          <p:nvPr/>
-        </p:nvSpPr>
-        <p:spPr>
-          <a:xfrm>
-            <a:off x="594360" y="3575304"/>
-            <a:ext cx="438912" cy="438912"/>
-          </a:xfrm>
-          <a:prstGeom prst="roundRect">
-            <a:avLst>
-              <a:gd name="adj" fmla="val 12000"/>
-            </a:avLst>
-          </a:prstGeom>
-          <a:solidFill>
-            <a:srgbClr val="095292"/>
-          </a:solidFill>
-          <a:ln>
-            <a:noFill/>
-          </a:ln>
-        </p:spPr>
-        <p:style>
-          <a:lnRef idx="1">
-            <a:schemeClr val="accent1"/>
-          </a:lnRef>
-          <a:fillRef idx="3">
-            <a:schemeClr val="accent1"/>
-          </a:fillRef>
-          <a:effectRef idx="2">
-            <a:schemeClr val="accent1"/>
-          </a:effectRef>
-          <a:fontRef idx="minor">
-            <a:schemeClr val="lt1"/>
-          </a:fontRef>
-        </p:style>
-        <p:txBody>
-          <a:bodyPr rtlCol="0" anchor="ctr"/>
-          <a:lstStyle/>
-          <a:p>
-            <a:pPr algn="ctr"/>
-          </a:p>
-        </p:txBody>
-      </p:sp>
-      <p:sp>
-        <p:nvSpPr>
-          <p:cNvPr id="15" name="TextBox 14"/>
-          <p:cNvSpPr txBox="1"/>
-          <p:nvPr/>
-        </p:nvSpPr>
-        <p:spPr>
-          <a:xfrm>
-            <a:off x="594360" y="3575304"/>
-            <a:ext cx="438912" cy="438912"/>
-          </a:xfrm>
-          <a:prstGeom prst="rect">
-            <a:avLst/>
-          </a:prstGeom>
-          <a:noFill/>
-        </p:spPr>
-        <p:txBody>
-          <a:bodyPr wrap="square" anchor="ctr"/>
-          <a:lstStyle/>
-          <a:p>
-            <a:pPr algn="ctr"/>
-            <a:r>
-              <a:rPr sz="1600" b="1" i="0">
-                <a:solidFill>
-                  <a:srgbClr val="FFFFFF"/>
-                </a:solidFill>
-                <a:latin typeface="Calibri"/>
-              </a:rPr>
-              <a:t>3</a:t>
-            </a:r>
-          </a:p>
-        </p:txBody>
-      </p:sp>
-      <p:sp>
-        <p:nvSpPr>
-          <p:cNvPr id="16" name="TextBox 15"/>
-          <p:cNvSpPr txBox="1"/>
-          <p:nvPr/>
-        </p:nvSpPr>
-        <p:spPr>
-          <a:xfrm>
-            <a:off x="1188720" y="3410712"/>
-            <a:ext cx="10271455" cy="786384"/>
-          </a:xfrm>
-          <a:prstGeom prst="rect">
-            <a:avLst/>
-          </a:prstGeom>
-          <a:noFill/>
-        </p:spPr>
-        <p:txBody>
-          <a:bodyPr wrap="square" anchor="ctr"/>
-          <a:lstStyle/>
-          <a:p>
-            <a:r>
-              <a:rPr sz="1400" b="1" i="0">
-                <a:solidFill>
-                  <a:srgbClr val="095292"/>
-                </a:solidFill>
-                <a:latin typeface="Calibri"/>
-              </a:rPr>
-              <a:t>Bloque de conjuntos (minutos 45 a 55): agregue private final Set&lt;String&gt; razas = new HashSet&lt;&gt;(); que se llene automaticamente en cada guardar y aproveche el boolean que devuelve add para avisar cuando la raza ya estaba; verifique que al cargar a Firulais y a Toby, ambos labradores, el conjunto reporta la raza repetida y razas.size() cuenta una sola vez Labrador.</a:t>
-            </a:r>
-          </a:p>
-        </p:txBody>
-      </p:sp>
-      <p:sp>
-        <p:nvSpPr>
-          <p:cNvPr id="17" name="Rounded Rectangle 16"/>
-          <p:cNvSpPr/>
-          <p:nvPr/>
-        </p:nvSpPr>
-        <p:spPr>
-          <a:xfrm>
-            <a:off x="457200" y="4361688"/>
-            <a:ext cx="11277295" cy="950976"/>
-          </a:xfrm>
-          <a:prstGeom prst="roundRect">
-            <a:avLst>
-              <a:gd name="adj" fmla="val 12000"/>
-            </a:avLst>
-          </a:prstGeom>
-          <a:solidFill>
-            <a:srgbClr val="E8F4FA"/>
-          </a:solidFill>
-          <a:ln>
-            <a:noFill/>
-          </a:ln>
-        </p:spPr>
-        <p:style>
-          <a:lnRef idx="1">
-            <a:schemeClr val="accent1"/>
-          </a:lnRef>
-          <a:fillRef idx="3">
-            <a:schemeClr val="accent1"/>
-          </a:fillRef>
-          <a:effectRef idx="2">
-            <a:schemeClr val="accent1"/>
-          </a:effectRef>
-          <a:fontRef idx="minor">
-            <a:schemeClr val="lt1"/>
-          </a:fontRef>
-        </p:style>
-        <p:txBody>
-          <a:bodyPr rtlCol="0" anchor="ctr"/>
-          <a:lstStyle/>
-          <a:p>
-            <a:pPr algn="ctr"/>
-          </a:p>
-        </p:txBody>
-      </p:sp>
-      <p:sp>
-        <p:nvSpPr>
-          <p:cNvPr id="18" name="Rounded Rectangle 17"/>
-          <p:cNvSpPr/>
-          <p:nvPr/>
-        </p:nvSpPr>
-        <p:spPr>
-          <a:xfrm>
-            <a:off x="594360" y="4617720"/>
-            <a:ext cx="438912" cy="438912"/>
-          </a:xfrm>
-          <a:prstGeom prst="roundRect">
-            <a:avLst>
-              <a:gd name="adj" fmla="val 12000"/>
-            </a:avLst>
-          </a:prstGeom>
-          <a:solidFill>
-            <a:srgbClr val="095292"/>
-          </a:solidFill>
-          <a:ln>
-            <a:noFill/>
-          </a:ln>
-        </p:spPr>
-        <p:style>
-          <a:lnRef idx="1">
-            <a:schemeClr val="accent1"/>
-          </a:lnRef>
-          <a:fillRef idx="3">
-            <a:schemeClr val="accent1"/>
-          </a:fillRef>
-          <a:effectRef idx="2">
-            <a:schemeClr val="accent1"/>
-          </a:effectRef>
-          <a:fontRef idx="minor">
-            <a:schemeClr val="lt1"/>
-          </a:fontRef>
-        </p:style>
-        <p:txBody>
-          <a:bodyPr rtlCol="0" anchor="ctr"/>
-          <a:lstStyle/>
-          <a:p>
-            <a:pPr algn="ctr"/>
-          </a:p>
-        </p:txBody>
-      </p:sp>
-      <p:sp>
-        <p:nvSpPr>
-          <p:cNvPr id="19" name="TextBox 18"/>
-          <p:cNvSpPr txBox="1"/>
-          <p:nvPr/>
-        </p:nvSpPr>
-        <p:spPr>
-          <a:xfrm>
-            <a:off x="594360" y="4617720"/>
-            <a:ext cx="438912" cy="438912"/>
-          </a:xfrm>
-          <a:prstGeom prst="rect">
-            <a:avLst/>
-          </a:prstGeom>
-          <a:noFill/>
-        </p:spPr>
-        <p:txBody>
-          <a:bodyPr wrap="square" anchor="ctr"/>
-          <a:lstStyle/>
-          <a:p>
-            <a:pPr algn="ctr"/>
-            <a:r>
-              <a:rPr sz="1600" b="1" i="0">
-                <a:solidFill>
-                  <a:srgbClr val="FFFFFF"/>
-                </a:solidFill>
-                <a:latin typeface="Calibri"/>
-              </a:rPr>
-              <a:t>4</a:t>
-            </a:r>
-          </a:p>
-        </p:txBody>
-      </p:sp>
-      <p:sp>
-        <p:nvSpPr>
-          <p:cNvPr id="20" name="TextBox 19"/>
-          <p:cNvSpPr txBox="1"/>
-          <p:nvPr/>
-        </p:nvSpPr>
-        <p:spPr>
-          <a:xfrm>
-            <a:off x="1188720" y="4453128"/>
-            <a:ext cx="10271455" cy="786384"/>
-          </a:xfrm>
-          <a:prstGeom prst="rect">
-            <a:avLst/>
-          </a:prstGeom>
-          <a:noFill/>
-        </p:spPr>
-        <p:txBody>
-          <a:bodyPr wrap="square" anchor="ctr"/>
-          <a:lstStyle/>
-          <a:p>
-            <a:r>
-              <a:rPr sz="1400" b="1" i="0">
-                <a:solidFill>
-                  <a:srgbClr val="095292"/>
-                </a:solidFill>
-                <a:latin typeface="Calibri"/>
-              </a:rPr>
-              <a:t>Bloque Swing (minutos 65 a 95): escriba a mano la clase VentanaBuscarExpediente que extiende JFrame, con un JPanel superior que contenga un JLabel, un JTextField y un JButton, y un JLabel central para el resultado; verifique que la ventana abre centrada, con titulo VetCare y que al cerrarla el programa termina.</a:t>
-            </a:r>
-          </a:p>
-        </p:txBody>
-      </p:sp>
-      <p:sp>
-        <p:nvSpPr>
-          <p:cNvPr id="21" name="Rounded Rectangle 20"/>
-          <p:cNvSpPr/>
-          <p:nvPr/>
-        </p:nvSpPr>
-        <p:spPr>
-          <a:xfrm>
-            <a:off x="457200" y="5404104"/>
-            <a:ext cx="11277295" cy="950976"/>
-          </a:xfrm>
-          <a:prstGeom prst="roundRect">
-            <a:avLst>
-              <a:gd name="adj" fmla="val 12000"/>
-            </a:avLst>
-          </a:prstGeom>
-          <a:solidFill>
-            <a:srgbClr val="F2F2F2"/>
-          </a:solidFill>
-          <a:ln>
-            <a:noFill/>
-          </a:ln>
-        </p:spPr>
-        <p:style>
-          <a:lnRef idx="1">
-            <a:schemeClr val="accent1"/>
-          </a:lnRef>
-          <a:fillRef idx="3">
-            <a:schemeClr val="accent1"/>
-          </a:fillRef>
-          <a:effectRef idx="2">
-            <a:schemeClr val="accent1"/>
-          </a:effectRef>
-          <a:fontRef idx="minor">
-            <a:schemeClr val="lt1"/>
-          </a:fontRef>
-        </p:style>
-        <p:txBody>
-          <a:bodyPr rtlCol="0" anchor="ctr"/>
-          <a:lstStyle/>
-          <a:p>
-            <a:pPr algn="ctr"/>
-          </a:p>
-        </p:txBody>
-      </p:sp>
-      <p:sp>
-        <p:nvSpPr>
-          <p:cNvPr id="22" name="Rounded Rectangle 21"/>
-          <p:cNvSpPr/>
-          <p:nvPr/>
-        </p:nvSpPr>
-        <p:spPr>
-          <a:xfrm>
-            <a:off x="594360" y="5660136"/>
-            <a:ext cx="438912" cy="438912"/>
-          </a:xfrm>
-          <a:prstGeom prst="roundRect">
-            <a:avLst>
-              <a:gd name="adj" fmla="val 12000"/>
-            </a:avLst>
-          </a:prstGeom>
-          <a:solidFill>
-            <a:srgbClr val="095292"/>
-          </a:solidFill>
-          <a:ln>
-            <a:noFill/>
-          </a:ln>
-        </p:spPr>
-        <p:style>
-          <a:lnRef idx="1">
-            <a:schemeClr val="accent1"/>
-          </a:lnRef>
-          <a:fillRef idx="3">
-            <a:schemeClr val="accent1"/>
-          </a:fillRef>
-          <a:effectRef idx="2">
-            <a:schemeClr val="accent1"/>
-          </a:effectRef>
-          <a:fontRef idx="minor">
-            <a:schemeClr val="lt1"/>
-          </a:fontRef>
-        </p:style>
-        <p:txBody>
-          <a:bodyPr rtlCol="0" anchor="ctr"/>
-          <a:lstStyle/>
-          <a:p>
-            <a:pPr algn="ctr"/>
-          </a:p>
-        </p:txBody>
-      </p:sp>
-      <p:sp>
-        <p:nvSpPr>
-          <p:cNvPr id="23" name="TextBox 22"/>
-          <p:cNvSpPr txBox="1"/>
-          <p:nvPr/>
-        </p:nvSpPr>
-        <p:spPr>
-          <a:xfrm>
-            <a:off x="594360" y="5660136"/>
-            <a:ext cx="438912" cy="438912"/>
-          </a:xfrm>
-          <a:prstGeom prst="rect">
-            <a:avLst/>
-          </a:prstGeom>
-          <a:noFill/>
-        </p:spPr>
-        <p:txBody>
-          <a:bodyPr wrap="square" anchor="ctr"/>
-          <a:lstStyle/>
-          <a:p>
-            <a:pPr algn="ctr"/>
-            <a:r>
-              <a:rPr sz="1600" b="1" i="0">
-                <a:solidFill>
-                  <a:srgbClr val="FFFFFF"/>
-                </a:solidFill>
-                <a:latin typeface="Calibri"/>
-              </a:rPr>
-              <a:t>5</a:t>
-            </a:r>
-          </a:p>
-        </p:txBody>
-      </p:sp>
-      <p:sp>
-        <p:nvSpPr>
-          <p:cNvPr id="24" name="TextBox 23"/>
-          <p:cNvSpPr txBox="1"/>
-          <p:nvPr/>
-        </p:nvSpPr>
-        <p:spPr>
-          <a:xfrm>
-            <a:off x="1188720" y="5495544"/>
-            <a:ext cx="10271455" cy="786384"/>
-          </a:xfrm>
-          <a:prstGeom prst="rect">
-            <a:avLst/>
-          </a:prstGeom>
-          <a:noFill/>
-        </p:spPr>
-        <p:txBody>
-          <a:bodyPr wrap="square" anchor="ctr"/>
-          <a:lstStyle/>
-          <a:p>
-            <a:r>
-              <a:rPr sz="1400" b="1" i="0">
-                <a:solidFill>
-                  <a:srgbClr val="095292"/>
-                </a:solidFill>
-                <a:latin typeface="Calibri"/>
-              </a:rPr>
-              <a:t>Integracion (minutos 95 a 115): conecte el boton con addActionListener usando lambda para que lea el ID del JTextField, lo normalice con trim() y toUpperCase(), consulte el HashMap y muestre el expediente en el JLabel central o un JOptionPane de advertencia si no existe, todo dentro de try-catch; capture la ventana con una busqueda exitosa y una fallida y suba el proyecto a la plataforma del curso.</a:t>
-            </a:r>
-          </a:p>
-        </p:txBody>
-      </p:sp>
-      <p:sp>
-        <p:nvSpPr>
-          <p:cNvPr id="25" name="TextBox 24"/>
+            <a:r>
+              <a:rPr sz="1200" b="0" i="1">
+                <a:solidFill>
+                  <a:srgbClr val="666666"/>
+                </a:solidFill>
+                <a:latin typeface="Calibri"/>
+              </a:rPr>
+              <a:t>El HashMap guarda la inteligencia y la ventana solo pregunta: si la logica se le mete al boton, el sistema deja de ser reutilizable.</a:t>
+            </a:r>
+          </a:p>
+        </p:txBody>
+      </p:sp>
+      <p:sp>
+        <p:nvSpPr>
+          <p:cNvPr id="10" name="TextBox 9"/>
           <p:cNvSpPr txBox="1"/>
           <p:nvPr/>
         </p:nvSpPr>

--- a/Programacion II/Clases/Clase 4 - Mapas conjuntos e interfaces graficas GUI/Presentacion.pptx
+++ b/Programacion II/Clases/Clase 4 - Mapas conjuntos e interfaces graficas GUI/Presentacion.pptx
@@ -9,37 +9,31 @@
     <p:sldId id="257" r:id="rId8"/>
     <p:sldId id="258" r:id="rId9"/>
     <p:sldId id="259" r:id="rId10"/>
-    <p:sldId id="260" r:id="rId11"/>
-    <p:sldId id="261" r:id="rId12"/>
-    <p:sldId id="262" r:id="rId13"/>
-    <p:sldId id="263" r:id="rId14"/>
-    <p:sldId id="264" r:id="rId15"/>
-    <p:sldId id="265" r:id="rId16"/>
-    <p:sldId id="266" r:id="rId17"/>
-    <p:sldId id="267" r:id="rId18"/>
-    <p:sldId id="268" r:id="rId19"/>
-    <p:sldId id="269" r:id="rId20"/>
-    <p:sldId id="270" r:id="rId21"/>
-    <p:sldId id="271" r:id="rId22"/>
-    <p:sldId id="272" r:id="rId23"/>
-    <p:sldId id="273" r:id="rId24"/>
-    <p:sldId id="274" r:id="rId25"/>
-    <p:sldId id="275" r:id="rId26"/>
-    <p:sldId id="276" r:id="rId27"/>
-    <p:sldId id="277" r:id="rId28"/>
-    <p:sldId id="278" r:id="rId29"/>
-    <p:sldId id="279" r:id="rId30"/>
-    <p:sldId id="280" r:id="rId31"/>
-    <p:sldId id="281" r:id="rId32"/>
-    <p:sldId id="282" r:id="rId33"/>
-    <p:sldId id="283" r:id="rId34"/>
-    <p:sldId id="284" r:id="rId35"/>
-    <p:sldId id="285" r:id="rId36"/>
-    <p:sldId id="286" r:id="rId37"/>
-    <p:sldId id="287" r:id="rId38"/>
-    <p:sldId id="288" r:id="rId39"/>
-    <p:sldId id="289" r:id="rId40"/>
-    <p:sldId id="290" r:id="rId41"/>
+    <p:sldId id="260" r:id="rId12"/>
+    <p:sldId id="261" r:id="rId13"/>
+    <p:sldId id="262" r:id="rId14"/>
+    <p:sldId id="263" r:id="rId15"/>
+    <p:sldId id="264" r:id="rId16"/>
+    <p:sldId id="265" r:id="rId17"/>
+    <p:sldId id="266" r:id="rId18"/>
+    <p:sldId id="267" r:id="rId19"/>
+    <p:sldId id="268" r:id="rId20"/>
+    <p:sldId id="269" r:id="rId21"/>
+    <p:sldId id="270" r:id="rId22"/>
+    <p:sldId id="271" r:id="rId23"/>
+    <p:sldId id="272" r:id="rId24"/>
+    <p:sldId id="273" r:id="rId25"/>
+    <p:sldId id="274" r:id="rId26"/>
+    <p:sldId id="275" r:id="rId27"/>
+    <p:sldId id="276" r:id="rId28"/>
+    <p:sldId id="277" r:id="rId29"/>
+    <p:sldId id="278" r:id="rId30"/>
+    <p:sldId id="279" r:id="rId31"/>
+    <p:sldId id="280" r:id="rId32"/>
+    <p:sldId id="281" r:id="rId33"/>
+    <p:sldId id="282" r:id="rId34"/>
+    <p:sldId id="283" r:id="rId35"/>
+    <p:sldId id="284" r:id="rId36"/>
   </p:sldIdLst>
   <p:sldSz cx="12191695" cy="6858000" type="screen4x3"/>
   <p:notesSz cx="6858000" cy="9144000"/>
@@ -139,6 +133,642 @@
     </a:lvl9pPr>
   </p:defaultTextStyle>
 </p:presentation>
+</file>
+
+<file path=ppt/notesMasters/notesMaster1.xml><?xml version="1.0" encoding="utf-8"?>
+<p:notesMaster xmlns:a="http://schemas.openxmlformats.org/drawingml/2006/main" xmlns:p="http://schemas.openxmlformats.org/presentationml/2006/main" xmlns:r="http://schemas.openxmlformats.org/officeDocument/2006/relationships">
+  <p:cSld>
+    <p:bg>
+      <p:bgRef idx="1001">
+        <a:schemeClr val="bg1"/>
+      </p:bgRef>
+    </p:bg>
+    <p:spTree>
+      <p:nvGrpSpPr>
+        <p:cNvPr id="1" name=""/>
+        <p:cNvGrpSpPr/>
+        <p:nvPr/>
+      </p:nvGrpSpPr>
+      <p:grpSpPr>
+        <a:xfrm>
+          <a:off x="0" y="0"/>
+          <a:ext cx="0" cy="0"/>
+          <a:chOff x="0" y="0"/>
+          <a:chExt cx="0" cy="0"/>
+        </a:xfrm>
+      </p:grpSpPr>
+      <p:sp>
+        <p:nvSpPr>
+          <p:cNvPr id="2" name="Header Placeholder 1"/>
+          <p:cNvSpPr>
+            <a:spLocks noGrp="1"/>
+          </p:cNvSpPr>
+          <p:nvPr>
+            <p:ph type="hdr" sz="quarter"/>
+          </p:nvPr>
+        </p:nvSpPr>
+        <p:spPr>
+          <a:xfrm>
+            <a:off x="0" y="0"/>
+            <a:ext cx="2971800" cy="457200"/>
+          </a:xfrm>
+          <a:prstGeom prst="rect">
+            <a:avLst/>
+          </a:prstGeom>
+        </p:spPr>
+        <p:txBody>
+          <a:bodyPr vert="horz" lIns="91440" tIns="45720" rIns="91440" bIns="45720" rtlCol="0"/>
+          <a:lstStyle>
+            <a:lvl1pPr algn="l">
+              <a:defRPr sz="1200"/>
+            </a:lvl1pPr>
+          </a:lstStyle>
+          <a:p>
+            <a:endParaRPr lang="en-US"/>
+          </a:p>
+        </p:txBody>
+      </p:sp>
+      <p:sp>
+        <p:nvSpPr>
+          <p:cNvPr id="3" name="Date Placeholder 2"/>
+          <p:cNvSpPr>
+            <a:spLocks noGrp="1"/>
+          </p:cNvSpPr>
+          <p:nvPr>
+            <p:ph type="dt" idx="1"/>
+          </p:nvPr>
+        </p:nvSpPr>
+        <p:spPr>
+          <a:xfrm>
+            <a:off x="3884613" y="0"/>
+            <a:ext cx="2971800" cy="457200"/>
+          </a:xfrm>
+          <a:prstGeom prst="rect">
+            <a:avLst/>
+          </a:prstGeom>
+        </p:spPr>
+        <p:txBody>
+          <a:bodyPr vert="horz" lIns="91440" tIns="45720" rIns="91440" bIns="45720" rtlCol="0"/>
+          <a:lstStyle>
+            <a:lvl1pPr algn="r">
+              <a:defRPr sz="1200"/>
+            </a:lvl1pPr>
+          </a:lstStyle>
+          <a:p>
+            <a:fld id="{0F89C1C7-3DCD-1040-A9CF-14679D8B5DDD}" type="datetimeFigureOut">
+              <a:rPr lang="en-US" smtClean="0"/>
+              <a:t>10/17/16</a:t>
+            </a:fld>
+            <a:endParaRPr lang="en-US"/>
+          </a:p>
+        </p:txBody>
+      </p:sp>
+      <p:sp>
+        <p:nvSpPr>
+          <p:cNvPr id="4" name="Slide Image Placeholder 3"/>
+          <p:cNvSpPr>
+            <a:spLocks noGrp="1" noRot="1" noChangeAspect="1"/>
+          </p:cNvSpPr>
+          <p:nvPr>
+            <p:ph type="sldImg" idx="2"/>
+          </p:nvPr>
+        </p:nvSpPr>
+        <p:spPr>
+          <a:xfrm>
+            <a:off x="1143000" y="685800"/>
+            <a:ext cx="4572000" cy="3429000"/>
+          </a:xfrm>
+          <a:prstGeom prst="rect">
+            <a:avLst/>
+          </a:prstGeom>
+          <a:noFill/>
+          <a:ln w="12700">
+            <a:solidFill>
+              <a:prstClr val="black"/>
+            </a:solidFill>
+          </a:ln>
+        </p:spPr>
+        <p:txBody>
+          <a:bodyPr vert="horz" lIns="91440" tIns="45720" rIns="91440" bIns="45720" rtlCol="0" anchor="ctr"/>
+          <a:lstStyle/>
+          <a:p>
+            <a:endParaRPr lang="en-US"/>
+          </a:p>
+        </p:txBody>
+      </p:sp>
+      <p:sp>
+        <p:nvSpPr>
+          <p:cNvPr id="5" name="Notes Placeholder 4"/>
+          <p:cNvSpPr>
+            <a:spLocks noGrp="1"/>
+          </p:cNvSpPr>
+          <p:nvPr>
+            <p:ph type="body" sz="quarter" idx="3"/>
+          </p:nvPr>
+        </p:nvSpPr>
+        <p:spPr>
+          <a:xfrm>
+            <a:off x="685800" y="4343400"/>
+            <a:ext cx="5486400" cy="4114800"/>
+          </a:xfrm>
+          <a:prstGeom prst="rect">
+            <a:avLst/>
+          </a:prstGeom>
+        </p:spPr>
+        <p:txBody>
+          <a:bodyPr vert="horz" lIns="91440" tIns="45720" rIns="91440" bIns="45720" rtlCol="0"/>
+          <a:lstStyle/>
+          <a:p>
+            <a:pPr lvl="0"/>
+            <a:r>
+              <a:rPr lang="en-US" smtClean="0"/>
+              <a:t>Click to edit Master text styles</a:t>
+            </a:r>
+          </a:p>
+          <a:p>
+            <a:pPr lvl="1"/>
+            <a:r>
+              <a:rPr lang="en-US" smtClean="0"/>
+              <a:t>Second level</a:t>
+            </a:r>
+          </a:p>
+          <a:p>
+            <a:pPr lvl="2"/>
+            <a:r>
+              <a:rPr lang="en-US" smtClean="0"/>
+              <a:t>Third level</a:t>
+            </a:r>
+          </a:p>
+          <a:p>
+            <a:pPr lvl="3"/>
+            <a:r>
+              <a:rPr lang="en-US" smtClean="0"/>
+              <a:t>Fourth level</a:t>
+            </a:r>
+          </a:p>
+          <a:p>
+            <a:pPr lvl="4"/>
+            <a:r>
+              <a:rPr lang="en-US" smtClean="0"/>
+              <a:t>Fifth level</a:t>
+            </a:r>
+            <a:endParaRPr lang="en-US"/>
+          </a:p>
+        </p:txBody>
+      </p:sp>
+      <p:sp>
+        <p:nvSpPr>
+          <p:cNvPr id="6" name="Footer Placeholder 5"/>
+          <p:cNvSpPr>
+            <a:spLocks noGrp="1"/>
+          </p:cNvSpPr>
+          <p:nvPr>
+            <p:ph type="ftr" sz="quarter" idx="4"/>
+          </p:nvPr>
+        </p:nvSpPr>
+        <p:spPr>
+          <a:xfrm>
+            <a:off x="0" y="8685213"/>
+            <a:ext cx="2971800" cy="457200"/>
+          </a:xfrm>
+          <a:prstGeom prst="rect">
+            <a:avLst/>
+          </a:prstGeom>
+        </p:spPr>
+        <p:txBody>
+          <a:bodyPr vert="horz" lIns="91440" tIns="45720" rIns="91440" bIns="45720" rtlCol="0" anchor="b"/>
+          <a:lstStyle>
+            <a:lvl1pPr algn="l">
+              <a:defRPr sz="1200"/>
+            </a:lvl1pPr>
+          </a:lstStyle>
+          <a:p>
+            <a:endParaRPr lang="en-US"/>
+          </a:p>
+        </p:txBody>
+      </p:sp>
+      <p:sp>
+        <p:nvSpPr>
+          <p:cNvPr id="7" name="Slide Number Placeholder 6"/>
+          <p:cNvSpPr>
+            <a:spLocks noGrp="1"/>
+          </p:cNvSpPr>
+          <p:nvPr>
+            <p:ph type="sldNum" sz="quarter" idx="5"/>
+          </p:nvPr>
+        </p:nvSpPr>
+        <p:spPr>
+          <a:xfrm>
+            <a:off x="3884613" y="8685213"/>
+            <a:ext cx="2971800" cy="457200"/>
+          </a:xfrm>
+          <a:prstGeom prst="rect">
+            <a:avLst/>
+          </a:prstGeom>
+        </p:spPr>
+        <p:txBody>
+          <a:bodyPr vert="horz" lIns="91440" tIns="45720" rIns="91440" bIns="45720" rtlCol="0" anchor="b"/>
+          <a:lstStyle>
+            <a:lvl1pPr algn="r">
+              <a:defRPr sz="1200"/>
+            </a:lvl1pPr>
+          </a:lstStyle>
+          <a:p>
+            <a:fld id="{BB5E49A5-4136-284D-997B-48E1D791AD67}" type="slidenum">
+              <a:rPr lang="en-US" smtClean="0"/>
+              <a:t>‹#›</a:t>
+            </a:fld>
+            <a:endParaRPr lang="en-US"/>
+          </a:p>
+        </p:txBody>
+      </p:sp>
+    </p:spTree>
+    <p:extLst>
+      <p:ext uri="{BB962C8B-B14F-4D97-AF65-F5344CB8AC3E}">
+        <p14:creationId xmlns:p14="http://schemas.microsoft.com/office/powerpoint/2010/main" val="2623252185"/>
+      </p:ext>
+    </p:extLst>
+  </p:cSld>
+  <p:clrMap bg1="lt1" tx1="dk1" bg2="lt2" tx2="dk2" accent1="accent1" accent2="accent2" accent3="accent3" accent4="accent4" accent5="accent5" accent6="accent6" hlink="hlink" folHlink="folHlink"/>
+  <p:notesStyle>
+    <a:lvl1pPr marL="0" algn="l" defTabSz="457200" rtl="0" eaLnBrk="1" latinLnBrk="0" hangingPunct="1">
+      <a:defRPr sz="1200" kern="1200">
+        <a:solidFill>
+          <a:schemeClr val="tx1"/>
+        </a:solidFill>
+        <a:latin typeface="+mn-lt"/>
+        <a:ea typeface="+mn-ea"/>
+        <a:cs typeface="+mn-cs"/>
+      </a:defRPr>
+    </a:lvl1pPr>
+    <a:lvl2pPr marL="457200" algn="l" defTabSz="457200" rtl="0" eaLnBrk="1" latinLnBrk="0" hangingPunct="1">
+      <a:defRPr sz="1200" kern="1200">
+        <a:solidFill>
+          <a:schemeClr val="tx1"/>
+        </a:solidFill>
+        <a:latin typeface="+mn-lt"/>
+        <a:ea typeface="+mn-ea"/>
+        <a:cs typeface="+mn-cs"/>
+      </a:defRPr>
+    </a:lvl2pPr>
+    <a:lvl3pPr marL="914400" algn="l" defTabSz="457200" rtl="0" eaLnBrk="1" latinLnBrk="0" hangingPunct="1">
+      <a:defRPr sz="1200" kern="1200">
+        <a:solidFill>
+          <a:schemeClr val="tx1"/>
+        </a:solidFill>
+        <a:latin typeface="+mn-lt"/>
+        <a:ea typeface="+mn-ea"/>
+        <a:cs typeface="+mn-cs"/>
+      </a:defRPr>
+    </a:lvl3pPr>
+    <a:lvl4pPr marL="1371600" algn="l" defTabSz="457200" rtl="0" eaLnBrk="1" latinLnBrk="0" hangingPunct="1">
+      <a:defRPr sz="1200" kern="1200">
+        <a:solidFill>
+          <a:schemeClr val="tx1"/>
+        </a:solidFill>
+        <a:latin typeface="+mn-lt"/>
+        <a:ea typeface="+mn-ea"/>
+        <a:cs typeface="+mn-cs"/>
+      </a:defRPr>
+    </a:lvl4pPr>
+    <a:lvl5pPr marL="1828800" algn="l" defTabSz="457200" rtl="0" eaLnBrk="1" latinLnBrk="0" hangingPunct="1">
+      <a:defRPr sz="1200" kern="1200">
+        <a:solidFill>
+          <a:schemeClr val="tx1"/>
+        </a:solidFill>
+        <a:latin typeface="+mn-lt"/>
+        <a:ea typeface="+mn-ea"/>
+        <a:cs typeface="+mn-cs"/>
+      </a:defRPr>
+    </a:lvl5pPr>
+    <a:lvl6pPr marL="2286000" algn="l" defTabSz="457200" rtl="0" eaLnBrk="1" latinLnBrk="0" hangingPunct="1">
+      <a:defRPr sz="1200" kern="1200">
+        <a:solidFill>
+          <a:schemeClr val="tx1"/>
+        </a:solidFill>
+        <a:latin typeface="+mn-lt"/>
+        <a:ea typeface="+mn-ea"/>
+        <a:cs typeface="+mn-cs"/>
+      </a:defRPr>
+    </a:lvl6pPr>
+    <a:lvl7pPr marL="2743200" algn="l" defTabSz="457200" rtl="0" eaLnBrk="1" latinLnBrk="0" hangingPunct="1">
+      <a:defRPr sz="1200" kern="1200">
+        <a:solidFill>
+          <a:schemeClr val="tx1"/>
+        </a:solidFill>
+        <a:latin typeface="+mn-lt"/>
+        <a:ea typeface="+mn-ea"/>
+        <a:cs typeface="+mn-cs"/>
+      </a:defRPr>
+    </a:lvl7pPr>
+    <a:lvl8pPr marL="3200400" algn="l" defTabSz="457200" rtl="0" eaLnBrk="1" latinLnBrk="0" hangingPunct="1">
+      <a:defRPr sz="1200" kern="1200">
+        <a:solidFill>
+          <a:schemeClr val="tx1"/>
+        </a:solidFill>
+        <a:latin typeface="+mn-lt"/>
+        <a:ea typeface="+mn-ea"/>
+        <a:cs typeface="+mn-cs"/>
+      </a:defRPr>
+    </a:lvl8pPr>
+    <a:lvl9pPr marL="3657600" algn="l" defTabSz="457200" rtl="0" eaLnBrk="1" latinLnBrk="0" hangingPunct="1">
+      <a:defRPr sz="1200" kern="1200">
+        <a:solidFill>
+          <a:schemeClr val="tx1"/>
+        </a:solidFill>
+        <a:latin typeface="+mn-lt"/>
+        <a:ea typeface="+mn-ea"/>
+        <a:cs typeface="+mn-cs"/>
+      </a:defRPr>
+    </a:lvl9pPr>
+  </p:notesStyle>
+</p:notesMaster>
+</file>
+
+<file path=ppt/notesSlides/notesSlide1.xml><?xml version="1.0" encoding="utf-8"?>
+<p:notes xmlns:a="http://schemas.openxmlformats.org/drawingml/2006/main" xmlns:p="http://schemas.openxmlformats.org/presentationml/2006/main" xmlns:r="http://schemas.openxmlformats.org/officeDocument/2006/relationships">
+  <p:cSld>
+    <p:spTree>
+      <p:nvGrpSpPr>
+        <p:cNvPr id="1" name=""/>
+        <p:cNvGrpSpPr/>
+        <p:nvPr/>
+      </p:nvGrpSpPr>
+      <p:grpSpPr>
+        <a:xfrm>
+          <a:off x="0" y="0"/>
+          <a:ext cx="0" cy="0"/>
+          <a:chOff x="0" y="0"/>
+          <a:chExt cx="0" cy="0"/>
+        </a:xfrm>
+      </p:grpSpPr>
+      <p:sp>
+        <p:nvSpPr>
+          <p:cNvPr id="2" name="Slide Image Placeholder 1"/>
+          <p:cNvSpPr>
+            <a:spLocks noGrp="1"/>
+          </p:cNvSpPr>
+          <p:nvPr>
+            <p:ph type="sldImg" idx="2"/>
+          </p:nvPr>
+        </p:nvSpPr>
+        <p:spPr/>
+      </p:sp>
+      <p:sp>
+        <p:nvSpPr>
+          <p:cNvPr id="3" name="Notes Placeholder 2"/>
+          <p:cNvSpPr>
+            <a:spLocks noGrp="1"/>
+          </p:cNvSpPr>
+          <p:nvPr>
+            <p:ph type="body" idx="3" sz="quarter"/>
+          </p:nvPr>
+        </p:nvSpPr>
+        <p:spPr/>
+        <p:txBody>
+          <a:bodyPr/>
+          <a:lstStyle/>
+          <a:p>
+            <a:r>
+              <a:t>Si el primer bloque se alarga, la ventana queda sin terminar y la clase se pierde, asi que ponga un cronometro visible.</a:t>
+            </a:r>
+          </a:p>
+        </p:txBody>
+      </p:sp>
+      <p:sp>
+        <p:nvSpPr>
+          <p:cNvPr id="4" name="Slide Number Placeholder 3"/>
+          <p:cNvSpPr>
+            <a:spLocks noGrp="1"/>
+          </p:cNvSpPr>
+          <p:nvPr>
+            <p:ph type="sldNum" idx="5" sz="quarter"/>
+          </p:nvPr>
+        </p:nvSpPr>
+        <p:spPr/>
+      </p:sp>
+    </p:spTree>
+  </p:cSld>
+  <p:clrMapOvr>
+    <a:masterClrMapping/>
+  </p:clrMapOvr>
+</p:notes>
+</file>
+
+<file path=ppt/notesSlides/notesSlide2.xml><?xml version="1.0" encoding="utf-8"?>
+<p:notes xmlns:a="http://schemas.openxmlformats.org/drawingml/2006/main" xmlns:p="http://schemas.openxmlformats.org/presentationml/2006/main" xmlns:r="http://schemas.openxmlformats.org/officeDocument/2006/relationships">
+  <p:cSld>
+    <p:spTree>
+      <p:nvGrpSpPr>
+        <p:cNvPr id="1" name=""/>
+        <p:cNvGrpSpPr/>
+        <p:nvPr/>
+      </p:nvGrpSpPr>
+      <p:grpSpPr>
+        <a:xfrm>
+          <a:off x="0" y="0"/>
+          <a:ext cx="0" cy="0"/>
+          <a:chOff x="0" y="0"/>
+          <a:chExt cx="0" cy="0"/>
+        </a:xfrm>
+      </p:grpSpPr>
+      <p:sp>
+        <p:nvSpPr>
+          <p:cNvPr id="2" name="Slide Image Placeholder 1"/>
+          <p:cNvSpPr>
+            <a:spLocks noGrp="1"/>
+          </p:cNvSpPr>
+          <p:nvPr>
+            <p:ph type="sldImg" idx="2"/>
+          </p:nvPr>
+        </p:nvSpPr>
+        <p:spPr/>
+      </p:sp>
+      <p:sp>
+        <p:nvSpPr>
+          <p:cNvPr id="3" name="Notes Placeholder 2"/>
+          <p:cNvSpPr>
+            <a:spLocks noGrp="1"/>
+          </p:cNvSpPr>
+          <p:nvPr>
+            <p:ph type="body" idx="3" sz="quarter"/>
+          </p:nvPr>
+        </p:nvSpPr>
+        <p:spPr/>
+        <p:txBody>
+          <a:bodyPr/>
+          <a:lstStyle/>
+          <a:p>
+            <a:r>
+              <a:t>Cuando dos claves distintas caen en la misma casilla (una colision), el mapa guarda ambas en esa casilla y usa equals() para distinguirlas al leer.</a:t>
+            </a:r>
+          </a:p>
+        </p:txBody>
+      </p:sp>
+      <p:sp>
+        <p:nvSpPr>
+          <p:cNvPr id="4" name="Slide Number Placeholder 3"/>
+          <p:cNvSpPr>
+            <a:spLocks noGrp="1"/>
+          </p:cNvSpPr>
+          <p:nvPr>
+            <p:ph type="sldNum" idx="5" sz="quarter"/>
+          </p:nvPr>
+        </p:nvSpPr>
+        <p:spPr/>
+      </p:sp>
+    </p:spTree>
+  </p:cSld>
+  <p:clrMapOvr>
+    <a:masterClrMapping/>
+  </p:clrMapOvr>
+</p:notes>
+</file>
+
+<file path=ppt/notesSlides/notesSlide3.xml><?xml version="1.0" encoding="utf-8"?>
+<p:notes xmlns:a="http://schemas.openxmlformats.org/drawingml/2006/main" xmlns:p="http://schemas.openxmlformats.org/presentationml/2006/main" xmlns:r="http://schemas.openxmlformats.org/officeDocument/2006/relationships">
+  <p:cSld>
+    <p:spTree>
+      <p:nvGrpSpPr>
+        <p:cNvPr id="1" name=""/>
+        <p:cNvGrpSpPr/>
+        <p:nvPr/>
+      </p:nvGrpSpPr>
+      <p:grpSpPr>
+        <a:xfrm>
+          <a:off x="0" y="0"/>
+          <a:ext cx="0" cy="0"/>
+          <a:chOff x="0" y="0"/>
+          <a:chExt cx="0" cy="0"/>
+        </a:xfrm>
+      </p:grpSpPr>
+      <p:sp>
+        <p:nvSpPr>
+          <p:cNvPr id="2" name="Slide Image Placeholder 1"/>
+          <p:cNvSpPr>
+            <a:spLocks noGrp="1"/>
+          </p:cNvSpPr>
+          <p:nvPr>
+            <p:ph type="sldImg" idx="2"/>
+          </p:nvPr>
+        </p:nvSpPr>
+        <p:spPr/>
+      </p:sp>
+      <p:sp>
+        <p:nvSpPr>
+          <p:cNvPr id="3" name="Notes Placeholder 2"/>
+          <p:cNvSpPr>
+            <a:spLocks noGrp="1"/>
+          </p:cNvSpPr>
+          <p:nvPr>
+            <p:ph type="body" idx="3" sz="quarter"/>
+          </p:nvPr>
+        </p:nvSpPr>
+        <p:spPr/>
+        <p:txBody>
+          <a:bodyPr/>
+          <a:lstStyle/>
+          <a:p>
+            <a:r>
+              <a:t>Lo que un HashSet no le garantiza es el orden: si usted agrega Labrador, Criollo y Persa y luego imprime el conjunto, pueden salir en cualquier orden, porque la posicion la decide el hash.</a:t>
+            </a:r>
+          </a:p>
+          <a:p/>
+          <a:p>
+            <a:r>
+              <a:t>Si necesita conservar el orden de insercion use LinkedHashSet o LinkedHashMap, y si necesita orden alfabetico use TreeSet o TreeMap, que ordenan pero cuestan un poco mas.</a:t>
+            </a:r>
+          </a:p>
+        </p:txBody>
+      </p:sp>
+      <p:sp>
+        <p:nvSpPr>
+          <p:cNvPr id="4" name="Slide Number Placeholder 3"/>
+          <p:cNvSpPr>
+            <a:spLocks noGrp="1"/>
+          </p:cNvSpPr>
+          <p:nvPr>
+            <p:ph type="sldNum" idx="5" sz="quarter"/>
+          </p:nvPr>
+        </p:nvSpPr>
+        <p:spPr/>
+      </p:sp>
+    </p:spTree>
+  </p:cSld>
+  <p:clrMapOvr>
+    <a:masterClrMapping/>
+  </p:clrMapOvr>
+</p:notes>
+</file>
+
+<file path=ppt/notesSlides/notesSlide4.xml><?xml version="1.0" encoding="utf-8"?>
+<p:notes xmlns:a="http://schemas.openxmlformats.org/drawingml/2006/main" xmlns:p="http://schemas.openxmlformats.org/presentationml/2006/main" xmlns:r="http://schemas.openxmlformats.org/officeDocument/2006/relationships">
+  <p:cSld>
+    <p:spTree>
+      <p:nvGrpSpPr>
+        <p:cNvPr id="1" name=""/>
+        <p:cNvGrpSpPr/>
+        <p:nvPr/>
+      </p:nvGrpSpPr>
+      <p:grpSpPr>
+        <a:xfrm>
+          <a:off x="0" y="0"/>
+          <a:ext cx="0" cy="0"/>
+          <a:chOff x="0" y="0"/>
+          <a:chExt cx="0" cy="0"/>
+        </a:xfrm>
+      </p:grpSpPr>
+      <p:sp>
+        <p:nvSpPr>
+          <p:cNvPr id="2" name="Slide Image Placeholder 1"/>
+          <p:cNvSpPr>
+            <a:spLocks noGrp="1"/>
+          </p:cNvSpPr>
+          <p:nvPr>
+            <p:ph type="sldImg" idx="2"/>
+          </p:nvPr>
+        </p:nvSpPr>
+        <p:spPr/>
+      </p:sp>
+      <p:sp>
+        <p:nvSpPr>
+          <p:cNvPr id="3" name="Notes Placeholder 2"/>
+          <p:cNvSpPr>
+            <a:spLocks noGrp="1"/>
+          </p:cNvSpPr>
+          <p:nvPr>
+            <p:ph type="body" idx="3" sz="quarter"/>
+          </p:nvPr>
+        </p:nvSpPr>
+        <p:spPr/>
+        <p:txBody>
+          <a:bodyPr/>
+          <a:lstStyle/>
+          <a:p>
+            <a:r>
+              <a:t>Ahora la parte grafica, y aqui empieza el segundo bloque de la clase.</a:t>
+            </a:r>
+          </a:p>
+        </p:txBody>
+      </p:sp>
+      <p:sp>
+        <p:nvSpPr>
+          <p:cNvPr id="4" name="Slide Number Placeholder 3"/>
+          <p:cNvSpPr>
+            <a:spLocks noGrp="1"/>
+          </p:cNvSpPr>
+          <p:nvPr>
+            <p:ph type="sldNum" idx="5" sz="quarter"/>
+          </p:nvPr>
+        </p:nvSpPr>
+        <p:spPr/>
+      </p:sp>
+    </p:spTree>
+  </p:cSld>
+  <p:clrMapOvr>
+    <a:masterClrMapping/>
+  </p:clrMapOvr>
+</p:notes>
 </file>
 
 <file path=ppt/slideLayouts/slideLayout1.xml><?xml version="1.0" encoding="utf-8"?>
@@ -7903,7 +8533,7 @@
                 </a:solidFill>
                 <a:latin typeface="Calibri"/>
               </a:rPr>
-              <a:t>Encuadre de hoy · Objetivo del PI</a:t>
+              <a:t>Encuadre de hoy</a:t>
             </a:r>
           </a:p>
         </p:txBody>
@@ -7951,7 +8581,7 @@
                 </a:solidFill>
                 <a:latin typeface="Calibri"/>
               </a:rPr>
-              <a:t>Hoy avanzamos VetCare en:</a:t>
+              <a:t>Tema de hoy:</a:t>
             </a:r>
             <a:r>
               <a:rPr sz="2000" b="0" i="0">
@@ -7960,7 +8590,7 @@
                 </a:solidFill>
                 <a:latin typeface="Calibri"/>
               </a:rPr>
-              <a:t> VetCare encuentra cualquier expediente por ID en tiempo constante con HashMap y estrena su primera ventana Swing para consultarlo.</a:t>
+              <a:t> Mapas, conjuntos e interfaces graficas · HashMap, HashSet y Swing — Buscar por clave en un instante y darle cara al sistema</a:t>
             </a:r>
           </a:p>
           <a:p>
@@ -8019,41 +8649,23 @@
                 </a:solidFill>
                 <a:latin typeface="Calibri"/>
               </a:rPr>
-              <a:t>–   </a:t>
-            </a:r>
-            <a:r>
-              <a:rPr sz="2000" b="1" i="0">
+              <a:t>–   Primero el concepto, despues el codigo que lo muestra y la demo en vivo.</a:t>
+            </a:r>
+          </a:p>
+          <a:p>
+            <a:pPr>
+              <a:spcAft>
+                <a:spcPts val="800"/>
+              </a:spcAft>
+            </a:pPr>
+            <a:r>
+              <a:rPr sz="2000" b="0" i="0">
                 <a:solidFill>
                   <a:srgbClr val="333333"/>
                 </a:solidFill>
                 <a:latin typeface="Calibri"/>
               </a:rPr>
-              <a:t>Entregable de hoy:</a:t>
-            </a:r>
-            <a:r>
-              <a:rPr sz="2000" b="0" i="0">
-                <a:solidFill>
-                  <a:srgbClr val="333333"/>
-                </a:solidFill>
-                <a:latin typeface="Calibri"/>
-              </a:rPr>
-              <a:t> Clase RegistroExpedientes con HashMap y HashSet mas la ventana VentanaBuscarExpediente construida a mano (sin arrastrar componentes) que busca por ID y muestra el resultado o un mensaje de error controlado; comprimido y subido a la plataforma del curso.</a:t>
-            </a:r>
-          </a:p>
-          <a:p>
-            <a:pPr>
-              <a:spcAft>
-                <a:spcPts val="800"/>
-              </a:spcAft>
-            </a:pPr>
-            <a:r>
-              <a:rPr sz="2000" b="0" i="0">
-                <a:solidFill>
-                  <a:srgbClr val="333333"/>
-                </a:solidFill>
-                <a:latin typeface="Calibri"/>
-              </a:rPr>
-              <a:t>–   La teoria esta al servicio del producto: al salir, VetCare avanzo.</a:t>
+              <a:t>–   Todo con el mismo dominio: la clinica veterinaria Huellitas (VetCare).</a:t>
             </a:r>
           </a:p>
         </p:txBody>
@@ -12577,13 +13189,13 @@
         <p:spPr>
           <a:xfrm>
             <a:off x="0" y="0"/>
-            <a:ext cx="12191695" cy="960120"/>
+            <a:ext cx="12191695" cy="164592"/>
           </a:xfrm>
           <a:prstGeom prst="rect">
             <a:avLst/>
           </a:prstGeom>
           <a:solidFill>
-            <a:srgbClr val="095292"/>
+            <a:srgbClr val="269CCB"/>
           </a:solidFill>
           <a:ln>
             <a:noFill/>
@@ -12611,49 +13223,30 @@
           </a:p>
         </p:txBody>
       </p:sp>
-      <p:sp>
-        <p:nvSpPr>
-          <p:cNvPr id="3" name="Rectangle 2"/>
-          <p:cNvSpPr/>
-          <p:nvPr/>
-        </p:nvSpPr>
-        <p:spPr>
-          <a:xfrm>
-            <a:off x="0" y="960120"/>
-            <a:ext cx="12191695" cy="41148"/>
-          </a:xfrm>
-          <a:prstGeom prst="rect">
-            <a:avLst/>
-          </a:prstGeom>
-          <a:solidFill>
-            <a:srgbClr val="FFD000"/>
-          </a:solidFill>
-          <a:ln>
-            <a:noFill/>
-          </a:ln>
-        </p:spPr>
-        <p:style>
-          <a:lnRef idx="1">
-            <a:schemeClr val="accent1"/>
-          </a:lnRef>
-          <a:fillRef idx="3">
-            <a:schemeClr val="accent1"/>
-          </a:fillRef>
-          <a:effectRef idx="2">
-            <a:schemeClr val="accent1"/>
-          </a:effectRef>
-          <a:fontRef idx="minor">
-            <a:schemeClr val="lt1"/>
-          </a:fontRef>
-        </p:style>
-        <p:txBody>
-          <a:bodyPr rtlCol="0" anchor="ctr"/>
-          <a:lstStyle/>
-          <a:p>
-            <a:pPr algn="ctr"/>
-          </a:p>
-        </p:txBody>
-      </p:sp>
+      <p:pic>
+        <p:nvPicPr>
+          <p:cNvPr id="3" name="Picture 2" descr="logo_uniajc_color.png"/>
+          <p:cNvPicPr>
+            <a:picLocks noChangeAspect="1"/>
+          </p:cNvPicPr>
+          <p:nvPr/>
+        </p:nvPicPr>
+        <p:blipFill>
+          <a:blip r:embed="rId2"/>
+          <a:stretch>
+            <a:fillRect/>
+          </a:stretch>
+        </p:blipFill>
+        <p:spPr>
+          <a:xfrm>
+            <a:off x="10271455" y="5998464"/>
+            <a:ext cx="1463040" cy="643233"/>
+          </a:xfrm>
+          <a:prstGeom prst="rect">
+            <a:avLst/>
+          </a:prstGeom>
+        </p:spPr>
+      </p:pic>
       <p:sp>
         <p:nvSpPr>
           <p:cNvPr id="4" name="TextBox 3"/>
@@ -12662,8 +13255,41 @@
         </p:nvSpPr>
         <p:spPr>
           <a:xfrm>
-            <a:off x="457200" y="164592"/>
-            <a:ext cx="11277295" cy="502920"/>
+            <a:off x="457200" y="1737360"/>
+            <a:ext cx="11277295" cy="1097280"/>
+          </a:xfrm>
+          <a:prstGeom prst="rect">
+            <a:avLst/>
+          </a:prstGeom>
+          <a:noFill/>
+        </p:spPr>
+        <p:txBody>
+          <a:bodyPr wrap="square" anchor="ctr"/>
+          <a:lstStyle/>
+          <a:p>
+            <a:pPr algn="ctr"/>
+            <a:r>
+              <a:rPr sz="3400" b="1" i="0">
+                <a:solidFill>
+                  <a:srgbClr val="095292"/>
+                </a:solidFill>
+                <a:latin typeface="Calibri"/>
+              </a:rPr>
+              <a:t>Clase 4 · Mapas, conjuntos e interfaces graficas · HashMap, HashSet y Swing</a:t>
+            </a:r>
+          </a:p>
+        </p:txBody>
+      </p:sp>
+      <p:sp>
+        <p:nvSpPr>
+          <p:cNvPr id="5" name="TextBox 4"/>
+          <p:cNvSpPr txBox="1"/>
+          <p:nvPr/>
+        </p:nvSpPr>
+        <p:spPr>
+          <a:xfrm>
+            <a:off x="457200" y="3017520"/>
+            <a:ext cx="11277295" cy="1645920"/>
           </a:xfrm>
           <a:prstGeom prst="rect">
             <a:avLst/>
@@ -12676,28 +13302,65 @@
           </a:bodyPr>
           <a:lstStyle/>
           <a:p>
-            <a:r>
-              <a:rPr sz="2600" b="1" i="0">
-                <a:solidFill>
-                  <a:srgbClr val="FFFFFF"/>
-                </a:solidFill>
-                <a:latin typeface="Calibri"/>
-              </a:rPr>
-              <a:t>Taller PI — por que importa</a:t>
-            </a:r>
-          </a:p>
-        </p:txBody>
-      </p:sp>
-      <p:sp>
-        <p:nvSpPr>
-          <p:cNvPr id="5" name="TextBox 4"/>
+            <a:pPr algn="ctr">
+              <a:spcAft>
+                <a:spcPts val="600"/>
+              </a:spcAft>
+            </a:pPr>
+            <a:r>
+              <a:rPr sz="1600" b="0" i="0">
+                <a:solidFill>
+                  <a:srgbClr val="333333"/>
+                </a:solidFill>
+                <a:latin typeface="Calibri"/>
+              </a:rPr>
+              <a:t>Buscar por clave en un instante y darle cara al sistema</a:t>
+            </a:r>
+          </a:p>
+          <a:p>
+            <a:pPr algn="ctr">
+              <a:spcAft>
+                <a:spcPts val="600"/>
+              </a:spcAft>
+            </a:pPr>
+            <a:r>
+              <a:rPr sz="1600" b="0" i="0">
+                <a:solidFill>
+                  <a:srgbClr val="333333"/>
+                </a:solidFill>
+                <a:latin typeface="Calibri"/>
+              </a:rPr>
+              <a:t>Repasa las laminas de concepto y el codigo de la demo</a:t>
+            </a:r>
+          </a:p>
+          <a:p>
+            <a:pPr algn="ctr">
+              <a:spcAft>
+                <a:spcPts val="600"/>
+              </a:spcAft>
+            </a:pPr>
+            <a:r>
+              <a:rPr sz="1600" b="0" i="0">
+                <a:solidFill>
+                  <a:srgbClr val="333333"/>
+                </a:solidFill>
+                <a:latin typeface="Calibri"/>
+              </a:rPr>
+              <a:t>Siguiente clase: continuamos el hilo del tema</a:t>
+            </a:r>
+          </a:p>
+        </p:txBody>
+      </p:sp>
+      <p:sp>
+        <p:nvSpPr>
+          <p:cNvPr id="6" name="TextBox 5"/>
           <p:cNvSpPr txBox="1"/>
           <p:nvPr/>
         </p:nvSpPr>
         <p:spPr>
           <a:xfrm>
-            <a:off x="457200" y="1170432"/>
-            <a:ext cx="11277295" cy="5230368"/>
+            <a:off x="457200" y="4754880"/>
+            <a:ext cx="11277295" cy="640080"/>
           </a:xfrm>
           <a:prstGeom prst="rect">
             <a:avLst/>
@@ -12710,104 +13373,15 @@
           </a:bodyPr>
           <a:lstStyle/>
           <a:p>
-            <a:pPr>
-              <a:spcAft>
-                <a:spcPts val="800"/>
-              </a:spcAft>
-            </a:pPr>
-            <a:r>
-              <a:rPr sz="2000" b="0" i="0">
-                <a:solidFill>
-                  <a:srgbClr val="333333"/>
-                </a:solidFill>
-                <a:latin typeface="Calibri"/>
-              </a:rPr>
-              <a:t>–   </a:t>
-            </a:r>
+            <a:pPr algn="ctr"/>
             <a:r>
               <a:rPr sz="2000" b="1" i="0">
                 <a:solidFill>
-                  <a:srgbClr val="333333"/>
-                </a:solidFill>
-                <a:latin typeface="Calibri"/>
-              </a:rPr>
-              <a:t>Por que importa al PI:</a:t>
-            </a:r>
-            <a:r>
-              <a:rPr sz="2000" b="0" i="0">
-                <a:solidFill>
-                  <a:srgbClr val="333333"/>
-                </a:solidFill>
-                <a:latin typeface="Calibri"/>
-              </a:rPr>
-              <a:t> el enunciado del proyecto exige buscar expedientes por ID y tener interfaz grafica, y hoy quedan resueltos los dos requisitos con la misma pieza de codigo.</a:t>
-            </a:r>
-          </a:p>
-          <a:p>
-            <a:pPr>
-              <a:spcAft>
-                <a:spcPts val="800"/>
-              </a:spcAft>
-            </a:pPr>
-            <a:r>
-              <a:rPr sz="2000" b="0" i="0">
-                <a:solidFill>
-                  <a:srgbClr val="333333"/>
-                </a:solidFill>
-                <a:latin typeface="Calibri"/>
-              </a:rPr>
-              <a:t>–   El HashMap sera el indice en memoria que se reconstruye al cargar el archivo CSV en las clases de persistencia, y el HashSet garantizara que no entren IDs repetidos.</a:t>
-            </a:r>
-          </a:p>
-          <a:p>
-            <a:pPr>
-              <a:spcAft>
-                <a:spcPts val="800"/>
-              </a:spcAft>
-            </a:pPr>
-            <a:r>
-              <a:rPr sz="2000" b="0" i="0">
-                <a:solidFill>
-                  <a:srgbClr val="333333"/>
-                </a:solidFill>
-                <a:latin typeface="Calibri"/>
-              </a:rPr>
-              <a:t>–   Esta primera ventana es el esqueleto sobre el que se montaran despues el formulario de registro de mascotas y la agenda de citas, por eso se escribe a mano y con la logica separada.</a:t>
-            </a:r>
-          </a:p>
-        </p:txBody>
-      </p:sp>
-      <p:sp>
-        <p:nvSpPr>
-          <p:cNvPr id="6" name="TextBox 5"/>
-          <p:cNvSpPr txBox="1"/>
-          <p:nvPr/>
-        </p:nvSpPr>
-        <p:spPr>
-          <a:xfrm>
-            <a:off x="11185855" y="6473952"/>
-            <a:ext cx="640080" cy="274320"/>
-          </a:xfrm>
-          <a:prstGeom prst="rect">
-            <a:avLst/>
-          </a:prstGeom>
-          <a:noFill/>
-        </p:spPr>
-        <p:txBody>
-          <a:bodyPr wrap="square">
-            <a:spAutoFit/>
-          </a:bodyPr>
-          <a:lstStyle/>
-          <a:p>
-            <a:pPr algn="r"/>
-            <a:r>
-              <a:rPr sz="1100" b="0" i="0">
-                <a:solidFill>
-                  <a:srgbClr val="666666"/>
-                </a:solidFill>
-                <a:latin typeface="Calibri"/>
-              </a:rPr>
-              <a:t>29</a:t>
+                  <a:srgbClr val="269CCB"/>
+                </a:solidFill>
+                <a:latin typeface="Calibri"/>
+              </a:rPr>
+              <a:t>Teoria al servicio del proyecto</a:t>
             </a:r>
           </a:p>
         </p:txBody>
@@ -13111,7 +13685,7 @@
                 </a:solidFill>
                 <a:latin typeface="Calibri"/>
               </a:rPr>
-              <a:t>Encuadre y repaso del avance</a:t>
+              <a:t>Encuadre y repaso de la clase anterior</a:t>
             </a:r>
           </a:p>
         </p:txBody>
@@ -13456,7 +14030,7 @@
                 </a:solidFill>
                 <a:latin typeface="Calibri"/>
               </a:rPr>
-              <a:t>Taller guiado = avance del PI</a:t>
+              <a:t>Practica (opcional, guia en la carpeta)</a:t>
             </a:r>
           </a:p>
         </p:txBody>
@@ -13571,7 +14145,7 @@
                 </a:solidFill>
                 <a:latin typeface="Calibri"/>
               </a:rPr>
-              <a:t>Criterios de exito y cierre</a:t>
+              <a:t>Repaso de conceptos y cierre</a:t>
             </a:r>
           </a:p>
         </p:txBody>
@@ -13660,3141 +14234,6 @@
                 <a:latin typeface="Calibri"/>
               </a:rPr>
               <a:t>3</a:t>
-            </a:r>
-          </a:p>
-        </p:txBody>
-      </p:sp>
-    </p:spTree>
-  </p:cSld>
-  <p:clrMapOvr>
-    <a:masterClrMapping/>
-  </p:clrMapOvr>
-</p:sld>
-</file>
-
-<file path=ppt/slides/slide30.xml><?xml version="1.0" encoding="utf-8"?>
-<p:sld xmlns:a="http://schemas.openxmlformats.org/drawingml/2006/main" xmlns:p="http://schemas.openxmlformats.org/presentationml/2006/main" xmlns:r="http://schemas.openxmlformats.org/officeDocument/2006/relationships">
-  <p:cSld>
-    <p:bg>
-      <p:bgPr>
-        <a:solidFill>
-          <a:srgbClr val="FFFFFF"/>
-        </a:solidFill>
-        <a:effectLst/>
-      </p:bgPr>
-    </p:bg>
-    <p:spTree>
-      <p:nvGrpSpPr>
-        <p:cNvPr id="1" name=""/>
-        <p:cNvGrpSpPr/>
-        <p:nvPr/>
-      </p:nvGrpSpPr>
-      <p:grpSpPr/>
-      <p:sp>
-        <p:nvSpPr>
-          <p:cNvPr id="2" name="Rectangle 1"/>
-          <p:cNvSpPr/>
-          <p:nvPr/>
-        </p:nvSpPr>
-        <p:spPr>
-          <a:xfrm>
-            <a:off x="0" y="0"/>
-            <a:ext cx="12191695" cy="960120"/>
-          </a:xfrm>
-          <a:prstGeom prst="rect">
-            <a:avLst/>
-          </a:prstGeom>
-          <a:solidFill>
-            <a:srgbClr val="095292"/>
-          </a:solidFill>
-          <a:ln>
-            <a:noFill/>
-          </a:ln>
-        </p:spPr>
-        <p:style>
-          <a:lnRef idx="1">
-            <a:schemeClr val="accent1"/>
-          </a:lnRef>
-          <a:fillRef idx="3">
-            <a:schemeClr val="accent1"/>
-          </a:fillRef>
-          <a:effectRef idx="2">
-            <a:schemeClr val="accent1"/>
-          </a:effectRef>
-          <a:fontRef idx="minor">
-            <a:schemeClr val="lt1"/>
-          </a:fontRef>
-        </p:style>
-        <p:txBody>
-          <a:bodyPr rtlCol="0" anchor="ctr"/>
-          <a:lstStyle/>
-          <a:p>
-            <a:pPr algn="ctr"/>
-          </a:p>
-        </p:txBody>
-      </p:sp>
-      <p:sp>
-        <p:nvSpPr>
-          <p:cNvPr id="3" name="Rectangle 2"/>
-          <p:cNvSpPr/>
-          <p:nvPr/>
-        </p:nvSpPr>
-        <p:spPr>
-          <a:xfrm>
-            <a:off x="0" y="960120"/>
-            <a:ext cx="12191695" cy="41148"/>
-          </a:xfrm>
-          <a:prstGeom prst="rect">
-            <a:avLst/>
-          </a:prstGeom>
-          <a:solidFill>
-            <a:srgbClr val="FFD000"/>
-          </a:solidFill>
-          <a:ln>
-            <a:noFill/>
-          </a:ln>
-        </p:spPr>
-        <p:style>
-          <a:lnRef idx="1">
-            <a:schemeClr val="accent1"/>
-          </a:lnRef>
-          <a:fillRef idx="3">
-            <a:schemeClr val="accent1"/>
-          </a:fillRef>
-          <a:effectRef idx="2">
-            <a:schemeClr val="accent1"/>
-          </a:effectRef>
-          <a:fontRef idx="minor">
-            <a:schemeClr val="lt1"/>
-          </a:fontRef>
-        </p:style>
-        <p:txBody>
-          <a:bodyPr rtlCol="0" anchor="ctr"/>
-          <a:lstStyle/>
-          <a:p>
-            <a:pPr algn="ctr"/>
-          </a:p>
-        </p:txBody>
-      </p:sp>
-      <p:sp>
-        <p:nvSpPr>
-          <p:cNvPr id="4" name="TextBox 3"/>
-          <p:cNvSpPr txBox="1"/>
-          <p:nvPr/>
-        </p:nvSpPr>
-        <p:spPr>
-          <a:xfrm>
-            <a:off x="457200" y="164592"/>
-            <a:ext cx="11277295" cy="502920"/>
-          </a:xfrm>
-          <a:prstGeom prst="rect">
-            <a:avLst/>
-          </a:prstGeom>
-          <a:noFill/>
-        </p:spPr>
-        <p:txBody>
-          <a:bodyPr wrap="square">
-            <a:spAutoFit/>
-          </a:bodyPr>
-          <a:lstStyle/>
-          <a:p>
-            <a:r>
-              <a:rPr sz="2600" b="1" i="0">
-                <a:solidFill>
-                  <a:srgbClr val="FFFFFF"/>
-                </a:solidFill>
-                <a:latin typeface="Calibri"/>
-              </a:rPr>
-              <a:t>Taller PI — punto de partida</a:t>
-            </a:r>
-          </a:p>
-        </p:txBody>
-      </p:sp>
-      <p:sp>
-        <p:nvSpPr>
-          <p:cNvPr id="5" name="TextBox 4"/>
-          <p:cNvSpPr txBox="1"/>
-          <p:nvPr/>
-        </p:nvSpPr>
-        <p:spPr>
-          <a:xfrm>
-            <a:off x="457200" y="1170432"/>
-            <a:ext cx="11277295" cy="5230368"/>
-          </a:xfrm>
-          <a:prstGeom prst="rect">
-            <a:avLst/>
-          </a:prstGeom>
-          <a:noFill/>
-        </p:spPr>
-        <p:txBody>
-          <a:bodyPr wrap="square">
-            <a:spAutoFit/>
-          </a:bodyPr>
-          <a:lstStyle/>
-          <a:p>
-            <a:pPr>
-              <a:spcAft>
-                <a:spcPts val="800"/>
-              </a:spcAft>
-            </a:pPr>
-            <a:r>
-              <a:rPr sz="2000" b="0" i="0">
-                <a:solidFill>
-                  <a:srgbClr val="333333"/>
-                </a:solidFill>
-                <a:latin typeface="Calibri"/>
-              </a:rPr>
-              <a:t>–   El registro arranca precargado con cinco expedientes: M-001 Firulais labrador de Ana Gomez, M-002 Michi criollo de Luis Perez, M-003 Rocky pastor aleman de Ana Gomez, M-004 Nieve persa de Sara Diaz y M-005 Toby labrador de Sara Diaz.</a:t>
-            </a:r>
-          </a:p>
-          <a:p>
-            <a:pPr>
-              <a:spcAft>
-                <a:spcPts val="800"/>
-              </a:spcAft>
-            </a:pPr>
-            <a:r>
-              <a:rPr sz="2000" b="0" i="0">
-                <a:solidFill>
-                  <a:srgbClr val="333333"/>
-                </a:solidFill>
-                <a:latin typeface="Calibri"/>
-              </a:rPr>
-              <a:t>–   Ademas hay un archivo historico de 5.000 fichas viejas (H-0001 a H-5000) que se usa solo para comparar la busqueda lineal del ArrayList contra el get() del HashMap.</a:t>
-            </a:r>
-          </a:p>
-          <a:p>
-            <a:pPr>
-              <a:spcAft>
-                <a:spcPts val="800"/>
-              </a:spcAft>
-            </a:pPr>
-            <a:r>
-              <a:rPr sz="2000" b="0" i="0">
-                <a:solidFill>
-                  <a:srgbClr val="333333"/>
-                </a:solidFill>
-                <a:latin typeface="Calibri"/>
-              </a:rPr>
-              <a:t>–   La recepcionista busca por ID escrito en minusculas o con espacios sobrantes, asi que el texto que entra debe limpiarse con trim() y toUpperCase() antes de consultar el mapa.</a:t>
-            </a:r>
-          </a:p>
-          <a:p>
-            <a:pPr>
-              <a:spcAft>
-                <a:spcPts val="800"/>
-              </a:spcAft>
-            </a:pPr>
-            <a:r>
-              <a:rPr sz="2000" b="0" i="0">
-                <a:solidFill>
-                  <a:srgbClr val="333333"/>
-                </a:solidFill>
-                <a:latin typeface="Calibri"/>
-              </a:rPr>
-              <a:t>–   Nadie pega una ventana ya hecha en esta clase: se escribe linea por linea para entender la jerarquia frame, panel y componente. VS Code no tiene disenador visual, asi que la tentacion no esta a un clic.</a:t>
-            </a:r>
-          </a:p>
-        </p:txBody>
-      </p:sp>
-      <p:sp>
-        <p:nvSpPr>
-          <p:cNvPr id="6" name="TextBox 5"/>
-          <p:cNvSpPr txBox="1"/>
-          <p:nvPr/>
-        </p:nvSpPr>
-        <p:spPr>
-          <a:xfrm>
-            <a:off x="11185855" y="6473952"/>
-            <a:ext cx="640080" cy="274320"/>
-          </a:xfrm>
-          <a:prstGeom prst="rect">
-            <a:avLst/>
-          </a:prstGeom>
-          <a:noFill/>
-        </p:spPr>
-        <p:txBody>
-          <a:bodyPr wrap="square">
-            <a:spAutoFit/>
-          </a:bodyPr>
-          <a:lstStyle/>
-          <a:p>
-            <a:pPr algn="r"/>
-            <a:r>
-              <a:rPr sz="1100" b="0" i="0">
-                <a:solidFill>
-                  <a:srgbClr val="666666"/>
-                </a:solidFill>
-                <a:latin typeface="Calibri"/>
-              </a:rPr>
-              <a:t>30</a:t>
-            </a:r>
-          </a:p>
-        </p:txBody>
-      </p:sp>
-    </p:spTree>
-  </p:cSld>
-  <p:clrMapOvr>
-    <a:masterClrMapping/>
-  </p:clrMapOvr>
-</p:sld>
-</file>
-
-<file path=ppt/slides/slide31.xml><?xml version="1.0" encoding="utf-8"?>
-<p:sld xmlns:a="http://schemas.openxmlformats.org/drawingml/2006/main" xmlns:p="http://schemas.openxmlformats.org/presentationml/2006/main" xmlns:r="http://schemas.openxmlformats.org/officeDocument/2006/relationships">
-  <p:cSld>
-    <p:bg>
-      <p:bgPr>
-        <a:solidFill>
-          <a:srgbClr val="FFFFFF"/>
-        </a:solidFill>
-        <a:effectLst/>
-      </p:bgPr>
-    </p:bg>
-    <p:spTree>
-      <p:nvGrpSpPr>
-        <p:cNvPr id="1" name=""/>
-        <p:cNvGrpSpPr/>
-        <p:nvPr/>
-      </p:nvGrpSpPr>
-      <p:grpSpPr/>
-      <p:sp>
-        <p:nvSpPr>
-          <p:cNvPr id="2" name="Rectangle 1"/>
-          <p:cNvSpPr/>
-          <p:nvPr/>
-        </p:nvSpPr>
-        <p:spPr>
-          <a:xfrm>
-            <a:off x="0" y="0"/>
-            <a:ext cx="12191695" cy="960120"/>
-          </a:xfrm>
-          <a:prstGeom prst="rect">
-            <a:avLst/>
-          </a:prstGeom>
-          <a:solidFill>
-            <a:srgbClr val="095292"/>
-          </a:solidFill>
-          <a:ln>
-            <a:noFill/>
-          </a:ln>
-        </p:spPr>
-        <p:style>
-          <a:lnRef idx="1">
-            <a:schemeClr val="accent1"/>
-          </a:lnRef>
-          <a:fillRef idx="3">
-            <a:schemeClr val="accent1"/>
-          </a:fillRef>
-          <a:effectRef idx="2">
-            <a:schemeClr val="accent1"/>
-          </a:effectRef>
-          <a:fontRef idx="minor">
-            <a:schemeClr val="lt1"/>
-          </a:fontRef>
-        </p:style>
-        <p:txBody>
-          <a:bodyPr rtlCol="0" anchor="ctr"/>
-          <a:lstStyle/>
-          <a:p>
-            <a:pPr algn="ctr"/>
-          </a:p>
-        </p:txBody>
-      </p:sp>
-      <p:sp>
-        <p:nvSpPr>
-          <p:cNvPr id="3" name="Rectangle 2"/>
-          <p:cNvSpPr/>
-          <p:nvPr/>
-        </p:nvSpPr>
-        <p:spPr>
-          <a:xfrm>
-            <a:off x="0" y="960120"/>
-            <a:ext cx="12191695" cy="41148"/>
-          </a:xfrm>
-          <a:prstGeom prst="rect">
-            <a:avLst/>
-          </a:prstGeom>
-          <a:solidFill>
-            <a:srgbClr val="FFD000"/>
-          </a:solidFill>
-          <a:ln>
-            <a:noFill/>
-          </a:ln>
-        </p:spPr>
-        <p:style>
-          <a:lnRef idx="1">
-            <a:schemeClr val="accent1"/>
-          </a:lnRef>
-          <a:fillRef idx="3">
-            <a:schemeClr val="accent1"/>
-          </a:fillRef>
-          <a:effectRef idx="2">
-            <a:schemeClr val="accent1"/>
-          </a:effectRef>
-          <a:fontRef idx="minor">
-            <a:schemeClr val="lt1"/>
-          </a:fontRef>
-        </p:style>
-        <p:txBody>
-          <a:bodyPr rtlCol="0" anchor="ctr"/>
-          <a:lstStyle/>
-          <a:p>
-            <a:pPr algn="ctr"/>
-          </a:p>
-        </p:txBody>
-      </p:sp>
-      <p:sp>
-        <p:nvSpPr>
-          <p:cNvPr id="4" name="TextBox 3"/>
-          <p:cNvSpPr txBox="1"/>
-          <p:nvPr/>
-        </p:nvSpPr>
-        <p:spPr>
-          <a:xfrm>
-            <a:off x="457200" y="164592"/>
-            <a:ext cx="11277295" cy="502920"/>
-          </a:xfrm>
-          <a:prstGeom prst="rect">
-            <a:avLst/>
-          </a:prstGeom>
-          <a:noFill/>
-        </p:spPr>
-        <p:txBody>
-          <a:bodyPr wrap="square">
-            <a:spAutoFit/>
-          </a:bodyPr>
-          <a:lstStyle/>
-          <a:p>
-            <a:r>
-              <a:rPr sz="2600" b="1" i="0">
-                <a:solidFill>
-                  <a:srgbClr val="FFFFFF"/>
-                </a:solidFill>
-                <a:latin typeface="Calibri"/>
-              </a:rPr>
-              <a:t>Taller PI — pasos guiados</a:t>
-            </a:r>
-          </a:p>
-        </p:txBody>
-      </p:sp>
-      <p:sp>
-        <p:nvSpPr>
-          <p:cNvPr id="5" name="Rounded Rectangle 4"/>
-          <p:cNvSpPr/>
-          <p:nvPr/>
-        </p:nvSpPr>
-        <p:spPr>
-          <a:xfrm>
-            <a:off x="457200" y="1234440"/>
-            <a:ext cx="11277295" cy="950976"/>
-          </a:xfrm>
-          <a:prstGeom prst="roundRect">
-            <a:avLst>
-              <a:gd name="adj" fmla="val 12000"/>
-            </a:avLst>
-          </a:prstGeom>
-          <a:solidFill>
-            <a:srgbClr val="F2F2F2"/>
-          </a:solidFill>
-          <a:ln>
-            <a:noFill/>
-          </a:ln>
-        </p:spPr>
-        <p:style>
-          <a:lnRef idx="1">
-            <a:schemeClr val="accent1"/>
-          </a:lnRef>
-          <a:fillRef idx="3">
-            <a:schemeClr val="accent1"/>
-          </a:fillRef>
-          <a:effectRef idx="2">
-            <a:schemeClr val="accent1"/>
-          </a:effectRef>
-          <a:fontRef idx="minor">
-            <a:schemeClr val="lt1"/>
-          </a:fontRef>
-        </p:style>
-        <p:txBody>
-          <a:bodyPr rtlCol="0" anchor="ctr"/>
-          <a:lstStyle/>
-          <a:p>
-            <a:pPr algn="ctr"/>
-          </a:p>
-        </p:txBody>
-      </p:sp>
-      <p:sp>
-        <p:nvSpPr>
-          <p:cNvPr id="6" name="Rounded Rectangle 5"/>
-          <p:cNvSpPr/>
-          <p:nvPr/>
-        </p:nvSpPr>
-        <p:spPr>
-          <a:xfrm>
-            <a:off x="594360" y="1490472"/>
-            <a:ext cx="438912" cy="438912"/>
-          </a:xfrm>
-          <a:prstGeom prst="roundRect">
-            <a:avLst>
-              <a:gd name="adj" fmla="val 12000"/>
-            </a:avLst>
-          </a:prstGeom>
-          <a:solidFill>
-            <a:srgbClr val="095292"/>
-          </a:solidFill>
-          <a:ln>
-            <a:noFill/>
-          </a:ln>
-        </p:spPr>
-        <p:style>
-          <a:lnRef idx="1">
-            <a:schemeClr val="accent1"/>
-          </a:lnRef>
-          <a:fillRef idx="3">
-            <a:schemeClr val="accent1"/>
-          </a:fillRef>
-          <a:effectRef idx="2">
-            <a:schemeClr val="accent1"/>
-          </a:effectRef>
-          <a:fontRef idx="minor">
-            <a:schemeClr val="lt1"/>
-          </a:fontRef>
-        </p:style>
-        <p:txBody>
-          <a:bodyPr rtlCol="0" anchor="ctr"/>
-          <a:lstStyle/>
-          <a:p>
-            <a:pPr algn="ctr"/>
-          </a:p>
-        </p:txBody>
-      </p:sp>
-      <p:sp>
-        <p:nvSpPr>
-          <p:cNvPr id="7" name="TextBox 6"/>
-          <p:cNvSpPr txBox="1"/>
-          <p:nvPr/>
-        </p:nvSpPr>
-        <p:spPr>
-          <a:xfrm>
-            <a:off x="594360" y="1490472"/>
-            <a:ext cx="438912" cy="438912"/>
-          </a:xfrm>
-          <a:prstGeom prst="rect">
-            <a:avLst/>
-          </a:prstGeom>
-          <a:noFill/>
-        </p:spPr>
-        <p:txBody>
-          <a:bodyPr wrap="square" anchor="ctr"/>
-          <a:lstStyle/>
-          <a:p>
-            <a:pPr algn="ctr"/>
-            <a:r>
-              <a:rPr sz="1600" b="1" i="0">
-                <a:solidFill>
-                  <a:srgbClr val="FFFFFF"/>
-                </a:solidFill>
-                <a:latin typeface="Calibri"/>
-              </a:rPr>
-              <a:t>1</a:t>
-            </a:r>
-          </a:p>
-        </p:txBody>
-      </p:sp>
-      <p:sp>
-        <p:nvSpPr>
-          <p:cNvPr id="8" name="TextBox 7"/>
-          <p:cNvSpPr txBox="1"/>
-          <p:nvPr/>
-        </p:nvSpPr>
-        <p:spPr>
-          <a:xfrm>
-            <a:off x="1188720" y="1325880"/>
-            <a:ext cx="10271455" cy="786384"/>
-          </a:xfrm>
-          <a:prstGeom prst="rect">
-            <a:avLst/>
-          </a:prstGeom>
-          <a:noFill/>
-        </p:spPr>
-        <p:txBody>
-          <a:bodyPr wrap="square" anchor="ctr"/>
-          <a:lstStyle/>
-          <a:p>
-            <a:r>
-              <a:rPr sz="1400" b="1" i="0">
-                <a:solidFill>
-                  <a:srgbClr val="095292"/>
-                </a:solidFill>
-                <a:latin typeface="Calibri"/>
-              </a:rPr>
-              <a:t>Bloque de mapas (minutos 10 a 30): cree la clase Expediente con id, nombre, raza, dueno y nota clinica, y la clase RegistroExpedientes con private final Map&lt;String, Expediente&gt; expedientes = new HashMap&lt;&gt;(); verifique guardando los cinco expedientes del escenario e imprimiendo expedientes.size().</a:t>
-            </a:r>
-          </a:p>
-        </p:txBody>
-      </p:sp>
-      <p:sp>
-        <p:nvSpPr>
-          <p:cNvPr id="9" name="Rounded Rectangle 8"/>
-          <p:cNvSpPr/>
-          <p:nvPr/>
-        </p:nvSpPr>
-        <p:spPr>
-          <a:xfrm>
-            <a:off x="457200" y="2276856"/>
-            <a:ext cx="11277295" cy="950976"/>
-          </a:xfrm>
-          <a:prstGeom prst="roundRect">
-            <a:avLst>
-              <a:gd name="adj" fmla="val 12000"/>
-            </a:avLst>
-          </a:prstGeom>
-          <a:solidFill>
-            <a:srgbClr val="E8F4FA"/>
-          </a:solidFill>
-          <a:ln>
-            <a:noFill/>
-          </a:ln>
-        </p:spPr>
-        <p:style>
-          <a:lnRef idx="1">
-            <a:schemeClr val="accent1"/>
-          </a:lnRef>
-          <a:fillRef idx="3">
-            <a:schemeClr val="accent1"/>
-          </a:fillRef>
-          <a:effectRef idx="2">
-            <a:schemeClr val="accent1"/>
-          </a:effectRef>
-          <a:fontRef idx="minor">
-            <a:schemeClr val="lt1"/>
-          </a:fontRef>
-        </p:style>
-        <p:txBody>
-          <a:bodyPr rtlCol="0" anchor="ctr"/>
-          <a:lstStyle/>
-          <a:p>
-            <a:pPr algn="ctr"/>
-          </a:p>
-        </p:txBody>
-      </p:sp>
-      <p:sp>
-        <p:nvSpPr>
-          <p:cNvPr id="10" name="Rounded Rectangle 9"/>
-          <p:cNvSpPr/>
-          <p:nvPr/>
-        </p:nvSpPr>
-        <p:spPr>
-          <a:xfrm>
-            <a:off x="594360" y="2532888"/>
-            <a:ext cx="438912" cy="438912"/>
-          </a:xfrm>
-          <a:prstGeom prst="roundRect">
-            <a:avLst>
-              <a:gd name="adj" fmla="val 12000"/>
-            </a:avLst>
-          </a:prstGeom>
-          <a:solidFill>
-            <a:srgbClr val="095292"/>
-          </a:solidFill>
-          <a:ln>
-            <a:noFill/>
-          </a:ln>
-        </p:spPr>
-        <p:style>
-          <a:lnRef idx="1">
-            <a:schemeClr val="accent1"/>
-          </a:lnRef>
-          <a:fillRef idx="3">
-            <a:schemeClr val="accent1"/>
-          </a:fillRef>
-          <a:effectRef idx="2">
-            <a:schemeClr val="accent1"/>
-          </a:effectRef>
-          <a:fontRef idx="minor">
-            <a:schemeClr val="lt1"/>
-          </a:fontRef>
-        </p:style>
-        <p:txBody>
-          <a:bodyPr rtlCol="0" anchor="ctr"/>
-          <a:lstStyle/>
-          <a:p>
-            <a:pPr algn="ctr"/>
-          </a:p>
-        </p:txBody>
-      </p:sp>
-      <p:sp>
-        <p:nvSpPr>
-          <p:cNvPr id="11" name="TextBox 10"/>
-          <p:cNvSpPr txBox="1"/>
-          <p:nvPr/>
-        </p:nvSpPr>
-        <p:spPr>
-          <a:xfrm>
-            <a:off x="594360" y="2532888"/>
-            <a:ext cx="438912" cy="438912"/>
-          </a:xfrm>
-          <a:prstGeom prst="rect">
-            <a:avLst/>
-          </a:prstGeom>
-          <a:noFill/>
-        </p:spPr>
-        <p:txBody>
-          <a:bodyPr wrap="square" anchor="ctr"/>
-          <a:lstStyle/>
-          <a:p>
-            <a:pPr algn="ctr"/>
-            <a:r>
-              <a:rPr sz="1600" b="1" i="0">
-                <a:solidFill>
-                  <a:srgbClr val="FFFFFF"/>
-                </a:solidFill>
-                <a:latin typeface="Calibri"/>
-              </a:rPr>
-              <a:t>2</a:t>
-            </a:r>
-          </a:p>
-        </p:txBody>
-      </p:sp>
-      <p:sp>
-        <p:nvSpPr>
-          <p:cNvPr id="12" name="TextBox 11"/>
-          <p:cNvSpPr txBox="1"/>
-          <p:nvPr/>
-        </p:nvSpPr>
-        <p:spPr>
-          <a:xfrm>
-            <a:off x="1188720" y="2368296"/>
-            <a:ext cx="10271455" cy="786384"/>
-          </a:xfrm>
-          <a:prstGeom prst="rect">
-            <a:avLst/>
-          </a:prstGeom>
-          <a:noFill/>
-        </p:spPr>
-        <p:txBody>
-          <a:bodyPr wrap="square" anchor="ctr"/>
-          <a:lstStyle/>
-          <a:p>
-            <a:r>
-              <a:rPr sz="1400" b="1" i="0">
-                <a:solidFill>
-                  <a:srgbClr val="095292"/>
-                </a:solidFill>
-                <a:latin typeface="Calibri"/>
-              </a:rPr>
-              <a:t>Bloque de mapas (minutos 30 a 45): implemente buscar(String id) con get y validacion de null, y guardar(Expediente e) que use containsKey para avisar cuando un ID ya existe antes de que put lo reemplace en silencio; verifique guardando dos veces M-001 y confirmando que el mapa sigue en cinco expedientes y aparece el aviso.</a:t>
-            </a:r>
-          </a:p>
-        </p:txBody>
-      </p:sp>
-      <p:sp>
-        <p:nvSpPr>
-          <p:cNvPr id="13" name="Rounded Rectangle 12"/>
-          <p:cNvSpPr/>
-          <p:nvPr/>
-        </p:nvSpPr>
-        <p:spPr>
-          <a:xfrm>
-            <a:off x="457200" y="3319272"/>
-            <a:ext cx="11277295" cy="950976"/>
-          </a:xfrm>
-          <a:prstGeom prst="roundRect">
-            <a:avLst>
-              <a:gd name="adj" fmla="val 12000"/>
-            </a:avLst>
-          </a:prstGeom>
-          <a:solidFill>
-            <a:srgbClr val="F2F2F2"/>
-          </a:solidFill>
-          <a:ln>
-            <a:noFill/>
-          </a:ln>
-        </p:spPr>
-        <p:style>
-          <a:lnRef idx="1">
-            <a:schemeClr val="accent1"/>
-          </a:lnRef>
-          <a:fillRef idx="3">
-            <a:schemeClr val="accent1"/>
-          </a:fillRef>
-          <a:effectRef idx="2">
-            <a:schemeClr val="accent1"/>
-          </a:effectRef>
-          <a:fontRef idx="minor">
-            <a:schemeClr val="lt1"/>
-          </a:fontRef>
-        </p:style>
-        <p:txBody>
-          <a:bodyPr rtlCol="0" anchor="ctr"/>
-          <a:lstStyle/>
-          <a:p>
-            <a:pPr algn="ctr"/>
-          </a:p>
-        </p:txBody>
-      </p:sp>
-      <p:sp>
-        <p:nvSpPr>
-          <p:cNvPr id="14" name="Rounded Rectangle 13"/>
-          <p:cNvSpPr/>
-          <p:nvPr/>
-        </p:nvSpPr>
-        <p:spPr>
-          <a:xfrm>
-            <a:off x="594360" y="3575304"/>
-            <a:ext cx="438912" cy="438912"/>
-          </a:xfrm>
-          <a:prstGeom prst="roundRect">
-            <a:avLst>
-              <a:gd name="adj" fmla="val 12000"/>
-            </a:avLst>
-          </a:prstGeom>
-          <a:solidFill>
-            <a:srgbClr val="095292"/>
-          </a:solidFill>
-          <a:ln>
-            <a:noFill/>
-          </a:ln>
-        </p:spPr>
-        <p:style>
-          <a:lnRef idx="1">
-            <a:schemeClr val="accent1"/>
-          </a:lnRef>
-          <a:fillRef idx="3">
-            <a:schemeClr val="accent1"/>
-          </a:fillRef>
-          <a:effectRef idx="2">
-            <a:schemeClr val="accent1"/>
-          </a:effectRef>
-          <a:fontRef idx="minor">
-            <a:schemeClr val="lt1"/>
-          </a:fontRef>
-        </p:style>
-        <p:txBody>
-          <a:bodyPr rtlCol="0" anchor="ctr"/>
-          <a:lstStyle/>
-          <a:p>
-            <a:pPr algn="ctr"/>
-          </a:p>
-        </p:txBody>
-      </p:sp>
-      <p:sp>
-        <p:nvSpPr>
-          <p:cNvPr id="15" name="TextBox 14"/>
-          <p:cNvSpPr txBox="1"/>
-          <p:nvPr/>
-        </p:nvSpPr>
-        <p:spPr>
-          <a:xfrm>
-            <a:off x="594360" y="3575304"/>
-            <a:ext cx="438912" cy="438912"/>
-          </a:xfrm>
-          <a:prstGeom prst="rect">
-            <a:avLst/>
-          </a:prstGeom>
-          <a:noFill/>
-        </p:spPr>
-        <p:txBody>
-          <a:bodyPr wrap="square" anchor="ctr"/>
-          <a:lstStyle/>
-          <a:p>
-            <a:pPr algn="ctr"/>
-            <a:r>
-              <a:rPr sz="1600" b="1" i="0">
-                <a:solidFill>
-                  <a:srgbClr val="FFFFFF"/>
-                </a:solidFill>
-                <a:latin typeface="Calibri"/>
-              </a:rPr>
-              <a:t>3</a:t>
-            </a:r>
-          </a:p>
-        </p:txBody>
-      </p:sp>
-      <p:sp>
-        <p:nvSpPr>
-          <p:cNvPr id="16" name="TextBox 15"/>
-          <p:cNvSpPr txBox="1"/>
-          <p:nvPr/>
-        </p:nvSpPr>
-        <p:spPr>
-          <a:xfrm>
-            <a:off x="1188720" y="3410712"/>
-            <a:ext cx="10271455" cy="786384"/>
-          </a:xfrm>
-          <a:prstGeom prst="rect">
-            <a:avLst/>
-          </a:prstGeom>
-          <a:noFill/>
-        </p:spPr>
-        <p:txBody>
-          <a:bodyPr wrap="square" anchor="ctr"/>
-          <a:lstStyle/>
-          <a:p>
-            <a:r>
-              <a:rPr sz="1400" b="1" i="0">
-                <a:solidFill>
-                  <a:srgbClr val="095292"/>
-                </a:solidFill>
-                <a:latin typeface="Calibri"/>
-              </a:rPr>
-              <a:t>Bloque de conjuntos (minutos 45 a 55): agregue private final Set&lt;String&gt; razas = new HashSet&lt;&gt;(); que se llene automaticamente en cada guardar y aproveche el boolean que devuelve add para avisar cuando la raza ya estaba; verifique que al cargar a Firulais y a Toby, ambos labradores, el conjunto reporta la raza repetida y razas.size() cuenta una sola vez Labrador.</a:t>
-            </a:r>
-          </a:p>
-        </p:txBody>
-      </p:sp>
-      <p:sp>
-        <p:nvSpPr>
-          <p:cNvPr id="17" name="Rounded Rectangle 16"/>
-          <p:cNvSpPr/>
-          <p:nvPr/>
-        </p:nvSpPr>
-        <p:spPr>
-          <a:xfrm>
-            <a:off x="457200" y="4361688"/>
-            <a:ext cx="11277295" cy="950976"/>
-          </a:xfrm>
-          <a:prstGeom prst="roundRect">
-            <a:avLst>
-              <a:gd name="adj" fmla="val 12000"/>
-            </a:avLst>
-          </a:prstGeom>
-          <a:solidFill>
-            <a:srgbClr val="E8F4FA"/>
-          </a:solidFill>
-          <a:ln>
-            <a:noFill/>
-          </a:ln>
-        </p:spPr>
-        <p:style>
-          <a:lnRef idx="1">
-            <a:schemeClr val="accent1"/>
-          </a:lnRef>
-          <a:fillRef idx="3">
-            <a:schemeClr val="accent1"/>
-          </a:fillRef>
-          <a:effectRef idx="2">
-            <a:schemeClr val="accent1"/>
-          </a:effectRef>
-          <a:fontRef idx="minor">
-            <a:schemeClr val="lt1"/>
-          </a:fontRef>
-        </p:style>
-        <p:txBody>
-          <a:bodyPr rtlCol="0" anchor="ctr"/>
-          <a:lstStyle/>
-          <a:p>
-            <a:pPr algn="ctr"/>
-          </a:p>
-        </p:txBody>
-      </p:sp>
-      <p:sp>
-        <p:nvSpPr>
-          <p:cNvPr id="18" name="Rounded Rectangle 17"/>
-          <p:cNvSpPr/>
-          <p:nvPr/>
-        </p:nvSpPr>
-        <p:spPr>
-          <a:xfrm>
-            <a:off x="594360" y="4617720"/>
-            <a:ext cx="438912" cy="438912"/>
-          </a:xfrm>
-          <a:prstGeom prst="roundRect">
-            <a:avLst>
-              <a:gd name="adj" fmla="val 12000"/>
-            </a:avLst>
-          </a:prstGeom>
-          <a:solidFill>
-            <a:srgbClr val="095292"/>
-          </a:solidFill>
-          <a:ln>
-            <a:noFill/>
-          </a:ln>
-        </p:spPr>
-        <p:style>
-          <a:lnRef idx="1">
-            <a:schemeClr val="accent1"/>
-          </a:lnRef>
-          <a:fillRef idx="3">
-            <a:schemeClr val="accent1"/>
-          </a:fillRef>
-          <a:effectRef idx="2">
-            <a:schemeClr val="accent1"/>
-          </a:effectRef>
-          <a:fontRef idx="minor">
-            <a:schemeClr val="lt1"/>
-          </a:fontRef>
-        </p:style>
-        <p:txBody>
-          <a:bodyPr rtlCol="0" anchor="ctr"/>
-          <a:lstStyle/>
-          <a:p>
-            <a:pPr algn="ctr"/>
-          </a:p>
-        </p:txBody>
-      </p:sp>
-      <p:sp>
-        <p:nvSpPr>
-          <p:cNvPr id="19" name="TextBox 18"/>
-          <p:cNvSpPr txBox="1"/>
-          <p:nvPr/>
-        </p:nvSpPr>
-        <p:spPr>
-          <a:xfrm>
-            <a:off x="594360" y="4617720"/>
-            <a:ext cx="438912" cy="438912"/>
-          </a:xfrm>
-          <a:prstGeom prst="rect">
-            <a:avLst/>
-          </a:prstGeom>
-          <a:noFill/>
-        </p:spPr>
-        <p:txBody>
-          <a:bodyPr wrap="square" anchor="ctr"/>
-          <a:lstStyle/>
-          <a:p>
-            <a:pPr algn="ctr"/>
-            <a:r>
-              <a:rPr sz="1600" b="1" i="0">
-                <a:solidFill>
-                  <a:srgbClr val="FFFFFF"/>
-                </a:solidFill>
-                <a:latin typeface="Calibri"/>
-              </a:rPr>
-              <a:t>4</a:t>
-            </a:r>
-          </a:p>
-        </p:txBody>
-      </p:sp>
-      <p:sp>
-        <p:nvSpPr>
-          <p:cNvPr id="20" name="TextBox 19"/>
-          <p:cNvSpPr txBox="1"/>
-          <p:nvPr/>
-        </p:nvSpPr>
-        <p:spPr>
-          <a:xfrm>
-            <a:off x="1188720" y="4453128"/>
-            <a:ext cx="10271455" cy="786384"/>
-          </a:xfrm>
-          <a:prstGeom prst="rect">
-            <a:avLst/>
-          </a:prstGeom>
-          <a:noFill/>
-        </p:spPr>
-        <p:txBody>
-          <a:bodyPr wrap="square" anchor="ctr"/>
-          <a:lstStyle/>
-          <a:p>
-            <a:r>
-              <a:rPr sz="1400" b="1" i="0">
-                <a:solidFill>
-                  <a:srgbClr val="095292"/>
-                </a:solidFill>
-                <a:latin typeface="Calibri"/>
-              </a:rPr>
-              <a:t>Bloque Swing (minutos 65 a 95): escriba a mano la clase VentanaBuscarExpediente que extiende JFrame, con un JPanel superior que contenga un JLabel, un JTextField y un JButton, y un JLabel central para el resultado; verifique que la ventana abre centrada, con titulo VetCare y que al cerrarla el programa termina.</a:t>
-            </a:r>
-          </a:p>
-        </p:txBody>
-      </p:sp>
-      <p:sp>
-        <p:nvSpPr>
-          <p:cNvPr id="21" name="Rounded Rectangle 20"/>
-          <p:cNvSpPr/>
-          <p:nvPr/>
-        </p:nvSpPr>
-        <p:spPr>
-          <a:xfrm>
-            <a:off x="457200" y="5404104"/>
-            <a:ext cx="11277295" cy="950976"/>
-          </a:xfrm>
-          <a:prstGeom prst="roundRect">
-            <a:avLst>
-              <a:gd name="adj" fmla="val 12000"/>
-            </a:avLst>
-          </a:prstGeom>
-          <a:solidFill>
-            <a:srgbClr val="F2F2F2"/>
-          </a:solidFill>
-          <a:ln>
-            <a:noFill/>
-          </a:ln>
-        </p:spPr>
-        <p:style>
-          <a:lnRef idx="1">
-            <a:schemeClr val="accent1"/>
-          </a:lnRef>
-          <a:fillRef idx="3">
-            <a:schemeClr val="accent1"/>
-          </a:fillRef>
-          <a:effectRef idx="2">
-            <a:schemeClr val="accent1"/>
-          </a:effectRef>
-          <a:fontRef idx="minor">
-            <a:schemeClr val="lt1"/>
-          </a:fontRef>
-        </p:style>
-        <p:txBody>
-          <a:bodyPr rtlCol="0" anchor="ctr"/>
-          <a:lstStyle/>
-          <a:p>
-            <a:pPr algn="ctr"/>
-          </a:p>
-        </p:txBody>
-      </p:sp>
-      <p:sp>
-        <p:nvSpPr>
-          <p:cNvPr id="22" name="Rounded Rectangle 21"/>
-          <p:cNvSpPr/>
-          <p:nvPr/>
-        </p:nvSpPr>
-        <p:spPr>
-          <a:xfrm>
-            <a:off x="594360" y="5660136"/>
-            <a:ext cx="438912" cy="438912"/>
-          </a:xfrm>
-          <a:prstGeom prst="roundRect">
-            <a:avLst>
-              <a:gd name="adj" fmla="val 12000"/>
-            </a:avLst>
-          </a:prstGeom>
-          <a:solidFill>
-            <a:srgbClr val="095292"/>
-          </a:solidFill>
-          <a:ln>
-            <a:noFill/>
-          </a:ln>
-        </p:spPr>
-        <p:style>
-          <a:lnRef idx="1">
-            <a:schemeClr val="accent1"/>
-          </a:lnRef>
-          <a:fillRef idx="3">
-            <a:schemeClr val="accent1"/>
-          </a:fillRef>
-          <a:effectRef idx="2">
-            <a:schemeClr val="accent1"/>
-          </a:effectRef>
-          <a:fontRef idx="minor">
-            <a:schemeClr val="lt1"/>
-          </a:fontRef>
-        </p:style>
-        <p:txBody>
-          <a:bodyPr rtlCol="0" anchor="ctr"/>
-          <a:lstStyle/>
-          <a:p>
-            <a:pPr algn="ctr"/>
-          </a:p>
-        </p:txBody>
-      </p:sp>
-      <p:sp>
-        <p:nvSpPr>
-          <p:cNvPr id="23" name="TextBox 22"/>
-          <p:cNvSpPr txBox="1"/>
-          <p:nvPr/>
-        </p:nvSpPr>
-        <p:spPr>
-          <a:xfrm>
-            <a:off x="594360" y="5660136"/>
-            <a:ext cx="438912" cy="438912"/>
-          </a:xfrm>
-          <a:prstGeom prst="rect">
-            <a:avLst/>
-          </a:prstGeom>
-          <a:noFill/>
-        </p:spPr>
-        <p:txBody>
-          <a:bodyPr wrap="square" anchor="ctr"/>
-          <a:lstStyle/>
-          <a:p>
-            <a:pPr algn="ctr"/>
-            <a:r>
-              <a:rPr sz="1600" b="1" i="0">
-                <a:solidFill>
-                  <a:srgbClr val="FFFFFF"/>
-                </a:solidFill>
-                <a:latin typeface="Calibri"/>
-              </a:rPr>
-              <a:t>5</a:t>
-            </a:r>
-          </a:p>
-        </p:txBody>
-      </p:sp>
-      <p:sp>
-        <p:nvSpPr>
-          <p:cNvPr id="24" name="TextBox 23"/>
-          <p:cNvSpPr txBox="1"/>
-          <p:nvPr/>
-        </p:nvSpPr>
-        <p:spPr>
-          <a:xfrm>
-            <a:off x="1188720" y="5495544"/>
-            <a:ext cx="10271455" cy="786384"/>
-          </a:xfrm>
-          <a:prstGeom prst="rect">
-            <a:avLst/>
-          </a:prstGeom>
-          <a:noFill/>
-        </p:spPr>
-        <p:txBody>
-          <a:bodyPr wrap="square" anchor="ctr"/>
-          <a:lstStyle/>
-          <a:p>
-            <a:r>
-              <a:rPr sz="1400" b="1" i="0">
-                <a:solidFill>
-                  <a:srgbClr val="095292"/>
-                </a:solidFill>
-                <a:latin typeface="Calibri"/>
-              </a:rPr>
-              <a:t>Integracion (minutos 95 a 115): conecte el boton con addActionListener usando lambda para que lea el ID del JTextField, lo normalice con trim() y toUpperCase(), consulte el HashMap y muestre el expediente en el JLabel central o un JOptionPane de advertencia si no existe, todo dentro de try-catch; capture la ventana con una busqueda exitosa y una fallida y suba el proyecto a la plataforma del curso.</a:t>
-            </a:r>
-          </a:p>
-        </p:txBody>
-      </p:sp>
-      <p:sp>
-        <p:nvSpPr>
-          <p:cNvPr id="25" name="TextBox 24"/>
-          <p:cNvSpPr txBox="1"/>
-          <p:nvPr/>
-        </p:nvSpPr>
-        <p:spPr>
-          <a:xfrm>
-            <a:off x="11185855" y="6473952"/>
-            <a:ext cx="640080" cy="274320"/>
-          </a:xfrm>
-          <a:prstGeom prst="rect">
-            <a:avLst/>
-          </a:prstGeom>
-          <a:noFill/>
-        </p:spPr>
-        <p:txBody>
-          <a:bodyPr wrap="square">
-            <a:spAutoFit/>
-          </a:bodyPr>
-          <a:lstStyle/>
-          <a:p>
-            <a:pPr algn="r"/>
-            <a:r>
-              <a:rPr sz="1100" b="0" i="0">
-                <a:solidFill>
-                  <a:srgbClr val="666666"/>
-                </a:solidFill>
-                <a:latin typeface="Calibri"/>
-              </a:rPr>
-              <a:t>31</a:t>
-            </a:r>
-          </a:p>
-        </p:txBody>
-      </p:sp>
-    </p:spTree>
-  </p:cSld>
-  <p:clrMapOvr>
-    <a:masterClrMapping/>
-  </p:clrMapOvr>
-</p:sld>
-</file>
-
-<file path=ppt/slides/slide32.xml><?xml version="1.0" encoding="utf-8"?>
-<p:sld xmlns:a="http://schemas.openxmlformats.org/drawingml/2006/main" xmlns:p="http://schemas.openxmlformats.org/presentationml/2006/main" xmlns:r="http://schemas.openxmlformats.org/officeDocument/2006/relationships">
-  <p:cSld>
-    <p:bg>
-      <p:bgPr>
-        <a:solidFill>
-          <a:srgbClr val="FFFFFF"/>
-        </a:solidFill>
-        <a:effectLst/>
-      </p:bgPr>
-    </p:bg>
-    <p:spTree>
-      <p:nvGrpSpPr>
-        <p:cNvPr id="1" name=""/>
-        <p:cNvGrpSpPr/>
-        <p:nvPr/>
-      </p:nvGrpSpPr>
-      <p:grpSpPr/>
-      <p:sp>
-        <p:nvSpPr>
-          <p:cNvPr id="2" name="Rectangle 1"/>
-          <p:cNvSpPr/>
-          <p:nvPr/>
-        </p:nvSpPr>
-        <p:spPr>
-          <a:xfrm>
-            <a:off x="0" y="0"/>
-            <a:ext cx="12191695" cy="960120"/>
-          </a:xfrm>
-          <a:prstGeom prst="rect">
-            <a:avLst/>
-          </a:prstGeom>
-          <a:solidFill>
-            <a:srgbClr val="095292"/>
-          </a:solidFill>
-          <a:ln>
-            <a:noFill/>
-          </a:ln>
-        </p:spPr>
-        <p:style>
-          <a:lnRef idx="1">
-            <a:schemeClr val="accent1"/>
-          </a:lnRef>
-          <a:fillRef idx="3">
-            <a:schemeClr val="accent1"/>
-          </a:fillRef>
-          <a:effectRef idx="2">
-            <a:schemeClr val="accent1"/>
-          </a:effectRef>
-          <a:fontRef idx="minor">
-            <a:schemeClr val="lt1"/>
-          </a:fontRef>
-        </p:style>
-        <p:txBody>
-          <a:bodyPr rtlCol="0" anchor="ctr"/>
-          <a:lstStyle/>
-          <a:p>
-            <a:pPr algn="ctr"/>
-          </a:p>
-        </p:txBody>
-      </p:sp>
-      <p:sp>
-        <p:nvSpPr>
-          <p:cNvPr id="3" name="Rectangle 2"/>
-          <p:cNvSpPr/>
-          <p:nvPr/>
-        </p:nvSpPr>
-        <p:spPr>
-          <a:xfrm>
-            <a:off x="0" y="960120"/>
-            <a:ext cx="12191695" cy="41148"/>
-          </a:xfrm>
-          <a:prstGeom prst="rect">
-            <a:avLst/>
-          </a:prstGeom>
-          <a:solidFill>
-            <a:srgbClr val="FFD000"/>
-          </a:solidFill>
-          <a:ln>
-            <a:noFill/>
-          </a:ln>
-        </p:spPr>
-        <p:style>
-          <a:lnRef idx="1">
-            <a:schemeClr val="accent1"/>
-          </a:lnRef>
-          <a:fillRef idx="3">
-            <a:schemeClr val="accent1"/>
-          </a:fillRef>
-          <a:effectRef idx="2">
-            <a:schemeClr val="accent1"/>
-          </a:effectRef>
-          <a:fontRef idx="minor">
-            <a:schemeClr val="lt1"/>
-          </a:fontRef>
-        </p:style>
-        <p:txBody>
-          <a:bodyPr rtlCol="0" anchor="ctr"/>
-          <a:lstStyle/>
-          <a:p>
-            <a:pPr algn="ctr"/>
-          </a:p>
-        </p:txBody>
-      </p:sp>
-      <p:sp>
-        <p:nvSpPr>
-          <p:cNvPr id="4" name="TextBox 3"/>
-          <p:cNvSpPr txBox="1"/>
-          <p:nvPr/>
-        </p:nvSpPr>
-        <p:spPr>
-          <a:xfrm>
-            <a:off x="457200" y="164592"/>
-            <a:ext cx="11277295" cy="502920"/>
-          </a:xfrm>
-          <a:prstGeom prst="rect">
-            <a:avLst/>
-          </a:prstGeom>
-          <a:noFill/>
-        </p:spPr>
-        <p:txBody>
-          <a:bodyPr wrap="square">
-            <a:spAutoFit/>
-          </a:bodyPr>
-          <a:lstStyle/>
-          <a:p>
-            <a:r>
-              <a:rPr sz="2600" b="1" i="0">
-                <a:solidFill>
-                  <a:srgbClr val="FFFFFF"/>
-                </a:solidFill>
-                <a:latin typeface="Calibri"/>
-              </a:rPr>
-              <a:t>Antes de entregar — autochequeo</a:t>
-            </a:r>
-          </a:p>
-        </p:txBody>
-      </p:sp>
-      <p:sp>
-        <p:nvSpPr>
-          <p:cNvPr id="5" name="Rounded Rectangle 4"/>
-          <p:cNvSpPr/>
-          <p:nvPr/>
-        </p:nvSpPr>
-        <p:spPr>
-          <a:xfrm>
-            <a:off x="457200" y="1261872"/>
-            <a:ext cx="11277295" cy="566928"/>
-          </a:xfrm>
-          <a:prstGeom prst="roundRect">
-            <a:avLst>
-              <a:gd name="adj" fmla="val 12000"/>
-            </a:avLst>
-          </a:prstGeom>
-          <a:solidFill>
-            <a:srgbClr val="F2F2F2"/>
-          </a:solidFill>
-          <a:ln>
-            <a:noFill/>
-          </a:ln>
-        </p:spPr>
-        <p:style>
-          <a:lnRef idx="1">
-            <a:schemeClr val="accent1"/>
-          </a:lnRef>
-          <a:fillRef idx="3">
-            <a:schemeClr val="accent1"/>
-          </a:fillRef>
-          <a:effectRef idx="2">
-            <a:schemeClr val="accent1"/>
-          </a:effectRef>
-          <a:fontRef idx="minor">
-            <a:schemeClr val="lt1"/>
-          </a:fontRef>
-        </p:style>
-        <p:txBody>
-          <a:bodyPr rtlCol="0" anchor="ctr"/>
-          <a:lstStyle/>
-          <a:p>
-            <a:pPr algn="ctr"/>
-          </a:p>
-        </p:txBody>
-      </p:sp>
-      <p:sp>
-        <p:nvSpPr>
-          <p:cNvPr id="6" name="Rectangle 5"/>
-          <p:cNvSpPr/>
-          <p:nvPr/>
-        </p:nvSpPr>
-        <p:spPr>
-          <a:xfrm>
-            <a:off x="640080" y="1408175"/>
-            <a:ext cx="274320" cy="274320"/>
-          </a:xfrm>
-          <a:prstGeom prst="rect">
-            <a:avLst/>
-          </a:prstGeom>
-          <a:solidFill>
-            <a:srgbClr val="FFFFFF"/>
-          </a:solidFill>
-          <a:ln>
-            <a:solidFill>
-              <a:srgbClr val="333333"/>
-            </a:solidFill>
-          </a:ln>
-        </p:spPr>
-        <p:style>
-          <a:lnRef idx="1">
-            <a:schemeClr val="accent1"/>
-          </a:lnRef>
-          <a:fillRef idx="3">
-            <a:schemeClr val="accent1"/>
-          </a:fillRef>
-          <a:effectRef idx="2">
-            <a:schemeClr val="accent1"/>
-          </a:effectRef>
-          <a:fontRef idx="minor">
-            <a:schemeClr val="lt1"/>
-          </a:fontRef>
-        </p:style>
-        <p:txBody>
-          <a:bodyPr rtlCol="0" anchor="ctr"/>
-          <a:lstStyle/>
-          <a:p>
-            <a:pPr algn="ctr"/>
-          </a:p>
-        </p:txBody>
-      </p:sp>
-      <p:sp>
-        <p:nvSpPr>
-          <p:cNvPr id="7" name="Rectangle 6"/>
-          <p:cNvSpPr/>
-          <p:nvPr/>
-        </p:nvSpPr>
-        <p:spPr>
-          <a:xfrm>
-            <a:off x="640080" y="1408175"/>
-            <a:ext cx="73152" cy="274320"/>
-          </a:xfrm>
-          <a:prstGeom prst="rect">
-            <a:avLst/>
-          </a:prstGeom>
-          <a:solidFill>
-            <a:srgbClr val="269CCB"/>
-          </a:solidFill>
-          <a:ln>
-            <a:noFill/>
-          </a:ln>
-        </p:spPr>
-        <p:style>
-          <a:lnRef idx="1">
-            <a:schemeClr val="accent1"/>
-          </a:lnRef>
-          <a:fillRef idx="3">
-            <a:schemeClr val="accent1"/>
-          </a:fillRef>
-          <a:effectRef idx="2">
-            <a:schemeClr val="accent1"/>
-          </a:effectRef>
-          <a:fontRef idx="minor">
-            <a:schemeClr val="lt1"/>
-          </a:fontRef>
-        </p:style>
-        <p:txBody>
-          <a:bodyPr rtlCol="0" anchor="ctr"/>
-          <a:lstStyle/>
-          <a:p>
-            <a:pPr algn="ctr"/>
-          </a:p>
-        </p:txBody>
-      </p:sp>
-      <p:sp>
-        <p:nvSpPr>
-          <p:cNvPr id="8" name="TextBox 7"/>
-          <p:cNvSpPr txBox="1"/>
-          <p:nvPr/>
-        </p:nvSpPr>
-        <p:spPr>
-          <a:xfrm>
-            <a:off x="1097280" y="1353312"/>
-            <a:ext cx="10362895" cy="402336"/>
-          </a:xfrm>
-          <a:prstGeom prst="rect">
-            <a:avLst/>
-          </a:prstGeom>
-          <a:noFill/>
-        </p:spPr>
-        <p:txBody>
-          <a:bodyPr wrap="square" anchor="ctr"/>
-          <a:lstStyle/>
-          <a:p>
-            <a:r>
-              <a:rPr sz="1500" b="0" i="0">
-                <a:solidFill>
-                  <a:srgbClr val="333333"/>
-                </a:solidFill>
-                <a:latin typeface="Calibri"/>
-              </a:rPr>
-              <a:t>Si al guardar dos veces el mismo ID el mapa sigue teniendo el mismo tamano y nadie aviso nada, que hace put cuando la clave ya existe y con que metodo pudo haberlo detectado antes?</a:t>
-            </a:r>
-          </a:p>
-        </p:txBody>
-      </p:sp>
-      <p:sp>
-        <p:nvSpPr>
-          <p:cNvPr id="9" name="Rounded Rectangle 8"/>
-          <p:cNvSpPr/>
-          <p:nvPr/>
-        </p:nvSpPr>
-        <p:spPr>
-          <a:xfrm>
-            <a:off x="457200" y="1938528"/>
-            <a:ext cx="11277295" cy="566928"/>
-          </a:xfrm>
-          <a:prstGeom prst="roundRect">
-            <a:avLst>
-              <a:gd name="adj" fmla="val 12000"/>
-            </a:avLst>
-          </a:prstGeom>
-          <a:solidFill>
-            <a:srgbClr val="F2F2F2"/>
-          </a:solidFill>
-          <a:ln>
-            <a:noFill/>
-          </a:ln>
-        </p:spPr>
-        <p:style>
-          <a:lnRef idx="1">
-            <a:schemeClr val="accent1"/>
-          </a:lnRef>
-          <a:fillRef idx="3">
-            <a:schemeClr val="accent1"/>
-          </a:fillRef>
-          <a:effectRef idx="2">
-            <a:schemeClr val="accent1"/>
-          </a:effectRef>
-          <a:fontRef idx="minor">
-            <a:schemeClr val="lt1"/>
-          </a:fontRef>
-        </p:style>
-        <p:txBody>
-          <a:bodyPr rtlCol="0" anchor="ctr"/>
-          <a:lstStyle/>
-          <a:p>
-            <a:pPr algn="ctr"/>
-          </a:p>
-        </p:txBody>
-      </p:sp>
-      <p:sp>
-        <p:nvSpPr>
-          <p:cNvPr id="10" name="Rectangle 9"/>
-          <p:cNvSpPr/>
-          <p:nvPr/>
-        </p:nvSpPr>
-        <p:spPr>
-          <a:xfrm>
-            <a:off x="640080" y="2084832"/>
-            <a:ext cx="274320" cy="274320"/>
-          </a:xfrm>
-          <a:prstGeom prst="rect">
-            <a:avLst/>
-          </a:prstGeom>
-          <a:solidFill>
-            <a:srgbClr val="FFFFFF"/>
-          </a:solidFill>
-          <a:ln>
-            <a:solidFill>
-              <a:srgbClr val="333333"/>
-            </a:solidFill>
-          </a:ln>
-        </p:spPr>
-        <p:style>
-          <a:lnRef idx="1">
-            <a:schemeClr val="accent1"/>
-          </a:lnRef>
-          <a:fillRef idx="3">
-            <a:schemeClr val="accent1"/>
-          </a:fillRef>
-          <a:effectRef idx="2">
-            <a:schemeClr val="accent1"/>
-          </a:effectRef>
-          <a:fontRef idx="minor">
-            <a:schemeClr val="lt1"/>
-          </a:fontRef>
-        </p:style>
-        <p:txBody>
-          <a:bodyPr rtlCol="0" anchor="ctr"/>
-          <a:lstStyle/>
-          <a:p>
-            <a:pPr algn="ctr"/>
-          </a:p>
-        </p:txBody>
-      </p:sp>
-      <p:sp>
-        <p:nvSpPr>
-          <p:cNvPr id="11" name="Rectangle 10"/>
-          <p:cNvSpPr/>
-          <p:nvPr/>
-        </p:nvSpPr>
-        <p:spPr>
-          <a:xfrm>
-            <a:off x="640080" y="2084832"/>
-            <a:ext cx="73152" cy="274320"/>
-          </a:xfrm>
-          <a:prstGeom prst="rect">
-            <a:avLst/>
-          </a:prstGeom>
-          <a:solidFill>
-            <a:srgbClr val="269CCB"/>
-          </a:solidFill>
-          <a:ln>
-            <a:noFill/>
-          </a:ln>
-        </p:spPr>
-        <p:style>
-          <a:lnRef idx="1">
-            <a:schemeClr val="accent1"/>
-          </a:lnRef>
-          <a:fillRef idx="3">
-            <a:schemeClr val="accent1"/>
-          </a:fillRef>
-          <a:effectRef idx="2">
-            <a:schemeClr val="accent1"/>
-          </a:effectRef>
-          <a:fontRef idx="minor">
-            <a:schemeClr val="lt1"/>
-          </a:fontRef>
-        </p:style>
-        <p:txBody>
-          <a:bodyPr rtlCol="0" anchor="ctr"/>
-          <a:lstStyle/>
-          <a:p>
-            <a:pPr algn="ctr"/>
-          </a:p>
-        </p:txBody>
-      </p:sp>
-      <p:sp>
-        <p:nvSpPr>
-          <p:cNvPr id="12" name="TextBox 11"/>
-          <p:cNvSpPr txBox="1"/>
-          <p:nvPr/>
-        </p:nvSpPr>
-        <p:spPr>
-          <a:xfrm>
-            <a:off x="1097280" y="2029968"/>
-            <a:ext cx="10362895" cy="402336"/>
-          </a:xfrm>
-          <a:prstGeom prst="rect">
-            <a:avLst/>
-          </a:prstGeom>
-          <a:noFill/>
-        </p:spPr>
-        <p:txBody>
-          <a:bodyPr wrap="square" anchor="ctr"/>
-          <a:lstStyle/>
-          <a:p>
-            <a:r>
-              <a:rPr sz="1500" b="0" i="0">
-                <a:solidFill>
-                  <a:srgbClr val="333333"/>
-                </a:solidFill>
-                <a:latin typeface="Calibri"/>
-              </a:rPr>
-              <a:t>Si compila sin errores pero no aparece ninguna ventana en pantalla, cual es la ultima linea que suele faltar despues de construir el JFrame?</a:t>
-            </a:r>
-          </a:p>
-        </p:txBody>
-      </p:sp>
-      <p:sp>
-        <p:nvSpPr>
-          <p:cNvPr id="13" name="Rounded Rectangle 12"/>
-          <p:cNvSpPr/>
-          <p:nvPr/>
-        </p:nvSpPr>
-        <p:spPr>
-          <a:xfrm>
-            <a:off x="457200" y="2615184"/>
-            <a:ext cx="11277295" cy="566928"/>
-          </a:xfrm>
-          <a:prstGeom prst="roundRect">
-            <a:avLst>
-              <a:gd name="adj" fmla="val 12000"/>
-            </a:avLst>
-          </a:prstGeom>
-          <a:solidFill>
-            <a:srgbClr val="F2F2F2"/>
-          </a:solidFill>
-          <a:ln>
-            <a:noFill/>
-          </a:ln>
-        </p:spPr>
-        <p:style>
-          <a:lnRef idx="1">
-            <a:schemeClr val="accent1"/>
-          </a:lnRef>
-          <a:fillRef idx="3">
-            <a:schemeClr val="accent1"/>
-          </a:fillRef>
-          <a:effectRef idx="2">
-            <a:schemeClr val="accent1"/>
-          </a:effectRef>
-          <a:fontRef idx="minor">
-            <a:schemeClr val="lt1"/>
-          </a:fontRef>
-        </p:style>
-        <p:txBody>
-          <a:bodyPr rtlCol="0" anchor="ctr"/>
-          <a:lstStyle/>
-          <a:p>
-            <a:pPr algn="ctr"/>
-          </a:p>
-        </p:txBody>
-      </p:sp>
-      <p:sp>
-        <p:nvSpPr>
-          <p:cNvPr id="14" name="Rectangle 13"/>
-          <p:cNvSpPr/>
-          <p:nvPr/>
-        </p:nvSpPr>
-        <p:spPr>
-          <a:xfrm>
-            <a:off x="640080" y="2761488"/>
-            <a:ext cx="274320" cy="274320"/>
-          </a:xfrm>
-          <a:prstGeom prst="rect">
-            <a:avLst/>
-          </a:prstGeom>
-          <a:solidFill>
-            <a:srgbClr val="FFFFFF"/>
-          </a:solidFill>
-          <a:ln>
-            <a:solidFill>
-              <a:srgbClr val="333333"/>
-            </a:solidFill>
-          </a:ln>
-        </p:spPr>
-        <p:style>
-          <a:lnRef idx="1">
-            <a:schemeClr val="accent1"/>
-          </a:lnRef>
-          <a:fillRef idx="3">
-            <a:schemeClr val="accent1"/>
-          </a:fillRef>
-          <a:effectRef idx="2">
-            <a:schemeClr val="accent1"/>
-          </a:effectRef>
-          <a:fontRef idx="minor">
-            <a:schemeClr val="lt1"/>
-          </a:fontRef>
-        </p:style>
-        <p:txBody>
-          <a:bodyPr rtlCol="0" anchor="ctr"/>
-          <a:lstStyle/>
-          <a:p>
-            <a:pPr algn="ctr"/>
-          </a:p>
-        </p:txBody>
-      </p:sp>
-      <p:sp>
-        <p:nvSpPr>
-          <p:cNvPr id="15" name="Rectangle 14"/>
-          <p:cNvSpPr/>
-          <p:nvPr/>
-        </p:nvSpPr>
-        <p:spPr>
-          <a:xfrm>
-            <a:off x="640080" y="2761488"/>
-            <a:ext cx="73152" cy="274320"/>
-          </a:xfrm>
-          <a:prstGeom prst="rect">
-            <a:avLst/>
-          </a:prstGeom>
-          <a:solidFill>
-            <a:srgbClr val="269CCB"/>
-          </a:solidFill>
-          <a:ln>
-            <a:noFill/>
-          </a:ln>
-        </p:spPr>
-        <p:style>
-          <a:lnRef idx="1">
-            <a:schemeClr val="accent1"/>
-          </a:lnRef>
-          <a:fillRef idx="3">
-            <a:schemeClr val="accent1"/>
-          </a:fillRef>
-          <a:effectRef idx="2">
-            <a:schemeClr val="accent1"/>
-          </a:effectRef>
-          <a:fontRef idx="minor">
-            <a:schemeClr val="lt1"/>
-          </a:fontRef>
-        </p:style>
-        <p:txBody>
-          <a:bodyPr rtlCol="0" anchor="ctr"/>
-          <a:lstStyle/>
-          <a:p>
-            <a:pPr algn="ctr"/>
-          </a:p>
-        </p:txBody>
-      </p:sp>
-      <p:sp>
-        <p:nvSpPr>
-          <p:cNvPr id="16" name="TextBox 15"/>
-          <p:cNvSpPr txBox="1"/>
-          <p:nvPr/>
-        </p:nvSpPr>
-        <p:spPr>
-          <a:xfrm>
-            <a:off x="1097280" y="2706624"/>
-            <a:ext cx="10362895" cy="402336"/>
-          </a:xfrm>
-          <a:prstGeom prst="rect">
-            <a:avLst/>
-          </a:prstGeom>
-          <a:noFill/>
-        </p:spPr>
-        <p:txBody>
-          <a:bodyPr wrap="square" anchor="ctr"/>
-          <a:lstStyle/>
-          <a:p>
-            <a:r>
-              <a:rPr sz="1500" b="0" i="0">
-                <a:solidFill>
-                  <a:srgbClr val="333333"/>
-                </a:solidFill>
-                <a:latin typeface="Calibri"/>
-              </a:rPr>
-              <a:t>Si el resultado sale correcto en la consola pero el JLabel no cambia, esta llamando al metodo que actualiza el texto del componente o solo esta imprimiendo?</a:t>
-            </a:r>
-          </a:p>
-        </p:txBody>
-      </p:sp>
-      <p:sp>
-        <p:nvSpPr>
-          <p:cNvPr id="17" name="TextBox 16"/>
-          <p:cNvSpPr txBox="1"/>
-          <p:nvPr/>
-        </p:nvSpPr>
-        <p:spPr>
-          <a:xfrm>
-            <a:off x="11185855" y="6473952"/>
-            <a:ext cx="640080" cy="274320"/>
-          </a:xfrm>
-          <a:prstGeom prst="rect">
-            <a:avLst/>
-          </a:prstGeom>
-          <a:noFill/>
-        </p:spPr>
-        <p:txBody>
-          <a:bodyPr wrap="square">
-            <a:spAutoFit/>
-          </a:bodyPr>
-          <a:lstStyle/>
-          <a:p>
-            <a:pPr algn="r"/>
-            <a:r>
-              <a:rPr sz="1100" b="0" i="0">
-                <a:solidFill>
-                  <a:srgbClr val="666666"/>
-                </a:solidFill>
-                <a:latin typeface="Calibri"/>
-              </a:rPr>
-              <a:t>32</a:t>
-            </a:r>
-          </a:p>
-        </p:txBody>
-      </p:sp>
-    </p:spTree>
-  </p:cSld>
-  <p:clrMapOvr>
-    <a:masterClrMapping/>
-  </p:clrMapOvr>
-</p:sld>
-</file>
-
-<file path=ppt/slides/slide33.xml><?xml version="1.0" encoding="utf-8"?>
-<p:sld xmlns:a="http://schemas.openxmlformats.org/drawingml/2006/main" xmlns:p="http://schemas.openxmlformats.org/presentationml/2006/main" xmlns:r="http://schemas.openxmlformats.org/officeDocument/2006/relationships">
-  <p:cSld>
-    <p:bg>
-      <p:bgPr>
-        <a:solidFill>
-          <a:srgbClr val="FFFFFF"/>
-        </a:solidFill>
-        <a:effectLst/>
-      </p:bgPr>
-    </p:bg>
-    <p:spTree>
-      <p:nvGrpSpPr>
-        <p:cNvPr id="1" name=""/>
-        <p:cNvGrpSpPr/>
-        <p:nvPr/>
-      </p:nvGrpSpPr>
-      <p:grpSpPr/>
-      <p:sp>
-        <p:nvSpPr>
-          <p:cNvPr id="2" name="Rectangle 1"/>
-          <p:cNvSpPr/>
-          <p:nvPr/>
-        </p:nvSpPr>
-        <p:spPr>
-          <a:xfrm>
-            <a:off x="0" y="0"/>
-            <a:ext cx="12191695" cy="960120"/>
-          </a:xfrm>
-          <a:prstGeom prst="rect">
-            <a:avLst/>
-          </a:prstGeom>
-          <a:solidFill>
-            <a:srgbClr val="095292"/>
-          </a:solidFill>
-          <a:ln>
-            <a:noFill/>
-          </a:ln>
-        </p:spPr>
-        <p:style>
-          <a:lnRef idx="1">
-            <a:schemeClr val="accent1"/>
-          </a:lnRef>
-          <a:fillRef idx="3">
-            <a:schemeClr val="accent1"/>
-          </a:fillRef>
-          <a:effectRef idx="2">
-            <a:schemeClr val="accent1"/>
-          </a:effectRef>
-          <a:fontRef idx="minor">
-            <a:schemeClr val="lt1"/>
-          </a:fontRef>
-        </p:style>
-        <p:txBody>
-          <a:bodyPr rtlCol="0" anchor="ctr"/>
-          <a:lstStyle/>
-          <a:p>
-            <a:pPr algn="ctr"/>
-          </a:p>
-        </p:txBody>
-      </p:sp>
-      <p:sp>
-        <p:nvSpPr>
-          <p:cNvPr id="3" name="Rectangle 2"/>
-          <p:cNvSpPr/>
-          <p:nvPr/>
-        </p:nvSpPr>
-        <p:spPr>
-          <a:xfrm>
-            <a:off x="0" y="960120"/>
-            <a:ext cx="12191695" cy="41148"/>
-          </a:xfrm>
-          <a:prstGeom prst="rect">
-            <a:avLst/>
-          </a:prstGeom>
-          <a:solidFill>
-            <a:srgbClr val="FFD000"/>
-          </a:solidFill>
-          <a:ln>
-            <a:noFill/>
-          </a:ln>
-        </p:spPr>
-        <p:style>
-          <a:lnRef idx="1">
-            <a:schemeClr val="accent1"/>
-          </a:lnRef>
-          <a:fillRef idx="3">
-            <a:schemeClr val="accent1"/>
-          </a:fillRef>
-          <a:effectRef idx="2">
-            <a:schemeClr val="accent1"/>
-          </a:effectRef>
-          <a:fontRef idx="minor">
-            <a:schemeClr val="lt1"/>
-          </a:fontRef>
-        </p:style>
-        <p:txBody>
-          <a:bodyPr rtlCol="0" anchor="ctr"/>
-          <a:lstStyle/>
-          <a:p>
-            <a:pPr algn="ctr"/>
-          </a:p>
-        </p:txBody>
-      </p:sp>
-      <p:sp>
-        <p:nvSpPr>
-          <p:cNvPr id="4" name="TextBox 3"/>
-          <p:cNvSpPr txBox="1"/>
-          <p:nvPr/>
-        </p:nvSpPr>
-        <p:spPr>
-          <a:xfrm>
-            <a:off x="457200" y="164592"/>
-            <a:ext cx="11277295" cy="502920"/>
-          </a:xfrm>
-          <a:prstGeom prst="rect">
-            <a:avLst/>
-          </a:prstGeom>
-          <a:noFill/>
-        </p:spPr>
-        <p:txBody>
-          <a:bodyPr wrap="square">
-            <a:spAutoFit/>
-          </a:bodyPr>
-          <a:lstStyle/>
-          <a:p>
-            <a:r>
-              <a:rPr sz="2600" b="1" i="0">
-                <a:solidFill>
-                  <a:srgbClr val="FFFFFF"/>
-                </a:solidFill>
-                <a:latin typeface="Calibri"/>
-              </a:rPr>
-              <a:t>Criterios de exito / entregable</a:t>
-            </a:r>
-          </a:p>
-        </p:txBody>
-      </p:sp>
-      <p:sp>
-        <p:nvSpPr>
-          <p:cNvPr id="5" name="TextBox 4"/>
-          <p:cNvSpPr txBox="1"/>
-          <p:nvPr/>
-        </p:nvSpPr>
-        <p:spPr>
-          <a:xfrm>
-            <a:off x="457200" y="1170432"/>
-            <a:ext cx="11277295" cy="5230368"/>
-          </a:xfrm>
-          <a:prstGeom prst="rect">
-            <a:avLst/>
-          </a:prstGeom>
-          <a:noFill/>
-        </p:spPr>
-        <p:txBody>
-          <a:bodyPr wrap="square">
-            <a:spAutoFit/>
-          </a:bodyPr>
-          <a:lstStyle/>
-          <a:p>
-            <a:pPr>
-              <a:spcAft>
-                <a:spcPts val="800"/>
-              </a:spcAft>
-            </a:pPr>
-            <a:r>
-              <a:rPr sz="2000" b="0" i="0">
-                <a:solidFill>
-                  <a:srgbClr val="333333"/>
-                </a:solidFill>
-                <a:latin typeface="Calibri"/>
-              </a:rPr>
-              <a:t>–   </a:t>
-            </a:r>
-            <a:r>
-              <a:rPr sz="2000" b="1" i="0">
-                <a:solidFill>
-                  <a:srgbClr val="333333"/>
-                </a:solidFill>
-                <a:latin typeface="Calibri"/>
-              </a:rPr>
-              <a:t>Entregable:</a:t>
-            </a:r>
-            <a:r>
-              <a:rPr sz="2000" b="0" i="0">
-                <a:solidFill>
-                  <a:srgbClr val="333333"/>
-                </a:solidFill>
-                <a:latin typeface="Calibri"/>
-              </a:rPr>
-              <a:t> Clase RegistroExpedientes con HashMap y HashSet mas la ventana VentanaBuscarExpediente construida a mano (sin arrastrar componentes) que busca por ID y muestra el resultado o un mensaje de error controlado; comprimido y subido a la plataforma del curso.</a:t>
-            </a:r>
-          </a:p>
-          <a:p>
-            <a:pPr>
-              <a:spcAft>
-                <a:spcPts val="800"/>
-              </a:spcAft>
-            </a:pPr>
-            <a:r>
-              <a:rPr sz="2000" b="0" i="0">
-                <a:solidFill>
-                  <a:srgbClr val="333333"/>
-                </a:solidFill>
-                <a:latin typeface="Calibri"/>
-              </a:rPr>
-              <a:t>–   </a:t>
-            </a:r>
-            <a:r>
-              <a:rPr sz="2000" b="1" i="0">
-                <a:solidFill>
-                  <a:srgbClr val="333333"/>
-                </a:solidFill>
-                <a:latin typeface="Calibri"/>
-              </a:rPr>
-              <a:t>Exito:</a:t>
-            </a:r>
-            <a:r>
-              <a:rPr sz="2000" b="0" i="0">
-                <a:solidFill>
-                  <a:srgbClr val="333333"/>
-                </a:solidFill>
-                <a:latin typeface="Calibri"/>
-              </a:rPr>
-              <a:t> La busqueda por ID usa get() del HashMap y no un recorrido de lista, y responde correctamente tanto para un ID existente como para uno inexistente.</a:t>
-            </a:r>
-          </a:p>
-          <a:p>
-            <a:pPr>
-              <a:spcAft>
-                <a:spcPts val="800"/>
-              </a:spcAft>
-            </a:pPr>
-            <a:r>
-              <a:rPr sz="2000" b="0" i="0">
-                <a:solidFill>
-                  <a:srgbClr val="333333"/>
-                </a:solidFill>
-                <a:latin typeface="Calibri"/>
-              </a:rPr>
-              <a:t>–   </a:t>
-            </a:r>
-            <a:r>
-              <a:rPr sz="2000" b="1" i="0">
-                <a:solidFill>
-                  <a:srgbClr val="333333"/>
-                </a:solidFill>
-                <a:latin typeface="Calibri"/>
-              </a:rPr>
-              <a:t>Exito:</a:t>
-            </a:r>
-            <a:r>
-              <a:rPr sz="2000" b="0" i="0">
-                <a:solidFill>
-                  <a:srgbClr val="333333"/>
-                </a:solidFill>
-                <a:latin typeface="Calibri"/>
-              </a:rPr>
-              <a:t> Intentar registrar un ID ya existente produce un aviso explicito y el tamano del mapa no cambia por accidente.</a:t>
-            </a:r>
-          </a:p>
-          <a:p>
-            <a:pPr>
-              <a:spcAft>
-                <a:spcPts val="800"/>
-              </a:spcAft>
-            </a:pPr>
-            <a:r>
-              <a:rPr sz="2000" b="0" i="0">
-                <a:solidFill>
-                  <a:srgbClr val="333333"/>
-                </a:solidFill>
-                <a:latin typeface="Calibri"/>
-              </a:rPr>
-              <a:t>–   </a:t>
-            </a:r>
-            <a:r>
-              <a:rPr sz="2000" b="1" i="0">
-                <a:solidFill>
-                  <a:srgbClr val="333333"/>
-                </a:solidFill>
-                <a:latin typeface="Calibri"/>
-              </a:rPr>
-              <a:t>Exito:</a:t>
-            </a:r>
-            <a:r>
-              <a:rPr sz="2000" b="0" i="0">
-                <a:solidFill>
-                  <a:srgbClr val="333333"/>
-                </a:solidFill>
-                <a:latin typeface="Calibri"/>
-              </a:rPr>
-              <a:t> La ventana abre centrada, con titulo, con el boton funcionando y termina el programa al cerrarse (setDefaultCloseOperation configurado).</a:t>
-            </a:r>
-          </a:p>
-          <a:p>
-            <a:pPr>
-              <a:spcAft>
-                <a:spcPts val="800"/>
-              </a:spcAft>
-            </a:pPr>
-            <a:r>
-              <a:rPr sz="2000" b="0" i="0">
-                <a:solidFill>
-                  <a:srgbClr val="333333"/>
-                </a:solidFill>
-                <a:latin typeface="Calibri"/>
-              </a:rPr>
-              <a:t>–   </a:t>
-            </a:r>
-            <a:r>
-              <a:rPr sz="2000" b="1" i="0">
-                <a:solidFill>
-                  <a:srgbClr val="333333"/>
-                </a:solidFill>
-                <a:latin typeface="Calibri"/>
-              </a:rPr>
-              <a:t>Exito:</a:t>
-            </a:r>
-            <a:r>
-              <a:rPr sz="2000" b="0" i="0">
-                <a:solidFill>
-                  <a:srgbClr val="333333"/>
-                </a:solidFill>
-                <a:latin typeface="Calibri"/>
-              </a:rPr>
-              <a:t> El evento del boton solo lee la entrada y llama al registro: ninguna estructura de datos ni regla de negocio esta escrita dentro del ActionListener.</a:t>
-            </a:r>
-          </a:p>
-          <a:p>
-            <a:pPr>
-              <a:spcAft>
-                <a:spcPts val="800"/>
-              </a:spcAft>
-            </a:pPr>
-            <a:r>
-              <a:rPr sz="2000" b="0" i="0">
-                <a:solidFill>
-                  <a:srgbClr val="333333"/>
-                </a:solidFill>
-                <a:latin typeface="Calibri"/>
-              </a:rPr>
-              <a:t>–   </a:t>
-            </a:r>
-            <a:r>
-              <a:rPr sz="2000" b="1" i="0">
-                <a:solidFill>
-                  <a:srgbClr val="333333"/>
-                </a:solidFill>
-                <a:latin typeface="Calibri"/>
-              </a:rPr>
-              <a:t>Entrega en la plataforma del curso</a:t>
-            </a:r>
-            <a:r>
-              <a:rPr sz="2000" b="0" i="0">
-                <a:solidFill>
-                  <a:srgbClr val="333333"/>
-                </a:solidFill>
-                <a:latin typeface="Calibri"/>
-              </a:rPr>
-              <a:t> — en la fecha que indique el docente.</a:t>
-            </a:r>
-          </a:p>
-        </p:txBody>
-      </p:sp>
-      <p:sp>
-        <p:nvSpPr>
-          <p:cNvPr id="6" name="TextBox 5"/>
-          <p:cNvSpPr txBox="1"/>
-          <p:nvPr/>
-        </p:nvSpPr>
-        <p:spPr>
-          <a:xfrm>
-            <a:off x="11185855" y="6473952"/>
-            <a:ext cx="640080" cy="274320"/>
-          </a:xfrm>
-          <a:prstGeom prst="rect">
-            <a:avLst/>
-          </a:prstGeom>
-          <a:noFill/>
-        </p:spPr>
-        <p:txBody>
-          <a:bodyPr wrap="square">
-            <a:spAutoFit/>
-          </a:bodyPr>
-          <a:lstStyle/>
-          <a:p>
-            <a:pPr algn="r"/>
-            <a:r>
-              <a:rPr sz="1100" b="0" i="0">
-                <a:solidFill>
-                  <a:srgbClr val="666666"/>
-                </a:solidFill>
-                <a:latin typeface="Calibri"/>
-              </a:rPr>
-              <a:t>33</a:t>
-            </a:r>
-          </a:p>
-        </p:txBody>
-      </p:sp>
-    </p:spTree>
-  </p:cSld>
-  <p:clrMapOvr>
-    <a:masterClrMapping/>
-  </p:clrMapOvr>
-</p:sld>
-</file>
-
-<file path=ppt/slides/slide34.xml><?xml version="1.0" encoding="utf-8"?>
-<p:sld xmlns:a="http://schemas.openxmlformats.org/drawingml/2006/main" xmlns:p="http://schemas.openxmlformats.org/presentationml/2006/main" xmlns:r="http://schemas.openxmlformats.org/officeDocument/2006/relationships">
-  <p:cSld>
-    <p:bg>
-      <p:bgPr>
-        <a:solidFill>
-          <a:srgbClr val="FFFFFF"/>
-        </a:solidFill>
-        <a:effectLst/>
-      </p:bgPr>
-    </p:bg>
-    <p:spTree>
-      <p:nvGrpSpPr>
-        <p:cNvPr id="1" name=""/>
-        <p:cNvGrpSpPr/>
-        <p:nvPr/>
-      </p:nvGrpSpPr>
-      <p:grpSpPr/>
-      <p:sp>
-        <p:nvSpPr>
-          <p:cNvPr id="2" name="Rectangle 1"/>
-          <p:cNvSpPr/>
-          <p:nvPr/>
-        </p:nvSpPr>
-        <p:spPr>
-          <a:xfrm>
-            <a:off x="0" y="0"/>
-            <a:ext cx="12191695" cy="960120"/>
-          </a:xfrm>
-          <a:prstGeom prst="rect">
-            <a:avLst/>
-          </a:prstGeom>
-          <a:solidFill>
-            <a:srgbClr val="095292"/>
-          </a:solidFill>
-          <a:ln>
-            <a:noFill/>
-          </a:ln>
-        </p:spPr>
-        <p:style>
-          <a:lnRef idx="1">
-            <a:schemeClr val="accent1"/>
-          </a:lnRef>
-          <a:fillRef idx="3">
-            <a:schemeClr val="accent1"/>
-          </a:fillRef>
-          <a:effectRef idx="2">
-            <a:schemeClr val="accent1"/>
-          </a:effectRef>
-          <a:fontRef idx="minor">
-            <a:schemeClr val="lt1"/>
-          </a:fontRef>
-        </p:style>
-        <p:txBody>
-          <a:bodyPr rtlCol="0" anchor="ctr"/>
-          <a:lstStyle/>
-          <a:p>
-            <a:pPr algn="ctr"/>
-          </a:p>
-        </p:txBody>
-      </p:sp>
-      <p:sp>
-        <p:nvSpPr>
-          <p:cNvPr id="3" name="Rectangle 2"/>
-          <p:cNvSpPr/>
-          <p:nvPr/>
-        </p:nvSpPr>
-        <p:spPr>
-          <a:xfrm>
-            <a:off x="0" y="960120"/>
-            <a:ext cx="12191695" cy="41148"/>
-          </a:xfrm>
-          <a:prstGeom prst="rect">
-            <a:avLst/>
-          </a:prstGeom>
-          <a:solidFill>
-            <a:srgbClr val="FFD000"/>
-          </a:solidFill>
-          <a:ln>
-            <a:noFill/>
-          </a:ln>
-        </p:spPr>
-        <p:style>
-          <a:lnRef idx="1">
-            <a:schemeClr val="accent1"/>
-          </a:lnRef>
-          <a:fillRef idx="3">
-            <a:schemeClr val="accent1"/>
-          </a:fillRef>
-          <a:effectRef idx="2">
-            <a:schemeClr val="accent1"/>
-          </a:effectRef>
-          <a:fontRef idx="minor">
-            <a:schemeClr val="lt1"/>
-          </a:fontRef>
-        </p:style>
-        <p:txBody>
-          <a:bodyPr rtlCol="0" anchor="ctr"/>
-          <a:lstStyle/>
-          <a:p>
-            <a:pPr algn="ctr"/>
-          </a:p>
-        </p:txBody>
-      </p:sp>
-      <p:sp>
-        <p:nvSpPr>
-          <p:cNvPr id="4" name="TextBox 3"/>
-          <p:cNvSpPr txBox="1"/>
-          <p:nvPr/>
-        </p:nvSpPr>
-        <p:spPr>
-          <a:xfrm>
-            <a:off x="457200" y="164592"/>
-            <a:ext cx="11277295" cy="502920"/>
-          </a:xfrm>
-          <a:prstGeom prst="rect">
-            <a:avLst/>
-          </a:prstGeom>
-          <a:noFill/>
-        </p:spPr>
-        <p:txBody>
-          <a:bodyPr wrap="square">
-            <a:spAutoFit/>
-          </a:bodyPr>
-          <a:lstStyle/>
-          <a:p>
-            <a:r>
-              <a:rPr sz="2600" b="1" i="0">
-                <a:solidFill>
-                  <a:srgbClr val="FFFFFF"/>
-                </a:solidFill>
-                <a:latin typeface="Calibri"/>
-              </a:rPr>
-              <a:t>Para el PI esta semana</a:t>
-            </a:r>
-          </a:p>
-        </p:txBody>
-      </p:sp>
-      <p:sp>
-        <p:nvSpPr>
-          <p:cNvPr id="5" name="Rounded Rectangle 4"/>
-          <p:cNvSpPr/>
-          <p:nvPr/>
-        </p:nvSpPr>
-        <p:spPr>
-          <a:xfrm>
-            <a:off x="457200" y="1261872"/>
-            <a:ext cx="11277295" cy="1051560"/>
-          </a:xfrm>
-          <a:prstGeom prst="roundRect">
-            <a:avLst>
-              <a:gd name="adj" fmla="val 12000"/>
-            </a:avLst>
-          </a:prstGeom>
-          <a:solidFill>
-            <a:srgbClr val="E8F4FA"/>
-          </a:solidFill>
-          <a:ln>
-            <a:noFill/>
-          </a:ln>
-        </p:spPr>
-        <p:style>
-          <a:lnRef idx="1">
-            <a:schemeClr val="accent1"/>
-          </a:lnRef>
-          <a:fillRef idx="3">
-            <a:schemeClr val="accent1"/>
-          </a:fillRef>
-          <a:effectRef idx="2">
-            <a:schemeClr val="accent1"/>
-          </a:effectRef>
-          <a:fontRef idx="minor">
-            <a:schemeClr val="lt1"/>
-          </a:fontRef>
-        </p:style>
-        <p:txBody>
-          <a:bodyPr rtlCol="0" anchor="ctr"/>
-          <a:lstStyle/>
-          <a:p>
-            <a:pPr algn="ctr"/>
-          </a:p>
-        </p:txBody>
-      </p:sp>
-      <p:sp>
-        <p:nvSpPr>
-          <p:cNvPr id="6" name="Rectangle 5"/>
-          <p:cNvSpPr/>
-          <p:nvPr/>
-        </p:nvSpPr>
-        <p:spPr>
-          <a:xfrm>
-            <a:off x="457200" y="1261872"/>
-            <a:ext cx="128016" cy="1051560"/>
-          </a:xfrm>
-          <a:prstGeom prst="rect">
-            <a:avLst/>
-          </a:prstGeom>
-          <a:solidFill>
-            <a:srgbClr val="269CCB"/>
-          </a:solidFill>
-          <a:ln>
-            <a:noFill/>
-          </a:ln>
-        </p:spPr>
-        <p:style>
-          <a:lnRef idx="1">
-            <a:schemeClr val="accent1"/>
-          </a:lnRef>
-          <a:fillRef idx="3">
-            <a:schemeClr val="accent1"/>
-          </a:fillRef>
-          <a:effectRef idx="2">
-            <a:schemeClr val="accent1"/>
-          </a:effectRef>
-          <a:fontRef idx="minor">
-            <a:schemeClr val="lt1"/>
-          </a:fontRef>
-        </p:style>
-        <p:txBody>
-          <a:bodyPr rtlCol="0" anchor="ctr"/>
-          <a:lstStyle/>
-          <a:p>
-            <a:pPr algn="ctr"/>
-          </a:p>
-        </p:txBody>
-      </p:sp>
-      <p:sp>
-        <p:nvSpPr>
-          <p:cNvPr id="7" name="TextBox 6"/>
-          <p:cNvSpPr txBox="1"/>
-          <p:nvPr/>
-        </p:nvSpPr>
-        <p:spPr>
-          <a:xfrm>
-            <a:off x="777240" y="1399031"/>
-            <a:ext cx="10774375" cy="822959"/>
-          </a:xfrm>
-          <a:prstGeom prst="rect">
-            <a:avLst/>
-          </a:prstGeom>
-          <a:noFill/>
-        </p:spPr>
-        <p:txBody>
-          <a:bodyPr wrap="square">
-            <a:spAutoFit/>
-          </a:bodyPr>
-          <a:lstStyle/>
-          <a:p>
-            <a:r>
-              <a:rPr sz="1200" b="1" i="0">
-                <a:solidFill>
-                  <a:srgbClr val="269CCB"/>
-                </a:solidFill>
-                <a:latin typeface="Calibri"/>
-              </a:rPr>
-              <a:t>Info</a:t>
-            </a:r>
-          </a:p>
-          <a:p>
-            <a:pPr>
-              <a:spcBef>
-                <a:spcPts val="400"/>
-              </a:spcBef>
-            </a:pPr>
-            <a:r>
-              <a:rPr sz="1400" b="0" i="0">
-                <a:solidFill>
-                  <a:srgbClr val="333333"/>
-                </a:solidFill>
-                <a:latin typeface="Calibri"/>
-              </a:rPr>
-              <a:t>Hito: VetCare encuentra cualquier expediente por ID en tiempo constante con HashMap y estrena su primera ventana Swing para consultarlo.</a:t>
-            </a:r>
-          </a:p>
-        </p:txBody>
-      </p:sp>
-      <p:sp>
-        <p:nvSpPr>
-          <p:cNvPr id="8" name="Rounded Rectangle 7"/>
-          <p:cNvSpPr/>
-          <p:nvPr/>
-        </p:nvSpPr>
-        <p:spPr>
-          <a:xfrm>
-            <a:off x="457200" y="2478024"/>
-            <a:ext cx="11277295" cy="1051560"/>
-          </a:xfrm>
-          <a:prstGeom prst="roundRect">
-            <a:avLst>
-              <a:gd name="adj" fmla="val 12000"/>
-            </a:avLst>
-          </a:prstGeom>
-          <a:solidFill>
-            <a:srgbClr val="FFF8E1"/>
-          </a:solidFill>
-          <a:ln>
-            <a:noFill/>
-          </a:ln>
-        </p:spPr>
-        <p:style>
-          <a:lnRef idx="1">
-            <a:schemeClr val="accent1"/>
-          </a:lnRef>
-          <a:fillRef idx="3">
-            <a:schemeClr val="accent1"/>
-          </a:fillRef>
-          <a:effectRef idx="2">
-            <a:schemeClr val="accent1"/>
-          </a:effectRef>
-          <a:fontRef idx="minor">
-            <a:schemeClr val="lt1"/>
-          </a:fontRef>
-        </p:style>
-        <p:txBody>
-          <a:bodyPr rtlCol="0" anchor="ctr"/>
-          <a:lstStyle/>
-          <a:p>
-            <a:pPr algn="ctr"/>
-          </a:p>
-        </p:txBody>
-      </p:sp>
-      <p:sp>
-        <p:nvSpPr>
-          <p:cNvPr id="9" name="Rectangle 8"/>
-          <p:cNvSpPr/>
-          <p:nvPr/>
-        </p:nvSpPr>
-        <p:spPr>
-          <a:xfrm>
-            <a:off x="457200" y="2478024"/>
-            <a:ext cx="128016" cy="1051560"/>
-          </a:xfrm>
-          <a:prstGeom prst="rect">
-            <a:avLst/>
-          </a:prstGeom>
-          <a:solidFill>
-            <a:srgbClr val="FFD000"/>
-          </a:solidFill>
-          <a:ln>
-            <a:noFill/>
-          </a:ln>
-        </p:spPr>
-        <p:style>
-          <a:lnRef idx="1">
-            <a:schemeClr val="accent1"/>
-          </a:lnRef>
-          <a:fillRef idx="3">
-            <a:schemeClr val="accent1"/>
-          </a:fillRef>
-          <a:effectRef idx="2">
-            <a:schemeClr val="accent1"/>
-          </a:effectRef>
-          <a:fontRef idx="minor">
-            <a:schemeClr val="lt1"/>
-          </a:fontRef>
-        </p:style>
-        <p:txBody>
-          <a:bodyPr rtlCol="0" anchor="ctr"/>
-          <a:lstStyle/>
-          <a:p>
-            <a:pPr algn="ctr"/>
-          </a:p>
-        </p:txBody>
-      </p:sp>
-      <p:sp>
-        <p:nvSpPr>
-          <p:cNvPr id="10" name="TextBox 9"/>
-          <p:cNvSpPr txBox="1"/>
-          <p:nvPr/>
-        </p:nvSpPr>
-        <p:spPr>
-          <a:xfrm>
-            <a:off x="777240" y="2615184"/>
-            <a:ext cx="10774375" cy="822959"/>
-          </a:xfrm>
-          <a:prstGeom prst="rect">
-            <a:avLst/>
-          </a:prstGeom>
-          <a:noFill/>
-        </p:spPr>
-        <p:txBody>
-          <a:bodyPr wrap="square">
-            <a:spAutoFit/>
-          </a:bodyPr>
-          <a:lstStyle/>
-          <a:p>
-            <a:r>
-              <a:rPr sz="1200" b="1" i="0">
-                <a:solidFill>
-                  <a:srgbClr val="FFD000"/>
-                </a:solidFill>
-                <a:latin typeface="Calibri"/>
-              </a:rPr>
-              <a:t>Aclaración</a:t>
-            </a:r>
-          </a:p>
-          <a:p>
-            <a:pPr>
-              <a:spcBef>
-                <a:spcPts val="400"/>
-              </a:spcBef>
-            </a:pPr>
-            <a:r>
-              <a:rPr sz="1400" b="0" i="0">
-                <a:solidFill>
-                  <a:srgbClr val="333333"/>
-                </a:solidFill>
-                <a:latin typeface="Calibri"/>
-              </a:rPr>
-              <a:t>Enunciado completo: Clases/Proyecto Integrador/ (VetCare).</a:t>
-            </a:r>
-          </a:p>
-        </p:txBody>
-      </p:sp>
-      <p:sp>
-        <p:nvSpPr>
-          <p:cNvPr id="11" name="Rounded Rectangle 10"/>
-          <p:cNvSpPr/>
-          <p:nvPr/>
-        </p:nvSpPr>
-        <p:spPr>
-          <a:xfrm>
-            <a:off x="457200" y="3694176"/>
-            <a:ext cx="11277295" cy="1051560"/>
-          </a:xfrm>
-          <a:prstGeom prst="roundRect">
-            <a:avLst>
-              <a:gd name="adj" fmla="val 12000"/>
-            </a:avLst>
-          </a:prstGeom>
-          <a:solidFill>
-            <a:srgbClr val="FBE4E4"/>
-          </a:solidFill>
-          <a:ln>
-            <a:noFill/>
-          </a:ln>
-        </p:spPr>
-        <p:style>
-          <a:lnRef idx="1">
-            <a:schemeClr val="accent1"/>
-          </a:lnRef>
-          <a:fillRef idx="3">
-            <a:schemeClr val="accent1"/>
-          </a:fillRef>
-          <a:effectRef idx="2">
-            <a:schemeClr val="accent1"/>
-          </a:effectRef>
-          <a:fontRef idx="minor">
-            <a:schemeClr val="lt1"/>
-          </a:fontRef>
-        </p:style>
-        <p:txBody>
-          <a:bodyPr rtlCol="0" anchor="ctr"/>
-          <a:lstStyle/>
-          <a:p>
-            <a:pPr algn="ctr"/>
-          </a:p>
-        </p:txBody>
-      </p:sp>
-      <p:sp>
-        <p:nvSpPr>
-          <p:cNvPr id="12" name="Rectangle 11"/>
-          <p:cNvSpPr/>
-          <p:nvPr/>
-        </p:nvSpPr>
-        <p:spPr>
-          <a:xfrm>
-            <a:off x="457200" y="3694176"/>
-            <a:ext cx="128016" cy="1051560"/>
-          </a:xfrm>
-          <a:prstGeom prst="rect">
-            <a:avLst/>
-          </a:prstGeom>
-          <a:solidFill>
-            <a:srgbClr val="A02030"/>
-          </a:solidFill>
-          <a:ln>
-            <a:noFill/>
-          </a:ln>
-        </p:spPr>
-        <p:style>
-          <a:lnRef idx="1">
-            <a:schemeClr val="accent1"/>
-          </a:lnRef>
-          <a:fillRef idx="3">
-            <a:schemeClr val="accent1"/>
-          </a:fillRef>
-          <a:effectRef idx="2">
-            <a:schemeClr val="accent1"/>
-          </a:effectRef>
-          <a:fontRef idx="minor">
-            <a:schemeClr val="lt1"/>
-          </a:fontRef>
-        </p:style>
-        <p:txBody>
-          <a:bodyPr rtlCol="0" anchor="ctr"/>
-          <a:lstStyle/>
-          <a:p>
-            <a:pPr algn="ctr"/>
-          </a:p>
-        </p:txBody>
-      </p:sp>
-      <p:sp>
-        <p:nvSpPr>
-          <p:cNvPr id="13" name="TextBox 12"/>
-          <p:cNvSpPr txBox="1"/>
-          <p:nvPr/>
-        </p:nvSpPr>
-        <p:spPr>
-          <a:xfrm>
-            <a:off x="777240" y="3831336"/>
-            <a:ext cx="10774375" cy="822959"/>
-          </a:xfrm>
-          <a:prstGeom prst="rect">
-            <a:avLst/>
-          </a:prstGeom>
-          <a:noFill/>
-        </p:spPr>
-        <p:txBody>
-          <a:bodyPr wrap="square">
-            <a:spAutoFit/>
-          </a:bodyPr>
-          <a:lstStyle/>
-          <a:p>
-            <a:r>
-              <a:rPr sz="1200" b="1" i="0">
-                <a:solidFill>
-                  <a:srgbClr val="A02030"/>
-                </a:solidFill>
-                <a:latin typeface="Calibri"/>
-              </a:rPr>
-              <a:t>Atención</a:t>
-            </a:r>
-          </a:p>
-          <a:p>
-            <a:pPr>
-              <a:spcBef>
-                <a:spcPts val="400"/>
-              </a:spcBef>
-            </a:pPr>
-            <a:r>
-              <a:rPr sz="1400" b="0" i="0">
-                <a:solidFill>
-                  <a:srgbClr val="333333"/>
-                </a:solidFill>
-                <a:latin typeface="Calibri"/>
-              </a:rPr>
-              <a:t>Entrega del taller, si el docente lo asigna · en la fecha que indique el docente.</a:t>
-            </a:r>
-          </a:p>
-        </p:txBody>
-      </p:sp>
-      <p:sp>
-        <p:nvSpPr>
-          <p:cNvPr id="14" name="TextBox 13"/>
-          <p:cNvSpPr txBox="1"/>
-          <p:nvPr/>
-        </p:nvSpPr>
-        <p:spPr>
-          <a:xfrm>
-            <a:off x="11185855" y="6473952"/>
-            <a:ext cx="640080" cy="274320"/>
-          </a:xfrm>
-          <a:prstGeom prst="rect">
-            <a:avLst/>
-          </a:prstGeom>
-          <a:noFill/>
-        </p:spPr>
-        <p:txBody>
-          <a:bodyPr wrap="square">
-            <a:spAutoFit/>
-          </a:bodyPr>
-          <a:lstStyle/>
-          <a:p>
-            <a:pPr algn="r"/>
-            <a:r>
-              <a:rPr sz="1100" b="0" i="0">
-                <a:solidFill>
-                  <a:srgbClr val="666666"/>
-                </a:solidFill>
-                <a:latin typeface="Calibri"/>
-              </a:rPr>
-              <a:t>34</a:t>
-            </a:r>
-          </a:p>
-        </p:txBody>
-      </p:sp>
-    </p:spTree>
-  </p:cSld>
-  <p:clrMapOvr>
-    <a:masterClrMapping/>
-  </p:clrMapOvr>
-</p:sld>
-</file>
-
-<file path=ppt/slides/slide35.xml><?xml version="1.0" encoding="utf-8"?>
-<p:sld xmlns:a="http://schemas.openxmlformats.org/drawingml/2006/main" xmlns:p="http://schemas.openxmlformats.org/presentationml/2006/main" xmlns:r="http://schemas.openxmlformats.org/officeDocument/2006/relationships">
-  <p:cSld>
-    <p:bg>
-      <p:bgPr>
-        <a:solidFill>
-          <a:srgbClr val="FFFFFF"/>
-        </a:solidFill>
-        <a:effectLst/>
-      </p:bgPr>
-    </p:bg>
-    <p:spTree>
-      <p:nvGrpSpPr>
-        <p:cNvPr id="1" name=""/>
-        <p:cNvGrpSpPr/>
-        <p:nvPr/>
-      </p:nvGrpSpPr>
-      <p:grpSpPr/>
-      <p:sp>
-        <p:nvSpPr>
-          <p:cNvPr id="2" name="Rectangle 1"/>
-          <p:cNvSpPr/>
-          <p:nvPr/>
-        </p:nvSpPr>
-        <p:spPr>
-          <a:xfrm>
-            <a:off x="0" y="0"/>
-            <a:ext cx="12191695" cy="164592"/>
-          </a:xfrm>
-          <a:prstGeom prst="rect">
-            <a:avLst/>
-          </a:prstGeom>
-          <a:solidFill>
-            <a:srgbClr val="269CCB"/>
-          </a:solidFill>
-          <a:ln>
-            <a:noFill/>
-          </a:ln>
-        </p:spPr>
-        <p:style>
-          <a:lnRef idx="1">
-            <a:schemeClr val="accent1"/>
-          </a:lnRef>
-          <a:fillRef idx="3">
-            <a:schemeClr val="accent1"/>
-          </a:fillRef>
-          <a:effectRef idx="2">
-            <a:schemeClr val="accent1"/>
-          </a:effectRef>
-          <a:fontRef idx="minor">
-            <a:schemeClr val="lt1"/>
-          </a:fontRef>
-        </p:style>
-        <p:txBody>
-          <a:bodyPr rtlCol="0" anchor="ctr"/>
-          <a:lstStyle/>
-          <a:p>
-            <a:pPr algn="ctr"/>
-          </a:p>
-        </p:txBody>
-      </p:sp>
-      <p:pic>
-        <p:nvPicPr>
-          <p:cNvPr id="3" name="Picture 2" descr="logo_uniajc_color.png"/>
-          <p:cNvPicPr>
-            <a:picLocks noChangeAspect="1"/>
-          </p:cNvPicPr>
-          <p:nvPr/>
-        </p:nvPicPr>
-        <p:blipFill>
-          <a:blip r:embed="rId2"/>
-          <a:stretch>
-            <a:fillRect/>
-          </a:stretch>
-        </p:blipFill>
-        <p:spPr>
-          <a:xfrm>
-            <a:off x="10271455" y="5998464"/>
-            <a:ext cx="1463040" cy="643233"/>
-          </a:xfrm>
-          <a:prstGeom prst="rect">
-            <a:avLst/>
-          </a:prstGeom>
-        </p:spPr>
-      </p:pic>
-      <p:sp>
-        <p:nvSpPr>
-          <p:cNvPr id="4" name="TextBox 3"/>
-          <p:cNvSpPr txBox="1"/>
-          <p:nvPr/>
-        </p:nvSpPr>
-        <p:spPr>
-          <a:xfrm>
-            <a:off x="457200" y="1737360"/>
-            <a:ext cx="11277295" cy="1097280"/>
-          </a:xfrm>
-          <a:prstGeom prst="rect">
-            <a:avLst/>
-          </a:prstGeom>
-          <a:noFill/>
-        </p:spPr>
-        <p:txBody>
-          <a:bodyPr wrap="square" anchor="ctr"/>
-          <a:lstStyle/>
-          <a:p>
-            <a:pPr algn="ctr"/>
-            <a:r>
-              <a:rPr sz="3400" b="1" i="0">
-                <a:solidFill>
-                  <a:srgbClr val="095292"/>
-                </a:solidFill>
-                <a:latin typeface="Calibri"/>
-              </a:rPr>
-              <a:t>Clase 4 · VetCare avanza</a:t>
-            </a:r>
-          </a:p>
-        </p:txBody>
-      </p:sp>
-      <p:sp>
-        <p:nvSpPr>
-          <p:cNvPr id="5" name="TextBox 4"/>
-          <p:cNvSpPr txBox="1"/>
-          <p:nvPr/>
-        </p:nvSpPr>
-        <p:spPr>
-          <a:xfrm>
-            <a:off x="457200" y="3017520"/>
-            <a:ext cx="11277295" cy="1645920"/>
-          </a:xfrm>
-          <a:prstGeom prst="rect">
-            <a:avLst/>
-          </a:prstGeom>
-          <a:noFill/>
-        </p:spPr>
-        <p:txBody>
-          <a:bodyPr wrap="square">
-            <a:spAutoFit/>
-          </a:bodyPr>
-          <a:lstStyle/>
-          <a:p>
-            <a:pPr algn="ctr">
-              <a:spcAft>
-                <a:spcPts val="600"/>
-              </a:spcAft>
-            </a:pPr>
-            <a:r>
-              <a:rPr sz="1600" b="0" i="0">
-                <a:solidFill>
-                  <a:srgbClr val="333333"/>
-                </a:solidFill>
-                <a:latin typeface="Calibri"/>
-              </a:rPr>
-              <a:t>VetCare encuentra cualquier expediente por ID en tiempo constante con HashMap y estrena su primera ventana Swing para consultarlo.</a:t>
-            </a:r>
-          </a:p>
-          <a:p>
-            <a:pPr algn="ctr">
-              <a:spcAft>
-                <a:spcPts val="600"/>
-              </a:spcAft>
-            </a:pPr>
-            <a:r>
-              <a:rPr sz="1600" b="0" i="0">
-                <a:solidFill>
-                  <a:srgbClr val="333333"/>
-                </a:solidFill>
-                <a:latin typeface="Calibri"/>
-              </a:rPr>
-              <a:t>Entregable: Clase RegistroExpedientes con HashMap y HashSet mas la ventana VentanaBuscarExpediente construida a mano (sin arrastrar componentes) que busca por ID y muestra el resultado o un mensaje de error controlado; comprimido y subido a la plataforma del curso.</a:t>
-            </a:r>
-          </a:p>
-          <a:p>
-            <a:pPr algn="ctr">
-              <a:spcAft>
-                <a:spcPts val="600"/>
-              </a:spcAft>
-            </a:pPr>
-            <a:r>
-              <a:rPr sz="1600" b="0" i="0">
-                <a:solidFill>
-                  <a:srgbClr val="333333"/>
-                </a:solidFill>
-                <a:latin typeface="Calibri"/>
-              </a:rPr>
-              <a:t>Siguiente clase: continuamos el hilo del PI</a:t>
-            </a:r>
-          </a:p>
-        </p:txBody>
-      </p:sp>
-      <p:sp>
-        <p:nvSpPr>
-          <p:cNvPr id="6" name="TextBox 5"/>
-          <p:cNvSpPr txBox="1"/>
-          <p:nvPr/>
-        </p:nvSpPr>
-        <p:spPr>
-          <a:xfrm>
-            <a:off x="457200" y="4754880"/>
-            <a:ext cx="11277295" cy="640080"/>
-          </a:xfrm>
-          <a:prstGeom prst="rect">
-            <a:avLst/>
-          </a:prstGeom>
-          <a:noFill/>
-        </p:spPr>
-        <p:txBody>
-          <a:bodyPr wrap="square">
-            <a:spAutoFit/>
-          </a:bodyPr>
-          <a:lstStyle/>
-          <a:p>
-            <a:pPr algn="ctr"/>
-            <a:r>
-              <a:rPr sz="2000" b="1" i="0">
-                <a:solidFill>
-                  <a:srgbClr val="269CCB"/>
-                </a:solidFill>
-                <a:latin typeface="Calibri"/>
-              </a:rPr>
-              <a:t>Teoria al servicio del proyecto</a:t>
             </a:r>
           </a:p>
         </p:txBody>
@@ -18725,4 +16164,324 @@
   </a:objectDefaults>
   <a:extraClrSchemeLst/>
 </a:theme>
+</file>
+
+<file path=ppt/theme/theme2.xml><?xml version="1.0" encoding="utf-8"?>
+<a:theme xmlns:a="http://schemas.openxmlformats.org/drawingml/2006/main" name="Office Theme">
+  <a:themeElements>
+    <a:clrScheme name="Office">
+      <a:dk1>
+        <a:sysClr val="windowText" lastClr="000000"/>
+      </a:dk1>
+      <a:lt1>
+        <a:sysClr val="window" lastClr="FFFFFF"/>
+      </a:lt1>
+      <a:dk2>
+        <a:srgbClr val="1F497D"/>
+      </a:dk2>
+      <a:lt2>
+        <a:srgbClr val="EEECE1"/>
+      </a:lt2>
+      <a:accent1>
+        <a:srgbClr val="4F81BD"/>
+      </a:accent1>
+      <a:accent2>
+        <a:srgbClr val="C0504D"/>
+      </a:accent2>
+      <a:accent3>
+        <a:srgbClr val="9BBB59"/>
+      </a:accent3>
+      <a:accent4>
+        <a:srgbClr val="8064A2"/>
+      </a:accent4>
+      <a:accent5>
+        <a:srgbClr val="4BACC6"/>
+      </a:accent5>
+      <a:accent6>
+        <a:srgbClr val="F79646"/>
+      </a:accent6>
+      <a:hlink>
+        <a:srgbClr val="0000FF"/>
+      </a:hlink>
+      <a:folHlink>
+        <a:srgbClr val="800080"/>
+      </a:folHlink>
+    </a:clrScheme>
+    <a:fontScheme name="Office">
+      <a:majorFont>
+        <a:latin typeface="Calibri"/>
+        <a:ea typeface=""/>
+        <a:cs typeface=""/>
+        <a:font script="Jpan" typeface="ＭＳ Ｐゴシック"/>
+        <a:font script="Hang" typeface="맑은 고딕"/>
+        <a:font script="Hans" typeface="宋体"/>
+        <a:font script="Hant" typeface="新細明體"/>
+        <a:font script="Arab" typeface="Times New Roman"/>
+        <a:font script="Hebr" typeface="Times New Roman"/>
+        <a:font script="Thai" typeface="Angsana New"/>
+        <a:font script="Ethi" typeface="Nyala"/>
+        <a:font script="Beng" typeface="Vrinda"/>
+        <a:font script="Gujr" typeface="Shruti"/>
+        <a:font script="Khmr" typeface="MoolBoran"/>
+        <a:font script="Knda" typeface="Tunga"/>
+        <a:font script="Guru" typeface="Raavi"/>
+        <a:font script="Cans" typeface="Euphemia"/>
+        <a:font script="Cher" typeface="Plantagenet Cherokee"/>
+        <a:font script="Yiii" typeface="Microsoft Yi Baiti"/>
+        <a:font script="Tibt" typeface="Microsoft Himalaya"/>
+        <a:font script="Thaa" typeface="MV Boli"/>
+        <a:font script="Deva" typeface="Mangal"/>
+        <a:font script="Telu" typeface="Gautami"/>
+        <a:font script="Taml" typeface="Latha"/>
+        <a:font script="Syrc" typeface="Estrangelo Edessa"/>
+        <a:font script="Orya" typeface="Kalinga"/>
+        <a:font script="Mlym" typeface="Kartika"/>
+        <a:font script="Laoo" typeface="DokChampa"/>
+        <a:font script="Sinh" typeface="Iskoola Pota"/>
+        <a:font script="Mong" typeface="Mongolian Baiti"/>
+        <a:font script="Viet" typeface="Times New Roman"/>
+        <a:font script="Uigh" typeface="Microsoft Uighur"/>
+        <a:font script="Geor" typeface="Sylfaen"/>
+      </a:majorFont>
+      <a:minorFont>
+        <a:latin typeface="Calibri"/>
+        <a:ea typeface=""/>
+        <a:cs typeface=""/>
+        <a:font script="Jpan" typeface="ＭＳ Ｐゴシック"/>
+        <a:font script="Hang" typeface="맑은 고딕"/>
+        <a:font script="Hans" typeface="宋体"/>
+        <a:font script="Hant" typeface="新細明體"/>
+        <a:font script="Arab" typeface="Arial"/>
+        <a:font script="Hebr" typeface="Arial"/>
+        <a:font script="Thai" typeface="Cordia New"/>
+        <a:font script="Ethi" typeface="Nyala"/>
+        <a:font script="Beng" typeface="Vrinda"/>
+        <a:font script="Gujr" typeface="Shruti"/>
+        <a:font script="Khmr" typeface="DaunPenh"/>
+        <a:font script="Knda" typeface="Tunga"/>
+        <a:font script="Guru" typeface="Raavi"/>
+        <a:font script="Cans" typeface="Euphemia"/>
+        <a:font script="Cher" typeface="Plantagenet Cherokee"/>
+        <a:font script="Yiii" typeface="Microsoft Yi Baiti"/>
+        <a:font script="Tibt" typeface="Microsoft Himalaya"/>
+        <a:font script="Thaa" typeface="MV Boli"/>
+        <a:font script="Deva" typeface="Mangal"/>
+        <a:font script="Telu" typeface="Gautami"/>
+        <a:font script="Taml" typeface="Latha"/>
+        <a:font script="Syrc" typeface="Estrangelo Edessa"/>
+        <a:font script="Orya" typeface="Kalinga"/>
+        <a:font script="Mlym" typeface="Kartika"/>
+        <a:font script="Laoo" typeface="DokChampa"/>
+        <a:font script="Sinh" typeface="Iskoola Pota"/>
+        <a:font script="Mong" typeface="Mongolian Baiti"/>
+        <a:font script="Viet" typeface="Arial"/>
+        <a:font script="Uigh" typeface="Microsoft Uighur"/>
+        <a:font script="Geor" typeface="Sylfaen"/>
+      </a:minorFont>
+    </a:fontScheme>
+    <a:fmtScheme name="Office">
+      <a:fillStyleLst>
+        <a:solidFill>
+          <a:schemeClr val="phClr"/>
+        </a:solidFill>
+        <a:gradFill rotWithShape="1">
+          <a:gsLst>
+            <a:gs pos="0">
+              <a:schemeClr val="phClr">
+                <a:tint val="50000"/>
+                <a:satMod val="300000"/>
+              </a:schemeClr>
+            </a:gs>
+            <a:gs pos="35000">
+              <a:schemeClr val="phClr">
+                <a:tint val="37000"/>
+                <a:satMod val="300000"/>
+              </a:schemeClr>
+            </a:gs>
+            <a:gs pos="100000">
+              <a:schemeClr val="phClr">
+                <a:tint val="15000"/>
+                <a:satMod val="350000"/>
+              </a:schemeClr>
+            </a:gs>
+          </a:gsLst>
+          <a:lin ang="16200000" scaled="1"/>
+        </a:gradFill>
+        <a:gradFill rotWithShape="1">
+          <a:gsLst>
+            <a:gs pos="0">
+              <a:schemeClr val="phClr">
+                <a:tint val="100000"/>
+                <a:shade val="100000"/>
+                <a:satMod val="130000"/>
+              </a:schemeClr>
+            </a:gs>
+            <a:gs pos="100000">
+              <a:schemeClr val="phClr">
+                <a:tint val="50000"/>
+                <a:shade val="100000"/>
+                <a:satMod val="350000"/>
+              </a:schemeClr>
+            </a:gs>
+          </a:gsLst>
+          <a:lin ang="16200000" scaled="0"/>
+        </a:gradFill>
+      </a:fillStyleLst>
+      <a:lnStyleLst>
+        <a:ln w="9525" cap="flat" cmpd="sng" algn="ctr">
+          <a:solidFill>
+            <a:schemeClr val="phClr">
+              <a:shade val="95000"/>
+              <a:satMod val="105000"/>
+            </a:schemeClr>
+          </a:solidFill>
+          <a:prstDash val="solid"/>
+        </a:ln>
+        <a:ln w="25400" cap="flat" cmpd="sng" algn="ctr">
+          <a:solidFill>
+            <a:schemeClr val="phClr"/>
+          </a:solidFill>
+          <a:prstDash val="solid"/>
+        </a:ln>
+        <a:ln w="38100" cap="flat" cmpd="sng" algn="ctr">
+          <a:solidFill>
+            <a:schemeClr val="phClr"/>
+          </a:solidFill>
+          <a:prstDash val="solid"/>
+        </a:ln>
+      </a:lnStyleLst>
+      <a:effectStyleLst>
+        <a:effectStyle>
+          <a:effectLst>
+            <a:outerShdw blurRad="40000" dist="20000" dir="5400000" rotWithShape="0">
+              <a:srgbClr val="000000">
+                <a:alpha val="38000"/>
+              </a:srgbClr>
+            </a:outerShdw>
+          </a:effectLst>
+        </a:effectStyle>
+        <a:effectStyle>
+          <a:effectLst>
+            <a:outerShdw blurRad="40000" dist="23000" dir="5400000" rotWithShape="0">
+              <a:srgbClr val="000000">
+                <a:alpha val="35000"/>
+              </a:srgbClr>
+            </a:outerShdw>
+          </a:effectLst>
+        </a:effectStyle>
+        <a:effectStyle>
+          <a:effectLst>
+            <a:outerShdw blurRad="40000" dist="23000" dir="5400000" rotWithShape="0">
+              <a:srgbClr val="000000">
+                <a:alpha val="35000"/>
+              </a:srgbClr>
+            </a:outerShdw>
+          </a:effectLst>
+          <a:scene3d>
+            <a:camera prst="orthographicFront">
+              <a:rot lat="0" lon="0" rev="0"/>
+            </a:camera>
+            <a:lightRig rig="threePt" dir="t">
+              <a:rot lat="0" lon="0" rev="1200000"/>
+            </a:lightRig>
+          </a:scene3d>
+          <a:sp3d>
+            <a:bevelT w="63500" h="25400"/>
+          </a:sp3d>
+        </a:effectStyle>
+      </a:effectStyleLst>
+      <a:bgFillStyleLst>
+        <a:solidFill>
+          <a:schemeClr val="phClr"/>
+        </a:solidFill>
+        <a:gradFill rotWithShape="1">
+          <a:gsLst>
+            <a:gs pos="0">
+              <a:schemeClr val="phClr">
+                <a:tint val="40000"/>
+                <a:satMod val="350000"/>
+              </a:schemeClr>
+            </a:gs>
+            <a:gs pos="40000">
+              <a:schemeClr val="phClr">
+                <a:tint val="45000"/>
+                <a:shade val="99000"/>
+                <a:satMod val="350000"/>
+              </a:schemeClr>
+            </a:gs>
+            <a:gs pos="100000">
+              <a:schemeClr val="phClr">
+                <a:shade val="20000"/>
+                <a:satMod val="255000"/>
+              </a:schemeClr>
+            </a:gs>
+          </a:gsLst>
+          <a:path path="circle">
+            <a:fillToRect l="50000" t="-80000" r="50000" b="180000"/>
+          </a:path>
+        </a:gradFill>
+        <a:gradFill rotWithShape="1">
+          <a:gsLst>
+            <a:gs pos="0">
+              <a:schemeClr val="phClr">
+                <a:tint val="80000"/>
+                <a:satMod val="300000"/>
+              </a:schemeClr>
+            </a:gs>
+            <a:gs pos="100000">
+              <a:schemeClr val="phClr">
+                <a:shade val="30000"/>
+                <a:satMod val="200000"/>
+              </a:schemeClr>
+            </a:gs>
+          </a:gsLst>
+          <a:path path="circle">
+            <a:fillToRect l="50000" t="50000" r="50000" b="50000"/>
+          </a:path>
+        </a:gradFill>
+      </a:bgFillStyleLst>
+    </a:fmtScheme>
+  </a:themeElements>
+  <a:objectDefaults>
+    <a:spDef>
+      <a:spPr/>
+      <a:bodyPr/>
+      <a:lstStyle/>
+      <a:style>
+        <a:lnRef idx="1">
+          <a:schemeClr val="accent1"/>
+        </a:lnRef>
+        <a:fillRef idx="3">
+          <a:schemeClr val="accent1"/>
+        </a:fillRef>
+        <a:effectRef idx="2">
+          <a:schemeClr val="accent1"/>
+        </a:effectRef>
+        <a:fontRef idx="minor">
+          <a:schemeClr val="lt1"/>
+        </a:fontRef>
+      </a:style>
+    </a:spDef>
+    <a:lnDef>
+      <a:spPr/>
+      <a:bodyPr/>
+      <a:lstStyle/>
+      <a:style>
+        <a:lnRef idx="2">
+          <a:schemeClr val="accent1"/>
+        </a:lnRef>
+        <a:fillRef idx="0">
+          <a:schemeClr val="accent1"/>
+        </a:fillRef>
+        <a:effectRef idx="1">
+          <a:schemeClr val="accent1"/>
+        </a:effectRef>
+        <a:fontRef idx="minor">
+          <a:schemeClr val="tx1"/>
+        </a:fontRef>
+      </a:style>
+    </a:lnDef>
+  </a:objectDefaults>
+  <a:extraClrSchemeLst/>
+</a:theme>
 </file>
--- a/Programacion II/Clases/Clase 4 - Mapas conjuntos e interfaces graficas GUI/Presentacion.pptx
+++ b/Programacion II/Clases/Clase 4 - Mapas conjuntos e interfaces graficas GUI/Presentacion.pptx
@@ -9,7 +9,7 @@
     <p:sldId id="257" r:id="rId8"/>
     <p:sldId id="258" r:id="rId9"/>
     <p:sldId id="259" r:id="rId10"/>
-    <p:sldId id="260" r:id="rId12"/>
+    <p:sldId id="260" r:id="rId11"/>
     <p:sldId id="261" r:id="rId13"/>
     <p:sldId id="262" r:id="rId14"/>
     <p:sldId id="263" r:id="rId15"/>
@@ -530,7 +530,7 @@
           <a:lstStyle/>
           <a:p>
             <a:r>
-              <a:t>Si el primer bloque se alarga, la ventana queda sin terminar y la clase se pierde, asi que ponga un cronometro visible.</a:t>
+              <a:t>Cuando dos claves distintas caen en la misma casilla (una colision), el mapa guarda ambas en esa casilla y usa equals() para distinguirlas al leer.</a:t>
             </a:r>
           </a:p>
         </p:txBody>
@@ -600,7 +600,13 @@
           <a:lstStyle/>
           <a:p>
             <a:r>
-              <a:t>Cuando dos claves distintas caen en la misma casilla (una colision), el mapa guarda ambas en esa casilla y usa equals() para distinguirlas al leer.</a:t>
+              <a:t>Lo que un HashSet no le garantiza es el orden: si usted agrega Labrador, Criollo y Persa y luego imprime el conjunto, pueden salir en cualquier orden, porque la posicion la decide el hash.</a:t>
+            </a:r>
+          </a:p>
+          <a:p/>
+          <a:p>
+            <a:r>
+              <a:t>Si necesita conservar el orden de insercion use LinkedHashSet o LinkedHashMap, y si necesita orden alfabetico use TreeSet o TreeMap, que ordenan pero cuestan un poco mas.</a:t>
             </a:r>
           </a:p>
         </p:txBody>
@@ -626,82 +632,6 @@
 </file>
 
 <file path=ppt/notesSlides/notesSlide3.xml><?xml version="1.0" encoding="utf-8"?>
-<p:notes xmlns:a="http://schemas.openxmlformats.org/drawingml/2006/main" xmlns:p="http://schemas.openxmlformats.org/presentationml/2006/main" xmlns:r="http://schemas.openxmlformats.org/officeDocument/2006/relationships">
-  <p:cSld>
-    <p:spTree>
-      <p:nvGrpSpPr>
-        <p:cNvPr id="1" name=""/>
-        <p:cNvGrpSpPr/>
-        <p:nvPr/>
-      </p:nvGrpSpPr>
-      <p:grpSpPr>
-        <a:xfrm>
-          <a:off x="0" y="0"/>
-          <a:ext cx="0" cy="0"/>
-          <a:chOff x="0" y="0"/>
-          <a:chExt cx="0" cy="0"/>
-        </a:xfrm>
-      </p:grpSpPr>
-      <p:sp>
-        <p:nvSpPr>
-          <p:cNvPr id="2" name="Slide Image Placeholder 1"/>
-          <p:cNvSpPr>
-            <a:spLocks noGrp="1"/>
-          </p:cNvSpPr>
-          <p:nvPr>
-            <p:ph type="sldImg" idx="2"/>
-          </p:nvPr>
-        </p:nvSpPr>
-        <p:spPr/>
-      </p:sp>
-      <p:sp>
-        <p:nvSpPr>
-          <p:cNvPr id="3" name="Notes Placeholder 2"/>
-          <p:cNvSpPr>
-            <a:spLocks noGrp="1"/>
-          </p:cNvSpPr>
-          <p:nvPr>
-            <p:ph type="body" idx="3" sz="quarter"/>
-          </p:nvPr>
-        </p:nvSpPr>
-        <p:spPr/>
-        <p:txBody>
-          <a:bodyPr/>
-          <a:lstStyle/>
-          <a:p>
-            <a:r>
-              <a:t>Lo que un HashSet no le garantiza es el orden: si usted agrega Labrador, Criollo y Persa y luego imprime el conjunto, pueden salir en cualquier orden, porque la posicion la decide el hash.</a:t>
-            </a:r>
-          </a:p>
-          <a:p/>
-          <a:p>
-            <a:r>
-              <a:t>Si necesita conservar el orden de insercion use LinkedHashSet o LinkedHashMap, y si necesita orden alfabetico use TreeSet o TreeMap, que ordenan pero cuestan un poco mas.</a:t>
-            </a:r>
-          </a:p>
-        </p:txBody>
-      </p:sp>
-      <p:sp>
-        <p:nvSpPr>
-          <p:cNvPr id="4" name="Slide Number Placeholder 3"/>
-          <p:cNvSpPr>
-            <a:spLocks noGrp="1"/>
-          </p:cNvSpPr>
-          <p:nvPr>
-            <p:ph type="sldNum" idx="5" sz="quarter"/>
-          </p:nvPr>
-        </p:nvSpPr>
-        <p:spPr/>
-      </p:sp>
-    </p:spTree>
-  </p:cSld>
-  <p:clrMapOvr>
-    <a:masterClrMapping/>
-  </p:clrMapOvr>
-</p:notes>
-</file>
-
-<file path=ppt/notesSlides/notesSlide4.xml><?xml version="1.0" encoding="utf-8"?>
 <p:notes xmlns:a="http://schemas.openxmlformats.org/drawingml/2006/main" xmlns:p="http://schemas.openxmlformats.org/presentationml/2006/main" xmlns:r="http://schemas.openxmlformats.org/officeDocument/2006/relationships">
   <p:cSld>
     <p:spTree>
@@ -4697,7 +4627,7 @@
                 </a:solidFill>
                 <a:latin typeface="Calibri"/>
               </a:rPr>
-              <a:t>–   En VetCare lo usamos para dos cosas concretas: un Set&lt;String&gt; de IDs ya usados, para rechazar un registro duplicado sin recorrer nada</a:t>
+              <a:t>–   En el sistema de la clinica lo usamos para dos cosas concretas: un Set&lt;String&gt; de IDs ya usados, para rechazar un registro duplicado sin recorrer nada</a:t>
             </a:r>
           </a:p>
           <a:p>
@@ -5430,7 +5360,7 @@
                 </a:solidFill>
                 <a:latin typeface="Calibri"/>
               </a:rPr>
-              <a:t>class VetCareBuscarExpediente</a:t>
+              <a:t>class ClinicaBuscarExpediente</a:t>
             </a:r>
           </a:p>
         </p:txBody>
@@ -5589,7 +5519,7 @@
                 </a:solidFill>
                 <a:latin typeface="Calibri"/>
               </a:rPr>
-              <a:t>public class VetCareBuscarExpediente extends JFrame {</a:t>
+              <a:t>public class ClinicaBuscarExpediente extends JFrame {</a:t>
             </a:r>
           </a:p>
           <a:p>
@@ -5930,7 +5860,7 @@
                 </a:solidFill>
                 <a:latin typeface="Calibri"/>
               </a:rPr>
-              <a:t>VetCareBuscarExpediente.java — VetCareBuscarExpediente()</a:t>
+              <a:t>ClinicaBuscarExpediente.java — ClinicaBuscarExpediente()</a:t>
             </a:r>
           </a:p>
         </p:txBody>
@@ -6089,7 +6019,7 @@
                 </a:solidFill>
                 <a:latin typeface="Calibri"/>
               </a:rPr>
-              <a:t>    public VetCareBuscarExpediente() {</a:t>
+              <a:t>    public ClinicaBuscarExpediente() {</a:t>
             </a:r>
           </a:p>
           <a:p>
@@ -6105,7 +6035,7 @@
                 </a:solidFill>
                 <a:latin typeface="Calibri"/>
               </a:rPr>
-              <a:t>        super("VetCare - Buscar expediente");</a:t>
+              <a:t>        super("Clinica - Buscar expediente");</a:t>
             </a:r>
           </a:p>
           <a:p>
@@ -6366,7 +6296,7 @@
                 </a:solidFill>
                 <a:latin typeface="Calibri"/>
               </a:rPr>
-              <a:t>VetCareBuscarExpediente.java — cargarDatosDePrueba()</a:t>
+              <a:t>ClinicaBuscarExpediente.java — cargarDatosDePrueba()</a:t>
             </a:r>
           </a:p>
         </p:txBody>
@@ -6850,7 +6780,7 @@
                 </a:solidFill>
                 <a:latin typeface="Calibri"/>
               </a:rPr>
-              <a:t>VetCareBuscarExpediente.java — guardar()</a:t>
+              <a:t>ClinicaBuscarExpediente.java — guardar()</a:t>
             </a:r>
           </a:p>
         </p:txBody>
@@ -7366,7 +7296,7 @@
                 </a:solidFill>
                 <a:latin typeface="Calibri"/>
               </a:rPr>
-              <a:t>VetCareBuscarExpediente.java — compararBusquedas() (1/2)</a:t>
+              <a:t>ClinicaBuscarExpediente.java — compararBusquedas() (1/2)</a:t>
             </a:r>
           </a:p>
         </p:txBody>
@@ -8033,7 +7963,7 @@
                 </a:solidFill>
                 <a:latin typeface="Calibri"/>
               </a:rPr>
-              <a:t>VetCareBuscarExpediente.java — compararBusquedas() (2/2)</a:t>
+              <a:t>ClinicaBuscarExpediente.java — compararBusquedas() (2/2)</a:t>
             </a:r>
           </a:p>
         </p:txBody>
@@ -8665,7 +8595,7 @@
                 </a:solidFill>
                 <a:latin typeface="Calibri"/>
               </a:rPr>
-              <a:t>–   Todo con el mismo dominio: la clinica veterinaria Huellitas (VetCare).</a:t>
+              <a:t>–   Todo con el mismo dominio: una clinica veterinaria.</a:t>
             </a:r>
           </a:p>
         </p:txBody>
@@ -8846,7 +8776,7 @@
                 </a:solidFill>
                 <a:latin typeface="Calibri"/>
               </a:rPr>
-              <a:t>VetCareBuscarExpediente.java — construirInterfaz() (1/2)</a:t>
+              <a:t>ClinicaBuscarExpediente.java — construirInterfaz() (1/2)</a:t>
             </a:r>
           </a:p>
         </p:txBody>
@@ -9513,7 +9443,7 @@
                 </a:solidFill>
                 <a:latin typeface="Calibri"/>
               </a:rPr>
-              <a:t>VetCareBuscarExpediente.java — construirInterfaz() (2/2)</a:t>
+              <a:t>ClinicaBuscarExpediente.java — construirInterfaz() (2/2)</a:t>
             </a:r>
           </a:p>
         </p:txBody>
@@ -9917,7 +9847,7 @@
                 </a:solidFill>
                 <a:latin typeface="Calibri"/>
               </a:rPr>
-              <a:t>VetCareBuscarExpediente.java — buscar() (1/2)</a:t>
+              <a:t>ClinicaBuscarExpediente.java — buscar() (1/2)</a:t>
             </a:r>
           </a:p>
         </p:txBody>
@@ -10584,7 +10514,7 @@
                 </a:solidFill>
                 <a:latin typeface="Calibri"/>
               </a:rPr>
-              <a:t>VetCareBuscarExpediente.java — buscar() (2/2)</a:t>
+              <a:t>ClinicaBuscarExpediente.java — buscar() (2/2)</a:t>
             </a:r>
           </a:p>
         </p:txBody>
@@ -10940,7 +10870,7 @@
                 </a:solidFill>
                 <a:latin typeface="Calibri"/>
               </a:rPr>
-              <a:t>VetCareBuscarExpediente.java — main()</a:t>
+              <a:t>ClinicaBuscarExpediente.java — main()</a:t>
             </a:r>
           </a:p>
         </p:txBody>
@@ -11131,7 +11061,7 @@
                 </a:solidFill>
                 <a:latin typeface="Calibri"/>
               </a:rPr>
-              <a:t>        SwingUtilities.invokeLater(() -&gt; new VetCareBuscarExpediente().setVisible(true));</a:t>
+              <a:t>        SwingUtilities.invokeLater(() -&gt; new ClinicaBuscarExpediente().setVisible(true));</a:t>
             </a:r>
           </a:p>
           <a:p>
@@ -11360,7 +11290,7 @@
                 </a:solidFill>
                 <a:latin typeface="Calibri"/>
               </a:rPr>
-              <a:t>VetCareBuscarExpediente.java — class Expediente</a:t>
+              <a:t>ClinicaBuscarExpediente.java — class Expediente</a:t>
             </a:r>
           </a:p>
         </p:txBody>
@@ -11812,7 +11742,7 @@
                 </a:solidFill>
                 <a:latin typeface="Calibri"/>
               </a:rPr>
-              <a:t>VetCareBuscarExpediente.java — Expediente()</a:t>
+              <a:t>ClinicaBuscarExpediente.java — Expediente()</a:t>
             </a:r>
           </a:p>
         </p:txBody>
@@ -12663,7 +12593,7 @@
                 </a:solidFill>
                 <a:latin typeface="Calibri"/>
               </a:rPr>
-              <a:t>JFrame v = new JFrame("VetCare");                   // 1) la ventana</a:t>
+              <a:t>JFrame v = new JFrame("Clinica");                   // 1) la ventana</a:t>
             </a:r>
           </a:p>
           <a:p>
@@ -13114,7 +13044,7 @@
                 </a:solidFill>
                 <a:latin typeface="Calibri"/>
               </a:rPr>
-              <a:t>–   Mismo dominio VetCare — no otro ejemplo.</a:t>
+              <a:t>–   Mismo dominio de la clinica — no otro ejemplo.</a:t>
             </a:r>
           </a:p>
         </p:txBody>
@@ -13915,7 +13845,7 @@
                 </a:solidFill>
                 <a:latin typeface="Calibri"/>
               </a:rPr>
-              <a:t>Demo en vivo sobre VetCare</a:t>
+              <a:t>Demo en vivo sobre el tema</a:t>
             </a:r>
           </a:p>
         </p:txBody>
@@ -14379,7 +14309,7 @@
                 </a:solidFill>
                 <a:latin typeface="Calibri"/>
               </a:rPr>
-              <a:t>Antes de entrar en materia, el reparto del tiempo, porque hoy son dos...</a:t>
+              <a:t>Hoy son dos temas en un solo bloque: primero mapas y conjuntos con demo...</a:t>
             </a:r>
           </a:p>
         </p:txBody>
@@ -14418,7 +14348,7 @@
                 </a:solidFill>
                 <a:latin typeface="Calibri"/>
               </a:rPr>
-              <a:t>–   Antes de entrar en materia, el reparto del tiempo, porque hoy son dos temas en un solo bloque de 120 minutos y hay que ser estricto: minutos 0 a 10 encuadre y repaso rapido de cola y pila; minutos 10 a 55 mapas y conjuntos con demo en consola</a:t>
+              <a:t>–   Hoy son dos temas en un solo bloque: primero mapas y conjuntos con demo en consola, y despues una introduccion a Swing con la ventana construida en vivo, que termina consultando el HashMap.</a:t>
             </a:r>
           </a:p>
           <a:p>
@@ -14434,23 +14364,7 @@
                 </a:solidFill>
                 <a:latin typeface="Calibri"/>
               </a:rPr>
-              <a:t>–   Minutos 55 a 65 pausa; minutos 65 a 95 introduccion a Swing con la ventana construida en vivo; minutos 95 a 115 taller integrado donde la ventana consulta el HashMap; minutos 115 a 120 cierre y entrega en la plataforma del curso.</a:t>
-            </a:r>
-          </a:p>
-          <a:p>
-            <a:pPr>
-              <a:spcAft>
-                <a:spcPts val="800"/>
-              </a:spcAft>
-            </a:pPr>
-            <a:r>
-              <a:rPr sz="2000" b="0" i="0">
-                <a:solidFill>
-                  <a:srgbClr val="333333"/>
-                </a:solidFill>
-                <a:latin typeface="Calibri"/>
-              </a:rPr>
-              <a:t>–   El hilo que une los dos temas es uno solo: hoy le damos a VetCare la capacidad de responder en un instante la pregunta que mas hace la recepcionista de Huellitas, que es dame el expediente de la mascota M-004</a:t>
+              <a:t>–   El hilo que une los dos temas es uno solo: hoy le damos al sistema de la clinica la capacidad de responder en un instante la pregunta que mas hace la recepcionista de la clinica, que es dame el expediente de la mascota M-004</a:t>
             </a:r>
           </a:p>
           <a:p>
@@ -14954,7 +14868,7 @@
                 </a:solidFill>
                 <a:latin typeface="Calibri"/>
               </a:rPr>
-              <a:t>–   En VetCare declaramos; y la clave es el ID, que es unico por definicion.</a:t>
+              <a:t>–   En el sistema de la clinica declaramos; y la clave es el ID, que es unico por definicion.</a:t>
             </a:r>
           </a:p>
         </p:txBody>

--- a/Programacion II/Clases/Clase 4 - Mapas conjuntos e interfaces graficas GUI/Presentacion.pptx
+++ b/Programacion II/Clases/Clase 4 - Mapas conjuntos e interfaces graficas GUI/Presentacion.pptx
@@ -830,94 +830,6 @@
           <a:p>
             <a:r>
               <a:t>Ahora la parte grafica, y aqui empieza el segundo bloque de la clase. Swing es la biblioteca de escritorio de Java y funciona por anidamiento: la ventana es un JFrame, dentro del frame hay un contenedor donde se ponen paneles JPanel, y dentro de los paneles van los componentes visibles como JLabel (texto fijo), JTextField (caja donde el usuario escribe) y JButton (boton). Como se acomodan esos componentes lo decide un layout manager: el JFrame usa BorderLayout por defecto, que reparte la ventana en NORTH, SOUTH, EAST, WEST y CENTER; el JPanel usa FlowLayout, que va poniendo los componentes en fila; y GridLayout arma una cuadricula de filas y columnas. Todo JFrame necesita tres lineas obligatorias o el estudiante creera que su programa no sirve: setDefaultCloseOperation(JFrame.EXIT_ON_CLOSE) para que cerrar la ventana termine el programa, setSize o pack para darle tamano, y setVisible(true) para que aparezca. Ademas, la ventana debe crearse dentro de SwingUtilities.invokeLater porque toda la interfaz de Swing vive en un hilo especial llamado EDT; hacerlo bien desde hoy evita cuelgues raros mas adelante.</a:t>
-            </a:r>
-          </a:p>
-        </p:txBody>
-      </p:sp>
-      <p:sp>
-        <p:nvSpPr>
-          <p:cNvPr id="4" name="Slide Number Placeholder 3"/>
-          <p:cNvSpPr>
-            <a:spLocks noGrp="1"/>
-          </p:cNvSpPr>
-          <p:nvPr>
-            <p:ph type="sldNum" idx="5" sz="quarter"/>
-          </p:nvPr>
-        </p:nvSpPr>
-        <p:spPr/>
-      </p:sp>
-    </p:spTree>
-  </p:cSld>
-  <p:clrMapOvr>
-    <a:masterClrMapping/>
-  </p:clrMapOvr>
-</p:notes>
-</file>
-
-<file path=ppt/notesSlides/notesSlide6.xml><?xml version="1.0" encoding="utf-8"?>
-<p:notes xmlns:a="http://schemas.openxmlformats.org/drawingml/2006/main" xmlns:p="http://schemas.openxmlformats.org/presentationml/2006/main" xmlns:r="http://schemas.openxmlformats.org/officeDocument/2006/relationships">
-  <p:cSld>
-    <p:spTree>
-      <p:nvGrpSpPr>
-        <p:cNvPr id="1" name=""/>
-        <p:cNvGrpSpPr/>
-        <p:nvPr/>
-      </p:nvGrpSpPr>
-      <p:grpSpPr>
-        <a:xfrm>
-          <a:off x="0" y="0"/>
-          <a:ext cx="0" cy="0"/>
-          <a:chOff x="0" y="0"/>
-          <a:chExt cx="0" cy="0"/>
-        </a:xfrm>
-      </p:grpSpPr>
-      <p:sp>
-        <p:nvSpPr>
-          <p:cNvPr id="2" name="Slide Image Placeholder 1"/>
-          <p:cNvSpPr>
-            <a:spLocks noGrp="1"/>
-          </p:cNvSpPr>
-          <p:nvPr>
-            <p:ph type="sldImg" idx="2"/>
-          </p:nvPr>
-        </p:nvSpPr>
-        <p:spPr/>
-      </p:sp>
-      <p:sp>
-        <p:nvSpPr>
-          <p:cNvPr id="3" name="Notes Placeholder 2"/>
-          <p:cNvSpPr>
-            <a:spLocks noGrp="1"/>
-          </p:cNvSpPr>
-          <p:nvPr>
-            <p:ph type="body" idx="3" sz="quarter"/>
-          </p:nvPr>
-        </p:nvSpPr>
-        <p:spPr/>
-        <p:txBody>
-          <a:bodyPr/>
-          <a:lstStyle/>
-          <a:p>
-            <a:r>
-              <a:t>TEXTO COMPLETO DE LA LÁMINA (se proyecta resumido):</a:t>
-            </a:r>
-          </a:p>
-          <a:p/>
-          <a:p>
-            <a:r>
-              <a:t>Herramienta: Visual Studio Code (Java)</a:t>
-            </a:r>
-          </a:p>
-          <a:p/>
-          <a:p>
-            <a:r>
-              <a:t>Demo: El docente busca la ficha H-5000 dentro de un archivo historico de 5.000 expedientes, primero recorriendo un ArrayList y luego con get() sobre un HashMap comparando los nanosegundos, y despues ejecuta la misma busqueda desde una ventana Swing escrita linea por linea.</a:t>
-            </a:r>
-          </a:p>
-          <a:p/>
-          <a:p>
-            <a:r>
-              <a:t>Mismo dominio de la clinica — no otro ejemplo.</a:t>
             </a:r>
           </a:p>
         </p:txBody>
@@ -12481,118 +12393,14 @@
       </p:sp>
       <p:sp>
         <p:nvSpPr>
-          <p:cNvPr id="5" name="Rounded Rectangle 4"/>
-          <p:cNvSpPr/>
-          <p:nvPr/>
-        </p:nvSpPr>
-        <p:spPr>
-          <a:xfrm>
-            <a:off x="5797149" y="1573813"/>
-            <a:ext cx="6010497" cy="4057845"/>
-          </a:xfrm>
-          <a:prstGeom prst="roundRect">
-            <a:avLst>
-              <a:gd name="adj" fmla="val 4000"/>
-            </a:avLst>
-          </a:prstGeom>
-          <a:solidFill>
-            <a:srgbClr val="E8EEF4"/>
-          </a:solidFill>
-          <a:ln>
-            <a:noFill/>
-          </a:ln>
-        </p:spPr>
-        <p:style>
-          <a:lnRef idx="1">
-            <a:schemeClr val="accent1"/>
-          </a:lnRef>
-          <a:fillRef idx="3">
-            <a:schemeClr val="accent1"/>
-          </a:fillRef>
-          <a:effectRef idx="2">
-            <a:schemeClr val="accent1"/>
-          </a:effectRef>
-          <a:fontRef idx="minor">
-            <a:schemeClr val="lt1"/>
-          </a:fontRef>
-        </p:style>
-        <p:txBody>
-          <a:bodyPr rtlCol="0" anchor="ctr"/>
-          <a:lstStyle/>
-          <a:p>
-            <a:pPr algn="ctr"/>
-          </a:p>
-        </p:txBody>
-      </p:sp>
-      <p:pic>
-        <p:nvPicPr>
-          <p:cNvPr id="6" name="Picture 5" descr="laptop-code-live-demo.jpg"/>
-          <p:cNvPicPr>
-            <a:picLocks noChangeAspect="1"/>
-          </p:cNvPicPr>
-          <p:nvPr/>
-        </p:nvPicPr>
-        <p:blipFill>
-          <a:blip r:embed="rId2"/>
-          <a:stretch>
-            <a:fillRect/>
-          </a:stretch>
-        </p:blipFill>
-        <p:spPr>
-          <a:xfrm>
-            <a:off x="5870301" y="1646965"/>
-            <a:ext cx="5864193" cy="3911541"/>
-          </a:xfrm>
-          <a:prstGeom prst="rect">
-            <a:avLst/>
-          </a:prstGeom>
-        </p:spPr>
-      </p:pic>
-      <p:sp>
-        <p:nvSpPr>
-          <p:cNvPr id="7" name="TextBox 6"/>
+          <p:cNvPr id="5" name="TextBox 4"/>
           <p:cNvSpPr txBox="1"/>
           <p:nvPr/>
         </p:nvSpPr>
         <p:spPr>
           <a:xfrm>
-            <a:off x="5870301" y="5961888"/>
-            <a:ext cx="5864193" cy="320040"/>
-          </a:xfrm>
-          <a:prstGeom prst="rect">
-            <a:avLst/>
-          </a:prstGeom>
-          <a:noFill/>
-        </p:spPr>
-        <p:txBody>
-          <a:bodyPr wrap="square">
-            <a:spAutoFit/>
-          </a:bodyPr>
-          <a:lstStyle/>
-          <a:p>
-            <a:pPr algn="ctr"/>
-            <a:r>
-              <a:rPr sz="1100" b="0" i="1">
-                <a:solidFill>
-                  <a:srgbClr val="666666"/>
-                </a:solidFill>
-                <a:latin typeface="Calibri"/>
-              </a:rPr>
-              <a:t>Foto: olia danilevich · Pexels</a:t>
-            </a:r>
-          </a:p>
-        </p:txBody>
-      </p:sp>
-      <p:sp>
-        <p:nvSpPr>
-          <p:cNvPr id="8" name="TextBox 7"/>
-          <p:cNvSpPr txBox="1"/>
-          <p:nvPr/>
-        </p:nvSpPr>
-        <p:spPr>
-          <a:xfrm>
-            <a:off x="457200" y="1353312"/>
-            <a:ext cx="5093061" cy="5047488"/>
+            <a:off x="457200" y="1170432"/>
+            <a:ext cx="11277295" cy="5230368"/>
           </a:xfrm>
           <a:prstGeom prst="rect">
             <a:avLst/>
@@ -12662,6 +12470,15 @@
               </a:rPr>
               <a:t>Demo:</a:t>
             </a:r>
+            <a:r>
+              <a:rPr sz="2000" b="0" i="0">
+                <a:solidFill>
+                  <a:srgbClr val="333333"/>
+                </a:solidFill>
+                <a:latin typeface="Calibri"/>
+              </a:rPr>
+              <a:t> El docente busca la ficha H-5000 dentro de un archivo historico de 5.000 expedientes, primero recorriendo un ArrayList y luego con get() sobre un HashMap comparando los nanosegundos, y despues ejecuta la misma busqueda desde una ventana Swing escrita linea por linea.</a:t>
+            </a:r>
           </a:p>
           <a:p>
             <a:pPr>
@@ -12683,7 +12500,7 @@
       </p:sp>
       <p:sp>
         <p:nvSpPr>
-          <p:cNvPr id="9" name="TextBox 8"/>
+          <p:cNvPr id="6" name="TextBox 5"/>
           <p:cNvSpPr txBox="1"/>
           <p:nvPr/>
         </p:nvSpPr>
@@ -13096,118 +12913,14 @@
       </p:sp>
       <p:sp>
         <p:nvSpPr>
-          <p:cNvPr id="5" name="Rounded Rectangle 4"/>
-          <p:cNvSpPr/>
-          <p:nvPr/>
-        </p:nvSpPr>
-        <p:spPr>
-          <a:xfrm>
-            <a:off x="5797149" y="1573813"/>
-            <a:ext cx="6010497" cy="4057845"/>
-          </a:xfrm>
-          <a:prstGeom prst="roundRect">
-            <a:avLst>
-              <a:gd name="adj" fmla="val 4000"/>
-            </a:avLst>
-          </a:prstGeom>
-          <a:solidFill>
-            <a:srgbClr val="E8EEF4"/>
-          </a:solidFill>
-          <a:ln>
-            <a:noFill/>
-          </a:ln>
-        </p:spPr>
-        <p:style>
-          <a:lnRef idx="1">
-            <a:schemeClr val="accent1"/>
-          </a:lnRef>
-          <a:fillRef idx="3">
-            <a:schemeClr val="accent1"/>
-          </a:fillRef>
-          <a:effectRef idx="2">
-            <a:schemeClr val="accent1"/>
-          </a:effectRef>
-          <a:fontRef idx="minor">
-            <a:schemeClr val="lt1"/>
-          </a:fontRef>
-        </p:style>
-        <p:txBody>
-          <a:bodyPr rtlCol="0" anchor="ctr"/>
-          <a:lstStyle/>
-          <a:p>
-            <a:pPr algn="ctr"/>
-          </a:p>
-        </p:txBody>
-      </p:sp>
-      <p:pic>
-        <p:nvPicPr>
-          <p:cNvPr id="6" name="Picture 5" descr="notebook-planning-desk-coffee.jpg"/>
-          <p:cNvPicPr>
-            <a:picLocks noChangeAspect="1"/>
-          </p:cNvPicPr>
-          <p:nvPr/>
-        </p:nvPicPr>
-        <p:blipFill>
-          <a:blip r:embed="rId2"/>
-          <a:stretch>
-            <a:fillRect/>
-          </a:stretch>
-        </p:blipFill>
-        <p:spPr>
-          <a:xfrm>
-            <a:off x="5870301" y="1646965"/>
-            <a:ext cx="5864193" cy="3911541"/>
-          </a:xfrm>
-          <a:prstGeom prst="rect">
-            <a:avLst/>
-          </a:prstGeom>
-        </p:spPr>
-      </p:pic>
-      <p:sp>
-        <p:nvSpPr>
-          <p:cNvPr id="7" name="TextBox 6"/>
+          <p:cNvPr id="5" name="TextBox 4"/>
           <p:cNvSpPr txBox="1"/>
           <p:nvPr/>
         </p:nvSpPr>
         <p:spPr>
           <a:xfrm>
-            <a:off x="5870301" y="5961888"/>
-            <a:ext cx="5864193" cy="320040"/>
-          </a:xfrm>
-          <a:prstGeom prst="rect">
-            <a:avLst/>
-          </a:prstGeom>
-          <a:noFill/>
-        </p:spPr>
-        <p:txBody>
-          <a:bodyPr wrap="square">
-            <a:spAutoFit/>
-          </a:bodyPr>
-          <a:lstStyle/>
-          <a:p>
-            <a:pPr algn="ctr"/>
-            <a:r>
-              <a:rPr sz="1100" b="0" i="1">
-                <a:solidFill>
-                  <a:srgbClr val="666666"/>
-                </a:solidFill>
-                <a:latin typeface="Calibri"/>
-              </a:rPr>
-              <a:t>Foto: Cup of  Couple · Pexels</a:t>
-            </a:r>
-          </a:p>
-        </p:txBody>
-      </p:sp>
-      <p:sp>
-        <p:nvSpPr>
-          <p:cNvPr id="8" name="TextBox 7"/>
-          <p:cNvSpPr txBox="1"/>
-          <p:nvPr/>
-        </p:nvSpPr>
-        <p:spPr>
-          <a:xfrm>
-            <a:off x="457200" y="1353312"/>
-            <a:ext cx="5093061" cy="5047488"/>
+            <a:off x="457200" y="1170432"/>
+            <a:ext cx="11277295" cy="5230368"/>
           </a:xfrm>
           <a:prstGeom prst="rect">
             <a:avLst/>
@@ -13332,7 +13045,7 @@
       </p:sp>
       <p:sp>
         <p:nvSpPr>
-          <p:cNvPr id="9" name="TextBox 8"/>
+          <p:cNvPr id="6" name="TextBox 5"/>
           <p:cNvSpPr txBox="1"/>
           <p:nvPr/>
         </p:nvSpPr>
@@ -14365,118 +14078,14 @@
       </p:sp>
       <p:sp>
         <p:nvSpPr>
-          <p:cNvPr id="5" name="Rounded Rectangle 4"/>
-          <p:cNvSpPr/>
-          <p:nvPr/>
-        </p:nvSpPr>
-        <p:spPr>
-          <a:xfrm>
-            <a:off x="5797149" y="1573813"/>
-            <a:ext cx="6010497" cy="4057845"/>
-          </a:xfrm>
-          <a:prstGeom prst="roundRect">
-            <a:avLst>
-              <a:gd name="adj" fmla="val 4000"/>
-            </a:avLst>
-          </a:prstGeom>
-          <a:solidFill>
-            <a:srgbClr val="E8EEF4"/>
-          </a:solidFill>
-          <a:ln>
-            <a:noFill/>
-          </a:ln>
-        </p:spPr>
-        <p:style>
-          <a:lnRef idx="1">
-            <a:schemeClr val="accent1"/>
-          </a:lnRef>
-          <a:fillRef idx="3">
-            <a:schemeClr val="accent1"/>
-          </a:fillRef>
-          <a:effectRef idx="2">
-            <a:schemeClr val="accent1"/>
-          </a:effectRef>
-          <a:fontRef idx="minor">
-            <a:schemeClr val="lt1"/>
-          </a:fontRef>
-        </p:style>
-        <p:txBody>
-          <a:bodyPr rtlCol="0" anchor="ctr"/>
-          <a:lstStyle/>
-          <a:p>
-            <a:pPr algn="ctr"/>
-          </a:p>
-        </p:txBody>
-      </p:sp>
-      <p:pic>
-        <p:nvPicPr>
-          <p:cNvPr id="6" name="Picture 5" descr="map-compass-desk.jpg"/>
-          <p:cNvPicPr>
-            <a:picLocks noChangeAspect="1"/>
-          </p:cNvPicPr>
-          <p:nvPr/>
-        </p:nvPicPr>
-        <p:blipFill>
-          <a:blip r:embed="rId2"/>
-          <a:stretch>
-            <a:fillRect/>
-          </a:stretch>
-        </p:blipFill>
-        <p:spPr>
-          <a:xfrm>
-            <a:off x="5870301" y="1646965"/>
-            <a:ext cx="5864193" cy="3911541"/>
-          </a:xfrm>
-          <a:prstGeom prst="rect">
-            <a:avLst/>
-          </a:prstGeom>
-        </p:spPr>
-      </p:pic>
-      <p:sp>
-        <p:nvSpPr>
-          <p:cNvPr id="7" name="TextBox 6"/>
+          <p:cNvPr id="5" name="TextBox 4"/>
           <p:cNvSpPr txBox="1"/>
           <p:nvPr/>
         </p:nvSpPr>
         <p:spPr>
           <a:xfrm>
-            <a:off x="5870301" y="5961888"/>
-            <a:ext cx="5864193" cy="320040"/>
-          </a:xfrm>
-          <a:prstGeom prst="rect">
-            <a:avLst/>
-          </a:prstGeom>
-          <a:noFill/>
-        </p:spPr>
-        <p:txBody>
-          <a:bodyPr wrap="square">
-            <a:spAutoFit/>
-          </a:bodyPr>
-          <a:lstStyle/>
-          <a:p>
-            <a:pPr algn="ctr"/>
-            <a:r>
-              <a:rPr sz="1100" b="0" i="1">
-                <a:solidFill>
-                  <a:srgbClr val="666666"/>
-                </a:solidFill>
-                <a:latin typeface="Calibri"/>
-              </a:rPr>
-              <a:t>Foto: cottonbro studio · Pexels</a:t>
-            </a:r>
-          </a:p>
-        </p:txBody>
-      </p:sp>
-      <p:sp>
-        <p:nvSpPr>
-          <p:cNvPr id="8" name="TextBox 7"/>
-          <p:cNvSpPr txBox="1"/>
-          <p:nvPr/>
-        </p:nvSpPr>
-        <p:spPr>
-          <a:xfrm>
-            <a:off x="457200" y="1353312"/>
-            <a:ext cx="5093061" cy="5047488"/>
+            <a:off x="457200" y="1170432"/>
+            <a:ext cx="11277295" cy="5230368"/>
           </a:xfrm>
           <a:prstGeom prst="rect">
             <a:avLst/>
@@ -14540,7 +14149,7 @@
       </p:sp>
       <p:sp>
         <p:nvSpPr>
-          <p:cNvPr id="9" name="TextBox 8"/>
+          <p:cNvPr id="6" name="TextBox 5"/>
           <p:cNvSpPr txBox="1"/>
           <p:nvPr/>
         </p:nvSpPr>

--- a/Programacion II/Clases/Clase 4 - Mapas conjuntos e interfaces graficas GUI/Presentacion.pptx
+++ b/Programacion II/Clases/Clase 4 - Mapas conjuntos e interfaces graficas GUI/Presentacion.pptx
@@ -830,6 +830,94 @@
           <a:p>
             <a:r>
               <a:t>Ahora la parte grafica, y aqui empieza el segundo bloque de la clase. Swing es la biblioteca de escritorio de Java y funciona por anidamiento: la ventana es un JFrame, dentro del frame hay un contenedor donde se ponen paneles JPanel, y dentro de los paneles van los componentes visibles como JLabel (texto fijo), JTextField (caja donde el usuario escribe) y JButton (boton). Como se acomodan esos componentes lo decide un layout manager: el JFrame usa BorderLayout por defecto, que reparte la ventana en NORTH, SOUTH, EAST, WEST y CENTER; el JPanel usa FlowLayout, que va poniendo los componentes en fila; y GridLayout arma una cuadricula de filas y columnas. Todo JFrame necesita tres lineas obligatorias o el estudiante creera que su programa no sirve: setDefaultCloseOperation(JFrame.EXIT_ON_CLOSE) para que cerrar la ventana termine el programa, setSize o pack para darle tamano, y setVisible(true) para que aparezca. Ademas, la ventana debe crearse dentro de SwingUtilities.invokeLater porque toda la interfaz de Swing vive en un hilo especial llamado EDT; hacerlo bien desde hoy evita cuelgues raros mas adelante.</a:t>
+            </a:r>
+          </a:p>
+        </p:txBody>
+      </p:sp>
+      <p:sp>
+        <p:nvSpPr>
+          <p:cNvPr id="4" name="Slide Number Placeholder 3"/>
+          <p:cNvSpPr>
+            <a:spLocks noGrp="1"/>
+          </p:cNvSpPr>
+          <p:nvPr>
+            <p:ph type="sldNum" idx="5" sz="quarter"/>
+          </p:nvPr>
+        </p:nvSpPr>
+        <p:spPr/>
+      </p:sp>
+    </p:spTree>
+  </p:cSld>
+  <p:clrMapOvr>
+    <a:masterClrMapping/>
+  </p:clrMapOvr>
+</p:notes>
+</file>
+
+<file path=ppt/notesSlides/notesSlide6.xml><?xml version="1.0" encoding="utf-8"?>
+<p:notes xmlns:a="http://schemas.openxmlformats.org/drawingml/2006/main" xmlns:p="http://schemas.openxmlformats.org/presentationml/2006/main" xmlns:r="http://schemas.openxmlformats.org/officeDocument/2006/relationships">
+  <p:cSld>
+    <p:spTree>
+      <p:nvGrpSpPr>
+        <p:cNvPr id="1" name=""/>
+        <p:cNvGrpSpPr/>
+        <p:nvPr/>
+      </p:nvGrpSpPr>
+      <p:grpSpPr>
+        <a:xfrm>
+          <a:off x="0" y="0"/>
+          <a:ext cx="0" cy="0"/>
+          <a:chOff x="0" y="0"/>
+          <a:chExt cx="0" cy="0"/>
+        </a:xfrm>
+      </p:grpSpPr>
+      <p:sp>
+        <p:nvSpPr>
+          <p:cNvPr id="2" name="Slide Image Placeholder 1"/>
+          <p:cNvSpPr>
+            <a:spLocks noGrp="1"/>
+          </p:cNvSpPr>
+          <p:nvPr>
+            <p:ph type="sldImg" idx="2"/>
+          </p:nvPr>
+        </p:nvSpPr>
+        <p:spPr/>
+      </p:sp>
+      <p:sp>
+        <p:nvSpPr>
+          <p:cNvPr id="3" name="Notes Placeholder 2"/>
+          <p:cNvSpPr>
+            <a:spLocks noGrp="1"/>
+          </p:cNvSpPr>
+          <p:nvPr>
+            <p:ph type="body" idx="3" sz="quarter"/>
+          </p:nvPr>
+        </p:nvSpPr>
+        <p:spPr/>
+        <p:txBody>
+          <a:bodyPr/>
+          <a:lstStyle/>
+          <a:p>
+            <a:r>
+              <a:t>TEXTO COMPLETO DE LA LÁMINA (se proyecta resumido):</a:t>
+            </a:r>
+          </a:p>
+          <a:p/>
+          <a:p>
+            <a:r>
+              <a:t>Herramienta: Visual Studio Code (Java)</a:t>
+            </a:r>
+          </a:p>
+          <a:p/>
+          <a:p>
+            <a:r>
+              <a:t>Demo: El docente busca la ficha H-5000 dentro de un archivo historico de 5.000 expedientes, primero recorriendo un ArrayList y luego con get() sobre un HashMap comparando los nanosegundos, y despues ejecuta la misma busqueda desde una ventana Swing escrita linea por linea.</a:t>
+            </a:r>
+          </a:p>
+          <a:p/>
+          <a:p>
+            <a:r>
+              <a:t>Mismo dominio de la clinica — no otro ejemplo.</a:t>
             </a:r>
           </a:p>
         </p:txBody>
@@ -12393,14 +12481,83 @@
       </p:sp>
       <p:sp>
         <p:nvSpPr>
-          <p:cNvPr id="5" name="TextBox 4"/>
+          <p:cNvPr id="5" name="Rounded Rectangle 4"/>
+          <p:cNvSpPr/>
+          <p:nvPr/>
+        </p:nvSpPr>
+        <p:spPr>
+          <a:xfrm>
+            <a:off x="5797149" y="1343926"/>
+            <a:ext cx="6010497" cy="4837658"/>
+          </a:xfrm>
+          <a:prstGeom prst="roundRect">
+            <a:avLst>
+              <a:gd name="adj" fmla="val 4000"/>
+            </a:avLst>
+          </a:prstGeom>
+          <a:solidFill>
+            <a:srgbClr val="E8EEF4"/>
+          </a:solidFill>
+          <a:ln>
+            <a:noFill/>
+          </a:ln>
+        </p:spPr>
+        <p:style>
+          <a:lnRef idx="1">
+            <a:schemeClr val="accent1"/>
+          </a:lnRef>
+          <a:fillRef idx="3">
+            <a:schemeClr val="accent1"/>
+          </a:fillRef>
+          <a:effectRef idx="2">
+            <a:schemeClr val="accent1"/>
+          </a:effectRef>
+          <a:fontRef idx="minor">
+            <a:schemeClr val="lt1"/>
+          </a:fontRef>
+        </p:style>
+        <p:txBody>
+          <a:bodyPr rtlCol="0" anchor="ctr"/>
+          <a:lstStyle/>
+          <a:p>
+            <a:pPr algn="ctr"/>
+          </a:p>
+        </p:txBody>
+      </p:sp>
+      <p:pic>
+        <p:nvPicPr>
+          <p:cNvPr id="6" name="Picture 5" descr="ilus-demo-paso1.png"/>
+          <p:cNvPicPr>
+            <a:picLocks noChangeAspect="1"/>
+          </p:cNvPicPr>
+          <p:nvPr/>
+        </p:nvPicPr>
+        <p:blipFill>
+          <a:blip r:embed="rId2"/>
+          <a:stretch>
+            <a:fillRect/>
+          </a:stretch>
+        </p:blipFill>
+        <p:spPr>
+          <a:xfrm>
+            <a:off x="5870301" y="1417078"/>
+            <a:ext cx="5864193" cy="4691354"/>
+          </a:xfrm>
+          <a:prstGeom prst="rect">
+            <a:avLst/>
+          </a:prstGeom>
+        </p:spPr>
+      </p:pic>
+      <p:sp>
+        <p:nvSpPr>
+          <p:cNvPr id="7" name="TextBox 6"/>
           <p:cNvSpPr txBox="1"/>
           <p:nvPr/>
         </p:nvSpPr>
         <p:spPr>
           <a:xfrm>
-            <a:off x="457200" y="1170432"/>
-            <a:ext cx="11277295" cy="5230368"/>
+            <a:off x="457200" y="1353312"/>
+            <a:ext cx="5093061" cy="5047488"/>
           </a:xfrm>
           <a:prstGeom prst="rect">
             <a:avLst/>
@@ -12477,7 +12634,7 @@
                 </a:solidFill>
                 <a:latin typeface="Calibri"/>
               </a:rPr>
-              <a:t> El docente busca la ficha H-5000 dentro de un archivo historico de 5.000 expedientes, primero recorriendo un ArrayList y luego con get() sobre un HashMap comparando los nanosegundos, y despues ejecuta la misma busqueda desde una ventana Swing escrita linea por linea.</a:t>
+              <a:t> El docente busca la ficha H-5000 dentro de un archivo historico de 5.000 expedientes, primero recorriendo un ArrayList y luego con get()…</a:t>
             </a:r>
           </a:p>
           <a:p>
@@ -12500,7 +12657,7 @@
       </p:sp>
       <p:sp>
         <p:nvSpPr>
-          <p:cNvPr id="6" name="TextBox 5"/>
+          <p:cNvPr id="8" name="TextBox 7"/>
           <p:cNvSpPr txBox="1"/>
           <p:nvPr/>
         </p:nvSpPr>
@@ -14078,14 +14235,83 @@
       </p:sp>
       <p:sp>
         <p:nvSpPr>
-          <p:cNvPr id="5" name="TextBox 4"/>
+          <p:cNvPr id="5" name="Rounded Rectangle 4"/>
+          <p:cNvSpPr/>
+          <p:nvPr/>
+        </p:nvSpPr>
+        <p:spPr>
+          <a:xfrm>
+            <a:off x="5797149" y="1343926"/>
+            <a:ext cx="6010497" cy="4837658"/>
+          </a:xfrm>
+          <a:prstGeom prst="roundRect">
+            <a:avLst>
+              <a:gd name="adj" fmla="val 4000"/>
+            </a:avLst>
+          </a:prstGeom>
+          <a:solidFill>
+            <a:srgbClr val="E8EEF4"/>
+          </a:solidFill>
+          <a:ln>
+            <a:noFill/>
+          </a:ln>
+        </p:spPr>
+        <p:style>
+          <a:lnRef idx="1">
+            <a:schemeClr val="accent1"/>
+          </a:lnRef>
+          <a:fillRef idx="3">
+            <a:schemeClr val="accent1"/>
+          </a:fillRef>
+          <a:effectRef idx="2">
+            <a:schemeClr val="accent1"/>
+          </a:effectRef>
+          <a:fontRef idx="minor">
+            <a:schemeClr val="lt1"/>
+          </a:fontRef>
+        </p:style>
+        <p:txBody>
+          <a:bodyPr rtlCol="0" anchor="ctr"/>
+          <a:lstStyle/>
+          <a:p>
+            <a:pPr algn="ctr"/>
+          </a:p>
+        </p:txBody>
+      </p:sp>
+      <p:pic>
+        <p:nvPicPr>
+          <p:cNvPr id="6" name="Picture 5" descr="ilus-objetivo-paso1.png"/>
+          <p:cNvPicPr>
+            <a:picLocks noChangeAspect="1"/>
+          </p:cNvPicPr>
+          <p:nvPr/>
+        </p:nvPicPr>
+        <p:blipFill>
+          <a:blip r:embed="rId2"/>
+          <a:stretch>
+            <a:fillRect/>
+          </a:stretch>
+        </p:blipFill>
+        <p:spPr>
+          <a:xfrm>
+            <a:off x="5870301" y="1417078"/>
+            <a:ext cx="5864193" cy="4691354"/>
+          </a:xfrm>
+          <a:prstGeom prst="rect">
+            <a:avLst/>
+          </a:prstGeom>
+        </p:spPr>
+      </p:pic>
+      <p:sp>
+        <p:nvSpPr>
+          <p:cNvPr id="7" name="TextBox 6"/>
           <p:cNvSpPr txBox="1"/>
           <p:nvPr/>
         </p:nvSpPr>
         <p:spPr>
           <a:xfrm>
-            <a:off x="457200" y="1170432"/>
-            <a:ext cx="11277295" cy="5230368"/>
+            <a:off x="457200" y="1353312"/>
+            <a:ext cx="5093061" cy="5047488"/>
           </a:xfrm>
           <a:prstGeom prst="rect">
             <a:avLst/>
@@ -14149,7 +14375,7 @@
       </p:sp>
       <p:sp>
         <p:nvSpPr>
-          <p:cNvPr id="6" name="TextBox 5"/>
+          <p:cNvPr id="8" name="TextBox 7"/>
           <p:cNvSpPr txBox="1"/>
           <p:nvPr/>
         </p:nvSpPr>
@@ -19586,9 +19812,33 @@
           </a:prstGeom>
         </p:spPr>
       </p:pic>
-      <p:sp>
-        <p:nvSpPr>
-          <p:cNvPr id="13" name="TextBox 12"/>
+      <p:pic>
+        <p:nvPicPr>
+          <p:cNvPr id="9" name="Picture 8" descr="map-put-get-paso4.png"/>
+          <p:cNvPicPr>
+            <a:picLocks noChangeAspect="1"/>
+          </p:cNvPicPr>
+          <p:nvPr/>
+        </p:nvPicPr>
+        <p:blipFill>
+          <a:blip r:embed="rId5"/>
+          <a:stretch>
+            <a:fillRect/>
+          </a:stretch>
+        </p:blipFill>
+        <p:spPr>
+          <a:xfrm>
+            <a:off x="5876318" y="1261872"/>
+            <a:ext cx="5852160" cy="4681728"/>
+          </a:xfrm>
+          <a:prstGeom prst="rect">
+            <a:avLst/>
+          </a:prstGeom>
+        </p:spPr>
+      </p:pic>
+      <p:sp>
+        <p:nvSpPr>
+          <p:cNvPr id="18" name="TextBox 17"/>
           <p:cNvSpPr txBox="1"/>
           <p:nvPr/>
         </p:nvSpPr>
@@ -19623,7 +19873,7 @@
       </p:sp>
       <p:sp>
         <p:nvSpPr>
-          <p:cNvPr id="14" name="TextBox 13"/>
+          <p:cNvPr id="19" name="TextBox 18"/>
           <p:cNvSpPr txBox="1"/>
           <p:nvPr/>
         </p:nvSpPr>
@@ -19710,7 +19960,7 @@
       </p:sp>
       <p:sp>
         <p:nvSpPr>
-          <p:cNvPr id="15" name="TextBox 14"/>
+          <p:cNvPr id="20" name="TextBox 19"/>
           <p:cNvSpPr txBox="1"/>
           <p:nvPr/>
         </p:nvSpPr>
@@ -19850,6 +20100,59 @@
                                         <p:cTn id="12" dur="450"/>
                                         <p:tgtEl>
                                           <p:spTgt spid="8"/>
+                                        </p:tgtEl>
+                                      </p:cBhvr>
+                                    </p:animEffect>
+                                  </p:childTnLst>
+                                </p:cTn>
+                              </p:par>
+                            </p:childTnLst>
+                          </p:cTn>
+                        </p:par>
+                      </p:childTnLst>
+                    </p:cTn>
+                  </p:par>
+                  <p:par>
+                    <p:cTn id="13" fill="hold">
+                      <p:stCondLst>
+                        <p:cond delay="indefinite"/>
+                      </p:stCondLst>
+                      <p:childTnLst>
+                        <p:par>
+                          <p:cTn id="14" fill="hold">
+                            <p:stCondLst>
+                              <p:cond delay="0"/>
+                            </p:stCondLst>
+                            <p:childTnLst>
+                              <p:par>
+                                <p:cTn id="15" presetID="10" presetClass="entr" presetSubtype="0" fill="hold" nodeType="clickEffect">
+                                  <p:stCondLst>
+                                    <p:cond delay="0"/>
+                                  </p:stCondLst>
+                                  <p:childTnLst>
+                                    <p:set>
+                                      <p:cBhvr>
+                                        <p:cTn id="16" dur="1" fill="hold">
+                                          <p:stCondLst>
+                                            <p:cond delay="0"/>
+                                          </p:stCondLst>
+                                        </p:cTn>
+                                        <p:tgtEl>
+                                          <p:spTgt spid="9"/>
+                                        </p:tgtEl>
+                                        <p:attrNameLst>
+                                          <p:attrName>style.visibility</p:attrName>
+                                        </p:attrNameLst>
+                                      </p:cBhvr>
+                                      <p:to>
+                                        <p:strVal val="visible"/>
+                                      </p:to>
+                                    </p:set>
+                                    <p:animEffect transition="in" filter="fade">
+                                      <p:cBhvr>
+                                        <p:cTn id="17" dur="450"/>
+                                        <p:tgtEl>
+                                          <p:spTgt spid="9"/>
                                         </p:tgtEl>
                                       </p:cBhvr>
                                     </p:animEffect>

--- a/Programacion II/Clases/Clase 4 - Mapas conjuntos e interfaces graficas GUI/Presentacion.pptx
+++ b/Programacion II/Clases/Clase 4 - Mapas conjuntos e interfaces graficas GUI/Presentacion.pptx
@@ -4455,7 +4455,7 @@
         <p:spPr>
           <a:xfrm>
             <a:off x="457200" y="1261872"/>
-            <a:ext cx="11277295" cy="4506872"/>
+            <a:ext cx="11277295" cy="3716223"/>
           </a:xfrm>
           <a:prstGeom prst="roundRect">
             <a:avLst>
@@ -4704,8 +4704,8 @@
         </p:nvSpPr>
         <p:spPr>
           <a:xfrm>
-            <a:off x="1188720" y="1719072"/>
-            <a:ext cx="10271455" cy="3912512"/>
+            <a:off x="685800" y="1719072"/>
+            <a:ext cx="502920" cy="3121863"/>
           </a:xfrm>
           <a:prstGeom prst="rect">
             <a:avLst/>
@@ -4718,620 +4718,179 @@
           </a:bodyPr>
           <a:lstStyle/>
           <a:p>
-            <a:pPr>
+            <a:pPr algn="r">
               <a:spcAft>
-                <a:spcPts val="385"/>
+                <a:spcPts val="321"/>
               </a:spcAft>
             </a:pPr>
             <a:r>
-              <a:rPr sz="1800" i="1" b="0">
-                <a:solidFill>
-                  <a:srgbClr val="6A9955"/>
-                </a:solidFill>
-                <a:latin typeface="Consolas"/>
-              </a:rPr>
-              <a:t>/** Regla de negocio: avisar antes de que put reemplace en silencio. */</a:t>
-            </a:r>
-          </a:p>
-          <a:p>
-            <a:pPr>
+              <a:rPr sz="1500" i="0" b="0">
+                <a:solidFill>
+                  <a:srgbClr val="858585"/>
+                </a:solidFill>
+                <a:latin typeface="Consolas"/>
+              </a:rPr>
+              <a:t>1</a:t>
+            </a:r>
+          </a:p>
+          <a:p>
+            <a:pPr algn="r">
               <a:spcAft>
-                <a:spcPts val="385"/>
+                <a:spcPts val="321"/>
               </a:spcAft>
             </a:pPr>
             <a:r>
-              <a:rPr sz="1800" i="0" b="0">
-                <a:solidFill>
-                  <a:srgbClr val="569CD6"/>
-                </a:solidFill>
-                <a:latin typeface="Consolas"/>
-              </a:rPr>
-              <a:t>private</a:t>
-            </a:r>
-            <a:r>
-              <a:rPr sz="1800" i="0" b="0">
-                <a:solidFill>
-                  <a:srgbClr val="D4D4D4"/>
-                </a:solidFill>
-                <a:latin typeface="Consolas"/>
-              </a:rPr>
-              <a:t> </a:t>
-            </a:r>
-            <a:r>
-              <a:rPr sz="1800" i="0" b="0">
-                <a:solidFill>
-                  <a:srgbClr val="569CD6"/>
-                </a:solidFill>
-                <a:latin typeface="Consolas"/>
-              </a:rPr>
-              <a:t>void</a:t>
-            </a:r>
-            <a:r>
-              <a:rPr sz="1800" i="0" b="0">
-                <a:solidFill>
-                  <a:srgbClr val="D4D4D4"/>
-                </a:solidFill>
-                <a:latin typeface="Consolas"/>
-              </a:rPr>
-              <a:t> </a:t>
-            </a:r>
-            <a:r>
-              <a:rPr sz="1800" i="0" b="0">
-                <a:solidFill>
-                  <a:srgbClr val="DCDCAA"/>
-                </a:solidFill>
-                <a:latin typeface="Consolas"/>
-              </a:rPr>
-              <a:t>guardar</a:t>
-            </a:r>
-            <a:r>
-              <a:rPr sz="1800" i="0" b="0">
-                <a:solidFill>
-                  <a:srgbClr val="D4D4D4"/>
-                </a:solidFill>
-                <a:latin typeface="Consolas"/>
-              </a:rPr>
-              <a:t>(</a:t>
-            </a:r>
-            <a:r>
-              <a:rPr sz="1800" i="0" b="0">
-                <a:solidFill>
-                  <a:srgbClr val="D4D4D4"/>
-                </a:solidFill>
-                <a:latin typeface="Consolas"/>
-              </a:rPr>
-              <a:t>Expediente</a:t>
-            </a:r>
-            <a:r>
-              <a:rPr sz="1800" i="0" b="0">
-                <a:solidFill>
-                  <a:srgbClr val="D4D4D4"/>
-                </a:solidFill>
-                <a:latin typeface="Consolas"/>
-              </a:rPr>
-              <a:t> </a:t>
-            </a:r>
-            <a:r>
-              <a:rPr sz="1800" i="0" b="0">
-                <a:solidFill>
-                  <a:srgbClr val="D4D4D4"/>
-                </a:solidFill>
-                <a:latin typeface="Consolas"/>
-              </a:rPr>
-              <a:t>e</a:t>
-            </a:r>
-            <a:r>
-              <a:rPr sz="1800" i="0" b="0">
-                <a:solidFill>
-                  <a:srgbClr val="D4D4D4"/>
-                </a:solidFill>
-                <a:latin typeface="Consolas"/>
-              </a:rPr>
-              <a:t>) {</a:t>
-            </a:r>
-          </a:p>
-          <a:p>
-            <a:pPr>
+              <a:rPr sz="1500" i="0" b="0">
+                <a:solidFill>
+                  <a:srgbClr val="858585"/>
+                </a:solidFill>
+                <a:latin typeface="Consolas"/>
+              </a:rPr>
+              <a:t>2</a:t>
+            </a:r>
+          </a:p>
+          <a:p>
+            <a:pPr algn="r">
               <a:spcAft>
-                <a:spcPts val="385"/>
+                <a:spcPts val="321"/>
               </a:spcAft>
             </a:pPr>
             <a:r>
-              <a:rPr sz="1800" i="0" b="0">
-                <a:solidFill>
-                  <a:srgbClr val="D4D4D4"/>
-                </a:solidFill>
-                <a:latin typeface="Consolas"/>
-              </a:rPr>
-              <a:t>    </a:t>
-            </a:r>
-            <a:r>
-              <a:rPr sz="1800" i="0" b="0">
-                <a:solidFill>
-                  <a:srgbClr val="569CD6"/>
-                </a:solidFill>
-                <a:latin typeface="Consolas"/>
-              </a:rPr>
-              <a:t>if</a:t>
-            </a:r>
-            <a:r>
-              <a:rPr sz="1800" i="0" b="0">
-                <a:solidFill>
-                  <a:srgbClr val="D4D4D4"/>
-                </a:solidFill>
-                <a:latin typeface="Consolas"/>
-              </a:rPr>
-              <a:t> (</a:t>
-            </a:r>
-            <a:r>
-              <a:rPr sz="1800" i="0" b="0">
-                <a:solidFill>
-                  <a:srgbClr val="DCDCAA"/>
-                </a:solidFill>
-                <a:latin typeface="Consolas"/>
-              </a:rPr>
-              <a:t>expedientes.containsKey</a:t>
-            </a:r>
-            <a:r>
-              <a:rPr sz="1800" i="0" b="0">
-                <a:solidFill>
-                  <a:srgbClr val="D4D4D4"/>
-                </a:solidFill>
-                <a:latin typeface="Consolas"/>
-              </a:rPr>
-              <a:t>(</a:t>
-            </a:r>
-            <a:r>
-              <a:rPr sz="1800" i="0" b="0">
-                <a:solidFill>
-                  <a:srgbClr val="DCDCAA"/>
-                </a:solidFill>
-                <a:latin typeface="Consolas"/>
-              </a:rPr>
-              <a:t>e.getId</a:t>
-            </a:r>
-            <a:r>
-              <a:rPr sz="1800" i="0" b="0">
-                <a:solidFill>
-                  <a:srgbClr val="D4D4D4"/>
-                </a:solidFill>
-                <a:latin typeface="Consolas"/>
-              </a:rPr>
-              <a:t>())) {</a:t>
-            </a:r>
-          </a:p>
-          <a:p>
-            <a:pPr>
+              <a:rPr sz="1500" i="0" b="0">
+                <a:solidFill>
+                  <a:srgbClr val="858585"/>
+                </a:solidFill>
+                <a:latin typeface="Consolas"/>
+              </a:rPr>
+              <a:t>3</a:t>
+            </a:r>
+          </a:p>
+          <a:p>
+            <a:pPr algn="r">
               <a:spcAft>
-                <a:spcPts val="385"/>
+                <a:spcPts val="321"/>
               </a:spcAft>
             </a:pPr>
             <a:r>
-              <a:rPr sz="1800" i="0" b="0">
-                <a:solidFill>
-                  <a:srgbClr val="D4D4D4"/>
-                </a:solidFill>
-                <a:latin typeface="Consolas"/>
-              </a:rPr>
-              <a:t>        </a:t>
-            </a:r>
-            <a:r>
-              <a:rPr sz="1800" i="0" b="0">
-                <a:solidFill>
-                  <a:srgbClr val="DCDCAA"/>
-                </a:solidFill>
-                <a:latin typeface="Consolas"/>
-              </a:rPr>
-              <a:t>System.out.println</a:t>
-            </a:r>
-            <a:r>
-              <a:rPr sz="1800" i="0" b="0">
-                <a:solidFill>
-                  <a:srgbClr val="D4D4D4"/>
-                </a:solidFill>
-                <a:latin typeface="Consolas"/>
-              </a:rPr>
-              <a:t>(</a:t>
-            </a:r>
-            <a:r>
-              <a:rPr sz="1800" i="0" b="0">
-                <a:solidFill>
-                  <a:srgbClr val="CE9178"/>
-                </a:solidFill>
-                <a:latin typeface="Consolas"/>
-              </a:rPr>
-              <a:t>"Atencion: el ID "</a:t>
-            </a:r>
-            <a:r>
-              <a:rPr sz="1800" i="0" b="0">
-                <a:solidFill>
-                  <a:srgbClr val="D4D4D4"/>
-                </a:solidFill>
-                <a:latin typeface="Consolas"/>
-              </a:rPr>
-              <a:t> + </a:t>
-            </a:r>
-            <a:r>
-              <a:rPr sz="1800" i="0" b="0">
-                <a:solidFill>
-                  <a:srgbClr val="DCDCAA"/>
-                </a:solidFill>
-                <a:latin typeface="Consolas"/>
-              </a:rPr>
-              <a:t>e.getId</a:t>
-            </a:r>
-            <a:r>
-              <a:rPr sz="1800" i="0" b="0">
-                <a:solidFill>
-                  <a:srgbClr val="D4D4D4"/>
-                </a:solidFill>
-                <a:latin typeface="Consolas"/>
-              </a:rPr>
-              <a:t>() + </a:t>
-            </a:r>
-            <a:r>
-              <a:rPr sz="1800" i="0" b="0">
-                <a:solidFill>
-                  <a:srgbClr val="CE9178"/>
-                </a:solidFill>
-                <a:latin typeface="Consolas"/>
-              </a:rPr>
-              <a:t>" ya existia y sera reemplazado"</a:t>
-            </a:r>
-            <a:r>
-              <a:rPr sz="1800" i="0" b="0">
-                <a:solidFill>
-                  <a:srgbClr val="D4D4D4"/>
-                </a:solidFill>
-                <a:latin typeface="Consolas"/>
-              </a:rPr>
-              <a:t>);</a:t>
-            </a:r>
-          </a:p>
-          <a:p>
-            <a:pPr>
+              <a:rPr sz="1500" i="0" b="0">
+                <a:solidFill>
+                  <a:srgbClr val="858585"/>
+                </a:solidFill>
+                <a:latin typeface="Consolas"/>
+              </a:rPr>
+              <a:t>4</a:t>
+            </a:r>
+          </a:p>
+          <a:p>
+            <a:pPr algn="r">
               <a:spcAft>
-                <a:spcPts val="385"/>
+                <a:spcPts val="321"/>
               </a:spcAft>
             </a:pPr>
             <a:r>
-              <a:rPr sz="1800" i="0" b="0">
-                <a:solidFill>
-                  <a:srgbClr val="D4D4D4"/>
-                </a:solidFill>
-                <a:latin typeface="Consolas"/>
-              </a:rPr>
-              <a:t>    }</a:t>
-            </a:r>
-          </a:p>
-          <a:p>
-            <a:pPr>
+              <a:rPr sz="1500" i="0" b="0">
+                <a:solidFill>
+                  <a:srgbClr val="858585"/>
+                </a:solidFill>
+                <a:latin typeface="Consolas"/>
+              </a:rPr>
+              <a:t>5</a:t>
+            </a:r>
+          </a:p>
+          <a:p>
+            <a:pPr algn="r">
               <a:spcAft>
-                <a:spcPts val="385"/>
+                <a:spcPts val="321"/>
               </a:spcAft>
             </a:pPr>
             <a:r>
-              <a:rPr sz="1800" i="0" b="0">
-                <a:solidFill>
-                  <a:srgbClr val="D4D4D4"/>
-                </a:solidFill>
-                <a:latin typeface="Consolas"/>
-              </a:rPr>
-              <a:t>    </a:t>
-            </a:r>
-            <a:r>
-              <a:rPr sz="1800" i="0" b="0">
-                <a:solidFill>
-                  <a:srgbClr val="DCDCAA"/>
-                </a:solidFill>
-                <a:latin typeface="Consolas"/>
-              </a:rPr>
-              <a:t>expedientes.put</a:t>
-            </a:r>
-            <a:r>
-              <a:rPr sz="1800" i="0" b="0">
-                <a:solidFill>
-                  <a:srgbClr val="D4D4D4"/>
-                </a:solidFill>
-                <a:latin typeface="Consolas"/>
-              </a:rPr>
-              <a:t>(</a:t>
-            </a:r>
-            <a:r>
-              <a:rPr sz="1800" i="0" b="0">
-                <a:solidFill>
-                  <a:srgbClr val="DCDCAA"/>
-                </a:solidFill>
-                <a:latin typeface="Consolas"/>
-              </a:rPr>
-              <a:t>e.getId</a:t>
-            </a:r>
-            <a:r>
-              <a:rPr sz="1800" i="0" b="0">
-                <a:solidFill>
-                  <a:srgbClr val="D4D4D4"/>
-                </a:solidFill>
-                <a:latin typeface="Consolas"/>
-              </a:rPr>
-              <a:t>(), </a:t>
-            </a:r>
-            <a:r>
-              <a:rPr sz="1800" i="0" b="0">
-                <a:solidFill>
-                  <a:srgbClr val="D4D4D4"/>
-                </a:solidFill>
-                <a:latin typeface="Consolas"/>
-              </a:rPr>
-              <a:t>e</a:t>
-            </a:r>
-            <a:r>
-              <a:rPr sz="1800" i="0" b="0">
-                <a:solidFill>
-                  <a:srgbClr val="D4D4D4"/>
-                </a:solidFill>
-                <a:latin typeface="Consolas"/>
-              </a:rPr>
-              <a:t>);              </a:t>
-            </a:r>
-            <a:r>
-              <a:rPr sz="1800" i="1" b="0">
-                <a:solidFill>
-                  <a:srgbClr val="6A9955"/>
-                </a:solidFill>
-                <a:latin typeface="Consolas"/>
-              </a:rPr>
-              <a:t>// clave -&gt; valor</a:t>
-            </a:r>
-          </a:p>
-          <a:p>
-            <a:pPr>
+              <a:rPr sz="1500" i="0" b="0">
+                <a:solidFill>
+                  <a:srgbClr val="858585"/>
+                </a:solidFill>
+                <a:latin typeface="Consolas"/>
+              </a:rPr>
+              <a:t>6</a:t>
+            </a:r>
+          </a:p>
+          <a:p>
+            <a:pPr algn="r">
               <a:spcAft>
-                <a:spcPts val="385"/>
+                <a:spcPts val="321"/>
               </a:spcAft>
             </a:pPr>
             <a:r>
-              <a:rPr sz="1800" i="0" b="0">
-                <a:solidFill>
-                  <a:srgbClr val="D4D4D4"/>
-                </a:solidFill>
-                <a:latin typeface="Consolas"/>
-              </a:rPr>
-              <a:t>    </a:t>
-            </a:r>
-            <a:r>
-              <a:rPr sz="1800" i="0" b="0">
-                <a:solidFill>
-                  <a:srgbClr val="4EC9B0"/>
-                </a:solidFill>
-                <a:latin typeface="Consolas"/>
-              </a:rPr>
-              <a:t>boolean</a:t>
-            </a:r>
-            <a:r>
-              <a:rPr sz="1800" i="0" b="0">
-                <a:solidFill>
-                  <a:srgbClr val="D4D4D4"/>
-                </a:solidFill>
-                <a:latin typeface="Consolas"/>
-              </a:rPr>
-              <a:t> </a:t>
-            </a:r>
-            <a:r>
-              <a:rPr sz="1800" i="0" b="0">
-                <a:solidFill>
-                  <a:srgbClr val="D4D4D4"/>
-                </a:solidFill>
-                <a:latin typeface="Consolas"/>
-              </a:rPr>
-              <a:t>razaNueva</a:t>
-            </a:r>
-            <a:r>
-              <a:rPr sz="1800" i="0" b="0">
-                <a:solidFill>
-                  <a:srgbClr val="D4D4D4"/>
-                </a:solidFill>
-                <a:latin typeface="Consolas"/>
-              </a:rPr>
-              <a:t> = </a:t>
-            </a:r>
-            <a:r>
-              <a:rPr sz="1800" i="0" b="0">
-                <a:solidFill>
-                  <a:srgbClr val="DCDCAA"/>
-                </a:solidFill>
-                <a:latin typeface="Consolas"/>
-              </a:rPr>
-              <a:t>razas.add</a:t>
-            </a:r>
-            <a:r>
-              <a:rPr sz="1800" i="0" b="0">
-                <a:solidFill>
-                  <a:srgbClr val="D4D4D4"/>
-                </a:solidFill>
-                <a:latin typeface="Consolas"/>
-              </a:rPr>
-              <a:t>(</a:t>
-            </a:r>
-            <a:r>
-              <a:rPr sz="1800" i="0" b="0">
-                <a:solidFill>
-                  <a:srgbClr val="DCDCAA"/>
-                </a:solidFill>
-                <a:latin typeface="Consolas"/>
-              </a:rPr>
-              <a:t>e.getRaza</a:t>
-            </a:r>
-            <a:r>
-              <a:rPr sz="1800" i="0" b="0">
-                <a:solidFill>
-                  <a:srgbClr val="D4D4D4"/>
-                </a:solidFill>
-                <a:latin typeface="Consolas"/>
-              </a:rPr>
-              <a:t>()); </a:t>
-            </a:r>
-            <a:r>
-              <a:rPr sz="1800" i="1" b="0">
-                <a:solidFill>
-                  <a:srgbClr val="6A9955"/>
-                </a:solidFill>
-                <a:latin typeface="Consolas"/>
-              </a:rPr>
-              <a:t>// add devuelve false si ya estaba</a:t>
-            </a:r>
-          </a:p>
-          <a:p>
-            <a:pPr>
+              <a:rPr sz="1500" i="0" b="0">
+                <a:solidFill>
+                  <a:srgbClr val="858585"/>
+                </a:solidFill>
+                <a:latin typeface="Consolas"/>
+              </a:rPr>
+              <a:t>7</a:t>
+            </a:r>
+          </a:p>
+          <a:p>
+            <a:pPr algn="r">
               <a:spcAft>
-                <a:spcPts val="385"/>
+                <a:spcPts val="321"/>
               </a:spcAft>
             </a:pPr>
             <a:r>
-              <a:rPr sz="1800" i="0" b="0">
-                <a:solidFill>
-                  <a:srgbClr val="D4D4D4"/>
-                </a:solidFill>
-                <a:latin typeface="Consolas"/>
-              </a:rPr>
-              <a:t>    </a:t>
-            </a:r>
-            <a:r>
-              <a:rPr sz="1800" i="0" b="0">
-                <a:solidFill>
-                  <a:srgbClr val="569CD6"/>
-                </a:solidFill>
-                <a:latin typeface="Consolas"/>
-              </a:rPr>
-              <a:t>if</a:t>
-            </a:r>
-            <a:r>
-              <a:rPr sz="1800" i="0" b="0">
-                <a:solidFill>
-                  <a:srgbClr val="D4D4D4"/>
-                </a:solidFill>
-                <a:latin typeface="Consolas"/>
-              </a:rPr>
-              <a:t> (!</a:t>
-            </a:r>
-            <a:r>
-              <a:rPr sz="1800" i="0" b="0">
-                <a:solidFill>
-                  <a:srgbClr val="D4D4D4"/>
-                </a:solidFill>
-                <a:latin typeface="Consolas"/>
-              </a:rPr>
-              <a:t>razaNueva</a:t>
-            </a:r>
-            <a:r>
-              <a:rPr sz="1800" i="0" b="0">
-                <a:solidFill>
-                  <a:srgbClr val="D4D4D4"/>
-                </a:solidFill>
-                <a:latin typeface="Consolas"/>
-              </a:rPr>
-              <a:t>) {</a:t>
-            </a:r>
-          </a:p>
-          <a:p>
-            <a:pPr>
+              <a:rPr sz="1500" i="0" b="0">
+                <a:solidFill>
+                  <a:srgbClr val="858585"/>
+                </a:solidFill>
+                <a:latin typeface="Consolas"/>
+              </a:rPr>
+              <a:t>8</a:t>
+            </a:r>
+          </a:p>
+          <a:p>
+            <a:pPr algn="r">
               <a:spcAft>
-                <a:spcPts val="385"/>
+                <a:spcPts val="321"/>
               </a:spcAft>
             </a:pPr>
             <a:r>
-              <a:rPr sz="1800" i="0" b="0">
-                <a:solidFill>
-                  <a:srgbClr val="D4D4D4"/>
-                </a:solidFill>
-                <a:latin typeface="Consolas"/>
-              </a:rPr>
-              <a:t>        </a:t>
-            </a:r>
-            <a:r>
-              <a:rPr sz="1800" i="0" b="0">
-                <a:solidFill>
-                  <a:srgbClr val="DCDCAA"/>
-                </a:solidFill>
-                <a:latin typeface="Consolas"/>
-              </a:rPr>
-              <a:t>System.out.println</a:t>
-            </a:r>
-            <a:r>
-              <a:rPr sz="1800" i="0" b="0">
-                <a:solidFill>
-                  <a:srgbClr val="D4D4D4"/>
-                </a:solidFill>
-                <a:latin typeface="Consolas"/>
-              </a:rPr>
-              <a:t>(</a:t>
-            </a:r>
-            <a:r>
-              <a:rPr sz="1800" i="0" b="0">
-                <a:solidFill>
-                  <a:srgbClr val="CE9178"/>
-                </a:solidFill>
-                <a:latin typeface="Consolas"/>
-              </a:rPr>
-              <a:t>"Raza ya registrada: "</a:t>
-            </a:r>
-            <a:r>
-              <a:rPr sz="1800" i="0" b="0">
-                <a:solidFill>
-                  <a:srgbClr val="D4D4D4"/>
-                </a:solidFill>
-                <a:latin typeface="Consolas"/>
-              </a:rPr>
-              <a:t> + </a:t>
-            </a:r>
-            <a:r>
-              <a:rPr sz="1800" i="0" b="0">
-                <a:solidFill>
-                  <a:srgbClr val="DCDCAA"/>
-                </a:solidFill>
-                <a:latin typeface="Consolas"/>
-              </a:rPr>
-              <a:t>e.getRaza</a:t>
-            </a:r>
-            <a:r>
-              <a:rPr sz="1800" i="0" b="0">
-                <a:solidFill>
-                  <a:srgbClr val="D4D4D4"/>
-                </a:solidFill>
-                <a:latin typeface="Consolas"/>
-              </a:rPr>
-              <a:t>());</a:t>
-            </a:r>
-          </a:p>
-          <a:p>
-            <a:pPr>
+              <a:rPr sz="1500" i="0" b="0">
+                <a:solidFill>
+                  <a:srgbClr val="858585"/>
+                </a:solidFill>
+                <a:latin typeface="Consolas"/>
+              </a:rPr>
+              <a:t>9</a:t>
+            </a:r>
+          </a:p>
+          <a:p>
+            <a:pPr algn="r">
               <a:spcAft>
-                <a:spcPts val="385"/>
+                <a:spcPts val="321"/>
               </a:spcAft>
             </a:pPr>
             <a:r>
-              <a:rPr sz="1800" i="0" b="0">
-                <a:solidFill>
-                  <a:srgbClr val="D4D4D4"/>
-                </a:solidFill>
-                <a:latin typeface="Consolas"/>
-              </a:rPr>
-              <a:t>    }</a:t>
-            </a:r>
-          </a:p>
-          <a:p>
-            <a:pPr>
+              <a:rPr sz="1500" i="0" b="0">
+                <a:solidFill>
+                  <a:srgbClr val="858585"/>
+                </a:solidFill>
+                <a:latin typeface="Consolas"/>
+              </a:rPr>
+              <a:t>10</a:t>
+            </a:r>
+          </a:p>
+          <a:p>
+            <a:pPr algn="r">
               <a:spcAft>
-                <a:spcPts val="385"/>
+                <a:spcPts val="321"/>
               </a:spcAft>
             </a:pPr>
             <a:r>
-              <a:rPr sz="1800" i="0" b="0">
-                <a:solidFill>
-                  <a:srgbClr val="D4D4D4"/>
-                </a:solidFill>
-                <a:latin typeface="Consolas"/>
-              </a:rPr>
-              <a:t>}</a:t>
+              <a:rPr sz="1500" i="0" b="0">
+                <a:solidFill>
+                  <a:srgbClr val="858585"/>
+                </a:solidFill>
+                <a:latin typeface="Consolas"/>
+              </a:rPr>
+              <a:t>11</a:t>
             </a:r>
           </a:p>
         </p:txBody>
@@ -5344,8 +4903,8 @@
         </p:nvSpPr>
         <p:spPr>
           <a:xfrm>
-            <a:off x="457200" y="6035040"/>
-            <a:ext cx="11277295" cy="365760"/>
+            <a:off x="1188720" y="1719072"/>
+            <a:ext cx="10271455" cy="3121863"/>
           </a:xfrm>
           <a:prstGeom prst="rect">
             <a:avLst/>
@@ -5358,6 +4917,646 @@
           </a:bodyPr>
           <a:lstStyle/>
           <a:p>
+            <a:pPr>
+              <a:spcAft>
+                <a:spcPts val="321"/>
+              </a:spcAft>
+            </a:pPr>
+            <a:r>
+              <a:rPr sz="1500" i="1" b="0">
+                <a:solidFill>
+                  <a:srgbClr val="6A9955"/>
+                </a:solidFill>
+                <a:latin typeface="Consolas"/>
+              </a:rPr>
+              <a:t>/** Regla de negocio: avisar antes de que put reemplace en silencio. */</a:t>
+            </a:r>
+          </a:p>
+          <a:p>
+            <a:pPr>
+              <a:spcAft>
+                <a:spcPts val="321"/>
+              </a:spcAft>
+            </a:pPr>
+            <a:r>
+              <a:rPr sz="1500" i="0" b="0">
+                <a:solidFill>
+                  <a:srgbClr val="569CD6"/>
+                </a:solidFill>
+                <a:latin typeface="Consolas"/>
+              </a:rPr>
+              <a:t>private</a:t>
+            </a:r>
+            <a:r>
+              <a:rPr sz="1500" i="0" b="0">
+                <a:solidFill>
+                  <a:srgbClr val="D4D4D4"/>
+                </a:solidFill>
+                <a:latin typeface="Consolas"/>
+              </a:rPr>
+              <a:t> </a:t>
+            </a:r>
+            <a:r>
+              <a:rPr sz="1500" i="0" b="0">
+                <a:solidFill>
+                  <a:srgbClr val="569CD6"/>
+                </a:solidFill>
+                <a:latin typeface="Consolas"/>
+              </a:rPr>
+              <a:t>void</a:t>
+            </a:r>
+            <a:r>
+              <a:rPr sz="1500" i="0" b="0">
+                <a:solidFill>
+                  <a:srgbClr val="D4D4D4"/>
+                </a:solidFill>
+                <a:latin typeface="Consolas"/>
+              </a:rPr>
+              <a:t> </a:t>
+            </a:r>
+            <a:r>
+              <a:rPr sz="1500" i="0" b="0">
+                <a:solidFill>
+                  <a:srgbClr val="DCDCAA"/>
+                </a:solidFill>
+                <a:latin typeface="Consolas"/>
+              </a:rPr>
+              <a:t>guardar</a:t>
+            </a:r>
+            <a:r>
+              <a:rPr sz="1500" i="0" b="0">
+                <a:solidFill>
+                  <a:srgbClr val="D4D4D4"/>
+                </a:solidFill>
+                <a:latin typeface="Consolas"/>
+              </a:rPr>
+              <a:t>(</a:t>
+            </a:r>
+            <a:r>
+              <a:rPr sz="1500" i="0" b="0">
+                <a:solidFill>
+                  <a:srgbClr val="D4D4D4"/>
+                </a:solidFill>
+                <a:latin typeface="Consolas"/>
+              </a:rPr>
+              <a:t>Expediente</a:t>
+            </a:r>
+            <a:r>
+              <a:rPr sz="1500" i="0" b="0">
+                <a:solidFill>
+                  <a:srgbClr val="D4D4D4"/>
+                </a:solidFill>
+                <a:latin typeface="Consolas"/>
+              </a:rPr>
+              <a:t> </a:t>
+            </a:r>
+            <a:r>
+              <a:rPr sz="1500" i="0" b="0">
+                <a:solidFill>
+                  <a:srgbClr val="D4D4D4"/>
+                </a:solidFill>
+                <a:latin typeface="Consolas"/>
+              </a:rPr>
+              <a:t>e</a:t>
+            </a:r>
+            <a:r>
+              <a:rPr sz="1500" i="0" b="0">
+                <a:solidFill>
+                  <a:srgbClr val="D4D4D4"/>
+                </a:solidFill>
+                <a:latin typeface="Consolas"/>
+              </a:rPr>
+              <a:t>) {</a:t>
+            </a:r>
+          </a:p>
+          <a:p>
+            <a:pPr>
+              <a:spcAft>
+                <a:spcPts val="321"/>
+              </a:spcAft>
+            </a:pPr>
+            <a:r>
+              <a:rPr sz="1500" i="0" b="0">
+                <a:solidFill>
+                  <a:srgbClr val="D4D4D4"/>
+                </a:solidFill>
+                <a:latin typeface="Consolas"/>
+              </a:rPr>
+              <a:t>    </a:t>
+            </a:r>
+            <a:r>
+              <a:rPr sz="1500" i="0" b="0">
+                <a:solidFill>
+                  <a:srgbClr val="569CD6"/>
+                </a:solidFill>
+                <a:latin typeface="Consolas"/>
+              </a:rPr>
+              <a:t>if</a:t>
+            </a:r>
+            <a:r>
+              <a:rPr sz="1500" i="0" b="0">
+                <a:solidFill>
+                  <a:srgbClr val="D4D4D4"/>
+                </a:solidFill>
+                <a:latin typeface="Consolas"/>
+              </a:rPr>
+              <a:t> (</a:t>
+            </a:r>
+            <a:r>
+              <a:rPr sz="1500" i="0" b="0">
+                <a:solidFill>
+                  <a:srgbClr val="DCDCAA"/>
+                </a:solidFill>
+                <a:latin typeface="Consolas"/>
+              </a:rPr>
+              <a:t>expedientes.containsKey</a:t>
+            </a:r>
+            <a:r>
+              <a:rPr sz="1500" i="0" b="0">
+                <a:solidFill>
+                  <a:srgbClr val="D4D4D4"/>
+                </a:solidFill>
+                <a:latin typeface="Consolas"/>
+              </a:rPr>
+              <a:t>(</a:t>
+            </a:r>
+            <a:r>
+              <a:rPr sz="1500" i="0" b="0">
+                <a:solidFill>
+                  <a:srgbClr val="DCDCAA"/>
+                </a:solidFill>
+                <a:latin typeface="Consolas"/>
+              </a:rPr>
+              <a:t>e.getId</a:t>
+            </a:r>
+            <a:r>
+              <a:rPr sz="1500" i="0" b="0">
+                <a:solidFill>
+                  <a:srgbClr val="D4D4D4"/>
+                </a:solidFill>
+                <a:latin typeface="Consolas"/>
+              </a:rPr>
+              <a:t>())) {</a:t>
+            </a:r>
+          </a:p>
+          <a:p>
+            <a:pPr>
+              <a:spcAft>
+                <a:spcPts val="321"/>
+              </a:spcAft>
+            </a:pPr>
+            <a:r>
+              <a:rPr sz="1500" i="0" b="0">
+                <a:solidFill>
+                  <a:srgbClr val="D4D4D4"/>
+                </a:solidFill>
+                <a:latin typeface="Consolas"/>
+              </a:rPr>
+              <a:t>        </a:t>
+            </a:r>
+            <a:r>
+              <a:rPr sz="1500" i="0" b="0">
+                <a:solidFill>
+                  <a:srgbClr val="DCDCAA"/>
+                </a:solidFill>
+                <a:latin typeface="Consolas"/>
+              </a:rPr>
+              <a:t>System.out.println</a:t>
+            </a:r>
+            <a:r>
+              <a:rPr sz="1500" i="0" b="0">
+                <a:solidFill>
+                  <a:srgbClr val="D4D4D4"/>
+                </a:solidFill>
+                <a:latin typeface="Consolas"/>
+              </a:rPr>
+              <a:t>(</a:t>
+            </a:r>
+            <a:r>
+              <a:rPr sz="1500" i="0" b="0">
+                <a:solidFill>
+                  <a:srgbClr val="CE9178"/>
+                </a:solidFill>
+                <a:latin typeface="Consolas"/>
+              </a:rPr>
+              <a:t>"Atencion: el ID "</a:t>
+            </a:r>
+            <a:r>
+              <a:rPr sz="1500" i="0" b="0">
+                <a:solidFill>
+                  <a:srgbClr val="D4D4D4"/>
+                </a:solidFill>
+                <a:latin typeface="Consolas"/>
+              </a:rPr>
+              <a:t> + </a:t>
+            </a:r>
+            <a:r>
+              <a:rPr sz="1500" i="0" b="0">
+                <a:solidFill>
+                  <a:srgbClr val="DCDCAA"/>
+                </a:solidFill>
+                <a:latin typeface="Consolas"/>
+              </a:rPr>
+              <a:t>e.getId</a:t>
+            </a:r>
+            <a:r>
+              <a:rPr sz="1500" i="0" b="0">
+                <a:solidFill>
+                  <a:srgbClr val="D4D4D4"/>
+                </a:solidFill>
+                <a:latin typeface="Consolas"/>
+              </a:rPr>
+              <a:t>() + </a:t>
+            </a:r>
+            <a:r>
+              <a:rPr sz="1500" i="0" b="0">
+                <a:solidFill>
+                  <a:srgbClr val="CE9178"/>
+                </a:solidFill>
+                <a:latin typeface="Consolas"/>
+              </a:rPr>
+              <a:t>" ya existia y sera reemplazado"</a:t>
+            </a:r>
+            <a:r>
+              <a:rPr sz="1500" i="0" b="0">
+                <a:solidFill>
+                  <a:srgbClr val="D4D4D4"/>
+                </a:solidFill>
+                <a:latin typeface="Consolas"/>
+              </a:rPr>
+              <a:t>);</a:t>
+            </a:r>
+          </a:p>
+          <a:p>
+            <a:pPr>
+              <a:spcAft>
+                <a:spcPts val="321"/>
+              </a:spcAft>
+            </a:pPr>
+            <a:r>
+              <a:rPr sz="1500" i="0" b="0">
+                <a:solidFill>
+                  <a:srgbClr val="D4D4D4"/>
+                </a:solidFill>
+                <a:latin typeface="Consolas"/>
+              </a:rPr>
+              <a:t>    }</a:t>
+            </a:r>
+          </a:p>
+          <a:p>
+            <a:pPr>
+              <a:spcAft>
+                <a:spcPts val="321"/>
+              </a:spcAft>
+            </a:pPr>
+            <a:r>
+              <a:rPr sz="1500" i="0" b="0">
+                <a:solidFill>
+                  <a:srgbClr val="D4D4D4"/>
+                </a:solidFill>
+                <a:latin typeface="Consolas"/>
+              </a:rPr>
+              <a:t>    </a:t>
+            </a:r>
+            <a:r>
+              <a:rPr sz="1500" i="0" b="0">
+                <a:solidFill>
+                  <a:srgbClr val="DCDCAA"/>
+                </a:solidFill>
+                <a:latin typeface="Consolas"/>
+              </a:rPr>
+              <a:t>expedientes.put</a:t>
+            </a:r>
+            <a:r>
+              <a:rPr sz="1500" i="0" b="0">
+                <a:solidFill>
+                  <a:srgbClr val="D4D4D4"/>
+                </a:solidFill>
+                <a:latin typeface="Consolas"/>
+              </a:rPr>
+              <a:t>(</a:t>
+            </a:r>
+            <a:r>
+              <a:rPr sz="1500" i="0" b="0">
+                <a:solidFill>
+                  <a:srgbClr val="DCDCAA"/>
+                </a:solidFill>
+                <a:latin typeface="Consolas"/>
+              </a:rPr>
+              <a:t>e.getId</a:t>
+            </a:r>
+            <a:r>
+              <a:rPr sz="1500" i="0" b="0">
+                <a:solidFill>
+                  <a:srgbClr val="D4D4D4"/>
+                </a:solidFill>
+                <a:latin typeface="Consolas"/>
+              </a:rPr>
+              <a:t>(), </a:t>
+            </a:r>
+            <a:r>
+              <a:rPr sz="1500" i="0" b="0">
+                <a:solidFill>
+                  <a:srgbClr val="D4D4D4"/>
+                </a:solidFill>
+                <a:latin typeface="Consolas"/>
+              </a:rPr>
+              <a:t>e</a:t>
+            </a:r>
+            <a:r>
+              <a:rPr sz="1500" i="0" b="0">
+                <a:solidFill>
+                  <a:srgbClr val="D4D4D4"/>
+                </a:solidFill>
+                <a:latin typeface="Consolas"/>
+              </a:rPr>
+              <a:t>);              </a:t>
+            </a:r>
+            <a:r>
+              <a:rPr sz="1500" i="1" b="0">
+                <a:solidFill>
+                  <a:srgbClr val="6A9955"/>
+                </a:solidFill>
+                <a:latin typeface="Consolas"/>
+              </a:rPr>
+              <a:t>// clave -&gt; valor</a:t>
+            </a:r>
+          </a:p>
+          <a:p>
+            <a:pPr>
+              <a:spcAft>
+                <a:spcPts val="321"/>
+              </a:spcAft>
+            </a:pPr>
+            <a:r>
+              <a:rPr sz="1500" i="0" b="0">
+                <a:solidFill>
+                  <a:srgbClr val="D4D4D4"/>
+                </a:solidFill>
+                <a:latin typeface="Consolas"/>
+              </a:rPr>
+              <a:t>    </a:t>
+            </a:r>
+            <a:r>
+              <a:rPr sz="1500" i="0" b="0">
+                <a:solidFill>
+                  <a:srgbClr val="4EC9B0"/>
+                </a:solidFill>
+                <a:latin typeface="Consolas"/>
+              </a:rPr>
+              <a:t>boolean</a:t>
+            </a:r>
+            <a:r>
+              <a:rPr sz="1500" i="0" b="0">
+                <a:solidFill>
+                  <a:srgbClr val="D4D4D4"/>
+                </a:solidFill>
+                <a:latin typeface="Consolas"/>
+              </a:rPr>
+              <a:t> </a:t>
+            </a:r>
+            <a:r>
+              <a:rPr sz="1500" i="0" b="0">
+                <a:solidFill>
+                  <a:srgbClr val="D4D4D4"/>
+                </a:solidFill>
+                <a:latin typeface="Consolas"/>
+              </a:rPr>
+              <a:t>razaNueva</a:t>
+            </a:r>
+            <a:r>
+              <a:rPr sz="1500" i="0" b="0">
+                <a:solidFill>
+                  <a:srgbClr val="D4D4D4"/>
+                </a:solidFill>
+                <a:latin typeface="Consolas"/>
+              </a:rPr>
+              <a:t> = </a:t>
+            </a:r>
+            <a:r>
+              <a:rPr sz="1500" i="0" b="0">
+                <a:solidFill>
+                  <a:srgbClr val="DCDCAA"/>
+                </a:solidFill>
+                <a:latin typeface="Consolas"/>
+              </a:rPr>
+              <a:t>razas.add</a:t>
+            </a:r>
+            <a:r>
+              <a:rPr sz="1500" i="0" b="0">
+                <a:solidFill>
+                  <a:srgbClr val="D4D4D4"/>
+                </a:solidFill>
+                <a:latin typeface="Consolas"/>
+              </a:rPr>
+              <a:t>(</a:t>
+            </a:r>
+            <a:r>
+              <a:rPr sz="1500" i="0" b="0">
+                <a:solidFill>
+                  <a:srgbClr val="DCDCAA"/>
+                </a:solidFill>
+                <a:latin typeface="Consolas"/>
+              </a:rPr>
+              <a:t>e.getRaza</a:t>
+            </a:r>
+            <a:r>
+              <a:rPr sz="1500" i="0" b="0">
+                <a:solidFill>
+                  <a:srgbClr val="D4D4D4"/>
+                </a:solidFill>
+                <a:latin typeface="Consolas"/>
+              </a:rPr>
+              <a:t>()); </a:t>
+            </a:r>
+            <a:r>
+              <a:rPr sz="1500" i="1" b="0">
+                <a:solidFill>
+                  <a:srgbClr val="6A9955"/>
+                </a:solidFill>
+                <a:latin typeface="Consolas"/>
+              </a:rPr>
+              <a:t>// add devuelve false si ya estaba</a:t>
+            </a:r>
+          </a:p>
+          <a:p>
+            <a:pPr>
+              <a:spcAft>
+                <a:spcPts val="321"/>
+              </a:spcAft>
+            </a:pPr>
+            <a:r>
+              <a:rPr sz="1500" i="0" b="0">
+                <a:solidFill>
+                  <a:srgbClr val="D4D4D4"/>
+                </a:solidFill>
+                <a:latin typeface="Consolas"/>
+              </a:rPr>
+              <a:t>    </a:t>
+            </a:r>
+            <a:r>
+              <a:rPr sz="1500" i="0" b="0">
+                <a:solidFill>
+                  <a:srgbClr val="569CD6"/>
+                </a:solidFill>
+                <a:latin typeface="Consolas"/>
+              </a:rPr>
+              <a:t>if</a:t>
+            </a:r>
+            <a:r>
+              <a:rPr sz="1500" i="0" b="0">
+                <a:solidFill>
+                  <a:srgbClr val="D4D4D4"/>
+                </a:solidFill>
+                <a:latin typeface="Consolas"/>
+              </a:rPr>
+              <a:t> (!</a:t>
+            </a:r>
+            <a:r>
+              <a:rPr sz="1500" i="0" b="0">
+                <a:solidFill>
+                  <a:srgbClr val="D4D4D4"/>
+                </a:solidFill>
+                <a:latin typeface="Consolas"/>
+              </a:rPr>
+              <a:t>razaNueva</a:t>
+            </a:r>
+            <a:r>
+              <a:rPr sz="1500" i="0" b="0">
+                <a:solidFill>
+                  <a:srgbClr val="D4D4D4"/>
+                </a:solidFill>
+                <a:latin typeface="Consolas"/>
+              </a:rPr>
+              <a:t>) {</a:t>
+            </a:r>
+          </a:p>
+          <a:p>
+            <a:pPr>
+              <a:spcAft>
+                <a:spcPts val="321"/>
+              </a:spcAft>
+            </a:pPr>
+            <a:r>
+              <a:rPr sz="1500" i="0" b="0">
+                <a:solidFill>
+                  <a:srgbClr val="D4D4D4"/>
+                </a:solidFill>
+                <a:latin typeface="Consolas"/>
+              </a:rPr>
+              <a:t>        </a:t>
+            </a:r>
+            <a:r>
+              <a:rPr sz="1500" i="0" b="0">
+                <a:solidFill>
+                  <a:srgbClr val="DCDCAA"/>
+                </a:solidFill>
+                <a:latin typeface="Consolas"/>
+              </a:rPr>
+              <a:t>System.out.println</a:t>
+            </a:r>
+            <a:r>
+              <a:rPr sz="1500" i="0" b="0">
+                <a:solidFill>
+                  <a:srgbClr val="D4D4D4"/>
+                </a:solidFill>
+                <a:latin typeface="Consolas"/>
+              </a:rPr>
+              <a:t>(</a:t>
+            </a:r>
+            <a:r>
+              <a:rPr sz="1500" i="0" b="0">
+                <a:solidFill>
+                  <a:srgbClr val="CE9178"/>
+                </a:solidFill>
+                <a:latin typeface="Consolas"/>
+              </a:rPr>
+              <a:t>"Raza ya registrada: "</a:t>
+            </a:r>
+            <a:r>
+              <a:rPr sz="1500" i="0" b="0">
+                <a:solidFill>
+                  <a:srgbClr val="D4D4D4"/>
+                </a:solidFill>
+                <a:latin typeface="Consolas"/>
+              </a:rPr>
+              <a:t> + </a:t>
+            </a:r>
+            <a:r>
+              <a:rPr sz="1500" i="0" b="0">
+                <a:solidFill>
+                  <a:srgbClr val="DCDCAA"/>
+                </a:solidFill>
+                <a:latin typeface="Consolas"/>
+              </a:rPr>
+              <a:t>e.getRaza</a:t>
+            </a:r>
+            <a:r>
+              <a:rPr sz="1500" i="0" b="0">
+                <a:solidFill>
+                  <a:srgbClr val="D4D4D4"/>
+                </a:solidFill>
+                <a:latin typeface="Consolas"/>
+              </a:rPr>
+              <a:t>());</a:t>
+            </a:r>
+          </a:p>
+          <a:p>
+            <a:pPr>
+              <a:spcAft>
+                <a:spcPts val="321"/>
+              </a:spcAft>
+            </a:pPr>
+            <a:r>
+              <a:rPr sz="1500" i="0" b="0">
+                <a:solidFill>
+                  <a:srgbClr val="D4D4D4"/>
+                </a:solidFill>
+                <a:latin typeface="Consolas"/>
+              </a:rPr>
+              <a:t>    }</a:t>
+            </a:r>
+          </a:p>
+          <a:p>
+            <a:pPr>
+              <a:spcAft>
+                <a:spcPts val="321"/>
+              </a:spcAft>
+            </a:pPr>
+            <a:r>
+              <a:rPr sz="1500" i="0" b="0">
+                <a:solidFill>
+                  <a:srgbClr val="D4D4D4"/>
+                </a:solidFill>
+                <a:latin typeface="Consolas"/>
+              </a:rPr>
+              <a:t>}</a:t>
+            </a:r>
+          </a:p>
+        </p:txBody>
+      </p:sp>
+      <p:sp>
+        <p:nvSpPr>
+          <p:cNvPr id="13" name="TextBox 12"/>
+          <p:cNvSpPr txBox="1"/>
+          <p:nvPr/>
+        </p:nvSpPr>
+        <p:spPr>
+          <a:xfrm>
+            <a:off x="457200" y="6035040"/>
+            <a:ext cx="11277295" cy="365760"/>
+          </a:xfrm>
+          <a:prstGeom prst="rect">
+            <a:avLst/>
+          </a:prstGeom>
+          <a:noFill/>
+        </p:spPr>
+        <p:txBody>
+          <a:bodyPr wrap="square">
+            <a:spAutoFit/>
+          </a:bodyPr>
+          <a:lstStyle/>
+          <a:p>
             <a:pPr algn="ctr"/>
             <a:r>
               <a:rPr sz="1300" b="0" i="1">
@@ -5373,7 +5572,7 @@
       </p:sp>
       <p:sp>
         <p:nvSpPr>
-          <p:cNvPr id="13" name="TextBox 12"/>
+          <p:cNvPr id="14" name="TextBox 13"/>
           <p:cNvSpPr txBox="1"/>
           <p:nvPr/>
         </p:nvSpPr>
@@ -6101,7 +6300,7 @@
         <p:spPr>
           <a:xfrm>
             <a:off x="457200" y="1261872"/>
-            <a:ext cx="11277295" cy="4219411"/>
+            <a:ext cx="11277295" cy="3614797"/>
           </a:xfrm>
           <a:prstGeom prst="roundRect">
             <a:avLst>
@@ -6350,8 +6549,8 @@
         </p:nvSpPr>
         <p:spPr>
           <a:xfrm>
-            <a:off x="1188720" y="1719072"/>
-            <a:ext cx="10271455" cy="3625051"/>
+            <a:off x="685800" y="1719072"/>
+            <a:ext cx="502920" cy="3020437"/>
           </a:xfrm>
           <a:prstGeom prst="rect">
             <a:avLst/>
@@ -6364,1302 +6563,195 @@
           </a:bodyPr>
           <a:lstStyle/>
           <a:p>
-            <a:pPr>
+            <a:pPr algn="r">
               <a:spcAft>
-                <a:spcPts val="321"/>
+                <a:spcPts val="278"/>
               </a:spcAft>
             </a:pPr>
             <a:r>
-              <a:rPr sz="1500" i="1" b="0">
-                <a:solidFill>
-                  <a:srgbClr val="6A9955"/>
-                </a:solidFill>
-                <a:latin typeface="Consolas"/>
-              </a:rPr>
-              <a:t>// ---- Datos: la inteligencia del sistema vive aqui, no en el boton ----</a:t>
-            </a:r>
-          </a:p>
-          <a:p>
-            <a:pPr>
+              <a:rPr sz="1300" i="0" b="0">
+                <a:solidFill>
+                  <a:srgbClr val="858585"/>
+                </a:solidFill>
+                <a:latin typeface="Consolas"/>
+              </a:rPr>
+              <a:t>1</a:t>
+            </a:r>
+          </a:p>
+          <a:p>
+            <a:pPr algn="r">
               <a:spcAft>
-                <a:spcPts val="321"/>
+                <a:spcPts val="278"/>
               </a:spcAft>
             </a:pPr>
             <a:r>
-              <a:rPr sz="1500" i="0" b="0">
-                <a:solidFill>
-                  <a:srgbClr val="569CD6"/>
-                </a:solidFill>
-                <a:latin typeface="Consolas"/>
-              </a:rPr>
-              <a:t>private</a:t>
-            </a:r>
-            <a:r>
-              <a:rPr sz="1500" i="0" b="0">
-                <a:solidFill>
-                  <a:srgbClr val="D4D4D4"/>
-                </a:solidFill>
-                <a:latin typeface="Consolas"/>
-              </a:rPr>
-              <a:t> </a:t>
-            </a:r>
-            <a:r>
-              <a:rPr sz="1500" i="0" b="0">
-                <a:solidFill>
-                  <a:srgbClr val="569CD6"/>
-                </a:solidFill>
-                <a:latin typeface="Consolas"/>
-              </a:rPr>
-              <a:t>final</a:t>
-            </a:r>
-            <a:r>
-              <a:rPr sz="1500" i="0" b="0">
-                <a:solidFill>
-                  <a:srgbClr val="D4D4D4"/>
-                </a:solidFill>
-                <a:latin typeface="Consolas"/>
-              </a:rPr>
-              <a:t> </a:t>
-            </a:r>
-            <a:r>
-              <a:rPr sz="1500" i="0" b="0">
-                <a:solidFill>
-                  <a:srgbClr val="4EC9B0"/>
-                </a:solidFill>
-                <a:latin typeface="Consolas"/>
-              </a:rPr>
-              <a:t>Map</a:t>
-            </a:r>
-            <a:r>
-              <a:rPr sz="1500" i="0" b="0">
-                <a:solidFill>
-                  <a:srgbClr val="D4D4D4"/>
-                </a:solidFill>
-                <a:latin typeface="Consolas"/>
-              </a:rPr>
-              <a:t>&lt;</a:t>
-            </a:r>
-            <a:r>
-              <a:rPr sz="1500" i="0" b="0">
-                <a:solidFill>
-                  <a:srgbClr val="4EC9B0"/>
-                </a:solidFill>
-                <a:latin typeface="Consolas"/>
-              </a:rPr>
-              <a:t>String</a:t>
-            </a:r>
-            <a:r>
-              <a:rPr sz="1500" i="0" b="0">
-                <a:solidFill>
-                  <a:srgbClr val="D4D4D4"/>
-                </a:solidFill>
-                <a:latin typeface="Consolas"/>
-              </a:rPr>
-              <a:t>, </a:t>
-            </a:r>
-            <a:r>
-              <a:rPr sz="1500" i="0" b="0">
-                <a:solidFill>
-                  <a:srgbClr val="D4D4D4"/>
-                </a:solidFill>
-                <a:latin typeface="Consolas"/>
-              </a:rPr>
-              <a:t>Expediente</a:t>
-            </a:r>
-            <a:r>
-              <a:rPr sz="1500" i="0" b="0">
-                <a:solidFill>
-                  <a:srgbClr val="D4D4D4"/>
-                </a:solidFill>
-                <a:latin typeface="Consolas"/>
-              </a:rPr>
-              <a:t>&gt; </a:t>
-            </a:r>
-            <a:r>
-              <a:rPr sz="1500" i="0" b="0">
-                <a:solidFill>
-                  <a:srgbClr val="D4D4D4"/>
-                </a:solidFill>
-                <a:latin typeface="Consolas"/>
-              </a:rPr>
-              <a:t>expedientes</a:t>
-            </a:r>
-            <a:r>
-              <a:rPr sz="1500" i="0" b="0">
-                <a:solidFill>
-                  <a:srgbClr val="D4D4D4"/>
-                </a:solidFill>
-                <a:latin typeface="Consolas"/>
-              </a:rPr>
-              <a:t> = </a:t>
-            </a:r>
-            <a:r>
-              <a:rPr sz="1500" i="0" b="0">
-                <a:solidFill>
-                  <a:srgbClr val="569CD6"/>
-                </a:solidFill>
-                <a:latin typeface="Consolas"/>
-              </a:rPr>
-              <a:t>new</a:t>
-            </a:r>
-            <a:r>
-              <a:rPr sz="1500" i="0" b="0">
-                <a:solidFill>
-                  <a:srgbClr val="D4D4D4"/>
-                </a:solidFill>
-                <a:latin typeface="Consolas"/>
-              </a:rPr>
-              <a:t> </a:t>
-            </a:r>
-            <a:r>
-              <a:rPr sz="1500" i="0" b="0">
-                <a:solidFill>
-                  <a:srgbClr val="4EC9B0"/>
-                </a:solidFill>
-                <a:latin typeface="Consolas"/>
-              </a:rPr>
-              <a:t>HashMap</a:t>
-            </a:r>
-            <a:r>
-              <a:rPr sz="1500" i="0" b="0">
-                <a:solidFill>
-                  <a:srgbClr val="D4D4D4"/>
-                </a:solidFill>
-                <a:latin typeface="Consolas"/>
-              </a:rPr>
-              <a:t>&lt;&gt;();</a:t>
-            </a:r>
-          </a:p>
-          <a:p>
-            <a:pPr>
+              <a:rPr sz="1300" i="0" b="0">
+                <a:solidFill>
+                  <a:srgbClr val="858585"/>
+                </a:solidFill>
+                <a:latin typeface="Consolas"/>
+              </a:rPr>
+              <a:t>2</a:t>
+            </a:r>
+          </a:p>
+          <a:p>
+            <a:pPr algn="r">
               <a:spcAft>
-                <a:spcPts val="321"/>
+                <a:spcPts val="278"/>
               </a:spcAft>
             </a:pPr>
             <a:r>
-              <a:rPr sz="1500" i="0" b="0">
-                <a:solidFill>
-                  <a:srgbClr val="569CD6"/>
-                </a:solidFill>
-                <a:latin typeface="Consolas"/>
-              </a:rPr>
-              <a:t>private</a:t>
-            </a:r>
-            <a:r>
-              <a:rPr sz="1500" i="0" b="0">
-                <a:solidFill>
-                  <a:srgbClr val="D4D4D4"/>
-                </a:solidFill>
-                <a:latin typeface="Consolas"/>
-              </a:rPr>
-              <a:t> </a:t>
-            </a:r>
-            <a:r>
-              <a:rPr sz="1500" i="0" b="0">
-                <a:solidFill>
-                  <a:srgbClr val="569CD6"/>
-                </a:solidFill>
-                <a:latin typeface="Consolas"/>
-              </a:rPr>
-              <a:t>final</a:t>
-            </a:r>
-            <a:r>
-              <a:rPr sz="1500" i="0" b="0">
-                <a:solidFill>
-                  <a:srgbClr val="D4D4D4"/>
-                </a:solidFill>
-                <a:latin typeface="Consolas"/>
-              </a:rPr>
-              <a:t> </a:t>
-            </a:r>
-            <a:r>
-              <a:rPr sz="1500" i="0" b="0">
-                <a:solidFill>
-                  <a:srgbClr val="4EC9B0"/>
-                </a:solidFill>
-                <a:latin typeface="Consolas"/>
-              </a:rPr>
-              <a:t>Set</a:t>
-            </a:r>
-            <a:r>
-              <a:rPr sz="1500" i="0" b="0">
-                <a:solidFill>
-                  <a:srgbClr val="D4D4D4"/>
-                </a:solidFill>
-                <a:latin typeface="Consolas"/>
-              </a:rPr>
-              <a:t>&lt;</a:t>
-            </a:r>
-            <a:r>
-              <a:rPr sz="1500" i="0" b="0">
-                <a:solidFill>
-                  <a:srgbClr val="4EC9B0"/>
-                </a:solidFill>
-                <a:latin typeface="Consolas"/>
-              </a:rPr>
-              <a:t>String</a:t>
-            </a:r>
-            <a:r>
-              <a:rPr sz="1500" i="0" b="0">
-                <a:solidFill>
-                  <a:srgbClr val="D4D4D4"/>
-                </a:solidFill>
-                <a:latin typeface="Consolas"/>
-              </a:rPr>
-              <a:t>&gt; </a:t>
-            </a:r>
-            <a:r>
-              <a:rPr sz="1500" i="0" b="0">
-                <a:solidFill>
-                  <a:srgbClr val="D4D4D4"/>
-                </a:solidFill>
-                <a:latin typeface="Consolas"/>
-              </a:rPr>
-              <a:t>razas</a:t>
-            </a:r>
-            <a:r>
-              <a:rPr sz="1500" i="0" b="0">
-                <a:solidFill>
-                  <a:srgbClr val="D4D4D4"/>
-                </a:solidFill>
-                <a:latin typeface="Consolas"/>
-              </a:rPr>
-              <a:t> = </a:t>
-            </a:r>
-            <a:r>
-              <a:rPr sz="1500" i="0" b="0">
-                <a:solidFill>
-                  <a:srgbClr val="569CD6"/>
-                </a:solidFill>
-                <a:latin typeface="Consolas"/>
-              </a:rPr>
-              <a:t>new</a:t>
-            </a:r>
-            <a:r>
-              <a:rPr sz="1500" i="0" b="0">
-                <a:solidFill>
-                  <a:srgbClr val="D4D4D4"/>
-                </a:solidFill>
-                <a:latin typeface="Consolas"/>
-              </a:rPr>
-              <a:t> </a:t>
-            </a:r>
-            <a:r>
-              <a:rPr sz="1500" i="0" b="0">
-                <a:solidFill>
-                  <a:srgbClr val="4EC9B0"/>
-                </a:solidFill>
-                <a:latin typeface="Consolas"/>
-              </a:rPr>
-              <a:t>HashSet</a:t>
-            </a:r>
-            <a:r>
-              <a:rPr sz="1500" i="0" b="0">
-                <a:solidFill>
-                  <a:srgbClr val="D4D4D4"/>
-                </a:solidFill>
-                <a:latin typeface="Consolas"/>
-              </a:rPr>
-              <a:t>&lt;&gt;();</a:t>
-            </a:r>
-          </a:p>
-          <a:p>
-            <a:pPr>
+              <a:rPr sz="1300" i="0" b="0">
+                <a:solidFill>
+                  <a:srgbClr val="858585"/>
+                </a:solidFill>
+                <a:latin typeface="Consolas"/>
+              </a:rPr>
+              <a:t>3</a:t>
+            </a:r>
+          </a:p>
+          <a:p>
+            <a:pPr algn="r">
               <a:spcAft>
-                <a:spcPts val="321"/>
+                <a:spcPts val="278"/>
               </a:spcAft>
             </a:pPr>
             <a:r>
-              <a:rPr sz="1500" i="0" b="0">
-                <a:solidFill>
-                  <a:srgbClr val="D4D4D4"/>
-                </a:solidFill>
-                <a:latin typeface="Consolas"/>
-              </a:rPr>
-              <a:t/>
-            </a:r>
-          </a:p>
-          <a:p>
-            <a:pPr>
+              <a:rPr sz="1300" i="0" b="0">
+                <a:solidFill>
+                  <a:srgbClr val="858585"/>
+                </a:solidFill>
+                <a:latin typeface="Consolas"/>
+              </a:rPr>
+              <a:t>4</a:t>
+            </a:r>
+          </a:p>
+          <a:p>
+            <a:pPr algn="r">
               <a:spcAft>
-                <a:spcPts val="321"/>
+                <a:spcPts val="278"/>
               </a:spcAft>
             </a:pPr>
             <a:r>
-              <a:rPr sz="1500" i="0" b="0">
-                <a:solidFill>
-                  <a:srgbClr val="569CD6"/>
-                </a:solidFill>
-                <a:latin typeface="Consolas"/>
-              </a:rPr>
-              <a:t>private</a:t>
-            </a:r>
-            <a:r>
-              <a:rPr sz="1500" i="0" b="0">
-                <a:solidFill>
-                  <a:srgbClr val="D4D4D4"/>
-                </a:solidFill>
-                <a:latin typeface="Consolas"/>
-              </a:rPr>
-              <a:t> </a:t>
-            </a:r>
-            <a:r>
-              <a:rPr sz="1500" i="0" b="0">
-                <a:solidFill>
-                  <a:srgbClr val="569CD6"/>
-                </a:solidFill>
-                <a:latin typeface="Consolas"/>
-              </a:rPr>
-              <a:t>void</a:t>
-            </a:r>
-            <a:r>
-              <a:rPr sz="1500" i="0" b="0">
-                <a:solidFill>
-                  <a:srgbClr val="D4D4D4"/>
-                </a:solidFill>
-                <a:latin typeface="Consolas"/>
-              </a:rPr>
-              <a:t> </a:t>
-            </a:r>
-            <a:r>
-              <a:rPr sz="1500" i="0" b="0">
-                <a:solidFill>
-                  <a:srgbClr val="DCDCAA"/>
-                </a:solidFill>
-                <a:latin typeface="Consolas"/>
-              </a:rPr>
-              <a:t>cargarDatosDePrueba</a:t>
-            </a:r>
-            <a:r>
-              <a:rPr sz="1500" i="0" b="0">
-                <a:solidFill>
-                  <a:srgbClr val="D4D4D4"/>
-                </a:solidFill>
-                <a:latin typeface="Consolas"/>
-              </a:rPr>
-              <a:t>() {</a:t>
-            </a:r>
-          </a:p>
-          <a:p>
-            <a:pPr>
+              <a:rPr sz="1300" i="0" b="0">
+                <a:solidFill>
+                  <a:srgbClr val="858585"/>
+                </a:solidFill>
+                <a:latin typeface="Consolas"/>
+              </a:rPr>
+              <a:t>5</a:t>
+            </a:r>
+          </a:p>
+          <a:p>
+            <a:pPr algn="r">
               <a:spcAft>
-                <a:spcPts val="321"/>
+                <a:spcPts val="278"/>
               </a:spcAft>
             </a:pPr>
             <a:r>
-              <a:rPr sz="1500" i="0" b="0">
-                <a:solidFill>
-                  <a:srgbClr val="D4D4D4"/>
-                </a:solidFill>
-                <a:latin typeface="Consolas"/>
-              </a:rPr>
-              <a:t>    </a:t>
-            </a:r>
-            <a:r>
-              <a:rPr sz="1500" i="0" b="0">
-                <a:solidFill>
-                  <a:srgbClr val="DCDCAA"/>
-                </a:solidFill>
-                <a:latin typeface="Consolas"/>
-              </a:rPr>
-              <a:t>guardar</a:t>
-            </a:r>
-            <a:r>
-              <a:rPr sz="1500" i="0" b="0">
-                <a:solidFill>
-                  <a:srgbClr val="D4D4D4"/>
-                </a:solidFill>
-                <a:latin typeface="Consolas"/>
-              </a:rPr>
-              <a:t>(</a:t>
-            </a:r>
-            <a:r>
-              <a:rPr sz="1500" i="0" b="0">
-                <a:solidFill>
-                  <a:srgbClr val="569CD6"/>
-                </a:solidFill>
-                <a:latin typeface="Consolas"/>
-              </a:rPr>
-              <a:t>new</a:t>
-            </a:r>
-            <a:r>
-              <a:rPr sz="1500" i="0" b="0">
-                <a:solidFill>
-                  <a:srgbClr val="D4D4D4"/>
-                </a:solidFill>
-                <a:latin typeface="Consolas"/>
-              </a:rPr>
-              <a:t> </a:t>
-            </a:r>
-            <a:r>
-              <a:rPr sz="1500" i="0" b="0">
-                <a:solidFill>
-                  <a:srgbClr val="4EC9B0"/>
-                </a:solidFill>
-                <a:latin typeface="Consolas"/>
-              </a:rPr>
-              <a:t>Expediente</a:t>
-            </a:r>
-            <a:r>
-              <a:rPr sz="1500" i="0" b="0">
-                <a:solidFill>
-                  <a:srgbClr val="D4D4D4"/>
-                </a:solidFill>
-                <a:latin typeface="Consolas"/>
-              </a:rPr>
-              <a:t>(</a:t>
-            </a:r>
-            <a:r>
-              <a:rPr sz="1500" i="0" b="0">
-                <a:solidFill>
-                  <a:srgbClr val="CE9178"/>
-                </a:solidFill>
-                <a:latin typeface="Consolas"/>
-              </a:rPr>
-              <a:t>"M-001"</a:t>
-            </a:r>
-            <a:r>
-              <a:rPr sz="1500" i="0" b="0">
-                <a:solidFill>
-                  <a:srgbClr val="D4D4D4"/>
-                </a:solidFill>
-                <a:latin typeface="Consolas"/>
-              </a:rPr>
-              <a:t>, </a:t>
-            </a:r>
-            <a:r>
-              <a:rPr sz="1500" i="0" b="0">
-                <a:solidFill>
-                  <a:srgbClr val="CE9178"/>
-                </a:solidFill>
-                <a:latin typeface="Consolas"/>
-              </a:rPr>
-              <a:t>"Firulais"</a:t>
-            </a:r>
-            <a:r>
-              <a:rPr sz="1500" i="0" b="0">
-                <a:solidFill>
-                  <a:srgbClr val="D4D4D4"/>
-                </a:solidFill>
-                <a:latin typeface="Consolas"/>
-              </a:rPr>
-              <a:t>, </a:t>
-            </a:r>
-            <a:r>
-              <a:rPr sz="1500" i="0" b="0">
-                <a:solidFill>
-                  <a:srgbClr val="CE9178"/>
-                </a:solidFill>
-                <a:latin typeface="Consolas"/>
-              </a:rPr>
-              <a:t>"Labrador"</a:t>
-            </a:r>
-            <a:r>
-              <a:rPr sz="1500" i="0" b="0">
-                <a:solidFill>
-                  <a:srgbClr val="D4D4D4"/>
-                </a:solidFill>
-                <a:latin typeface="Consolas"/>
-              </a:rPr>
-              <a:t>, </a:t>
-            </a:r>
-            <a:r>
-              <a:rPr sz="1500" i="0" b="0">
-                <a:solidFill>
-                  <a:srgbClr val="CE9178"/>
-                </a:solidFill>
-                <a:latin typeface="Consolas"/>
-              </a:rPr>
-              <a:t>"Ana Gomez"</a:t>
-            </a:r>
-            <a:r>
-              <a:rPr sz="1500" i="0" b="0">
-                <a:solidFill>
-                  <a:srgbClr val="D4D4D4"/>
-                </a:solidFill>
-                <a:latin typeface="Consolas"/>
-              </a:rPr>
-              <a:t>, </a:t>
-            </a:r>
-            <a:r>
-              <a:rPr sz="1500" i="0" b="0">
-                <a:solidFill>
-                  <a:srgbClr val="CE9178"/>
-                </a:solidFill>
-                <a:latin typeface="Consolas"/>
-              </a:rPr>
-              <a:t>"Vacunacion al dia"</a:t>
-            </a:r>
-            <a:r>
-              <a:rPr sz="1500" i="0" b="0">
-                <a:solidFill>
-                  <a:srgbClr val="D4D4D4"/>
-                </a:solidFill>
-                <a:latin typeface="Consolas"/>
-              </a:rPr>
-              <a:t>));</a:t>
-            </a:r>
-          </a:p>
-          <a:p>
-            <a:pPr>
+              <a:rPr sz="1300" i="0" b="0">
+                <a:solidFill>
+                  <a:srgbClr val="858585"/>
+                </a:solidFill>
+                <a:latin typeface="Consolas"/>
+              </a:rPr>
+              <a:t>6</a:t>
+            </a:r>
+          </a:p>
+          <a:p>
+            <a:pPr algn="r">
               <a:spcAft>
-                <a:spcPts val="321"/>
+                <a:spcPts val="278"/>
               </a:spcAft>
             </a:pPr>
             <a:r>
-              <a:rPr sz="1500" i="0" b="0">
-                <a:solidFill>
-                  <a:srgbClr val="D4D4D4"/>
-                </a:solidFill>
-                <a:latin typeface="Consolas"/>
-              </a:rPr>
-              <a:t>    </a:t>
-            </a:r>
-            <a:r>
-              <a:rPr sz="1500" i="0" b="0">
-                <a:solidFill>
-                  <a:srgbClr val="DCDCAA"/>
-                </a:solidFill>
-                <a:latin typeface="Consolas"/>
-              </a:rPr>
-              <a:t>guardar</a:t>
-            </a:r>
-            <a:r>
-              <a:rPr sz="1500" i="0" b="0">
-                <a:solidFill>
-                  <a:srgbClr val="D4D4D4"/>
-                </a:solidFill>
-                <a:latin typeface="Consolas"/>
-              </a:rPr>
-              <a:t>(</a:t>
-            </a:r>
-            <a:r>
-              <a:rPr sz="1500" i="0" b="0">
-                <a:solidFill>
-                  <a:srgbClr val="569CD6"/>
-                </a:solidFill>
-                <a:latin typeface="Consolas"/>
-              </a:rPr>
-              <a:t>new</a:t>
-            </a:r>
-            <a:r>
-              <a:rPr sz="1500" i="0" b="0">
-                <a:solidFill>
-                  <a:srgbClr val="D4D4D4"/>
-                </a:solidFill>
-                <a:latin typeface="Consolas"/>
-              </a:rPr>
-              <a:t> </a:t>
-            </a:r>
-            <a:r>
-              <a:rPr sz="1500" i="0" b="0">
-                <a:solidFill>
-                  <a:srgbClr val="4EC9B0"/>
-                </a:solidFill>
-                <a:latin typeface="Consolas"/>
-              </a:rPr>
-              <a:t>Expediente</a:t>
-            </a:r>
-            <a:r>
-              <a:rPr sz="1500" i="0" b="0">
-                <a:solidFill>
-                  <a:srgbClr val="D4D4D4"/>
-                </a:solidFill>
-                <a:latin typeface="Consolas"/>
-              </a:rPr>
-              <a:t>(</a:t>
-            </a:r>
-            <a:r>
-              <a:rPr sz="1500" i="0" b="0">
-                <a:solidFill>
-                  <a:srgbClr val="CE9178"/>
-                </a:solidFill>
-                <a:latin typeface="Consolas"/>
-              </a:rPr>
-              <a:t>"M-002"</a:t>
-            </a:r>
-            <a:r>
-              <a:rPr sz="1500" i="0" b="0">
-                <a:solidFill>
-                  <a:srgbClr val="D4D4D4"/>
-                </a:solidFill>
-                <a:latin typeface="Consolas"/>
-              </a:rPr>
-              <a:t>, </a:t>
-            </a:r>
-            <a:r>
-              <a:rPr sz="1500" i="0" b="0">
-                <a:solidFill>
-                  <a:srgbClr val="CE9178"/>
-                </a:solidFill>
-                <a:latin typeface="Consolas"/>
-              </a:rPr>
-              <a:t>"Michi"</a:t>
-            </a:r>
-            <a:r>
-              <a:rPr sz="1500" i="0" b="0">
-                <a:solidFill>
-                  <a:srgbClr val="D4D4D4"/>
-                </a:solidFill>
-                <a:latin typeface="Consolas"/>
-              </a:rPr>
-              <a:t>, </a:t>
-            </a:r>
-            <a:r>
-              <a:rPr sz="1500" i="0" b="0">
-                <a:solidFill>
-                  <a:srgbClr val="CE9178"/>
-                </a:solidFill>
-                <a:latin typeface="Consolas"/>
-              </a:rPr>
-              <a:t>"Criollo"</a:t>
-            </a:r>
-            <a:r>
-              <a:rPr sz="1500" i="0" b="0">
-                <a:solidFill>
-                  <a:srgbClr val="D4D4D4"/>
-                </a:solidFill>
-                <a:latin typeface="Consolas"/>
-              </a:rPr>
-              <a:t>, </a:t>
-            </a:r>
-            <a:r>
-              <a:rPr sz="1500" i="0" b="0">
-                <a:solidFill>
-                  <a:srgbClr val="CE9178"/>
-                </a:solidFill>
-                <a:latin typeface="Consolas"/>
-              </a:rPr>
-              <a:t>"Luis Perez"</a:t>
-            </a:r>
-            <a:r>
-              <a:rPr sz="1500" i="0" b="0">
-                <a:solidFill>
-                  <a:srgbClr val="D4D4D4"/>
-                </a:solidFill>
-                <a:latin typeface="Consolas"/>
-              </a:rPr>
-              <a:t>, </a:t>
-            </a:r>
-            <a:r>
-              <a:rPr sz="1500" i="0" b="0">
-                <a:solidFill>
-                  <a:srgbClr val="CE9178"/>
-                </a:solidFill>
-                <a:latin typeface="Consolas"/>
-              </a:rPr>
-              <a:t>"Control de peso"</a:t>
-            </a:r>
-            <a:r>
-              <a:rPr sz="1500" i="0" b="0">
-                <a:solidFill>
-                  <a:srgbClr val="D4D4D4"/>
-                </a:solidFill>
-                <a:latin typeface="Consolas"/>
-              </a:rPr>
-              <a:t>));</a:t>
-            </a:r>
-          </a:p>
-          <a:p>
-            <a:pPr>
+              <a:rPr sz="1300" i="0" b="0">
+                <a:solidFill>
+                  <a:srgbClr val="858585"/>
+                </a:solidFill>
+                <a:latin typeface="Consolas"/>
+              </a:rPr>
+              <a:t>7</a:t>
+            </a:r>
+          </a:p>
+          <a:p>
+            <a:pPr algn="r">
               <a:spcAft>
-                <a:spcPts val="321"/>
+                <a:spcPts val="278"/>
               </a:spcAft>
             </a:pPr>
             <a:r>
-              <a:rPr sz="1500" i="0" b="0">
-                <a:solidFill>
-                  <a:srgbClr val="D4D4D4"/>
-                </a:solidFill>
-                <a:latin typeface="Consolas"/>
-              </a:rPr>
-              <a:t>    </a:t>
-            </a:r>
-            <a:r>
-              <a:rPr sz="1500" i="0" b="0">
-                <a:solidFill>
-                  <a:srgbClr val="DCDCAA"/>
-                </a:solidFill>
-                <a:latin typeface="Consolas"/>
-              </a:rPr>
-              <a:t>guardar</a:t>
-            </a:r>
-            <a:r>
-              <a:rPr sz="1500" i="0" b="0">
-                <a:solidFill>
-                  <a:srgbClr val="D4D4D4"/>
-                </a:solidFill>
-                <a:latin typeface="Consolas"/>
-              </a:rPr>
-              <a:t>(</a:t>
-            </a:r>
-            <a:r>
-              <a:rPr sz="1500" i="0" b="0">
-                <a:solidFill>
-                  <a:srgbClr val="569CD6"/>
-                </a:solidFill>
-                <a:latin typeface="Consolas"/>
-              </a:rPr>
-              <a:t>new</a:t>
-            </a:r>
-            <a:r>
-              <a:rPr sz="1500" i="0" b="0">
-                <a:solidFill>
-                  <a:srgbClr val="D4D4D4"/>
-                </a:solidFill>
-                <a:latin typeface="Consolas"/>
-              </a:rPr>
-              <a:t> </a:t>
-            </a:r>
-            <a:r>
-              <a:rPr sz="1500" i="0" b="0">
-                <a:solidFill>
-                  <a:srgbClr val="4EC9B0"/>
-                </a:solidFill>
-                <a:latin typeface="Consolas"/>
-              </a:rPr>
-              <a:t>Expediente</a:t>
-            </a:r>
-            <a:r>
-              <a:rPr sz="1500" i="0" b="0">
-                <a:solidFill>
-                  <a:srgbClr val="D4D4D4"/>
-                </a:solidFill>
-                <a:latin typeface="Consolas"/>
-              </a:rPr>
-              <a:t>(</a:t>
-            </a:r>
-            <a:r>
-              <a:rPr sz="1500" i="0" b="0">
-                <a:solidFill>
-                  <a:srgbClr val="CE9178"/>
-                </a:solidFill>
-                <a:latin typeface="Consolas"/>
-              </a:rPr>
-              <a:t>"M-003"</a:t>
-            </a:r>
-            <a:r>
-              <a:rPr sz="1500" i="0" b="0">
-                <a:solidFill>
-                  <a:srgbClr val="D4D4D4"/>
-                </a:solidFill>
-                <a:latin typeface="Consolas"/>
-              </a:rPr>
-              <a:t>, </a:t>
-            </a:r>
-            <a:r>
-              <a:rPr sz="1500" i="0" b="0">
-                <a:solidFill>
-                  <a:srgbClr val="CE9178"/>
-                </a:solidFill>
-                <a:latin typeface="Consolas"/>
-              </a:rPr>
-              <a:t>"Rocky"</a:t>
-            </a:r>
-            <a:r>
-              <a:rPr sz="1500" i="0" b="0">
-                <a:solidFill>
-                  <a:srgbClr val="D4D4D4"/>
-                </a:solidFill>
-                <a:latin typeface="Consolas"/>
-              </a:rPr>
-              <a:t>, </a:t>
-            </a:r>
-            <a:r>
-              <a:rPr sz="1500" i="0" b="0">
-                <a:solidFill>
-                  <a:srgbClr val="CE9178"/>
-                </a:solidFill>
-                <a:latin typeface="Consolas"/>
-              </a:rPr>
-              <a:t>"Pastor Aleman"</a:t>
-            </a:r>
-            <a:r>
-              <a:rPr sz="1500" i="0" b="0">
-                <a:solidFill>
-                  <a:srgbClr val="D4D4D4"/>
-                </a:solidFill>
-                <a:latin typeface="Consolas"/>
-              </a:rPr>
-              <a:t>, </a:t>
-            </a:r>
-            <a:r>
-              <a:rPr sz="1500" i="0" b="0">
-                <a:solidFill>
-                  <a:srgbClr val="CE9178"/>
-                </a:solidFill>
-                <a:latin typeface="Consolas"/>
-              </a:rPr>
-              <a:t>"Ana Gomez"</a:t>
-            </a:r>
-            <a:r>
-              <a:rPr sz="1500" i="0" b="0">
-                <a:solidFill>
-                  <a:srgbClr val="D4D4D4"/>
-                </a:solidFill>
-                <a:latin typeface="Consolas"/>
-              </a:rPr>
-              <a:t>, </a:t>
-            </a:r>
-            <a:r>
-              <a:rPr sz="1500" i="0" b="0">
-                <a:solidFill>
-                  <a:srgbClr val="CE9178"/>
-                </a:solidFill>
-                <a:latin typeface="Consolas"/>
-              </a:rPr>
-              <a:t>"Revision de patas"</a:t>
-            </a:r>
-            <a:r>
-              <a:rPr sz="1500" i="0" b="0">
-                <a:solidFill>
-                  <a:srgbClr val="D4D4D4"/>
-                </a:solidFill>
-                <a:latin typeface="Consolas"/>
-              </a:rPr>
-              <a:t>));</a:t>
-            </a:r>
-          </a:p>
-          <a:p>
-            <a:pPr>
+              <a:rPr sz="1300" i="0" b="0">
+                <a:solidFill>
+                  <a:srgbClr val="858585"/>
+                </a:solidFill>
+                <a:latin typeface="Consolas"/>
+              </a:rPr>
+              <a:t>8</a:t>
+            </a:r>
+          </a:p>
+          <a:p>
+            <a:pPr algn="r">
               <a:spcAft>
-                <a:spcPts val="321"/>
+                <a:spcPts val="278"/>
               </a:spcAft>
             </a:pPr>
             <a:r>
-              <a:rPr sz="1500" i="0" b="0">
-                <a:solidFill>
-                  <a:srgbClr val="D4D4D4"/>
-                </a:solidFill>
-                <a:latin typeface="Consolas"/>
-              </a:rPr>
-              <a:t>    </a:t>
-            </a:r>
-            <a:r>
-              <a:rPr sz="1500" i="0" b="0">
-                <a:solidFill>
-                  <a:srgbClr val="DCDCAA"/>
-                </a:solidFill>
-                <a:latin typeface="Consolas"/>
-              </a:rPr>
-              <a:t>guardar</a:t>
-            </a:r>
-            <a:r>
-              <a:rPr sz="1500" i="0" b="0">
-                <a:solidFill>
-                  <a:srgbClr val="D4D4D4"/>
-                </a:solidFill>
-                <a:latin typeface="Consolas"/>
-              </a:rPr>
-              <a:t>(</a:t>
-            </a:r>
-            <a:r>
-              <a:rPr sz="1500" i="0" b="0">
-                <a:solidFill>
-                  <a:srgbClr val="569CD6"/>
-                </a:solidFill>
-                <a:latin typeface="Consolas"/>
-              </a:rPr>
-              <a:t>new</a:t>
-            </a:r>
-            <a:r>
-              <a:rPr sz="1500" i="0" b="0">
-                <a:solidFill>
-                  <a:srgbClr val="D4D4D4"/>
-                </a:solidFill>
-                <a:latin typeface="Consolas"/>
-              </a:rPr>
-              <a:t> </a:t>
-            </a:r>
-            <a:r>
-              <a:rPr sz="1500" i="0" b="0">
-                <a:solidFill>
-                  <a:srgbClr val="4EC9B0"/>
-                </a:solidFill>
-                <a:latin typeface="Consolas"/>
-              </a:rPr>
-              <a:t>Expediente</a:t>
-            </a:r>
-            <a:r>
-              <a:rPr sz="1500" i="0" b="0">
-                <a:solidFill>
-                  <a:srgbClr val="D4D4D4"/>
-                </a:solidFill>
-                <a:latin typeface="Consolas"/>
-              </a:rPr>
-              <a:t>(</a:t>
-            </a:r>
-            <a:r>
-              <a:rPr sz="1500" i="0" b="0">
-                <a:solidFill>
-                  <a:srgbClr val="CE9178"/>
-                </a:solidFill>
-                <a:latin typeface="Consolas"/>
-              </a:rPr>
-              <a:t>"M-004"</a:t>
-            </a:r>
-            <a:r>
-              <a:rPr sz="1500" i="0" b="0">
-                <a:solidFill>
-                  <a:srgbClr val="D4D4D4"/>
-                </a:solidFill>
-                <a:latin typeface="Consolas"/>
-              </a:rPr>
-              <a:t>, </a:t>
-            </a:r>
-            <a:r>
-              <a:rPr sz="1500" i="0" b="0">
-                <a:solidFill>
-                  <a:srgbClr val="CE9178"/>
-                </a:solidFill>
-                <a:latin typeface="Consolas"/>
-              </a:rPr>
-              <a:t>"Nieve"</a:t>
-            </a:r>
-            <a:r>
-              <a:rPr sz="1500" i="0" b="0">
-                <a:solidFill>
-                  <a:srgbClr val="D4D4D4"/>
-                </a:solidFill>
-                <a:latin typeface="Consolas"/>
-              </a:rPr>
-              <a:t>, </a:t>
-            </a:r>
-            <a:r>
-              <a:rPr sz="1500" i="0" b="0">
-                <a:solidFill>
-                  <a:srgbClr val="CE9178"/>
-                </a:solidFill>
-                <a:latin typeface="Consolas"/>
-              </a:rPr>
-              <a:t>"Persa"</a:t>
-            </a:r>
-            <a:r>
-              <a:rPr sz="1500" i="0" b="0">
-                <a:solidFill>
-                  <a:srgbClr val="D4D4D4"/>
-                </a:solidFill>
-                <a:latin typeface="Consolas"/>
-              </a:rPr>
-              <a:t>, </a:t>
-            </a:r>
-            <a:r>
-              <a:rPr sz="1500" i="0" b="0">
-                <a:solidFill>
-                  <a:srgbClr val="CE9178"/>
-                </a:solidFill>
-                <a:latin typeface="Consolas"/>
-              </a:rPr>
-              <a:t>"Sara Diaz"</a:t>
-            </a:r>
-            <a:r>
-              <a:rPr sz="1500" i="0" b="0">
-                <a:solidFill>
-                  <a:srgbClr val="D4D4D4"/>
-                </a:solidFill>
-                <a:latin typeface="Consolas"/>
-              </a:rPr>
-              <a:t>, </a:t>
-            </a:r>
-            <a:r>
-              <a:rPr sz="1500" i="0" b="0">
-                <a:solidFill>
-                  <a:srgbClr val="CE9178"/>
-                </a:solidFill>
-                <a:latin typeface="Consolas"/>
-              </a:rPr>
-              <a:t>"Desparasitacion"</a:t>
-            </a:r>
-            <a:r>
-              <a:rPr sz="1500" i="0" b="0">
-                <a:solidFill>
-                  <a:srgbClr val="D4D4D4"/>
-                </a:solidFill>
-                <a:latin typeface="Consolas"/>
-              </a:rPr>
-              <a:t>));</a:t>
-            </a:r>
-          </a:p>
-          <a:p>
-            <a:pPr>
+              <a:rPr sz="1300" i="0" b="0">
+                <a:solidFill>
+                  <a:srgbClr val="858585"/>
+                </a:solidFill>
+                <a:latin typeface="Consolas"/>
+              </a:rPr>
+              <a:t>9</a:t>
+            </a:r>
+          </a:p>
+          <a:p>
+            <a:pPr algn="r">
               <a:spcAft>
-                <a:spcPts val="321"/>
+                <a:spcPts val="278"/>
               </a:spcAft>
             </a:pPr>
             <a:r>
-              <a:rPr sz="1500" i="0" b="0">
-                <a:solidFill>
-                  <a:srgbClr val="D4D4D4"/>
-                </a:solidFill>
-                <a:latin typeface="Consolas"/>
-              </a:rPr>
-              <a:t>    </a:t>
-            </a:r>
-            <a:r>
-              <a:rPr sz="1500" i="0" b="0">
-                <a:solidFill>
-                  <a:srgbClr val="DCDCAA"/>
-                </a:solidFill>
-                <a:latin typeface="Consolas"/>
-              </a:rPr>
-              <a:t>guardar</a:t>
-            </a:r>
-            <a:r>
-              <a:rPr sz="1500" i="0" b="0">
-                <a:solidFill>
-                  <a:srgbClr val="D4D4D4"/>
-                </a:solidFill>
-                <a:latin typeface="Consolas"/>
-              </a:rPr>
-              <a:t>(</a:t>
-            </a:r>
-            <a:r>
-              <a:rPr sz="1500" i="0" b="0">
-                <a:solidFill>
-                  <a:srgbClr val="569CD6"/>
-                </a:solidFill>
-                <a:latin typeface="Consolas"/>
-              </a:rPr>
-              <a:t>new</a:t>
-            </a:r>
-            <a:r>
-              <a:rPr sz="1500" i="0" b="0">
-                <a:solidFill>
-                  <a:srgbClr val="D4D4D4"/>
-                </a:solidFill>
-                <a:latin typeface="Consolas"/>
-              </a:rPr>
-              <a:t> </a:t>
-            </a:r>
-            <a:r>
-              <a:rPr sz="1500" i="0" b="0">
-                <a:solidFill>
-                  <a:srgbClr val="4EC9B0"/>
-                </a:solidFill>
-                <a:latin typeface="Consolas"/>
-              </a:rPr>
-              <a:t>Expediente</a:t>
-            </a:r>
-            <a:r>
-              <a:rPr sz="1500" i="0" b="0">
-                <a:solidFill>
-                  <a:srgbClr val="D4D4D4"/>
-                </a:solidFill>
-                <a:latin typeface="Consolas"/>
-              </a:rPr>
-              <a:t>(</a:t>
-            </a:r>
-            <a:r>
-              <a:rPr sz="1500" i="0" b="0">
-                <a:solidFill>
-                  <a:srgbClr val="CE9178"/>
-                </a:solidFill>
-                <a:latin typeface="Consolas"/>
-              </a:rPr>
-              <a:t>"M-005"</a:t>
-            </a:r>
-            <a:r>
-              <a:rPr sz="1500" i="0" b="0">
-                <a:solidFill>
-                  <a:srgbClr val="D4D4D4"/>
-                </a:solidFill>
-                <a:latin typeface="Consolas"/>
-              </a:rPr>
-              <a:t>, </a:t>
-            </a:r>
-            <a:r>
-              <a:rPr sz="1500" i="0" b="0">
-                <a:solidFill>
-                  <a:srgbClr val="CE9178"/>
-                </a:solidFill>
-                <a:latin typeface="Consolas"/>
-              </a:rPr>
-              <a:t>"Toby"</a:t>
-            </a:r>
-            <a:r>
-              <a:rPr sz="1500" i="0" b="0">
-                <a:solidFill>
-                  <a:srgbClr val="D4D4D4"/>
-                </a:solidFill>
-                <a:latin typeface="Consolas"/>
-              </a:rPr>
-              <a:t>, </a:t>
-            </a:r>
-            <a:r>
-              <a:rPr sz="1500" i="0" b="0">
-                <a:solidFill>
-                  <a:srgbClr val="CE9178"/>
-                </a:solidFill>
-                <a:latin typeface="Consolas"/>
-              </a:rPr>
-              <a:t>"Labrador"</a:t>
-            </a:r>
-            <a:r>
-              <a:rPr sz="1500" i="0" b="0">
-                <a:solidFill>
-                  <a:srgbClr val="D4D4D4"/>
-                </a:solidFill>
-                <a:latin typeface="Consolas"/>
-              </a:rPr>
-              <a:t>, </a:t>
-            </a:r>
-            <a:r>
-              <a:rPr sz="1500" i="0" b="0">
-                <a:solidFill>
-                  <a:srgbClr val="CE9178"/>
-                </a:solidFill>
-                <a:latin typeface="Consolas"/>
-              </a:rPr>
-              <a:t>"Sara Diaz"</a:t>
-            </a:r>
-            <a:r>
-              <a:rPr sz="1500" i="0" b="0">
-                <a:solidFill>
-                  <a:srgbClr val="D4D4D4"/>
-                </a:solidFill>
-                <a:latin typeface="Consolas"/>
-              </a:rPr>
-              <a:t>, </a:t>
-            </a:r>
-            <a:r>
-              <a:rPr sz="1500" i="0" b="0">
-                <a:solidFill>
-                  <a:srgbClr val="CE9178"/>
-                </a:solidFill>
-                <a:latin typeface="Consolas"/>
-              </a:rPr>
-              <a:t>"Control geriatrico"</a:t>
-            </a:r>
-            <a:r>
-              <a:rPr sz="1500" i="0" b="0">
-                <a:solidFill>
-                  <a:srgbClr val="D4D4D4"/>
-                </a:solidFill>
-                <a:latin typeface="Consolas"/>
-              </a:rPr>
-              <a:t>));</a:t>
-            </a:r>
-          </a:p>
-          <a:p>
-            <a:pPr>
+              <a:rPr sz="1300" i="0" b="0">
+                <a:solidFill>
+                  <a:srgbClr val="858585"/>
+                </a:solidFill>
+                <a:latin typeface="Consolas"/>
+              </a:rPr>
+              <a:t>10</a:t>
+            </a:r>
+          </a:p>
+          <a:p>
+            <a:pPr algn="r">
               <a:spcAft>
-                <a:spcPts val="321"/>
+                <a:spcPts val="278"/>
               </a:spcAft>
             </a:pPr>
             <a:r>
-              <a:rPr sz="1500" i="0" b="0">
-                <a:solidFill>
-                  <a:srgbClr val="D4D4D4"/>
-                </a:solidFill>
-                <a:latin typeface="Consolas"/>
-              </a:rPr>
-              <a:t>    </a:t>
-            </a:r>
-            <a:r>
-              <a:rPr sz="1500" i="0" b="0">
-                <a:solidFill>
-                  <a:srgbClr val="DCDCAA"/>
-                </a:solidFill>
-                <a:latin typeface="Consolas"/>
-              </a:rPr>
-              <a:t>System.out.println</a:t>
-            </a:r>
-            <a:r>
-              <a:rPr sz="1500" i="0" b="0">
-                <a:solidFill>
-                  <a:srgbClr val="D4D4D4"/>
-                </a:solidFill>
-                <a:latin typeface="Consolas"/>
-              </a:rPr>
-              <a:t>(</a:t>
-            </a:r>
-            <a:r>
-              <a:rPr sz="1500" i="0" b="0">
-                <a:solidFill>
-                  <a:srgbClr val="CE9178"/>
-                </a:solidFill>
-                <a:latin typeface="Consolas"/>
-              </a:rPr>
-              <a:t>"Expedientes: "</a:t>
-            </a:r>
-            <a:r>
-              <a:rPr sz="1500" i="0" b="0">
-                <a:solidFill>
-                  <a:srgbClr val="D4D4D4"/>
-                </a:solidFill>
-                <a:latin typeface="Consolas"/>
-              </a:rPr>
-              <a:t> + </a:t>
-            </a:r>
-            <a:r>
-              <a:rPr sz="1500" i="0" b="0">
-                <a:solidFill>
-                  <a:srgbClr val="DCDCAA"/>
-                </a:solidFill>
-                <a:latin typeface="Consolas"/>
-              </a:rPr>
-              <a:t>expedientes.size</a:t>
-            </a:r>
-            <a:r>
-              <a:rPr sz="1500" i="0" b="0">
-                <a:solidFill>
-                  <a:srgbClr val="D4D4D4"/>
-                </a:solidFill>
-                <a:latin typeface="Consolas"/>
-              </a:rPr>
-              <a:t>() + </a:t>
-            </a:r>
-            <a:r>
-              <a:rPr sz="1500" i="0" b="0">
-                <a:solidFill>
-                  <a:srgbClr val="CE9178"/>
-                </a:solidFill>
-                <a:latin typeface="Consolas"/>
-              </a:rPr>
-              <a:t>" | Razas distintas: "</a:t>
-            </a:r>
-            <a:r>
-              <a:rPr sz="1500" i="0" b="0">
-                <a:solidFill>
-                  <a:srgbClr val="D4D4D4"/>
-                </a:solidFill>
-                <a:latin typeface="Consolas"/>
-              </a:rPr>
-              <a:t> + </a:t>
-            </a:r>
-            <a:r>
-              <a:rPr sz="1500" i="0" b="0">
-                <a:solidFill>
-                  <a:srgbClr val="DCDCAA"/>
-                </a:solidFill>
-                <a:latin typeface="Consolas"/>
-              </a:rPr>
-              <a:t>razas.size</a:t>
-            </a:r>
-            <a:r>
-              <a:rPr sz="1500" i="0" b="0">
-                <a:solidFill>
-                  <a:srgbClr val="D4D4D4"/>
-                </a:solidFill>
-                <a:latin typeface="Consolas"/>
-              </a:rPr>
-              <a:t>());</a:t>
-            </a:r>
-          </a:p>
-          <a:p>
-            <a:pPr>
+              <a:rPr sz="1300" i="0" b="0">
+                <a:solidFill>
+                  <a:srgbClr val="858585"/>
+                </a:solidFill>
+                <a:latin typeface="Consolas"/>
+              </a:rPr>
+              <a:t>11</a:t>
+            </a:r>
+          </a:p>
+          <a:p>
+            <a:pPr algn="r">
               <a:spcAft>
-                <a:spcPts val="321"/>
+                <a:spcPts val="278"/>
               </a:spcAft>
             </a:pPr>
             <a:r>
-              <a:rPr sz="1500" i="0" b="0">
-                <a:solidFill>
-                  <a:srgbClr val="D4D4D4"/>
-                </a:solidFill>
-                <a:latin typeface="Consolas"/>
-              </a:rPr>
-              <a:t>}</a:t>
+              <a:rPr sz="1300" i="0" b="0">
+                <a:solidFill>
+                  <a:srgbClr val="858585"/>
+                </a:solidFill>
+                <a:latin typeface="Consolas"/>
+              </a:rPr>
+              <a:t>12</a:t>
             </a:r>
           </a:p>
         </p:txBody>
@@ -7672,8 +6764,8 @@
         </p:nvSpPr>
         <p:spPr>
           <a:xfrm>
-            <a:off x="457200" y="6035040"/>
-            <a:ext cx="11277295" cy="365760"/>
+            <a:off x="1188720" y="1719072"/>
+            <a:ext cx="10271455" cy="3020437"/>
           </a:xfrm>
           <a:prstGeom prst="rect">
             <a:avLst/>
@@ -7686,6 +6778,1328 @@
           </a:bodyPr>
           <a:lstStyle/>
           <a:p>
+            <a:pPr>
+              <a:spcAft>
+                <a:spcPts val="278"/>
+              </a:spcAft>
+            </a:pPr>
+            <a:r>
+              <a:rPr sz="1300" i="1" b="0">
+                <a:solidFill>
+                  <a:srgbClr val="6A9955"/>
+                </a:solidFill>
+                <a:latin typeface="Consolas"/>
+              </a:rPr>
+              <a:t>// ---- Datos: la inteligencia del sistema vive aqui, no en el boton ----</a:t>
+            </a:r>
+          </a:p>
+          <a:p>
+            <a:pPr>
+              <a:spcAft>
+                <a:spcPts val="278"/>
+              </a:spcAft>
+            </a:pPr>
+            <a:r>
+              <a:rPr sz="1300" i="0" b="0">
+                <a:solidFill>
+                  <a:srgbClr val="569CD6"/>
+                </a:solidFill>
+                <a:latin typeface="Consolas"/>
+              </a:rPr>
+              <a:t>private</a:t>
+            </a:r>
+            <a:r>
+              <a:rPr sz="1300" i="0" b="0">
+                <a:solidFill>
+                  <a:srgbClr val="D4D4D4"/>
+                </a:solidFill>
+                <a:latin typeface="Consolas"/>
+              </a:rPr>
+              <a:t> </a:t>
+            </a:r>
+            <a:r>
+              <a:rPr sz="1300" i="0" b="0">
+                <a:solidFill>
+                  <a:srgbClr val="569CD6"/>
+                </a:solidFill>
+                <a:latin typeface="Consolas"/>
+              </a:rPr>
+              <a:t>final</a:t>
+            </a:r>
+            <a:r>
+              <a:rPr sz="1300" i="0" b="0">
+                <a:solidFill>
+                  <a:srgbClr val="D4D4D4"/>
+                </a:solidFill>
+                <a:latin typeface="Consolas"/>
+              </a:rPr>
+              <a:t> </a:t>
+            </a:r>
+            <a:r>
+              <a:rPr sz="1300" i="0" b="0">
+                <a:solidFill>
+                  <a:srgbClr val="4EC9B0"/>
+                </a:solidFill>
+                <a:latin typeface="Consolas"/>
+              </a:rPr>
+              <a:t>Map</a:t>
+            </a:r>
+            <a:r>
+              <a:rPr sz="1300" i="0" b="0">
+                <a:solidFill>
+                  <a:srgbClr val="D4D4D4"/>
+                </a:solidFill>
+                <a:latin typeface="Consolas"/>
+              </a:rPr>
+              <a:t>&lt;</a:t>
+            </a:r>
+            <a:r>
+              <a:rPr sz="1300" i="0" b="0">
+                <a:solidFill>
+                  <a:srgbClr val="4EC9B0"/>
+                </a:solidFill>
+                <a:latin typeface="Consolas"/>
+              </a:rPr>
+              <a:t>String</a:t>
+            </a:r>
+            <a:r>
+              <a:rPr sz="1300" i="0" b="0">
+                <a:solidFill>
+                  <a:srgbClr val="D4D4D4"/>
+                </a:solidFill>
+                <a:latin typeface="Consolas"/>
+              </a:rPr>
+              <a:t>, </a:t>
+            </a:r>
+            <a:r>
+              <a:rPr sz="1300" i="0" b="0">
+                <a:solidFill>
+                  <a:srgbClr val="D4D4D4"/>
+                </a:solidFill>
+                <a:latin typeface="Consolas"/>
+              </a:rPr>
+              <a:t>Expediente</a:t>
+            </a:r>
+            <a:r>
+              <a:rPr sz="1300" i="0" b="0">
+                <a:solidFill>
+                  <a:srgbClr val="D4D4D4"/>
+                </a:solidFill>
+                <a:latin typeface="Consolas"/>
+              </a:rPr>
+              <a:t>&gt; </a:t>
+            </a:r>
+            <a:r>
+              <a:rPr sz="1300" i="0" b="0">
+                <a:solidFill>
+                  <a:srgbClr val="D4D4D4"/>
+                </a:solidFill>
+                <a:latin typeface="Consolas"/>
+              </a:rPr>
+              <a:t>expedientes</a:t>
+            </a:r>
+            <a:r>
+              <a:rPr sz="1300" i="0" b="0">
+                <a:solidFill>
+                  <a:srgbClr val="D4D4D4"/>
+                </a:solidFill>
+                <a:latin typeface="Consolas"/>
+              </a:rPr>
+              <a:t> = </a:t>
+            </a:r>
+            <a:r>
+              <a:rPr sz="1300" i="0" b="0">
+                <a:solidFill>
+                  <a:srgbClr val="569CD6"/>
+                </a:solidFill>
+                <a:latin typeface="Consolas"/>
+              </a:rPr>
+              <a:t>new</a:t>
+            </a:r>
+            <a:r>
+              <a:rPr sz="1300" i="0" b="0">
+                <a:solidFill>
+                  <a:srgbClr val="D4D4D4"/>
+                </a:solidFill>
+                <a:latin typeface="Consolas"/>
+              </a:rPr>
+              <a:t> </a:t>
+            </a:r>
+            <a:r>
+              <a:rPr sz="1300" i="0" b="0">
+                <a:solidFill>
+                  <a:srgbClr val="4EC9B0"/>
+                </a:solidFill>
+                <a:latin typeface="Consolas"/>
+              </a:rPr>
+              <a:t>HashMap</a:t>
+            </a:r>
+            <a:r>
+              <a:rPr sz="1300" i="0" b="0">
+                <a:solidFill>
+                  <a:srgbClr val="D4D4D4"/>
+                </a:solidFill>
+                <a:latin typeface="Consolas"/>
+              </a:rPr>
+              <a:t>&lt;&gt;();</a:t>
+            </a:r>
+          </a:p>
+          <a:p>
+            <a:pPr>
+              <a:spcAft>
+                <a:spcPts val="278"/>
+              </a:spcAft>
+            </a:pPr>
+            <a:r>
+              <a:rPr sz="1300" i="0" b="0">
+                <a:solidFill>
+                  <a:srgbClr val="569CD6"/>
+                </a:solidFill>
+                <a:latin typeface="Consolas"/>
+              </a:rPr>
+              <a:t>private</a:t>
+            </a:r>
+            <a:r>
+              <a:rPr sz="1300" i="0" b="0">
+                <a:solidFill>
+                  <a:srgbClr val="D4D4D4"/>
+                </a:solidFill>
+                <a:latin typeface="Consolas"/>
+              </a:rPr>
+              <a:t> </a:t>
+            </a:r>
+            <a:r>
+              <a:rPr sz="1300" i="0" b="0">
+                <a:solidFill>
+                  <a:srgbClr val="569CD6"/>
+                </a:solidFill>
+                <a:latin typeface="Consolas"/>
+              </a:rPr>
+              <a:t>final</a:t>
+            </a:r>
+            <a:r>
+              <a:rPr sz="1300" i="0" b="0">
+                <a:solidFill>
+                  <a:srgbClr val="D4D4D4"/>
+                </a:solidFill>
+                <a:latin typeface="Consolas"/>
+              </a:rPr>
+              <a:t> </a:t>
+            </a:r>
+            <a:r>
+              <a:rPr sz="1300" i="0" b="0">
+                <a:solidFill>
+                  <a:srgbClr val="4EC9B0"/>
+                </a:solidFill>
+                <a:latin typeface="Consolas"/>
+              </a:rPr>
+              <a:t>Set</a:t>
+            </a:r>
+            <a:r>
+              <a:rPr sz="1300" i="0" b="0">
+                <a:solidFill>
+                  <a:srgbClr val="D4D4D4"/>
+                </a:solidFill>
+                <a:latin typeface="Consolas"/>
+              </a:rPr>
+              <a:t>&lt;</a:t>
+            </a:r>
+            <a:r>
+              <a:rPr sz="1300" i="0" b="0">
+                <a:solidFill>
+                  <a:srgbClr val="4EC9B0"/>
+                </a:solidFill>
+                <a:latin typeface="Consolas"/>
+              </a:rPr>
+              <a:t>String</a:t>
+            </a:r>
+            <a:r>
+              <a:rPr sz="1300" i="0" b="0">
+                <a:solidFill>
+                  <a:srgbClr val="D4D4D4"/>
+                </a:solidFill>
+                <a:latin typeface="Consolas"/>
+              </a:rPr>
+              <a:t>&gt; </a:t>
+            </a:r>
+            <a:r>
+              <a:rPr sz="1300" i="0" b="0">
+                <a:solidFill>
+                  <a:srgbClr val="D4D4D4"/>
+                </a:solidFill>
+                <a:latin typeface="Consolas"/>
+              </a:rPr>
+              <a:t>razas</a:t>
+            </a:r>
+            <a:r>
+              <a:rPr sz="1300" i="0" b="0">
+                <a:solidFill>
+                  <a:srgbClr val="D4D4D4"/>
+                </a:solidFill>
+                <a:latin typeface="Consolas"/>
+              </a:rPr>
+              <a:t> = </a:t>
+            </a:r>
+            <a:r>
+              <a:rPr sz="1300" i="0" b="0">
+                <a:solidFill>
+                  <a:srgbClr val="569CD6"/>
+                </a:solidFill>
+                <a:latin typeface="Consolas"/>
+              </a:rPr>
+              <a:t>new</a:t>
+            </a:r>
+            <a:r>
+              <a:rPr sz="1300" i="0" b="0">
+                <a:solidFill>
+                  <a:srgbClr val="D4D4D4"/>
+                </a:solidFill>
+                <a:latin typeface="Consolas"/>
+              </a:rPr>
+              <a:t> </a:t>
+            </a:r>
+            <a:r>
+              <a:rPr sz="1300" i="0" b="0">
+                <a:solidFill>
+                  <a:srgbClr val="4EC9B0"/>
+                </a:solidFill>
+                <a:latin typeface="Consolas"/>
+              </a:rPr>
+              <a:t>HashSet</a:t>
+            </a:r>
+            <a:r>
+              <a:rPr sz="1300" i="0" b="0">
+                <a:solidFill>
+                  <a:srgbClr val="D4D4D4"/>
+                </a:solidFill>
+                <a:latin typeface="Consolas"/>
+              </a:rPr>
+              <a:t>&lt;&gt;();</a:t>
+            </a:r>
+          </a:p>
+          <a:p>
+            <a:pPr>
+              <a:spcAft>
+                <a:spcPts val="278"/>
+              </a:spcAft>
+            </a:pPr>
+            <a:r>
+              <a:rPr sz="1300" i="0" b="0">
+                <a:solidFill>
+                  <a:srgbClr val="D4D4D4"/>
+                </a:solidFill>
+                <a:latin typeface="Consolas"/>
+              </a:rPr>
+              <a:t/>
+            </a:r>
+          </a:p>
+          <a:p>
+            <a:pPr>
+              <a:spcAft>
+                <a:spcPts val="278"/>
+              </a:spcAft>
+            </a:pPr>
+            <a:r>
+              <a:rPr sz="1300" i="0" b="0">
+                <a:solidFill>
+                  <a:srgbClr val="569CD6"/>
+                </a:solidFill>
+                <a:latin typeface="Consolas"/>
+              </a:rPr>
+              <a:t>private</a:t>
+            </a:r>
+            <a:r>
+              <a:rPr sz="1300" i="0" b="0">
+                <a:solidFill>
+                  <a:srgbClr val="D4D4D4"/>
+                </a:solidFill>
+                <a:latin typeface="Consolas"/>
+              </a:rPr>
+              <a:t> </a:t>
+            </a:r>
+            <a:r>
+              <a:rPr sz="1300" i="0" b="0">
+                <a:solidFill>
+                  <a:srgbClr val="569CD6"/>
+                </a:solidFill>
+                <a:latin typeface="Consolas"/>
+              </a:rPr>
+              <a:t>void</a:t>
+            </a:r>
+            <a:r>
+              <a:rPr sz="1300" i="0" b="0">
+                <a:solidFill>
+                  <a:srgbClr val="D4D4D4"/>
+                </a:solidFill>
+                <a:latin typeface="Consolas"/>
+              </a:rPr>
+              <a:t> </a:t>
+            </a:r>
+            <a:r>
+              <a:rPr sz="1300" i="0" b="0">
+                <a:solidFill>
+                  <a:srgbClr val="DCDCAA"/>
+                </a:solidFill>
+                <a:latin typeface="Consolas"/>
+              </a:rPr>
+              <a:t>cargarDatosDePrueba</a:t>
+            </a:r>
+            <a:r>
+              <a:rPr sz="1300" i="0" b="0">
+                <a:solidFill>
+                  <a:srgbClr val="D4D4D4"/>
+                </a:solidFill>
+                <a:latin typeface="Consolas"/>
+              </a:rPr>
+              <a:t>() {</a:t>
+            </a:r>
+          </a:p>
+          <a:p>
+            <a:pPr>
+              <a:spcAft>
+                <a:spcPts val="278"/>
+              </a:spcAft>
+            </a:pPr>
+            <a:r>
+              <a:rPr sz="1300" i="0" b="0">
+                <a:solidFill>
+                  <a:srgbClr val="D4D4D4"/>
+                </a:solidFill>
+                <a:latin typeface="Consolas"/>
+              </a:rPr>
+              <a:t>    </a:t>
+            </a:r>
+            <a:r>
+              <a:rPr sz="1300" i="0" b="0">
+                <a:solidFill>
+                  <a:srgbClr val="DCDCAA"/>
+                </a:solidFill>
+                <a:latin typeface="Consolas"/>
+              </a:rPr>
+              <a:t>guardar</a:t>
+            </a:r>
+            <a:r>
+              <a:rPr sz="1300" i="0" b="0">
+                <a:solidFill>
+                  <a:srgbClr val="D4D4D4"/>
+                </a:solidFill>
+                <a:latin typeface="Consolas"/>
+              </a:rPr>
+              <a:t>(</a:t>
+            </a:r>
+            <a:r>
+              <a:rPr sz="1300" i="0" b="0">
+                <a:solidFill>
+                  <a:srgbClr val="569CD6"/>
+                </a:solidFill>
+                <a:latin typeface="Consolas"/>
+              </a:rPr>
+              <a:t>new</a:t>
+            </a:r>
+            <a:r>
+              <a:rPr sz="1300" i="0" b="0">
+                <a:solidFill>
+                  <a:srgbClr val="D4D4D4"/>
+                </a:solidFill>
+                <a:latin typeface="Consolas"/>
+              </a:rPr>
+              <a:t> </a:t>
+            </a:r>
+            <a:r>
+              <a:rPr sz="1300" i="0" b="0">
+                <a:solidFill>
+                  <a:srgbClr val="4EC9B0"/>
+                </a:solidFill>
+                <a:latin typeface="Consolas"/>
+              </a:rPr>
+              <a:t>Expediente</a:t>
+            </a:r>
+            <a:r>
+              <a:rPr sz="1300" i="0" b="0">
+                <a:solidFill>
+                  <a:srgbClr val="D4D4D4"/>
+                </a:solidFill>
+                <a:latin typeface="Consolas"/>
+              </a:rPr>
+              <a:t>(</a:t>
+            </a:r>
+            <a:r>
+              <a:rPr sz="1300" i="0" b="0">
+                <a:solidFill>
+                  <a:srgbClr val="CE9178"/>
+                </a:solidFill>
+                <a:latin typeface="Consolas"/>
+              </a:rPr>
+              <a:t>"M-001"</a:t>
+            </a:r>
+            <a:r>
+              <a:rPr sz="1300" i="0" b="0">
+                <a:solidFill>
+                  <a:srgbClr val="D4D4D4"/>
+                </a:solidFill>
+                <a:latin typeface="Consolas"/>
+              </a:rPr>
+              <a:t>, </a:t>
+            </a:r>
+            <a:r>
+              <a:rPr sz="1300" i="0" b="0">
+                <a:solidFill>
+                  <a:srgbClr val="CE9178"/>
+                </a:solidFill>
+                <a:latin typeface="Consolas"/>
+              </a:rPr>
+              <a:t>"Firulais"</a:t>
+            </a:r>
+            <a:r>
+              <a:rPr sz="1300" i="0" b="0">
+                <a:solidFill>
+                  <a:srgbClr val="D4D4D4"/>
+                </a:solidFill>
+                <a:latin typeface="Consolas"/>
+              </a:rPr>
+              <a:t>, </a:t>
+            </a:r>
+            <a:r>
+              <a:rPr sz="1300" i="0" b="0">
+                <a:solidFill>
+                  <a:srgbClr val="CE9178"/>
+                </a:solidFill>
+                <a:latin typeface="Consolas"/>
+              </a:rPr>
+              <a:t>"Labrador"</a:t>
+            </a:r>
+            <a:r>
+              <a:rPr sz="1300" i="0" b="0">
+                <a:solidFill>
+                  <a:srgbClr val="D4D4D4"/>
+                </a:solidFill>
+                <a:latin typeface="Consolas"/>
+              </a:rPr>
+              <a:t>, </a:t>
+            </a:r>
+            <a:r>
+              <a:rPr sz="1300" i="0" b="0">
+                <a:solidFill>
+                  <a:srgbClr val="CE9178"/>
+                </a:solidFill>
+                <a:latin typeface="Consolas"/>
+              </a:rPr>
+              <a:t>"Ana Gomez"</a:t>
+            </a:r>
+            <a:r>
+              <a:rPr sz="1300" i="0" b="0">
+                <a:solidFill>
+                  <a:srgbClr val="D4D4D4"/>
+                </a:solidFill>
+                <a:latin typeface="Consolas"/>
+              </a:rPr>
+              <a:t>, </a:t>
+            </a:r>
+            <a:r>
+              <a:rPr sz="1300" i="0" b="0">
+                <a:solidFill>
+                  <a:srgbClr val="CE9178"/>
+                </a:solidFill>
+                <a:latin typeface="Consolas"/>
+              </a:rPr>
+              <a:t>"Vacunacion al dia"</a:t>
+            </a:r>
+            <a:r>
+              <a:rPr sz="1300" i="0" b="0">
+                <a:solidFill>
+                  <a:srgbClr val="D4D4D4"/>
+                </a:solidFill>
+                <a:latin typeface="Consolas"/>
+              </a:rPr>
+              <a:t>));</a:t>
+            </a:r>
+          </a:p>
+          <a:p>
+            <a:pPr>
+              <a:spcAft>
+                <a:spcPts val="278"/>
+              </a:spcAft>
+            </a:pPr>
+            <a:r>
+              <a:rPr sz="1300" i="0" b="0">
+                <a:solidFill>
+                  <a:srgbClr val="D4D4D4"/>
+                </a:solidFill>
+                <a:latin typeface="Consolas"/>
+              </a:rPr>
+              <a:t>    </a:t>
+            </a:r>
+            <a:r>
+              <a:rPr sz="1300" i="0" b="0">
+                <a:solidFill>
+                  <a:srgbClr val="DCDCAA"/>
+                </a:solidFill>
+                <a:latin typeface="Consolas"/>
+              </a:rPr>
+              <a:t>guardar</a:t>
+            </a:r>
+            <a:r>
+              <a:rPr sz="1300" i="0" b="0">
+                <a:solidFill>
+                  <a:srgbClr val="D4D4D4"/>
+                </a:solidFill>
+                <a:latin typeface="Consolas"/>
+              </a:rPr>
+              <a:t>(</a:t>
+            </a:r>
+            <a:r>
+              <a:rPr sz="1300" i="0" b="0">
+                <a:solidFill>
+                  <a:srgbClr val="569CD6"/>
+                </a:solidFill>
+                <a:latin typeface="Consolas"/>
+              </a:rPr>
+              <a:t>new</a:t>
+            </a:r>
+            <a:r>
+              <a:rPr sz="1300" i="0" b="0">
+                <a:solidFill>
+                  <a:srgbClr val="D4D4D4"/>
+                </a:solidFill>
+                <a:latin typeface="Consolas"/>
+              </a:rPr>
+              <a:t> </a:t>
+            </a:r>
+            <a:r>
+              <a:rPr sz="1300" i="0" b="0">
+                <a:solidFill>
+                  <a:srgbClr val="4EC9B0"/>
+                </a:solidFill>
+                <a:latin typeface="Consolas"/>
+              </a:rPr>
+              <a:t>Expediente</a:t>
+            </a:r>
+            <a:r>
+              <a:rPr sz="1300" i="0" b="0">
+                <a:solidFill>
+                  <a:srgbClr val="D4D4D4"/>
+                </a:solidFill>
+                <a:latin typeface="Consolas"/>
+              </a:rPr>
+              <a:t>(</a:t>
+            </a:r>
+            <a:r>
+              <a:rPr sz="1300" i="0" b="0">
+                <a:solidFill>
+                  <a:srgbClr val="CE9178"/>
+                </a:solidFill>
+                <a:latin typeface="Consolas"/>
+              </a:rPr>
+              <a:t>"M-002"</a:t>
+            </a:r>
+            <a:r>
+              <a:rPr sz="1300" i="0" b="0">
+                <a:solidFill>
+                  <a:srgbClr val="D4D4D4"/>
+                </a:solidFill>
+                <a:latin typeface="Consolas"/>
+              </a:rPr>
+              <a:t>, </a:t>
+            </a:r>
+            <a:r>
+              <a:rPr sz="1300" i="0" b="0">
+                <a:solidFill>
+                  <a:srgbClr val="CE9178"/>
+                </a:solidFill>
+                <a:latin typeface="Consolas"/>
+              </a:rPr>
+              <a:t>"Michi"</a:t>
+            </a:r>
+            <a:r>
+              <a:rPr sz="1300" i="0" b="0">
+                <a:solidFill>
+                  <a:srgbClr val="D4D4D4"/>
+                </a:solidFill>
+                <a:latin typeface="Consolas"/>
+              </a:rPr>
+              <a:t>, </a:t>
+            </a:r>
+            <a:r>
+              <a:rPr sz="1300" i="0" b="0">
+                <a:solidFill>
+                  <a:srgbClr val="CE9178"/>
+                </a:solidFill>
+                <a:latin typeface="Consolas"/>
+              </a:rPr>
+              <a:t>"Criollo"</a:t>
+            </a:r>
+            <a:r>
+              <a:rPr sz="1300" i="0" b="0">
+                <a:solidFill>
+                  <a:srgbClr val="D4D4D4"/>
+                </a:solidFill>
+                <a:latin typeface="Consolas"/>
+              </a:rPr>
+              <a:t>, </a:t>
+            </a:r>
+            <a:r>
+              <a:rPr sz="1300" i="0" b="0">
+                <a:solidFill>
+                  <a:srgbClr val="CE9178"/>
+                </a:solidFill>
+                <a:latin typeface="Consolas"/>
+              </a:rPr>
+              <a:t>"Luis Perez"</a:t>
+            </a:r>
+            <a:r>
+              <a:rPr sz="1300" i="0" b="0">
+                <a:solidFill>
+                  <a:srgbClr val="D4D4D4"/>
+                </a:solidFill>
+                <a:latin typeface="Consolas"/>
+              </a:rPr>
+              <a:t>, </a:t>
+            </a:r>
+            <a:r>
+              <a:rPr sz="1300" i="0" b="0">
+                <a:solidFill>
+                  <a:srgbClr val="CE9178"/>
+                </a:solidFill>
+                <a:latin typeface="Consolas"/>
+              </a:rPr>
+              <a:t>"Control de peso"</a:t>
+            </a:r>
+            <a:r>
+              <a:rPr sz="1300" i="0" b="0">
+                <a:solidFill>
+                  <a:srgbClr val="D4D4D4"/>
+                </a:solidFill>
+                <a:latin typeface="Consolas"/>
+              </a:rPr>
+              <a:t>));</a:t>
+            </a:r>
+          </a:p>
+          <a:p>
+            <a:pPr>
+              <a:spcAft>
+                <a:spcPts val="278"/>
+              </a:spcAft>
+            </a:pPr>
+            <a:r>
+              <a:rPr sz="1300" i="0" b="0">
+                <a:solidFill>
+                  <a:srgbClr val="D4D4D4"/>
+                </a:solidFill>
+                <a:latin typeface="Consolas"/>
+              </a:rPr>
+              <a:t>    </a:t>
+            </a:r>
+            <a:r>
+              <a:rPr sz="1300" i="0" b="0">
+                <a:solidFill>
+                  <a:srgbClr val="DCDCAA"/>
+                </a:solidFill>
+                <a:latin typeface="Consolas"/>
+              </a:rPr>
+              <a:t>guardar</a:t>
+            </a:r>
+            <a:r>
+              <a:rPr sz="1300" i="0" b="0">
+                <a:solidFill>
+                  <a:srgbClr val="D4D4D4"/>
+                </a:solidFill>
+                <a:latin typeface="Consolas"/>
+              </a:rPr>
+              <a:t>(</a:t>
+            </a:r>
+            <a:r>
+              <a:rPr sz="1300" i="0" b="0">
+                <a:solidFill>
+                  <a:srgbClr val="569CD6"/>
+                </a:solidFill>
+                <a:latin typeface="Consolas"/>
+              </a:rPr>
+              <a:t>new</a:t>
+            </a:r>
+            <a:r>
+              <a:rPr sz="1300" i="0" b="0">
+                <a:solidFill>
+                  <a:srgbClr val="D4D4D4"/>
+                </a:solidFill>
+                <a:latin typeface="Consolas"/>
+              </a:rPr>
+              <a:t> </a:t>
+            </a:r>
+            <a:r>
+              <a:rPr sz="1300" i="0" b="0">
+                <a:solidFill>
+                  <a:srgbClr val="4EC9B0"/>
+                </a:solidFill>
+                <a:latin typeface="Consolas"/>
+              </a:rPr>
+              <a:t>Expediente</a:t>
+            </a:r>
+            <a:r>
+              <a:rPr sz="1300" i="0" b="0">
+                <a:solidFill>
+                  <a:srgbClr val="D4D4D4"/>
+                </a:solidFill>
+                <a:latin typeface="Consolas"/>
+              </a:rPr>
+              <a:t>(</a:t>
+            </a:r>
+            <a:r>
+              <a:rPr sz="1300" i="0" b="0">
+                <a:solidFill>
+                  <a:srgbClr val="CE9178"/>
+                </a:solidFill>
+                <a:latin typeface="Consolas"/>
+              </a:rPr>
+              <a:t>"M-003"</a:t>
+            </a:r>
+            <a:r>
+              <a:rPr sz="1300" i="0" b="0">
+                <a:solidFill>
+                  <a:srgbClr val="D4D4D4"/>
+                </a:solidFill>
+                <a:latin typeface="Consolas"/>
+              </a:rPr>
+              <a:t>, </a:t>
+            </a:r>
+            <a:r>
+              <a:rPr sz="1300" i="0" b="0">
+                <a:solidFill>
+                  <a:srgbClr val="CE9178"/>
+                </a:solidFill>
+                <a:latin typeface="Consolas"/>
+              </a:rPr>
+              <a:t>"Rocky"</a:t>
+            </a:r>
+            <a:r>
+              <a:rPr sz="1300" i="0" b="0">
+                <a:solidFill>
+                  <a:srgbClr val="D4D4D4"/>
+                </a:solidFill>
+                <a:latin typeface="Consolas"/>
+              </a:rPr>
+              <a:t>, </a:t>
+            </a:r>
+            <a:r>
+              <a:rPr sz="1300" i="0" b="0">
+                <a:solidFill>
+                  <a:srgbClr val="CE9178"/>
+                </a:solidFill>
+                <a:latin typeface="Consolas"/>
+              </a:rPr>
+              <a:t>"Pastor Aleman"</a:t>
+            </a:r>
+            <a:r>
+              <a:rPr sz="1300" i="0" b="0">
+                <a:solidFill>
+                  <a:srgbClr val="D4D4D4"/>
+                </a:solidFill>
+                <a:latin typeface="Consolas"/>
+              </a:rPr>
+              <a:t>, </a:t>
+            </a:r>
+            <a:r>
+              <a:rPr sz="1300" i="0" b="0">
+                <a:solidFill>
+                  <a:srgbClr val="CE9178"/>
+                </a:solidFill>
+                <a:latin typeface="Consolas"/>
+              </a:rPr>
+              <a:t>"Ana Gomez"</a:t>
+            </a:r>
+            <a:r>
+              <a:rPr sz="1300" i="0" b="0">
+                <a:solidFill>
+                  <a:srgbClr val="D4D4D4"/>
+                </a:solidFill>
+                <a:latin typeface="Consolas"/>
+              </a:rPr>
+              <a:t>, </a:t>
+            </a:r>
+            <a:r>
+              <a:rPr sz="1300" i="0" b="0">
+                <a:solidFill>
+                  <a:srgbClr val="CE9178"/>
+                </a:solidFill>
+                <a:latin typeface="Consolas"/>
+              </a:rPr>
+              <a:t>"Revision de patas"</a:t>
+            </a:r>
+            <a:r>
+              <a:rPr sz="1300" i="0" b="0">
+                <a:solidFill>
+                  <a:srgbClr val="D4D4D4"/>
+                </a:solidFill>
+                <a:latin typeface="Consolas"/>
+              </a:rPr>
+              <a:t>));</a:t>
+            </a:r>
+          </a:p>
+          <a:p>
+            <a:pPr>
+              <a:spcAft>
+                <a:spcPts val="278"/>
+              </a:spcAft>
+            </a:pPr>
+            <a:r>
+              <a:rPr sz="1300" i="0" b="0">
+                <a:solidFill>
+                  <a:srgbClr val="D4D4D4"/>
+                </a:solidFill>
+                <a:latin typeface="Consolas"/>
+              </a:rPr>
+              <a:t>    </a:t>
+            </a:r>
+            <a:r>
+              <a:rPr sz="1300" i="0" b="0">
+                <a:solidFill>
+                  <a:srgbClr val="DCDCAA"/>
+                </a:solidFill>
+                <a:latin typeface="Consolas"/>
+              </a:rPr>
+              <a:t>guardar</a:t>
+            </a:r>
+            <a:r>
+              <a:rPr sz="1300" i="0" b="0">
+                <a:solidFill>
+                  <a:srgbClr val="D4D4D4"/>
+                </a:solidFill>
+                <a:latin typeface="Consolas"/>
+              </a:rPr>
+              <a:t>(</a:t>
+            </a:r>
+            <a:r>
+              <a:rPr sz="1300" i="0" b="0">
+                <a:solidFill>
+                  <a:srgbClr val="569CD6"/>
+                </a:solidFill>
+                <a:latin typeface="Consolas"/>
+              </a:rPr>
+              <a:t>new</a:t>
+            </a:r>
+            <a:r>
+              <a:rPr sz="1300" i="0" b="0">
+                <a:solidFill>
+                  <a:srgbClr val="D4D4D4"/>
+                </a:solidFill>
+                <a:latin typeface="Consolas"/>
+              </a:rPr>
+              <a:t> </a:t>
+            </a:r>
+            <a:r>
+              <a:rPr sz="1300" i="0" b="0">
+                <a:solidFill>
+                  <a:srgbClr val="4EC9B0"/>
+                </a:solidFill>
+                <a:latin typeface="Consolas"/>
+              </a:rPr>
+              <a:t>Expediente</a:t>
+            </a:r>
+            <a:r>
+              <a:rPr sz="1300" i="0" b="0">
+                <a:solidFill>
+                  <a:srgbClr val="D4D4D4"/>
+                </a:solidFill>
+                <a:latin typeface="Consolas"/>
+              </a:rPr>
+              <a:t>(</a:t>
+            </a:r>
+            <a:r>
+              <a:rPr sz="1300" i="0" b="0">
+                <a:solidFill>
+                  <a:srgbClr val="CE9178"/>
+                </a:solidFill>
+                <a:latin typeface="Consolas"/>
+              </a:rPr>
+              <a:t>"M-004"</a:t>
+            </a:r>
+            <a:r>
+              <a:rPr sz="1300" i="0" b="0">
+                <a:solidFill>
+                  <a:srgbClr val="D4D4D4"/>
+                </a:solidFill>
+                <a:latin typeface="Consolas"/>
+              </a:rPr>
+              <a:t>, </a:t>
+            </a:r>
+            <a:r>
+              <a:rPr sz="1300" i="0" b="0">
+                <a:solidFill>
+                  <a:srgbClr val="CE9178"/>
+                </a:solidFill>
+                <a:latin typeface="Consolas"/>
+              </a:rPr>
+              <a:t>"Nieve"</a:t>
+            </a:r>
+            <a:r>
+              <a:rPr sz="1300" i="0" b="0">
+                <a:solidFill>
+                  <a:srgbClr val="D4D4D4"/>
+                </a:solidFill>
+                <a:latin typeface="Consolas"/>
+              </a:rPr>
+              <a:t>, </a:t>
+            </a:r>
+            <a:r>
+              <a:rPr sz="1300" i="0" b="0">
+                <a:solidFill>
+                  <a:srgbClr val="CE9178"/>
+                </a:solidFill>
+                <a:latin typeface="Consolas"/>
+              </a:rPr>
+              <a:t>"Persa"</a:t>
+            </a:r>
+            <a:r>
+              <a:rPr sz="1300" i="0" b="0">
+                <a:solidFill>
+                  <a:srgbClr val="D4D4D4"/>
+                </a:solidFill>
+                <a:latin typeface="Consolas"/>
+              </a:rPr>
+              <a:t>, </a:t>
+            </a:r>
+            <a:r>
+              <a:rPr sz="1300" i="0" b="0">
+                <a:solidFill>
+                  <a:srgbClr val="CE9178"/>
+                </a:solidFill>
+                <a:latin typeface="Consolas"/>
+              </a:rPr>
+              <a:t>"Sara Diaz"</a:t>
+            </a:r>
+            <a:r>
+              <a:rPr sz="1300" i="0" b="0">
+                <a:solidFill>
+                  <a:srgbClr val="D4D4D4"/>
+                </a:solidFill>
+                <a:latin typeface="Consolas"/>
+              </a:rPr>
+              <a:t>, </a:t>
+            </a:r>
+            <a:r>
+              <a:rPr sz="1300" i="0" b="0">
+                <a:solidFill>
+                  <a:srgbClr val="CE9178"/>
+                </a:solidFill>
+                <a:latin typeface="Consolas"/>
+              </a:rPr>
+              <a:t>"Desparasitacion"</a:t>
+            </a:r>
+            <a:r>
+              <a:rPr sz="1300" i="0" b="0">
+                <a:solidFill>
+                  <a:srgbClr val="D4D4D4"/>
+                </a:solidFill>
+                <a:latin typeface="Consolas"/>
+              </a:rPr>
+              <a:t>));</a:t>
+            </a:r>
+          </a:p>
+          <a:p>
+            <a:pPr>
+              <a:spcAft>
+                <a:spcPts val="278"/>
+              </a:spcAft>
+            </a:pPr>
+            <a:r>
+              <a:rPr sz="1300" i="0" b="0">
+                <a:solidFill>
+                  <a:srgbClr val="D4D4D4"/>
+                </a:solidFill>
+                <a:latin typeface="Consolas"/>
+              </a:rPr>
+              <a:t>    </a:t>
+            </a:r>
+            <a:r>
+              <a:rPr sz="1300" i="0" b="0">
+                <a:solidFill>
+                  <a:srgbClr val="DCDCAA"/>
+                </a:solidFill>
+                <a:latin typeface="Consolas"/>
+              </a:rPr>
+              <a:t>guardar</a:t>
+            </a:r>
+            <a:r>
+              <a:rPr sz="1300" i="0" b="0">
+                <a:solidFill>
+                  <a:srgbClr val="D4D4D4"/>
+                </a:solidFill>
+                <a:latin typeface="Consolas"/>
+              </a:rPr>
+              <a:t>(</a:t>
+            </a:r>
+            <a:r>
+              <a:rPr sz="1300" i="0" b="0">
+                <a:solidFill>
+                  <a:srgbClr val="569CD6"/>
+                </a:solidFill>
+                <a:latin typeface="Consolas"/>
+              </a:rPr>
+              <a:t>new</a:t>
+            </a:r>
+            <a:r>
+              <a:rPr sz="1300" i="0" b="0">
+                <a:solidFill>
+                  <a:srgbClr val="D4D4D4"/>
+                </a:solidFill>
+                <a:latin typeface="Consolas"/>
+              </a:rPr>
+              <a:t> </a:t>
+            </a:r>
+            <a:r>
+              <a:rPr sz="1300" i="0" b="0">
+                <a:solidFill>
+                  <a:srgbClr val="4EC9B0"/>
+                </a:solidFill>
+                <a:latin typeface="Consolas"/>
+              </a:rPr>
+              <a:t>Expediente</a:t>
+            </a:r>
+            <a:r>
+              <a:rPr sz="1300" i="0" b="0">
+                <a:solidFill>
+                  <a:srgbClr val="D4D4D4"/>
+                </a:solidFill>
+                <a:latin typeface="Consolas"/>
+              </a:rPr>
+              <a:t>(</a:t>
+            </a:r>
+            <a:r>
+              <a:rPr sz="1300" i="0" b="0">
+                <a:solidFill>
+                  <a:srgbClr val="CE9178"/>
+                </a:solidFill>
+                <a:latin typeface="Consolas"/>
+              </a:rPr>
+              <a:t>"M-005"</a:t>
+            </a:r>
+            <a:r>
+              <a:rPr sz="1300" i="0" b="0">
+                <a:solidFill>
+                  <a:srgbClr val="D4D4D4"/>
+                </a:solidFill>
+                <a:latin typeface="Consolas"/>
+              </a:rPr>
+              <a:t>, </a:t>
+            </a:r>
+            <a:r>
+              <a:rPr sz="1300" i="0" b="0">
+                <a:solidFill>
+                  <a:srgbClr val="CE9178"/>
+                </a:solidFill>
+                <a:latin typeface="Consolas"/>
+              </a:rPr>
+              <a:t>"Toby"</a:t>
+            </a:r>
+            <a:r>
+              <a:rPr sz="1300" i="0" b="0">
+                <a:solidFill>
+                  <a:srgbClr val="D4D4D4"/>
+                </a:solidFill>
+                <a:latin typeface="Consolas"/>
+              </a:rPr>
+              <a:t>, </a:t>
+            </a:r>
+            <a:r>
+              <a:rPr sz="1300" i="0" b="0">
+                <a:solidFill>
+                  <a:srgbClr val="CE9178"/>
+                </a:solidFill>
+                <a:latin typeface="Consolas"/>
+              </a:rPr>
+              <a:t>"Labrador"</a:t>
+            </a:r>
+            <a:r>
+              <a:rPr sz="1300" i="0" b="0">
+                <a:solidFill>
+                  <a:srgbClr val="D4D4D4"/>
+                </a:solidFill>
+                <a:latin typeface="Consolas"/>
+              </a:rPr>
+              <a:t>, </a:t>
+            </a:r>
+            <a:r>
+              <a:rPr sz="1300" i="0" b="0">
+                <a:solidFill>
+                  <a:srgbClr val="CE9178"/>
+                </a:solidFill>
+                <a:latin typeface="Consolas"/>
+              </a:rPr>
+              <a:t>"Sara Diaz"</a:t>
+            </a:r>
+            <a:r>
+              <a:rPr sz="1300" i="0" b="0">
+                <a:solidFill>
+                  <a:srgbClr val="D4D4D4"/>
+                </a:solidFill>
+                <a:latin typeface="Consolas"/>
+              </a:rPr>
+              <a:t>, </a:t>
+            </a:r>
+            <a:r>
+              <a:rPr sz="1300" i="0" b="0">
+                <a:solidFill>
+                  <a:srgbClr val="CE9178"/>
+                </a:solidFill>
+                <a:latin typeface="Consolas"/>
+              </a:rPr>
+              <a:t>"Control geriatrico"</a:t>
+            </a:r>
+            <a:r>
+              <a:rPr sz="1300" i="0" b="0">
+                <a:solidFill>
+                  <a:srgbClr val="D4D4D4"/>
+                </a:solidFill>
+                <a:latin typeface="Consolas"/>
+              </a:rPr>
+              <a:t>));</a:t>
+            </a:r>
+          </a:p>
+          <a:p>
+            <a:pPr>
+              <a:spcAft>
+                <a:spcPts val="278"/>
+              </a:spcAft>
+            </a:pPr>
+            <a:r>
+              <a:rPr sz="1300" i="0" b="0">
+                <a:solidFill>
+                  <a:srgbClr val="D4D4D4"/>
+                </a:solidFill>
+                <a:latin typeface="Consolas"/>
+              </a:rPr>
+              <a:t>    </a:t>
+            </a:r>
+            <a:r>
+              <a:rPr sz="1300" i="0" b="0">
+                <a:solidFill>
+                  <a:srgbClr val="DCDCAA"/>
+                </a:solidFill>
+                <a:latin typeface="Consolas"/>
+              </a:rPr>
+              <a:t>System.out.println</a:t>
+            </a:r>
+            <a:r>
+              <a:rPr sz="1300" i="0" b="0">
+                <a:solidFill>
+                  <a:srgbClr val="D4D4D4"/>
+                </a:solidFill>
+                <a:latin typeface="Consolas"/>
+              </a:rPr>
+              <a:t>(</a:t>
+            </a:r>
+            <a:r>
+              <a:rPr sz="1300" i="0" b="0">
+                <a:solidFill>
+                  <a:srgbClr val="CE9178"/>
+                </a:solidFill>
+                <a:latin typeface="Consolas"/>
+              </a:rPr>
+              <a:t>"Expedientes: "</a:t>
+            </a:r>
+            <a:r>
+              <a:rPr sz="1300" i="0" b="0">
+                <a:solidFill>
+                  <a:srgbClr val="D4D4D4"/>
+                </a:solidFill>
+                <a:latin typeface="Consolas"/>
+              </a:rPr>
+              <a:t> + </a:t>
+            </a:r>
+            <a:r>
+              <a:rPr sz="1300" i="0" b="0">
+                <a:solidFill>
+                  <a:srgbClr val="DCDCAA"/>
+                </a:solidFill>
+                <a:latin typeface="Consolas"/>
+              </a:rPr>
+              <a:t>expedientes.size</a:t>
+            </a:r>
+            <a:r>
+              <a:rPr sz="1300" i="0" b="0">
+                <a:solidFill>
+                  <a:srgbClr val="D4D4D4"/>
+                </a:solidFill>
+                <a:latin typeface="Consolas"/>
+              </a:rPr>
+              <a:t>() + </a:t>
+            </a:r>
+            <a:r>
+              <a:rPr sz="1300" i="0" b="0">
+                <a:solidFill>
+                  <a:srgbClr val="CE9178"/>
+                </a:solidFill>
+                <a:latin typeface="Consolas"/>
+              </a:rPr>
+              <a:t>" | Razas distintas: "</a:t>
+            </a:r>
+            <a:r>
+              <a:rPr sz="1300" i="0" b="0">
+                <a:solidFill>
+                  <a:srgbClr val="D4D4D4"/>
+                </a:solidFill>
+                <a:latin typeface="Consolas"/>
+              </a:rPr>
+              <a:t> + </a:t>
+            </a:r>
+            <a:r>
+              <a:rPr sz="1300" i="0" b="0">
+                <a:solidFill>
+                  <a:srgbClr val="DCDCAA"/>
+                </a:solidFill>
+                <a:latin typeface="Consolas"/>
+              </a:rPr>
+              <a:t>razas.size</a:t>
+            </a:r>
+            <a:r>
+              <a:rPr sz="1300" i="0" b="0">
+                <a:solidFill>
+                  <a:srgbClr val="D4D4D4"/>
+                </a:solidFill>
+                <a:latin typeface="Consolas"/>
+              </a:rPr>
+              <a:t>());</a:t>
+            </a:r>
+          </a:p>
+          <a:p>
+            <a:pPr>
+              <a:spcAft>
+                <a:spcPts val="278"/>
+              </a:spcAft>
+            </a:pPr>
+            <a:r>
+              <a:rPr sz="1300" i="0" b="0">
+                <a:solidFill>
+                  <a:srgbClr val="D4D4D4"/>
+                </a:solidFill>
+                <a:latin typeface="Consolas"/>
+              </a:rPr>
+              <a:t>}</a:t>
+            </a:r>
+          </a:p>
+        </p:txBody>
+      </p:sp>
+      <p:sp>
+        <p:nvSpPr>
+          <p:cNvPr id="13" name="TextBox 12"/>
+          <p:cNvSpPr txBox="1"/>
+          <p:nvPr/>
+        </p:nvSpPr>
+        <p:spPr>
+          <a:xfrm>
+            <a:off x="457200" y="6035040"/>
+            <a:ext cx="11277295" cy="365760"/>
+          </a:xfrm>
+          <a:prstGeom prst="rect">
+            <a:avLst/>
+          </a:prstGeom>
+          <a:noFill/>
+        </p:spPr>
+        <p:txBody>
+          <a:bodyPr wrap="square">
+            <a:spAutoFit/>
+          </a:bodyPr>
+          <a:lstStyle/>
+          <a:p>
             <a:pPr algn="ctr"/>
             <a:r>
               <a:rPr sz="1300" b="0" i="1">
@@ -7701,7 +8115,7 @@
       </p:sp>
       <p:sp>
         <p:nvSpPr>
-          <p:cNvPr id="13" name="TextBox 12"/>
+          <p:cNvPr id="14" name="TextBox 13"/>
           <p:cNvSpPr txBox="1"/>
           <p:nvPr/>
         </p:nvSpPr>
@@ -10238,7 +10652,7 @@
         <p:spPr>
           <a:xfrm>
             <a:off x="457200" y="1261872"/>
-            <a:ext cx="11277295" cy="4692907"/>
+            <a:ext cx="11277295" cy="3886755"/>
           </a:xfrm>
           <a:prstGeom prst="roundRect">
             <a:avLst>
@@ -10487,8 +10901,8 @@
         </p:nvSpPr>
         <p:spPr>
           <a:xfrm>
-            <a:off x="1188720" y="1719072"/>
-            <a:ext cx="10271455" cy="4098547"/>
+            <a:off x="685800" y="1719072"/>
+            <a:ext cx="502920" cy="3292395"/>
           </a:xfrm>
           <a:prstGeom prst="rect">
             <a:avLst/>
@@ -10501,611 +10915,179 @@
           </a:bodyPr>
           <a:lstStyle/>
           <a:p>
-            <a:pPr>
+            <a:pPr algn="r">
               <a:spcAft>
-                <a:spcPts val="407"/>
+                <a:spcPts val="342"/>
               </a:spcAft>
             </a:pPr>
             <a:r>
-              <a:rPr sz="1900" i="0" b="0">
-                <a:solidFill>
-                  <a:srgbClr val="DCDCAA"/>
-                </a:solidFill>
-                <a:latin typeface="Consolas"/>
-              </a:rPr>
-              <a:t>btnBuscar.addActionListener</a:t>
-            </a:r>
-            <a:r>
-              <a:rPr sz="1900" i="0" b="0">
-                <a:solidFill>
-                  <a:srgbClr val="D4D4D4"/>
-                </a:solidFill>
-                <a:latin typeface="Consolas"/>
-              </a:rPr>
-              <a:t>(</a:t>
-            </a:r>
-            <a:r>
-              <a:rPr sz="1900" i="0" b="0">
-                <a:solidFill>
-                  <a:srgbClr val="D4D4D4"/>
-                </a:solidFill>
-                <a:latin typeface="Consolas"/>
-              </a:rPr>
-              <a:t>e</a:t>
-            </a:r>
-            <a:r>
-              <a:rPr sz="1900" i="0" b="0">
-                <a:solidFill>
-                  <a:srgbClr val="D4D4D4"/>
-                </a:solidFill>
-                <a:latin typeface="Consolas"/>
-              </a:rPr>
-              <a:t> -&gt; </a:t>
-            </a:r>
-            <a:r>
-              <a:rPr sz="1900" i="0" b="0">
-                <a:solidFill>
-                  <a:srgbClr val="DCDCAA"/>
-                </a:solidFill>
-                <a:latin typeface="Consolas"/>
-              </a:rPr>
-              <a:t>buscar</a:t>
-            </a:r>
-            <a:r>
-              <a:rPr sz="1900" i="0" b="0">
-                <a:solidFill>
-                  <a:srgbClr val="D4D4D4"/>
-                </a:solidFill>
-                <a:latin typeface="Consolas"/>
-              </a:rPr>
-              <a:t>());    </a:t>
-            </a:r>
-            <a:r>
-              <a:rPr sz="1900" i="1" b="0">
-                <a:solidFill>
-                  <a:srgbClr val="6A9955"/>
-                </a:solidFill>
-                <a:latin typeface="Consolas"/>
-              </a:rPr>
-              <a:t>// el evento solo delega</a:t>
-            </a:r>
-          </a:p>
-          <a:p>
-            <a:pPr>
+              <a:rPr sz="1600" i="0" b="0">
+                <a:solidFill>
+                  <a:srgbClr val="858585"/>
+                </a:solidFill>
+                <a:latin typeface="Consolas"/>
+              </a:rPr>
+              <a:t>1</a:t>
+            </a:r>
+          </a:p>
+          <a:p>
+            <a:pPr algn="r">
               <a:spcAft>
-                <a:spcPts val="407"/>
+                <a:spcPts val="342"/>
               </a:spcAft>
             </a:pPr>
             <a:r>
-              <a:rPr sz="1900" i="0" b="0">
-                <a:solidFill>
-                  <a:srgbClr val="DCDCAA"/>
-                </a:solidFill>
-                <a:latin typeface="Consolas"/>
-              </a:rPr>
-              <a:t>txtId.addActionListener</a:t>
-            </a:r>
-            <a:r>
-              <a:rPr sz="1900" i="0" b="0">
-                <a:solidFill>
-                  <a:srgbClr val="D4D4D4"/>
-                </a:solidFill>
-                <a:latin typeface="Consolas"/>
-              </a:rPr>
-              <a:t>(</a:t>
-            </a:r>
-            <a:r>
-              <a:rPr sz="1900" i="0" b="0">
-                <a:solidFill>
-                  <a:srgbClr val="D4D4D4"/>
-                </a:solidFill>
-                <a:latin typeface="Consolas"/>
-              </a:rPr>
-              <a:t>e</a:t>
-            </a:r>
-            <a:r>
-              <a:rPr sz="1900" i="0" b="0">
-                <a:solidFill>
-                  <a:srgbClr val="D4D4D4"/>
-                </a:solidFill>
-                <a:latin typeface="Consolas"/>
-              </a:rPr>
-              <a:t> -&gt; </a:t>
-            </a:r>
-            <a:r>
-              <a:rPr sz="1900" i="0" b="0">
-                <a:solidFill>
-                  <a:srgbClr val="DCDCAA"/>
-                </a:solidFill>
-                <a:latin typeface="Consolas"/>
-              </a:rPr>
-              <a:t>buscar</a:t>
-            </a:r>
-            <a:r>
-              <a:rPr sz="1900" i="0" b="0">
-                <a:solidFill>
-                  <a:srgbClr val="D4D4D4"/>
-                </a:solidFill>
-                <a:latin typeface="Consolas"/>
-              </a:rPr>
-              <a:t>());        </a:t>
-            </a:r>
-            <a:r>
-              <a:rPr sz="1900" i="1" b="0">
-                <a:solidFill>
-                  <a:srgbClr val="6A9955"/>
-                </a:solidFill>
-                <a:latin typeface="Consolas"/>
-              </a:rPr>
-              <a:t>// Enter tambien busca</a:t>
-            </a:r>
-          </a:p>
-          <a:p>
-            <a:pPr>
+              <a:rPr sz="1600" i="0" b="0">
+                <a:solidFill>
+                  <a:srgbClr val="858585"/>
+                </a:solidFill>
+                <a:latin typeface="Consolas"/>
+              </a:rPr>
+              <a:t>2</a:t>
+            </a:r>
+          </a:p>
+          <a:p>
+            <a:pPr algn="r">
               <a:spcAft>
-                <a:spcPts val="407"/>
+                <a:spcPts val="342"/>
               </a:spcAft>
             </a:pPr>
             <a:r>
-              <a:rPr sz="1900" i="0" b="0">
-                <a:solidFill>
-                  <a:srgbClr val="D4D4D4"/>
-                </a:solidFill>
-                <a:latin typeface="Consolas"/>
-              </a:rPr>
-              <a:t/>
-            </a:r>
-          </a:p>
-          <a:p>
-            <a:pPr>
+              <a:rPr sz="1600" i="0" b="0">
+                <a:solidFill>
+                  <a:srgbClr val="858585"/>
+                </a:solidFill>
+                <a:latin typeface="Consolas"/>
+              </a:rPr>
+              <a:t>3</a:t>
+            </a:r>
+          </a:p>
+          <a:p>
+            <a:pPr algn="r">
               <a:spcAft>
-                <a:spcPts val="407"/>
+                <a:spcPts val="342"/>
               </a:spcAft>
             </a:pPr>
             <a:r>
-              <a:rPr sz="1900" i="0" b="0">
-                <a:solidFill>
-                  <a:srgbClr val="DCDCAA"/>
-                </a:solidFill>
-                <a:latin typeface="Consolas"/>
-              </a:rPr>
-              <a:t>setDefaultCloseOperation</a:t>
-            </a:r>
-            <a:r>
-              <a:rPr sz="1900" i="0" b="0">
-                <a:solidFill>
-                  <a:srgbClr val="D4D4D4"/>
-                </a:solidFill>
-                <a:latin typeface="Consolas"/>
-              </a:rPr>
-              <a:t>(</a:t>
-            </a:r>
-            <a:r>
-              <a:rPr sz="1900" i="0" b="0">
-                <a:solidFill>
-                  <a:srgbClr val="D4D4D4"/>
-                </a:solidFill>
-                <a:latin typeface="Consolas"/>
-              </a:rPr>
-              <a:t>JFrame</a:t>
-            </a:r>
-            <a:r>
-              <a:rPr sz="1900" i="0" b="0">
-                <a:solidFill>
-                  <a:srgbClr val="D4D4D4"/>
-                </a:solidFill>
-                <a:latin typeface="Consolas"/>
-              </a:rPr>
-              <a:t>.</a:t>
-            </a:r>
-            <a:r>
-              <a:rPr sz="1900" i="0" b="0">
-                <a:solidFill>
-                  <a:srgbClr val="D4D4D4"/>
-                </a:solidFill>
-                <a:latin typeface="Consolas"/>
-              </a:rPr>
-              <a:t>EXIT_ON_CLOSE</a:t>
-            </a:r>
-            <a:r>
-              <a:rPr sz="1900" i="0" b="0">
-                <a:solidFill>
-                  <a:srgbClr val="D4D4D4"/>
-                </a:solidFill>
-                <a:latin typeface="Consolas"/>
-              </a:rPr>
-              <a:t>);</a:t>
-            </a:r>
-          </a:p>
-          <a:p>
-            <a:pPr>
+              <a:rPr sz="1600" i="0" b="0">
+                <a:solidFill>
+                  <a:srgbClr val="858585"/>
+                </a:solidFill>
+                <a:latin typeface="Consolas"/>
+              </a:rPr>
+              <a:t>4</a:t>
+            </a:r>
+          </a:p>
+          <a:p>
+            <a:pPr algn="r">
               <a:spcAft>
-                <a:spcPts val="407"/>
+                <a:spcPts val="342"/>
               </a:spcAft>
             </a:pPr>
             <a:r>
-              <a:rPr sz="1900" i="0" b="0">
-                <a:solidFill>
-                  <a:srgbClr val="DCDCAA"/>
-                </a:solidFill>
-                <a:latin typeface="Consolas"/>
-              </a:rPr>
-              <a:t>setSize</a:t>
-            </a:r>
-            <a:r>
-              <a:rPr sz="1900" i="0" b="0">
-                <a:solidFill>
-                  <a:srgbClr val="D4D4D4"/>
-                </a:solidFill>
-                <a:latin typeface="Consolas"/>
-              </a:rPr>
-              <a:t>(</a:t>
-            </a:r>
-            <a:r>
-              <a:rPr sz="1900" i="0" b="0">
-                <a:solidFill>
-                  <a:srgbClr val="B5CEA8"/>
-                </a:solidFill>
-                <a:latin typeface="Consolas"/>
-              </a:rPr>
-              <a:t>600</a:t>
-            </a:r>
-            <a:r>
-              <a:rPr sz="1900" i="0" b="0">
-                <a:solidFill>
-                  <a:srgbClr val="D4D4D4"/>
-                </a:solidFill>
-                <a:latin typeface="Consolas"/>
-              </a:rPr>
-              <a:t>, </a:t>
-            </a:r>
-            <a:r>
-              <a:rPr sz="1900" i="0" b="0">
-                <a:solidFill>
-                  <a:srgbClr val="B5CEA8"/>
-                </a:solidFill>
-                <a:latin typeface="Consolas"/>
-              </a:rPr>
-              <a:t>230</a:t>
-            </a:r>
-            <a:r>
-              <a:rPr sz="1900" i="0" b="0">
-                <a:solidFill>
-                  <a:srgbClr val="D4D4D4"/>
-                </a:solidFill>
-                <a:latin typeface="Consolas"/>
-              </a:rPr>
-              <a:t>);</a:t>
-            </a:r>
-          </a:p>
-          <a:p>
-            <a:pPr>
+              <a:rPr sz="1600" i="0" b="0">
+                <a:solidFill>
+                  <a:srgbClr val="858585"/>
+                </a:solidFill>
+                <a:latin typeface="Consolas"/>
+              </a:rPr>
+              <a:t>5</a:t>
+            </a:r>
+          </a:p>
+          <a:p>
+            <a:pPr algn="r">
               <a:spcAft>
-                <a:spcPts val="407"/>
+                <a:spcPts val="342"/>
               </a:spcAft>
             </a:pPr>
             <a:r>
-              <a:rPr sz="1900" i="0" b="0">
-                <a:solidFill>
-                  <a:srgbClr val="DCDCAA"/>
-                </a:solidFill>
-                <a:latin typeface="Consolas"/>
-              </a:rPr>
-              <a:t>setLocationRelativeTo</a:t>
-            </a:r>
-            <a:r>
-              <a:rPr sz="1900" i="0" b="0">
-                <a:solidFill>
-                  <a:srgbClr val="D4D4D4"/>
-                </a:solidFill>
-                <a:latin typeface="Consolas"/>
-              </a:rPr>
-              <a:t>(</a:t>
-            </a:r>
-            <a:r>
-              <a:rPr sz="1900" i="0" b="0">
-                <a:solidFill>
-                  <a:srgbClr val="569CD6"/>
-                </a:solidFill>
-                <a:latin typeface="Consolas"/>
-              </a:rPr>
-              <a:t>null</a:t>
-            </a:r>
-            <a:r>
-              <a:rPr sz="1900" i="0" b="0">
-                <a:solidFill>
-                  <a:srgbClr val="D4D4D4"/>
-                </a:solidFill>
-                <a:latin typeface="Consolas"/>
-              </a:rPr>
-              <a:t>);                   </a:t>
-            </a:r>
-            <a:r>
-              <a:rPr sz="1900" i="1" b="0">
-                <a:solidFill>
-                  <a:srgbClr val="6A9955"/>
-                </a:solidFill>
-                <a:latin typeface="Consolas"/>
-              </a:rPr>
-              <a:t>// centrada en pantalla</a:t>
-            </a:r>
-          </a:p>
-          <a:p>
-            <a:pPr>
+              <a:rPr sz="1600" i="0" b="0">
+                <a:solidFill>
+                  <a:srgbClr val="858585"/>
+                </a:solidFill>
+                <a:latin typeface="Consolas"/>
+              </a:rPr>
+              <a:t>6</a:t>
+            </a:r>
+          </a:p>
+          <a:p>
+            <a:pPr algn="r">
               <a:spcAft>
-                <a:spcPts val="407"/>
+                <a:spcPts val="342"/>
               </a:spcAft>
             </a:pPr>
             <a:r>
-              <a:rPr sz="1900" i="0" b="0">
-                <a:solidFill>
-                  <a:srgbClr val="D4D4D4"/>
-                </a:solidFill>
-                <a:latin typeface="Consolas"/>
-              </a:rPr>
-              <a:t/>
-            </a:r>
-          </a:p>
-          <a:p>
-            <a:pPr>
+              <a:rPr sz="1600" i="0" b="0">
+                <a:solidFill>
+                  <a:srgbClr val="858585"/>
+                </a:solidFill>
+                <a:latin typeface="Consolas"/>
+              </a:rPr>
+              <a:t>7</a:t>
+            </a:r>
+          </a:p>
+          <a:p>
+            <a:pPr algn="r">
               <a:spcAft>
-                <a:spcPts val="407"/>
+                <a:spcPts val="342"/>
               </a:spcAft>
             </a:pPr>
             <a:r>
-              <a:rPr sz="1900" i="0" b="0">
-                <a:solidFill>
-                  <a:srgbClr val="569CD6"/>
-                </a:solidFill>
-                <a:latin typeface="Consolas"/>
-              </a:rPr>
-              <a:t>public</a:t>
-            </a:r>
-            <a:r>
-              <a:rPr sz="1900" i="0" b="0">
-                <a:solidFill>
-                  <a:srgbClr val="D4D4D4"/>
-                </a:solidFill>
-                <a:latin typeface="Consolas"/>
-              </a:rPr>
-              <a:t> </a:t>
-            </a:r>
-            <a:r>
-              <a:rPr sz="1900" i="0" b="0">
-                <a:solidFill>
-                  <a:srgbClr val="569CD6"/>
-                </a:solidFill>
-                <a:latin typeface="Consolas"/>
-              </a:rPr>
-              <a:t>static</a:t>
-            </a:r>
-            <a:r>
-              <a:rPr sz="1900" i="0" b="0">
-                <a:solidFill>
-                  <a:srgbClr val="D4D4D4"/>
-                </a:solidFill>
-                <a:latin typeface="Consolas"/>
-              </a:rPr>
-              <a:t> </a:t>
-            </a:r>
-            <a:r>
-              <a:rPr sz="1900" i="0" b="0">
-                <a:solidFill>
-                  <a:srgbClr val="569CD6"/>
-                </a:solidFill>
-                <a:latin typeface="Consolas"/>
-              </a:rPr>
-              <a:t>void</a:t>
-            </a:r>
-            <a:r>
-              <a:rPr sz="1900" i="0" b="0">
-                <a:solidFill>
-                  <a:srgbClr val="D4D4D4"/>
-                </a:solidFill>
-                <a:latin typeface="Consolas"/>
-              </a:rPr>
-              <a:t> </a:t>
-            </a:r>
-            <a:r>
-              <a:rPr sz="1900" i="0" b="0">
-                <a:solidFill>
-                  <a:srgbClr val="DCDCAA"/>
-                </a:solidFill>
-                <a:latin typeface="Consolas"/>
-              </a:rPr>
-              <a:t>main</a:t>
-            </a:r>
-            <a:r>
-              <a:rPr sz="1900" i="0" b="0">
-                <a:solidFill>
-                  <a:srgbClr val="D4D4D4"/>
-                </a:solidFill>
-                <a:latin typeface="Consolas"/>
-              </a:rPr>
-              <a:t>(</a:t>
-            </a:r>
-            <a:r>
-              <a:rPr sz="1900" i="0" b="0">
-                <a:solidFill>
-                  <a:srgbClr val="4EC9B0"/>
-                </a:solidFill>
-                <a:latin typeface="Consolas"/>
-              </a:rPr>
-              <a:t>String</a:t>
-            </a:r>
-            <a:r>
-              <a:rPr sz="1900" i="0" b="0">
-                <a:solidFill>
-                  <a:srgbClr val="D4D4D4"/>
-                </a:solidFill>
-                <a:latin typeface="Consolas"/>
-              </a:rPr>
-              <a:t>[] </a:t>
-            </a:r>
-            <a:r>
-              <a:rPr sz="1900" i="0" b="0">
-                <a:solidFill>
-                  <a:srgbClr val="D4D4D4"/>
-                </a:solidFill>
-                <a:latin typeface="Consolas"/>
-              </a:rPr>
-              <a:t>args</a:t>
-            </a:r>
-            <a:r>
-              <a:rPr sz="1900" i="0" b="0">
-                <a:solidFill>
-                  <a:srgbClr val="D4D4D4"/>
-                </a:solidFill>
-                <a:latin typeface="Consolas"/>
-              </a:rPr>
-              <a:t>) {</a:t>
-            </a:r>
-          </a:p>
-          <a:p>
-            <a:pPr>
+              <a:rPr sz="1600" i="0" b="0">
+                <a:solidFill>
+                  <a:srgbClr val="858585"/>
+                </a:solidFill>
+                <a:latin typeface="Consolas"/>
+              </a:rPr>
+              <a:t>8</a:t>
+            </a:r>
+          </a:p>
+          <a:p>
+            <a:pPr algn="r">
               <a:spcAft>
-                <a:spcPts val="407"/>
+                <a:spcPts val="342"/>
               </a:spcAft>
             </a:pPr>
             <a:r>
-              <a:rPr sz="1900" i="0" b="0">
-                <a:solidFill>
-                  <a:srgbClr val="D4D4D4"/>
-                </a:solidFill>
-                <a:latin typeface="Consolas"/>
-              </a:rPr>
-              <a:t>    </a:t>
-            </a:r>
-            <a:r>
-              <a:rPr sz="1900" i="1" b="0">
-                <a:solidFill>
-                  <a:srgbClr val="6A9955"/>
-                </a:solidFill>
-                <a:latin typeface="Consolas"/>
-              </a:rPr>
-              <a:t>// La interfaz se construye en el hilo de eventos de Swing (EDT)</a:t>
-            </a:r>
-          </a:p>
-          <a:p>
-            <a:pPr>
+              <a:rPr sz="1600" i="0" b="0">
+                <a:solidFill>
+                  <a:srgbClr val="858585"/>
+                </a:solidFill>
+                <a:latin typeface="Consolas"/>
+              </a:rPr>
+              <a:t>9</a:t>
+            </a:r>
+          </a:p>
+          <a:p>
+            <a:pPr algn="r">
               <a:spcAft>
-                <a:spcPts val="407"/>
+                <a:spcPts val="342"/>
               </a:spcAft>
             </a:pPr>
             <a:r>
-              <a:rPr sz="1900" i="0" b="0">
-                <a:solidFill>
-                  <a:srgbClr val="D4D4D4"/>
-                </a:solidFill>
-                <a:latin typeface="Consolas"/>
-              </a:rPr>
-              <a:t>    </a:t>
-            </a:r>
-            <a:r>
-              <a:rPr sz="1900" i="0" b="0">
-                <a:solidFill>
-                  <a:srgbClr val="DCDCAA"/>
-                </a:solidFill>
-                <a:latin typeface="Consolas"/>
-              </a:rPr>
-              <a:t>SwingUtilities.invokeLater</a:t>
-            </a:r>
-            <a:r>
-              <a:rPr sz="1900" i="0" b="0">
-                <a:solidFill>
-                  <a:srgbClr val="D4D4D4"/>
-                </a:solidFill>
-                <a:latin typeface="Consolas"/>
-              </a:rPr>
-              <a:t>(() -&gt; </a:t>
-            </a:r>
-            <a:r>
-              <a:rPr sz="1900" i="0" b="0">
-                <a:solidFill>
-                  <a:srgbClr val="569CD6"/>
-                </a:solidFill>
-                <a:latin typeface="Consolas"/>
-              </a:rPr>
-              <a:t>new</a:t>
-            </a:r>
-            <a:r>
-              <a:rPr sz="1900" i="0" b="0">
-                <a:solidFill>
-                  <a:srgbClr val="D4D4D4"/>
-                </a:solidFill>
-                <a:latin typeface="Consolas"/>
-              </a:rPr>
-              <a:t> </a:t>
-            </a:r>
-            <a:r>
-              <a:rPr sz="1900" i="0" b="0">
-                <a:solidFill>
-                  <a:srgbClr val="4EC9B0"/>
-                </a:solidFill>
-                <a:latin typeface="Consolas"/>
-              </a:rPr>
-              <a:t>ClinicaBuscarExpediente</a:t>
-            </a:r>
-            <a:r>
-              <a:rPr sz="1900" i="0" b="0">
-                <a:solidFill>
-                  <a:srgbClr val="D4D4D4"/>
-                </a:solidFill>
-                <a:latin typeface="Consolas"/>
-              </a:rPr>
-              <a:t>().</a:t>
-            </a:r>
-            <a:r>
-              <a:rPr sz="1900" i="0" b="0">
-                <a:solidFill>
-                  <a:srgbClr val="DCDCAA"/>
-                </a:solidFill>
-                <a:latin typeface="Consolas"/>
-              </a:rPr>
-              <a:t>setVisible</a:t>
-            </a:r>
-            <a:r>
-              <a:rPr sz="1900" i="0" b="0">
-                <a:solidFill>
-                  <a:srgbClr val="D4D4D4"/>
-                </a:solidFill>
-                <a:latin typeface="Consolas"/>
-              </a:rPr>
-              <a:t>(</a:t>
-            </a:r>
-            <a:r>
-              <a:rPr sz="1900" i="0" b="0">
-                <a:solidFill>
-                  <a:srgbClr val="569CD6"/>
-                </a:solidFill>
-                <a:latin typeface="Consolas"/>
-              </a:rPr>
-              <a:t>true</a:t>
-            </a:r>
-            <a:r>
-              <a:rPr sz="1900" i="0" b="0">
-                <a:solidFill>
-                  <a:srgbClr val="D4D4D4"/>
-                </a:solidFill>
-                <a:latin typeface="Consolas"/>
-              </a:rPr>
-              <a:t>));</a:t>
-            </a:r>
-          </a:p>
-          <a:p>
-            <a:pPr>
+              <a:rPr sz="1600" i="0" b="0">
+                <a:solidFill>
+                  <a:srgbClr val="858585"/>
+                </a:solidFill>
+                <a:latin typeface="Consolas"/>
+              </a:rPr>
+              <a:t>10</a:t>
+            </a:r>
+          </a:p>
+          <a:p>
+            <a:pPr algn="r">
               <a:spcAft>
-                <a:spcPts val="407"/>
+                <a:spcPts val="342"/>
               </a:spcAft>
             </a:pPr>
             <a:r>
-              <a:rPr sz="1900" i="0" b="0">
-                <a:solidFill>
-                  <a:srgbClr val="D4D4D4"/>
-                </a:solidFill>
-                <a:latin typeface="Consolas"/>
-              </a:rPr>
-              <a:t>}</a:t>
+              <a:rPr sz="1600" i="0" b="0">
+                <a:solidFill>
+                  <a:srgbClr val="858585"/>
+                </a:solidFill>
+                <a:latin typeface="Consolas"/>
+              </a:rPr>
+              <a:t>11</a:t>
             </a:r>
           </a:p>
         </p:txBody>
@@ -11118,8 +11100,8 @@
         </p:nvSpPr>
         <p:spPr>
           <a:xfrm>
-            <a:off x="457200" y="6035040"/>
-            <a:ext cx="11277295" cy="365760"/>
+            <a:off x="1188720" y="1719072"/>
+            <a:ext cx="10271455" cy="3292395"/>
           </a:xfrm>
           <a:prstGeom prst="rect">
             <a:avLst/>
@@ -11132,6 +11114,637 @@
           </a:bodyPr>
           <a:lstStyle/>
           <a:p>
+            <a:pPr>
+              <a:spcAft>
+                <a:spcPts val="342"/>
+              </a:spcAft>
+            </a:pPr>
+            <a:r>
+              <a:rPr sz="1600" i="0" b="0">
+                <a:solidFill>
+                  <a:srgbClr val="DCDCAA"/>
+                </a:solidFill>
+                <a:latin typeface="Consolas"/>
+              </a:rPr>
+              <a:t>btnBuscar.addActionListener</a:t>
+            </a:r>
+            <a:r>
+              <a:rPr sz="1600" i="0" b="0">
+                <a:solidFill>
+                  <a:srgbClr val="D4D4D4"/>
+                </a:solidFill>
+                <a:latin typeface="Consolas"/>
+              </a:rPr>
+              <a:t>(</a:t>
+            </a:r>
+            <a:r>
+              <a:rPr sz="1600" i="0" b="0">
+                <a:solidFill>
+                  <a:srgbClr val="D4D4D4"/>
+                </a:solidFill>
+                <a:latin typeface="Consolas"/>
+              </a:rPr>
+              <a:t>e</a:t>
+            </a:r>
+            <a:r>
+              <a:rPr sz="1600" i="0" b="0">
+                <a:solidFill>
+                  <a:srgbClr val="D4D4D4"/>
+                </a:solidFill>
+                <a:latin typeface="Consolas"/>
+              </a:rPr>
+              <a:t> -&gt; </a:t>
+            </a:r>
+            <a:r>
+              <a:rPr sz="1600" i="0" b="0">
+                <a:solidFill>
+                  <a:srgbClr val="DCDCAA"/>
+                </a:solidFill>
+                <a:latin typeface="Consolas"/>
+              </a:rPr>
+              <a:t>buscar</a:t>
+            </a:r>
+            <a:r>
+              <a:rPr sz="1600" i="0" b="0">
+                <a:solidFill>
+                  <a:srgbClr val="D4D4D4"/>
+                </a:solidFill>
+                <a:latin typeface="Consolas"/>
+              </a:rPr>
+              <a:t>());    </a:t>
+            </a:r>
+            <a:r>
+              <a:rPr sz="1600" i="1" b="0">
+                <a:solidFill>
+                  <a:srgbClr val="6A9955"/>
+                </a:solidFill>
+                <a:latin typeface="Consolas"/>
+              </a:rPr>
+              <a:t>// el evento solo delega</a:t>
+            </a:r>
+          </a:p>
+          <a:p>
+            <a:pPr>
+              <a:spcAft>
+                <a:spcPts val="342"/>
+              </a:spcAft>
+            </a:pPr>
+            <a:r>
+              <a:rPr sz="1600" i="0" b="0">
+                <a:solidFill>
+                  <a:srgbClr val="DCDCAA"/>
+                </a:solidFill>
+                <a:latin typeface="Consolas"/>
+              </a:rPr>
+              <a:t>txtId.addActionListener</a:t>
+            </a:r>
+            <a:r>
+              <a:rPr sz="1600" i="0" b="0">
+                <a:solidFill>
+                  <a:srgbClr val="D4D4D4"/>
+                </a:solidFill>
+                <a:latin typeface="Consolas"/>
+              </a:rPr>
+              <a:t>(</a:t>
+            </a:r>
+            <a:r>
+              <a:rPr sz="1600" i="0" b="0">
+                <a:solidFill>
+                  <a:srgbClr val="D4D4D4"/>
+                </a:solidFill>
+                <a:latin typeface="Consolas"/>
+              </a:rPr>
+              <a:t>e</a:t>
+            </a:r>
+            <a:r>
+              <a:rPr sz="1600" i="0" b="0">
+                <a:solidFill>
+                  <a:srgbClr val="D4D4D4"/>
+                </a:solidFill>
+                <a:latin typeface="Consolas"/>
+              </a:rPr>
+              <a:t> -&gt; </a:t>
+            </a:r>
+            <a:r>
+              <a:rPr sz="1600" i="0" b="0">
+                <a:solidFill>
+                  <a:srgbClr val="DCDCAA"/>
+                </a:solidFill>
+                <a:latin typeface="Consolas"/>
+              </a:rPr>
+              <a:t>buscar</a:t>
+            </a:r>
+            <a:r>
+              <a:rPr sz="1600" i="0" b="0">
+                <a:solidFill>
+                  <a:srgbClr val="D4D4D4"/>
+                </a:solidFill>
+                <a:latin typeface="Consolas"/>
+              </a:rPr>
+              <a:t>());        </a:t>
+            </a:r>
+            <a:r>
+              <a:rPr sz="1600" i="1" b="0">
+                <a:solidFill>
+                  <a:srgbClr val="6A9955"/>
+                </a:solidFill>
+                <a:latin typeface="Consolas"/>
+              </a:rPr>
+              <a:t>// Enter tambien busca</a:t>
+            </a:r>
+          </a:p>
+          <a:p>
+            <a:pPr>
+              <a:spcAft>
+                <a:spcPts val="342"/>
+              </a:spcAft>
+            </a:pPr>
+            <a:r>
+              <a:rPr sz="1600" i="0" b="0">
+                <a:solidFill>
+                  <a:srgbClr val="D4D4D4"/>
+                </a:solidFill>
+                <a:latin typeface="Consolas"/>
+              </a:rPr>
+              <a:t/>
+            </a:r>
+          </a:p>
+          <a:p>
+            <a:pPr>
+              <a:spcAft>
+                <a:spcPts val="342"/>
+              </a:spcAft>
+            </a:pPr>
+            <a:r>
+              <a:rPr sz="1600" i="0" b="0">
+                <a:solidFill>
+                  <a:srgbClr val="DCDCAA"/>
+                </a:solidFill>
+                <a:latin typeface="Consolas"/>
+              </a:rPr>
+              <a:t>setDefaultCloseOperation</a:t>
+            </a:r>
+            <a:r>
+              <a:rPr sz="1600" i="0" b="0">
+                <a:solidFill>
+                  <a:srgbClr val="D4D4D4"/>
+                </a:solidFill>
+                <a:latin typeface="Consolas"/>
+              </a:rPr>
+              <a:t>(</a:t>
+            </a:r>
+            <a:r>
+              <a:rPr sz="1600" i="0" b="0">
+                <a:solidFill>
+                  <a:srgbClr val="D4D4D4"/>
+                </a:solidFill>
+                <a:latin typeface="Consolas"/>
+              </a:rPr>
+              <a:t>JFrame</a:t>
+            </a:r>
+            <a:r>
+              <a:rPr sz="1600" i="0" b="0">
+                <a:solidFill>
+                  <a:srgbClr val="D4D4D4"/>
+                </a:solidFill>
+                <a:latin typeface="Consolas"/>
+              </a:rPr>
+              <a:t>.</a:t>
+            </a:r>
+            <a:r>
+              <a:rPr sz="1600" i="0" b="0">
+                <a:solidFill>
+                  <a:srgbClr val="D4D4D4"/>
+                </a:solidFill>
+                <a:latin typeface="Consolas"/>
+              </a:rPr>
+              <a:t>EXIT_ON_CLOSE</a:t>
+            </a:r>
+            <a:r>
+              <a:rPr sz="1600" i="0" b="0">
+                <a:solidFill>
+                  <a:srgbClr val="D4D4D4"/>
+                </a:solidFill>
+                <a:latin typeface="Consolas"/>
+              </a:rPr>
+              <a:t>);</a:t>
+            </a:r>
+          </a:p>
+          <a:p>
+            <a:pPr>
+              <a:spcAft>
+                <a:spcPts val="342"/>
+              </a:spcAft>
+            </a:pPr>
+            <a:r>
+              <a:rPr sz="1600" i="0" b="0">
+                <a:solidFill>
+                  <a:srgbClr val="DCDCAA"/>
+                </a:solidFill>
+                <a:latin typeface="Consolas"/>
+              </a:rPr>
+              <a:t>setSize</a:t>
+            </a:r>
+            <a:r>
+              <a:rPr sz="1600" i="0" b="0">
+                <a:solidFill>
+                  <a:srgbClr val="D4D4D4"/>
+                </a:solidFill>
+                <a:latin typeface="Consolas"/>
+              </a:rPr>
+              <a:t>(</a:t>
+            </a:r>
+            <a:r>
+              <a:rPr sz="1600" i="0" b="0">
+                <a:solidFill>
+                  <a:srgbClr val="B5CEA8"/>
+                </a:solidFill>
+                <a:latin typeface="Consolas"/>
+              </a:rPr>
+              <a:t>600</a:t>
+            </a:r>
+            <a:r>
+              <a:rPr sz="1600" i="0" b="0">
+                <a:solidFill>
+                  <a:srgbClr val="D4D4D4"/>
+                </a:solidFill>
+                <a:latin typeface="Consolas"/>
+              </a:rPr>
+              <a:t>, </a:t>
+            </a:r>
+            <a:r>
+              <a:rPr sz="1600" i="0" b="0">
+                <a:solidFill>
+                  <a:srgbClr val="B5CEA8"/>
+                </a:solidFill>
+                <a:latin typeface="Consolas"/>
+              </a:rPr>
+              <a:t>230</a:t>
+            </a:r>
+            <a:r>
+              <a:rPr sz="1600" i="0" b="0">
+                <a:solidFill>
+                  <a:srgbClr val="D4D4D4"/>
+                </a:solidFill>
+                <a:latin typeface="Consolas"/>
+              </a:rPr>
+              <a:t>);</a:t>
+            </a:r>
+          </a:p>
+          <a:p>
+            <a:pPr>
+              <a:spcAft>
+                <a:spcPts val="342"/>
+              </a:spcAft>
+            </a:pPr>
+            <a:r>
+              <a:rPr sz="1600" i="0" b="0">
+                <a:solidFill>
+                  <a:srgbClr val="DCDCAA"/>
+                </a:solidFill>
+                <a:latin typeface="Consolas"/>
+              </a:rPr>
+              <a:t>setLocationRelativeTo</a:t>
+            </a:r>
+            <a:r>
+              <a:rPr sz="1600" i="0" b="0">
+                <a:solidFill>
+                  <a:srgbClr val="D4D4D4"/>
+                </a:solidFill>
+                <a:latin typeface="Consolas"/>
+              </a:rPr>
+              <a:t>(</a:t>
+            </a:r>
+            <a:r>
+              <a:rPr sz="1600" i="0" b="0">
+                <a:solidFill>
+                  <a:srgbClr val="569CD6"/>
+                </a:solidFill>
+                <a:latin typeface="Consolas"/>
+              </a:rPr>
+              <a:t>null</a:t>
+            </a:r>
+            <a:r>
+              <a:rPr sz="1600" i="0" b="0">
+                <a:solidFill>
+                  <a:srgbClr val="D4D4D4"/>
+                </a:solidFill>
+                <a:latin typeface="Consolas"/>
+              </a:rPr>
+              <a:t>);                   </a:t>
+            </a:r>
+            <a:r>
+              <a:rPr sz="1600" i="1" b="0">
+                <a:solidFill>
+                  <a:srgbClr val="6A9955"/>
+                </a:solidFill>
+                <a:latin typeface="Consolas"/>
+              </a:rPr>
+              <a:t>// centrada en pantalla</a:t>
+            </a:r>
+          </a:p>
+          <a:p>
+            <a:pPr>
+              <a:spcAft>
+                <a:spcPts val="342"/>
+              </a:spcAft>
+            </a:pPr>
+            <a:r>
+              <a:rPr sz="1600" i="0" b="0">
+                <a:solidFill>
+                  <a:srgbClr val="D4D4D4"/>
+                </a:solidFill>
+                <a:latin typeface="Consolas"/>
+              </a:rPr>
+              <a:t/>
+            </a:r>
+          </a:p>
+          <a:p>
+            <a:pPr>
+              <a:spcAft>
+                <a:spcPts val="342"/>
+              </a:spcAft>
+            </a:pPr>
+            <a:r>
+              <a:rPr sz="1600" i="0" b="0">
+                <a:solidFill>
+                  <a:srgbClr val="569CD6"/>
+                </a:solidFill>
+                <a:latin typeface="Consolas"/>
+              </a:rPr>
+              <a:t>public</a:t>
+            </a:r>
+            <a:r>
+              <a:rPr sz="1600" i="0" b="0">
+                <a:solidFill>
+                  <a:srgbClr val="D4D4D4"/>
+                </a:solidFill>
+                <a:latin typeface="Consolas"/>
+              </a:rPr>
+              <a:t> </a:t>
+            </a:r>
+            <a:r>
+              <a:rPr sz="1600" i="0" b="0">
+                <a:solidFill>
+                  <a:srgbClr val="569CD6"/>
+                </a:solidFill>
+                <a:latin typeface="Consolas"/>
+              </a:rPr>
+              <a:t>static</a:t>
+            </a:r>
+            <a:r>
+              <a:rPr sz="1600" i="0" b="0">
+                <a:solidFill>
+                  <a:srgbClr val="D4D4D4"/>
+                </a:solidFill>
+                <a:latin typeface="Consolas"/>
+              </a:rPr>
+              <a:t> </a:t>
+            </a:r>
+            <a:r>
+              <a:rPr sz="1600" i="0" b="0">
+                <a:solidFill>
+                  <a:srgbClr val="569CD6"/>
+                </a:solidFill>
+                <a:latin typeface="Consolas"/>
+              </a:rPr>
+              <a:t>void</a:t>
+            </a:r>
+            <a:r>
+              <a:rPr sz="1600" i="0" b="0">
+                <a:solidFill>
+                  <a:srgbClr val="D4D4D4"/>
+                </a:solidFill>
+                <a:latin typeface="Consolas"/>
+              </a:rPr>
+              <a:t> </a:t>
+            </a:r>
+            <a:r>
+              <a:rPr sz="1600" i="0" b="0">
+                <a:solidFill>
+                  <a:srgbClr val="DCDCAA"/>
+                </a:solidFill>
+                <a:latin typeface="Consolas"/>
+              </a:rPr>
+              <a:t>main</a:t>
+            </a:r>
+            <a:r>
+              <a:rPr sz="1600" i="0" b="0">
+                <a:solidFill>
+                  <a:srgbClr val="D4D4D4"/>
+                </a:solidFill>
+                <a:latin typeface="Consolas"/>
+              </a:rPr>
+              <a:t>(</a:t>
+            </a:r>
+            <a:r>
+              <a:rPr sz="1600" i="0" b="0">
+                <a:solidFill>
+                  <a:srgbClr val="4EC9B0"/>
+                </a:solidFill>
+                <a:latin typeface="Consolas"/>
+              </a:rPr>
+              <a:t>String</a:t>
+            </a:r>
+            <a:r>
+              <a:rPr sz="1600" i="0" b="0">
+                <a:solidFill>
+                  <a:srgbClr val="D4D4D4"/>
+                </a:solidFill>
+                <a:latin typeface="Consolas"/>
+              </a:rPr>
+              <a:t>[] </a:t>
+            </a:r>
+            <a:r>
+              <a:rPr sz="1600" i="0" b="0">
+                <a:solidFill>
+                  <a:srgbClr val="D4D4D4"/>
+                </a:solidFill>
+                <a:latin typeface="Consolas"/>
+              </a:rPr>
+              <a:t>args</a:t>
+            </a:r>
+            <a:r>
+              <a:rPr sz="1600" i="0" b="0">
+                <a:solidFill>
+                  <a:srgbClr val="D4D4D4"/>
+                </a:solidFill>
+                <a:latin typeface="Consolas"/>
+              </a:rPr>
+              <a:t>) {</a:t>
+            </a:r>
+          </a:p>
+          <a:p>
+            <a:pPr>
+              <a:spcAft>
+                <a:spcPts val="342"/>
+              </a:spcAft>
+            </a:pPr>
+            <a:r>
+              <a:rPr sz="1600" i="0" b="0">
+                <a:solidFill>
+                  <a:srgbClr val="D4D4D4"/>
+                </a:solidFill>
+                <a:latin typeface="Consolas"/>
+              </a:rPr>
+              <a:t>    </a:t>
+            </a:r>
+            <a:r>
+              <a:rPr sz="1600" i="1" b="0">
+                <a:solidFill>
+                  <a:srgbClr val="6A9955"/>
+                </a:solidFill>
+                <a:latin typeface="Consolas"/>
+              </a:rPr>
+              <a:t>// La interfaz se construye en el hilo de eventos de Swing (EDT)</a:t>
+            </a:r>
+          </a:p>
+          <a:p>
+            <a:pPr>
+              <a:spcAft>
+                <a:spcPts val="342"/>
+              </a:spcAft>
+            </a:pPr>
+            <a:r>
+              <a:rPr sz="1600" i="0" b="0">
+                <a:solidFill>
+                  <a:srgbClr val="D4D4D4"/>
+                </a:solidFill>
+                <a:latin typeface="Consolas"/>
+              </a:rPr>
+              <a:t>    </a:t>
+            </a:r>
+            <a:r>
+              <a:rPr sz="1600" i="0" b="0">
+                <a:solidFill>
+                  <a:srgbClr val="DCDCAA"/>
+                </a:solidFill>
+                <a:latin typeface="Consolas"/>
+              </a:rPr>
+              <a:t>SwingUtilities.invokeLater</a:t>
+            </a:r>
+            <a:r>
+              <a:rPr sz="1600" i="0" b="0">
+                <a:solidFill>
+                  <a:srgbClr val="D4D4D4"/>
+                </a:solidFill>
+                <a:latin typeface="Consolas"/>
+              </a:rPr>
+              <a:t>(() -&gt; </a:t>
+            </a:r>
+            <a:r>
+              <a:rPr sz="1600" i="0" b="0">
+                <a:solidFill>
+                  <a:srgbClr val="569CD6"/>
+                </a:solidFill>
+                <a:latin typeface="Consolas"/>
+              </a:rPr>
+              <a:t>new</a:t>
+            </a:r>
+            <a:r>
+              <a:rPr sz="1600" i="0" b="0">
+                <a:solidFill>
+                  <a:srgbClr val="D4D4D4"/>
+                </a:solidFill>
+                <a:latin typeface="Consolas"/>
+              </a:rPr>
+              <a:t> </a:t>
+            </a:r>
+            <a:r>
+              <a:rPr sz="1600" i="0" b="0">
+                <a:solidFill>
+                  <a:srgbClr val="4EC9B0"/>
+                </a:solidFill>
+                <a:latin typeface="Consolas"/>
+              </a:rPr>
+              <a:t>ClinicaBuscarExpediente</a:t>
+            </a:r>
+            <a:r>
+              <a:rPr sz="1600" i="0" b="0">
+                <a:solidFill>
+                  <a:srgbClr val="D4D4D4"/>
+                </a:solidFill>
+                <a:latin typeface="Consolas"/>
+              </a:rPr>
+              <a:t>().</a:t>
+            </a:r>
+            <a:r>
+              <a:rPr sz="1600" i="0" b="0">
+                <a:solidFill>
+                  <a:srgbClr val="DCDCAA"/>
+                </a:solidFill>
+                <a:latin typeface="Consolas"/>
+              </a:rPr>
+              <a:t>setVisible</a:t>
+            </a:r>
+            <a:r>
+              <a:rPr sz="1600" i="0" b="0">
+                <a:solidFill>
+                  <a:srgbClr val="D4D4D4"/>
+                </a:solidFill>
+                <a:latin typeface="Consolas"/>
+              </a:rPr>
+              <a:t>(</a:t>
+            </a:r>
+            <a:r>
+              <a:rPr sz="1600" i="0" b="0">
+                <a:solidFill>
+                  <a:srgbClr val="569CD6"/>
+                </a:solidFill>
+                <a:latin typeface="Consolas"/>
+              </a:rPr>
+              <a:t>true</a:t>
+            </a:r>
+            <a:r>
+              <a:rPr sz="1600" i="0" b="0">
+                <a:solidFill>
+                  <a:srgbClr val="D4D4D4"/>
+                </a:solidFill>
+                <a:latin typeface="Consolas"/>
+              </a:rPr>
+              <a:t>));</a:t>
+            </a:r>
+          </a:p>
+          <a:p>
+            <a:pPr>
+              <a:spcAft>
+                <a:spcPts val="342"/>
+              </a:spcAft>
+            </a:pPr>
+            <a:r>
+              <a:rPr sz="1600" i="0" b="0">
+                <a:solidFill>
+                  <a:srgbClr val="D4D4D4"/>
+                </a:solidFill>
+                <a:latin typeface="Consolas"/>
+              </a:rPr>
+              <a:t>}</a:t>
+            </a:r>
+          </a:p>
+        </p:txBody>
+      </p:sp>
+      <p:sp>
+        <p:nvSpPr>
+          <p:cNvPr id="13" name="TextBox 12"/>
+          <p:cNvSpPr txBox="1"/>
+          <p:nvPr/>
+        </p:nvSpPr>
+        <p:spPr>
+          <a:xfrm>
+            <a:off x="457200" y="6035040"/>
+            <a:ext cx="11277295" cy="365760"/>
+          </a:xfrm>
+          <a:prstGeom prst="rect">
+            <a:avLst/>
+          </a:prstGeom>
+          <a:noFill/>
+        </p:spPr>
+        <p:txBody>
+          <a:bodyPr wrap="square">
+            <a:spAutoFit/>
+          </a:bodyPr>
+          <a:lstStyle/>
+          <a:p>
             <a:pPr algn="ctr"/>
             <a:r>
               <a:rPr sz="1300" b="0" i="1">
@@ -11147,7 +11760,7 @@
       </p:sp>
       <p:sp>
         <p:nvSpPr>
-          <p:cNvPr id="13" name="TextBox 12"/>
+          <p:cNvPr id="14" name="TextBox 13"/>
           <p:cNvSpPr txBox="1"/>
           <p:nvPr/>
         </p:nvSpPr>
@@ -11335,7 +11948,7 @@
         <p:spPr>
           <a:xfrm>
             <a:off x="457200" y="1261872"/>
-            <a:ext cx="11277295" cy="4654807"/>
+            <a:ext cx="11277295" cy="3600608"/>
           </a:xfrm>
           <a:prstGeom prst="roundRect">
             <a:avLst>
@@ -11584,8 +12197,8 @@
         </p:nvSpPr>
         <p:spPr>
           <a:xfrm>
-            <a:off x="1188720" y="1719072"/>
-            <a:ext cx="10271455" cy="4060447"/>
+            <a:off x="685800" y="1719072"/>
+            <a:ext cx="502920" cy="3006248"/>
           </a:xfrm>
           <a:prstGeom prst="rect">
             <a:avLst/>
@@ -11598,667 +12211,163 @@
           </a:bodyPr>
           <a:lstStyle/>
           <a:p>
-            <a:pPr>
+            <a:pPr algn="r">
               <a:spcAft>
-                <a:spcPts val="407"/>
+                <a:spcPts val="342"/>
               </a:spcAft>
             </a:pPr>
             <a:r>
-              <a:rPr sz="1900" i="0" b="0">
-                <a:solidFill>
-                  <a:srgbClr val="D4D4D4"/>
-                </a:solidFill>
-                <a:latin typeface="Consolas"/>
-              </a:rPr>
-              <a:t>Expediente</a:t>
-            </a:r>
-            <a:r>
-              <a:rPr sz="1900" i="0" b="0">
-                <a:solidFill>
-                  <a:srgbClr val="D4D4D4"/>
-                </a:solidFill>
-                <a:latin typeface="Consolas"/>
-              </a:rPr>
-              <a:t> </a:t>
-            </a:r>
-            <a:r>
-              <a:rPr sz="1900" i="0" b="0">
-                <a:solidFill>
-                  <a:srgbClr val="D4D4D4"/>
-                </a:solidFill>
-                <a:latin typeface="Consolas"/>
-              </a:rPr>
-              <a:t>e</a:t>
-            </a:r>
-            <a:r>
-              <a:rPr sz="1900" i="0" b="0">
-                <a:solidFill>
-                  <a:srgbClr val="D4D4D4"/>
-                </a:solidFill>
-                <a:latin typeface="Consolas"/>
-              </a:rPr>
-              <a:t> = </a:t>
-            </a:r>
-            <a:r>
-              <a:rPr sz="1900" i="0" b="0">
-                <a:solidFill>
-                  <a:srgbClr val="DCDCAA"/>
-                </a:solidFill>
-                <a:latin typeface="Consolas"/>
-              </a:rPr>
-              <a:t>expedientes.get</a:t>
-            </a:r>
-            <a:r>
-              <a:rPr sz="1900" i="0" b="0">
-                <a:solidFill>
-                  <a:srgbClr val="D4D4D4"/>
-                </a:solidFill>
-                <a:latin typeface="Consolas"/>
-              </a:rPr>
-              <a:t>(</a:t>
-            </a:r>
-            <a:r>
-              <a:rPr sz="1900" i="0" b="0">
-                <a:solidFill>
-                  <a:srgbClr val="D4D4D4"/>
-                </a:solidFill>
-                <a:latin typeface="Consolas"/>
-              </a:rPr>
-              <a:t>id</a:t>
-            </a:r>
-            <a:r>
-              <a:rPr sz="1900" i="0" b="0">
-                <a:solidFill>
-                  <a:srgbClr val="D4D4D4"/>
-                </a:solidFill>
-                <a:latin typeface="Consolas"/>
-              </a:rPr>
-              <a:t>);        </a:t>
-            </a:r>
-            <a:r>
-              <a:rPr sz="1900" i="1" b="0">
-                <a:solidFill>
-                  <a:srgbClr val="6A9955"/>
-                </a:solidFill>
-                <a:latin typeface="Consolas"/>
-              </a:rPr>
-              <a:t>// busqueda por clave, sin recorrer</a:t>
-            </a:r>
-          </a:p>
-          <a:p>
-            <a:pPr>
+              <a:rPr sz="1600" i="0" b="0">
+                <a:solidFill>
+                  <a:srgbClr val="858585"/>
+                </a:solidFill>
+                <a:latin typeface="Consolas"/>
+              </a:rPr>
+              <a:t>1</a:t>
+            </a:r>
+          </a:p>
+          <a:p>
+            <a:pPr algn="r">
               <a:spcAft>
-                <a:spcPts val="407"/>
+                <a:spcPts val="342"/>
               </a:spcAft>
             </a:pPr>
             <a:r>
-              <a:rPr sz="1900" i="0" b="0">
-                <a:solidFill>
-                  <a:srgbClr val="569CD6"/>
-                </a:solidFill>
-                <a:latin typeface="Consolas"/>
-              </a:rPr>
-              <a:t>if</a:t>
-            </a:r>
-            <a:r>
-              <a:rPr sz="1900" i="0" b="0">
-                <a:solidFill>
-                  <a:srgbClr val="D4D4D4"/>
-                </a:solidFill>
-                <a:latin typeface="Consolas"/>
-              </a:rPr>
-              <a:t> (</a:t>
-            </a:r>
-            <a:r>
-              <a:rPr sz="1900" i="0" b="0">
-                <a:solidFill>
-                  <a:srgbClr val="D4D4D4"/>
-                </a:solidFill>
-                <a:latin typeface="Consolas"/>
-              </a:rPr>
-              <a:t>e</a:t>
-            </a:r>
-            <a:r>
-              <a:rPr sz="1900" i="0" b="0">
-                <a:solidFill>
-                  <a:srgbClr val="D4D4D4"/>
-                </a:solidFill>
-                <a:latin typeface="Consolas"/>
-              </a:rPr>
-              <a:t> == </a:t>
-            </a:r>
-            <a:r>
-              <a:rPr sz="1900" i="0" b="0">
-                <a:solidFill>
-                  <a:srgbClr val="569CD6"/>
-                </a:solidFill>
-                <a:latin typeface="Consolas"/>
-              </a:rPr>
-              <a:t>null</a:t>
-            </a:r>
-            <a:r>
-              <a:rPr sz="1900" i="0" b="0">
-                <a:solidFill>
-                  <a:srgbClr val="D4D4D4"/>
-                </a:solidFill>
-                <a:latin typeface="Consolas"/>
-              </a:rPr>
-              <a:t>) {                           </a:t>
-            </a:r>
-            <a:r>
-              <a:rPr sz="1900" i="1" b="0">
-                <a:solidFill>
-                  <a:srgbClr val="6A9955"/>
-                </a:solidFill>
-                <a:latin typeface="Consolas"/>
-              </a:rPr>
-              <a:t>// get devuelve null si no existe</a:t>
-            </a:r>
-          </a:p>
-          <a:p>
-            <a:pPr>
+              <a:rPr sz="1600" i="0" b="0">
+                <a:solidFill>
+                  <a:srgbClr val="858585"/>
+                </a:solidFill>
+                <a:latin typeface="Consolas"/>
+              </a:rPr>
+              <a:t>2</a:t>
+            </a:r>
+          </a:p>
+          <a:p>
+            <a:pPr algn="r">
               <a:spcAft>
-                <a:spcPts val="407"/>
+                <a:spcPts val="342"/>
               </a:spcAft>
             </a:pPr>
             <a:r>
-              <a:rPr sz="1900" i="0" b="0">
-                <a:solidFill>
-                  <a:srgbClr val="D4D4D4"/>
-                </a:solidFill>
-                <a:latin typeface="Consolas"/>
-              </a:rPr>
-              <a:t>    </a:t>
-            </a:r>
-            <a:r>
-              <a:rPr sz="1900" i="0" b="0">
-                <a:solidFill>
-                  <a:srgbClr val="DCDCAA"/>
-                </a:solidFill>
-                <a:latin typeface="Consolas"/>
-              </a:rPr>
-              <a:t>lblResultado.setText</a:t>
-            </a:r>
-            <a:r>
-              <a:rPr sz="1900" i="0" b="0">
-                <a:solidFill>
-                  <a:srgbClr val="D4D4D4"/>
-                </a:solidFill>
-                <a:latin typeface="Consolas"/>
-              </a:rPr>
-              <a:t>(</a:t>
-            </a:r>
-            <a:r>
-              <a:rPr sz="1900" i="0" b="0">
-                <a:solidFill>
-                  <a:srgbClr val="CE9178"/>
-                </a:solidFill>
-                <a:latin typeface="Consolas"/>
-              </a:rPr>
-              <a:t>"No existe expediente con ID "</a:t>
-            </a:r>
-            <a:r>
-              <a:rPr sz="1900" i="0" b="0">
-                <a:solidFill>
-                  <a:srgbClr val="D4D4D4"/>
-                </a:solidFill>
-                <a:latin typeface="Consolas"/>
-              </a:rPr>
-              <a:t> + </a:t>
-            </a:r>
-            <a:r>
-              <a:rPr sz="1900" i="0" b="0">
-                <a:solidFill>
-                  <a:srgbClr val="D4D4D4"/>
-                </a:solidFill>
-                <a:latin typeface="Consolas"/>
-              </a:rPr>
-              <a:t>id</a:t>
-            </a:r>
-            <a:r>
-              <a:rPr sz="1900" i="0" b="0">
-                <a:solidFill>
-                  <a:srgbClr val="D4D4D4"/>
-                </a:solidFill>
-                <a:latin typeface="Consolas"/>
-              </a:rPr>
-              <a:t>);</a:t>
-            </a:r>
-          </a:p>
-          <a:p>
-            <a:pPr>
+              <a:rPr sz="1600" i="0" b="0">
+                <a:solidFill>
+                  <a:srgbClr val="858585"/>
+                </a:solidFill>
+                <a:latin typeface="Consolas"/>
+              </a:rPr>
+              <a:t>3</a:t>
+            </a:r>
+          </a:p>
+          <a:p>
+            <a:pPr algn="r">
               <a:spcAft>
-                <a:spcPts val="407"/>
+                <a:spcPts val="342"/>
               </a:spcAft>
             </a:pPr>
             <a:r>
-              <a:rPr sz="1900" i="0" b="0">
-                <a:solidFill>
-                  <a:srgbClr val="D4D4D4"/>
-                </a:solidFill>
-                <a:latin typeface="Consolas"/>
-              </a:rPr>
-              <a:t>    </a:t>
-            </a:r>
-            <a:r>
-              <a:rPr sz="1900" i="0" b="0">
-                <a:solidFill>
-                  <a:srgbClr val="DCDCAA"/>
-                </a:solidFill>
-                <a:latin typeface="Consolas"/>
-              </a:rPr>
-              <a:t>JOptionPane.showMessageDialog</a:t>
-            </a:r>
-            <a:r>
-              <a:rPr sz="1900" i="0" b="0">
-                <a:solidFill>
-                  <a:srgbClr val="D4D4D4"/>
-                </a:solidFill>
-                <a:latin typeface="Consolas"/>
-              </a:rPr>
-              <a:t>(</a:t>
-            </a:r>
-            <a:r>
-              <a:rPr sz="1900" i="0" b="0">
-                <a:solidFill>
-                  <a:srgbClr val="569CD6"/>
-                </a:solidFill>
-                <a:latin typeface="Consolas"/>
-              </a:rPr>
-              <a:t>this</a:t>
-            </a:r>
-            <a:r>
-              <a:rPr sz="1900" i="0" b="0">
-                <a:solidFill>
-                  <a:srgbClr val="D4D4D4"/>
-                </a:solidFill>
-                <a:latin typeface="Consolas"/>
-              </a:rPr>
-              <a:t>,</a:t>
-            </a:r>
-          </a:p>
-          <a:p>
-            <a:pPr>
+              <a:rPr sz="1600" i="0" b="0">
+                <a:solidFill>
+                  <a:srgbClr val="858585"/>
+                </a:solidFill>
+                <a:latin typeface="Consolas"/>
+              </a:rPr>
+              <a:t>4</a:t>
+            </a:r>
+          </a:p>
+          <a:p>
+            <a:pPr algn="r">
               <a:spcAft>
-                <a:spcPts val="407"/>
+                <a:spcPts val="342"/>
               </a:spcAft>
             </a:pPr>
             <a:r>
-              <a:rPr sz="1900" i="0" b="0">
-                <a:solidFill>
-                  <a:srgbClr val="D4D4D4"/>
-                </a:solidFill>
-                <a:latin typeface="Consolas"/>
-              </a:rPr>
-              <a:t>            </a:t>
-            </a:r>
-            <a:r>
-              <a:rPr sz="1900" i="0" b="0">
-                <a:solidFill>
-                  <a:srgbClr val="CE9178"/>
-                </a:solidFill>
-                <a:latin typeface="Consolas"/>
-              </a:rPr>
-              <a:t>"No existe expediente con ID "</a:t>
-            </a:r>
-            <a:r>
-              <a:rPr sz="1900" i="0" b="0">
-                <a:solidFill>
-                  <a:srgbClr val="D4D4D4"/>
-                </a:solidFill>
-                <a:latin typeface="Consolas"/>
-              </a:rPr>
-              <a:t> + </a:t>
-            </a:r>
-            <a:r>
-              <a:rPr sz="1900" i="0" b="0">
-                <a:solidFill>
-                  <a:srgbClr val="D4D4D4"/>
-                </a:solidFill>
-                <a:latin typeface="Consolas"/>
-              </a:rPr>
-              <a:t>id</a:t>
-            </a:r>
-            <a:r>
-              <a:rPr sz="1900" i="0" b="0">
-                <a:solidFill>
-                  <a:srgbClr val="D4D4D4"/>
-                </a:solidFill>
-                <a:latin typeface="Consolas"/>
-              </a:rPr>
-              <a:t>,</a:t>
-            </a:r>
-          </a:p>
-          <a:p>
-            <a:pPr>
+              <a:rPr sz="1600" i="0" b="0">
+                <a:solidFill>
+                  <a:srgbClr val="858585"/>
+                </a:solidFill>
+                <a:latin typeface="Consolas"/>
+              </a:rPr>
+              <a:t>5</a:t>
+            </a:r>
+          </a:p>
+          <a:p>
+            <a:pPr algn="r">
               <a:spcAft>
-                <a:spcPts val="407"/>
+                <a:spcPts val="342"/>
               </a:spcAft>
             </a:pPr>
             <a:r>
-              <a:rPr sz="1900" i="0" b="0">
-                <a:solidFill>
-                  <a:srgbClr val="D4D4D4"/>
-                </a:solidFill>
-                <a:latin typeface="Consolas"/>
-              </a:rPr>
-              <a:t>            </a:t>
-            </a:r>
-            <a:r>
-              <a:rPr sz="1900" i="0" b="0">
-                <a:solidFill>
-                  <a:srgbClr val="CE9178"/>
-                </a:solidFill>
-                <a:latin typeface="Consolas"/>
-              </a:rPr>
-              <a:t>"Sin resultados"</a:t>
-            </a:r>
-            <a:r>
-              <a:rPr sz="1900" i="0" b="0">
-                <a:solidFill>
-                  <a:srgbClr val="D4D4D4"/>
-                </a:solidFill>
-                <a:latin typeface="Consolas"/>
-              </a:rPr>
-              <a:t>, </a:t>
-            </a:r>
-            <a:r>
-              <a:rPr sz="1900" i="0" b="0">
-                <a:solidFill>
-                  <a:srgbClr val="D4D4D4"/>
-                </a:solidFill>
-                <a:latin typeface="Consolas"/>
-              </a:rPr>
-              <a:t>JOptionPane</a:t>
-            </a:r>
-            <a:r>
-              <a:rPr sz="1900" i="0" b="0">
-                <a:solidFill>
-                  <a:srgbClr val="D4D4D4"/>
-                </a:solidFill>
-                <a:latin typeface="Consolas"/>
-              </a:rPr>
-              <a:t>.</a:t>
-            </a:r>
-            <a:r>
-              <a:rPr sz="1900" i="0" b="0">
-                <a:solidFill>
-                  <a:srgbClr val="D4D4D4"/>
-                </a:solidFill>
-                <a:latin typeface="Consolas"/>
-              </a:rPr>
-              <a:t>WARNING_MESSAGE</a:t>
-            </a:r>
-            <a:r>
-              <a:rPr sz="1900" i="0" b="0">
-                <a:solidFill>
-                  <a:srgbClr val="D4D4D4"/>
-                </a:solidFill>
-                <a:latin typeface="Consolas"/>
-              </a:rPr>
-              <a:t>);</a:t>
-            </a:r>
-          </a:p>
-          <a:p>
-            <a:pPr>
+              <a:rPr sz="1600" i="0" b="0">
+                <a:solidFill>
+                  <a:srgbClr val="858585"/>
+                </a:solidFill>
+                <a:latin typeface="Consolas"/>
+              </a:rPr>
+              <a:t>6</a:t>
+            </a:r>
+          </a:p>
+          <a:p>
+            <a:pPr algn="r">
               <a:spcAft>
-                <a:spcPts val="407"/>
+                <a:spcPts val="342"/>
               </a:spcAft>
             </a:pPr>
             <a:r>
-              <a:rPr sz="1900" i="0" b="0">
-                <a:solidFill>
-                  <a:srgbClr val="D4D4D4"/>
-                </a:solidFill>
-                <a:latin typeface="Consolas"/>
-              </a:rPr>
-              <a:t>    </a:t>
-            </a:r>
-            <a:r>
-              <a:rPr sz="1900" i="0" b="0">
-                <a:solidFill>
-                  <a:srgbClr val="569CD6"/>
-                </a:solidFill>
-                <a:latin typeface="Consolas"/>
-              </a:rPr>
-              <a:t>return</a:t>
-            </a:r>
-            <a:r>
-              <a:rPr sz="1900" i="0" b="0">
-                <a:solidFill>
-                  <a:srgbClr val="D4D4D4"/>
-                </a:solidFill>
-                <a:latin typeface="Consolas"/>
-              </a:rPr>
-              <a:t>;</a:t>
-            </a:r>
-          </a:p>
-          <a:p>
-            <a:pPr>
+              <a:rPr sz="1600" i="0" b="0">
+                <a:solidFill>
+                  <a:srgbClr val="858585"/>
+                </a:solidFill>
+                <a:latin typeface="Consolas"/>
+              </a:rPr>
+              <a:t>7</a:t>
+            </a:r>
+          </a:p>
+          <a:p>
+            <a:pPr algn="r">
               <a:spcAft>
-                <a:spcPts val="407"/>
+                <a:spcPts val="342"/>
               </a:spcAft>
             </a:pPr>
             <a:r>
-              <a:rPr sz="1900" i="0" b="0">
-                <a:solidFill>
-                  <a:srgbClr val="D4D4D4"/>
-                </a:solidFill>
-                <a:latin typeface="Consolas"/>
-              </a:rPr>
-              <a:t>}</a:t>
-            </a:r>
-          </a:p>
-          <a:p>
-            <a:pPr>
+              <a:rPr sz="1600" i="0" b="0">
+                <a:solidFill>
+                  <a:srgbClr val="858585"/>
+                </a:solidFill>
+                <a:latin typeface="Consolas"/>
+              </a:rPr>
+              <a:t>8</a:t>
+            </a:r>
+          </a:p>
+          <a:p>
+            <a:pPr algn="r">
               <a:spcAft>
-                <a:spcPts val="407"/>
+                <a:spcPts val="342"/>
               </a:spcAft>
             </a:pPr>
             <a:r>
-              <a:rPr sz="1900" i="0" b="0">
-                <a:solidFill>
-                  <a:srgbClr val="DCDCAA"/>
-                </a:solidFill>
-                <a:latin typeface="Consolas"/>
-              </a:rPr>
-              <a:t>lblResultado.setText</a:t>
-            </a:r>
-            <a:r>
-              <a:rPr sz="1900" i="0" b="0">
-                <a:solidFill>
-                  <a:srgbClr val="D4D4D4"/>
-                </a:solidFill>
-                <a:latin typeface="Consolas"/>
-              </a:rPr>
-              <a:t>(</a:t>
-            </a:r>
-            <a:r>
-              <a:rPr sz="1900" i="0" b="0">
-                <a:solidFill>
-                  <a:srgbClr val="CE9178"/>
-                </a:solidFill>
-                <a:latin typeface="Consolas"/>
-              </a:rPr>
-              <a:t>"&lt;html&gt;&lt;b&gt;"</a:t>
-            </a:r>
-            <a:r>
-              <a:rPr sz="1900" i="0" b="0">
-                <a:solidFill>
-                  <a:srgbClr val="D4D4D4"/>
-                </a:solidFill>
-                <a:latin typeface="Consolas"/>
-              </a:rPr>
-              <a:t> + </a:t>
-            </a:r>
-            <a:r>
-              <a:rPr sz="1900" i="0" b="0">
-                <a:solidFill>
-                  <a:srgbClr val="DCDCAA"/>
-                </a:solidFill>
-                <a:latin typeface="Consolas"/>
-              </a:rPr>
-              <a:t>e.getNombre</a:t>
-            </a:r>
-            <a:r>
-              <a:rPr sz="1900" i="0" b="0">
-                <a:solidFill>
-                  <a:srgbClr val="D4D4D4"/>
-                </a:solidFill>
-                <a:latin typeface="Consolas"/>
-              </a:rPr>
-              <a:t>() + </a:t>
-            </a:r>
-            <a:r>
-              <a:rPr sz="1900" i="0" b="0">
-                <a:solidFill>
-                  <a:srgbClr val="CE9178"/>
-                </a:solidFill>
-                <a:latin typeface="Consolas"/>
-              </a:rPr>
-              <a:t>"&lt;/b&gt; ("</a:t>
-            </a:r>
-            <a:r>
-              <a:rPr sz="1900" i="0" b="0">
-                <a:solidFill>
-                  <a:srgbClr val="D4D4D4"/>
-                </a:solidFill>
-                <a:latin typeface="Consolas"/>
-              </a:rPr>
-              <a:t> + </a:t>
-            </a:r>
-            <a:r>
-              <a:rPr sz="1900" i="0" b="0">
-                <a:solidFill>
-                  <a:srgbClr val="DCDCAA"/>
-                </a:solidFill>
-                <a:latin typeface="Consolas"/>
-              </a:rPr>
-              <a:t>e.getRaza</a:t>
-            </a:r>
-            <a:r>
-              <a:rPr sz="1900" i="0" b="0">
-                <a:solidFill>
-                  <a:srgbClr val="D4D4D4"/>
-                </a:solidFill>
-                <a:latin typeface="Consolas"/>
-              </a:rPr>
-              <a:t>() + </a:t>
-            </a:r>
-            <a:r>
-              <a:rPr sz="1900" i="0" b="0">
-                <a:solidFill>
-                  <a:srgbClr val="CE9178"/>
-                </a:solidFill>
-                <a:latin typeface="Consolas"/>
-              </a:rPr>
-              <a:t>")&lt;br&gt;"</a:t>
-            </a:r>
-          </a:p>
-          <a:p>
-            <a:pPr>
+              <a:rPr sz="1600" i="0" b="0">
+                <a:solidFill>
+                  <a:srgbClr val="858585"/>
+                </a:solidFill>
+                <a:latin typeface="Consolas"/>
+              </a:rPr>
+              <a:t>9</a:t>
+            </a:r>
+          </a:p>
+          <a:p>
+            <a:pPr algn="r">
               <a:spcAft>
-                <a:spcPts val="407"/>
+                <a:spcPts val="342"/>
               </a:spcAft>
             </a:pPr>
             <a:r>
-              <a:rPr sz="1900" i="0" b="0">
-                <a:solidFill>
-                  <a:srgbClr val="D4D4D4"/>
-                </a:solidFill>
-                <a:latin typeface="Consolas"/>
-              </a:rPr>
-              <a:t>        + </a:t>
-            </a:r>
-            <a:r>
-              <a:rPr sz="1900" i="0" b="0">
-                <a:solidFill>
-                  <a:srgbClr val="CE9178"/>
-                </a:solidFill>
-                <a:latin typeface="Consolas"/>
-              </a:rPr>
-              <a:t>"Dueno: "</a:t>
-            </a:r>
-            <a:r>
-              <a:rPr sz="1900" i="0" b="0">
-                <a:solidFill>
-                  <a:srgbClr val="D4D4D4"/>
-                </a:solidFill>
-                <a:latin typeface="Consolas"/>
-              </a:rPr>
-              <a:t> + </a:t>
-            </a:r>
-            <a:r>
-              <a:rPr sz="1900" i="0" b="0">
-                <a:solidFill>
-                  <a:srgbClr val="DCDCAA"/>
-                </a:solidFill>
-                <a:latin typeface="Consolas"/>
-              </a:rPr>
-              <a:t>e.getDueno</a:t>
-            </a:r>
-            <a:r>
-              <a:rPr sz="1900" i="0" b="0">
-                <a:solidFill>
-                  <a:srgbClr val="D4D4D4"/>
-                </a:solidFill>
-                <a:latin typeface="Consolas"/>
-              </a:rPr>
-              <a:t>() + </a:t>
-            </a:r>
-            <a:r>
-              <a:rPr sz="1900" i="0" b="0">
-                <a:solidFill>
-                  <a:srgbClr val="CE9178"/>
-                </a:solidFill>
-                <a:latin typeface="Consolas"/>
-              </a:rPr>
-              <a:t>"&lt;br&gt;Nota clinica: "</a:t>
-            </a:r>
-            <a:r>
-              <a:rPr sz="1900" i="0" b="0">
-                <a:solidFill>
-                  <a:srgbClr val="D4D4D4"/>
-                </a:solidFill>
-                <a:latin typeface="Consolas"/>
-              </a:rPr>
-              <a:t> + </a:t>
-            </a:r>
-            <a:r>
-              <a:rPr sz="1900" i="0" b="0">
-                <a:solidFill>
-                  <a:srgbClr val="DCDCAA"/>
-                </a:solidFill>
-                <a:latin typeface="Consolas"/>
-              </a:rPr>
-              <a:t>e.getNota</a:t>
-            </a:r>
-            <a:r>
-              <a:rPr sz="1900" i="0" b="0">
-                <a:solidFill>
-                  <a:srgbClr val="D4D4D4"/>
-                </a:solidFill>
-                <a:latin typeface="Consolas"/>
-              </a:rPr>
-              <a:t>() + </a:t>
-            </a:r>
-            <a:r>
-              <a:rPr sz="1900" i="0" b="0">
-                <a:solidFill>
-                  <a:srgbClr val="CE9178"/>
-                </a:solidFill>
-                <a:latin typeface="Consolas"/>
-              </a:rPr>
-              <a:t>"&lt;/html&gt;"</a:t>
-            </a:r>
-            <a:r>
-              <a:rPr sz="1900" i="0" b="0">
-                <a:solidFill>
-                  <a:srgbClr val="D4D4D4"/>
-                </a:solidFill>
-                <a:latin typeface="Consolas"/>
-              </a:rPr>
-              <a:t>);</a:t>
+              <a:rPr sz="1600" i="0" b="0">
+                <a:solidFill>
+                  <a:srgbClr val="858585"/>
+                </a:solidFill>
+                <a:latin typeface="Consolas"/>
+              </a:rPr>
+              <a:t>10</a:t>
             </a:r>
           </a:p>
         </p:txBody>
@@ -12271,8 +12380,8 @@
         </p:nvSpPr>
         <p:spPr>
           <a:xfrm>
-            <a:off x="457200" y="6035040"/>
-            <a:ext cx="11277295" cy="365760"/>
+            <a:off x="1188720" y="1719072"/>
+            <a:ext cx="10271455" cy="3006248"/>
           </a:xfrm>
           <a:prstGeom prst="rect">
             <a:avLst/>
@@ -12285,6 +12394,693 @@
           </a:bodyPr>
           <a:lstStyle/>
           <a:p>
+            <a:pPr>
+              <a:spcAft>
+                <a:spcPts val="342"/>
+              </a:spcAft>
+            </a:pPr>
+            <a:r>
+              <a:rPr sz="1600" i="0" b="0">
+                <a:solidFill>
+                  <a:srgbClr val="D4D4D4"/>
+                </a:solidFill>
+                <a:latin typeface="Consolas"/>
+              </a:rPr>
+              <a:t>Expediente</a:t>
+            </a:r>
+            <a:r>
+              <a:rPr sz="1600" i="0" b="0">
+                <a:solidFill>
+                  <a:srgbClr val="D4D4D4"/>
+                </a:solidFill>
+                <a:latin typeface="Consolas"/>
+              </a:rPr>
+              <a:t> </a:t>
+            </a:r>
+            <a:r>
+              <a:rPr sz="1600" i="0" b="0">
+                <a:solidFill>
+                  <a:srgbClr val="D4D4D4"/>
+                </a:solidFill>
+                <a:latin typeface="Consolas"/>
+              </a:rPr>
+              <a:t>e</a:t>
+            </a:r>
+            <a:r>
+              <a:rPr sz="1600" i="0" b="0">
+                <a:solidFill>
+                  <a:srgbClr val="D4D4D4"/>
+                </a:solidFill>
+                <a:latin typeface="Consolas"/>
+              </a:rPr>
+              <a:t> = </a:t>
+            </a:r>
+            <a:r>
+              <a:rPr sz="1600" i="0" b="0">
+                <a:solidFill>
+                  <a:srgbClr val="DCDCAA"/>
+                </a:solidFill>
+                <a:latin typeface="Consolas"/>
+              </a:rPr>
+              <a:t>expedientes.get</a:t>
+            </a:r>
+            <a:r>
+              <a:rPr sz="1600" i="0" b="0">
+                <a:solidFill>
+                  <a:srgbClr val="D4D4D4"/>
+                </a:solidFill>
+                <a:latin typeface="Consolas"/>
+              </a:rPr>
+              <a:t>(</a:t>
+            </a:r>
+            <a:r>
+              <a:rPr sz="1600" i="0" b="0">
+                <a:solidFill>
+                  <a:srgbClr val="D4D4D4"/>
+                </a:solidFill>
+                <a:latin typeface="Consolas"/>
+              </a:rPr>
+              <a:t>id</a:t>
+            </a:r>
+            <a:r>
+              <a:rPr sz="1600" i="0" b="0">
+                <a:solidFill>
+                  <a:srgbClr val="D4D4D4"/>
+                </a:solidFill>
+                <a:latin typeface="Consolas"/>
+              </a:rPr>
+              <a:t>);        </a:t>
+            </a:r>
+            <a:r>
+              <a:rPr sz="1600" i="1" b="0">
+                <a:solidFill>
+                  <a:srgbClr val="6A9955"/>
+                </a:solidFill>
+                <a:latin typeface="Consolas"/>
+              </a:rPr>
+              <a:t>// busqueda por clave, sin recorrer</a:t>
+            </a:r>
+          </a:p>
+          <a:p>
+            <a:pPr>
+              <a:spcAft>
+                <a:spcPts val="342"/>
+              </a:spcAft>
+            </a:pPr>
+            <a:r>
+              <a:rPr sz="1600" i="0" b="0">
+                <a:solidFill>
+                  <a:srgbClr val="569CD6"/>
+                </a:solidFill>
+                <a:latin typeface="Consolas"/>
+              </a:rPr>
+              <a:t>if</a:t>
+            </a:r>
+            <a:r>
+              <a:rPr sz="1600" i="0" b="0">
+                <a:solidFill>
+                  <a:srgbClr val="D4D4D4"/>
+                </a:solidFill>
+                <a:latin typeface="Consolas"/>
+              </a:rPr>
+              <a:t> (</a:t>
+            </a:r>
+            <a:r>
+              <a:rPr sz="1600" i="0" b="0">
+                <a:solidFill>
+                  <a:srgbClr val="D4D4D4"/>
+                </a:solidFill>
+                <a:latin typeface="Consolas"/>
+              </a:rPr>
+              <a:t>e</a:t>
+            </a:r>
+            <a:r>
+              <a:rPr sz="1600" i="0" b="0">
+                <a:solidFill>
+                  <a:srgbClr val="D4D4D4"/>
+                </a:solidFill>
+                <a:latin typeface="Consolas"/>
+              </a:rPr>
+              <a:t> == </a:t>
+            </a:r>
+            <a:r>
+              <a:rPr sz="1600" i="0" b="0">
+                <a:solidFill>
+                  <a:srgbClr val="569CD6"/>
+                </a:solidFill>
+                <a:latin typeface="Consolas"/>
+              </a:rPr>
+              <a:t>null</a:t>
+            </a:r>
+            <a:r>
+              <a:rPr sz="1600" i="0" b="0">
+                <a:solidFill>
+                  <a:srgbClr val="D4D4D4"/>
+                </a:solidFill>
+                <a:latin typeface="Consolas"/>
+              </a:rPr>
+              <a:t>) {                           </a:t>
+            </a:r>
+            <a:r>
+              <a:rPr sz="1600" i="1" b="0">
+                <a:solidFill>
+                  <a:srgbClr val="6A9955"/>
+                </a:solidFill>
+                <a:latin typeface="Consolas"/>
+              </a:rPr>
+              <a:t>// get devuelve null si no existe</a:t>
+            </a:r>
+          </a:p>
+          <a:p>
+            <a:pPr>
+              <a:spcAft>
+                <a:spcPts val="342"/>
+              </a:spcAft>
+            </a:pPr>
+            <a:r>
+              <a:rPr sz="1600" i="0" b="0">
+                <a:solidFill>
+                  <a:srgbClr val="D4D4D4"/>
+                </a:solidFill>
+                <a:latin typeface="Consolas"/>
+              </a:rPr>
+              <a:t>    </a:t>
+            </a:r>
+            <a:r>
+              <a:rPr sz="1600" i="0" b="0">
+                <a:solidFill>
+                  <a:srgbClr val="DCDCAA"/>
+                </a:solidFill>
+                <a:latin typeface="Consolas"/>
+              </a:rPr>
+              <a:t>lblResultado.setText</a:t>
+            </a:r>
+            <a:r>
+              <a:rPr sz="1600" i="0" b="0">
+                <a:solidFill>
+                  <a:srgbClr val="D4D4D4"/>
+                </a:solidFill>
+                <a:latin typeface="Consolas"/>
+              </a:rPr>
+              <a:t>(</a:t>
+            </a:r>
+            <a:r>
+              <a:rPr sz="1600" i="0" b="0">
+                <a:solidFill>
+                  <a:srgbClr val="CE9178"/>
+                </a:solidFill>
+                <a:latin typeface="Consolas"/>
+              </a:rPr>
+              <a:t>"No existe expediente con ID "</a:t>
+            </a:r>
+            <a:r>
+              <a:rPr sz="1600" i="0" b="0">
+                <a:solidFill>
+                  <a:srgbClr val="D4D4D4"/>
+                </a:solidFill>
+                <a:latin typeface="Consolas"/>
+              </a:rPr>
+              <a:t> + </a:t>
+            </a:r>
+            <a:r>
+              <a:rPr sz="1600" i="0" b="0">
+                <a:solidFill>
+                  <a:srgbClr val="D4D4D4"/>
+                </a:solidFill>
+                <a:latin typeface="Consolas"/>
+              </a:rPr>
+              <a:t>id</a:t>
+            </a:r>
+            <a:r>
+              <a:rPr sz="1600" i="0" b="0">
+                <a:solidFill>
+                  <a:srgbClr val="D4D4D4"/>
+                </a:solidFill>
+                <a:latin typeface="Consolas"/>
+              </a:rPr>
+              <a:t>);</a:t>
+            </a:r>
+          </a:p>
+          <a:p>
+            <a:pPr>
+              <a:spcAft>
+                <a:spcPts val="342"/>
+              </a:spcAft>
+            </a:pPr>
+            <a:r>
+              <a:rPr sz="1600" i="0" b="0">
+                <a:solidFill>
+                  <a:srgbClr val="D4D4D4"/>
+                </a:solidFill>
+                <a:latin typeface="Consolas"/>
+              </a:rPr>
+              <a:t>    </a:t>
+            </a:r>
+            <a:r>
+              <a:rPr sz="1600" i="0" b="0">
+                <a:solidFill>
+                  <a:srgbClr val="DCDCAA"/>
+                </a:solidFill>
+                <a:latin typeface="Consolas"/>
+              </a:rPr>
+              <a:t>JOptionPane.showMessageDialog</a:t>
+            </a:r>
+            <a:r>
+              <a:rPr sz="1600" i="0" b="0">
+                <a:solidFill>
+                  <a:srgbClr val="D4D4D4"/>
+                </a:solidFill>
+                <a:latin typeface="Consolas"/>
+              </a:rPr>
+              <a:t>(</a:t>
+            </a:r>
+            <a:r>
+              <a:rPr sz="1600" i="0" b="0">
+                <a:solidFill>
+                  <a:srgbClr val="569CD6"/>
+                </a:solidFill>
+                <a:latin typeface="Consolas"/>
+              </a:rPr>
+              <a:t>this</a:t>
+            </a:r>
+            <a:r>
+              <a:rPr sz="1600" i="0" b="0">
+                <a:solidFill>
+                  <a:srgbClr val="D4D4D4"/>
+                </a:solidFill>
+                <a:latin typeface="Consolas"/>
+              </a:rPr>
+              <a:t>,</a:t>
+            </a:r>
+          </a:p>
+          <a:p>
+            <a:pPr>
+              <a:spcAft>
+                <a:spcPts val="342"/>
+              </a:spcAft>
+            </a:pPr>
+            <a:r>
+              <a:rPr sz="1600" i="0" b="0">
+                <a:solidFill>
+                  <a:srgbClr val="D4D4D4"/>
+                </a:solidFill>
+                <a:latin typeface="Consolas"/>
+              </a:rPr>
+              <a:t>            </a:t>
+            </a:r>
+            <a:r>
+              <a:rPr sz="1600" i="0" b="0">
+                <a:solidFill>
+                  <a:srgbClr val="CE9178"/>
+                </a:solidFill>
+                <a:latin typeface="Consolas"/>
+              </a:rPr>
+              <a:t>"No existe expediente con ID "</a:t>
+            </a:r>
+            <a:r>
+              <a:rPr sz="1600" i="0" b="0">
+                <a:solidFill>
+                  <a:srgbClr val="D4D4D4"/>
+                </a:solidFill>
+                <a:latin typeface="Consolas"/>
+              </a:rPr>
+              <a:t> + </a:t>
+            </a:r>
+            <a:r>
+              <a:rPr sz="1600" i="0" b="0">
+                <a:solidFill>
+                  <a:srgbClr val="D4D4D4"/>
+                </a:solidFill>
+                <a:latin typeface="Consolas"/>
+              </a:rPr>
+              <a:t>id</a:t>
+            </a:r>
+            <a:r>
+              <a:rPr sz="1600" i="0" b="0">
+                <a:solidFill>
+                  <a:srgbClr val="D4D4D4"/>
+                </a:solidFill>
+                <a:latin typeface="Consolas"/>
+              </a:rPr>
+              <a:t>,</a:t>
+            </a:r>
+          </a:p>
+          <a:p>
+            <a:pPr>
+              <a:spcAft>
+                <a:spcPts val="342"/>
+              </a:spcAft>
+            </a:pPr>
+            <a:r>
+              <a:rPr sz="1600" i="0" b="0">
+                <a:solidFill>
+                  <a:srgbClr val="D4D4D4"/>
+                </a:solidFill>
+                <a:latin typeface="Consolas"/>
+              </a:rPr>
+              <a:t>            </a:t>
+            </a:r>
+            <a:r>
+              <a:rPr sz="1600" i="0" b="0">
+                <a:solidFill>
+                  <a:srgbClr val="CE9178"/>
+                </a:solidFill>
+                <a:latin typeface="Consolas"/>
+              </a:rPr>
+              <a:t>"Sin resultados"</a:t>
+            </a:r>
+            <a:r>
+              <a:rPr sz="1600" i="0" b="0">
+                <a:solidFill>
+                  <a:srgbClr val="D4D4D4"/>
+                </a:solidFill>
+                <a:latin typeface="Consolas"/>
+              </a:rPr>
+              <a:t>, </a:t>
+            </a:r>
+            <a:r>
+              <a:rPr sz="1600" i="0" b="0">
+                <a:solidFill>
+                  <a:srgbClr val="D4D4D4"/>
+                </a:solidFill>
+                <a:latin typeface="Consolas"/>
+              </a:rPr>
+              <a:t>JOptionPane</a:t>
+            </a:r>
+            <a:r>
+              <a:rPr sz="1600" i="0" b="0">
+                <a:solidFill>
+                  <a:srgbClr val="D4D4D4"/>
+                </a:solidFill>
+                <a:latin typeface="Consolas"/>
+              </a:rPr>
+              <a:t>.</a:t>
+            </a:r>
+            <a:r>
+              <a:rPr sz="1600" i="0" b="0">
+                <a:solidFill>
+                  <a:srgbClr val="D4D4D4"/>
+                </a:solidFill>
+                <a:latin typeface="Consolas"/>
+              </a:rPr>
+              <a:t>WARNING_MESSAGE</a:t>
+            </a:r>
+            <a:r>
+              <a:rPr sz="1600" i="0" b="0">
+                <a:solidFill>
+                  <a:srgbClr val="D4D4D4"/>
+                </a:solidFill>
+                <a:latin typeface="Consolas"/>
+              </a:rPr>
+              <a:t>);</a:t>
+            </a:r>
+          </a:p>
+          <a:p>
+            <a:pPr>
+              <a:spcAft>
+                <a:spcPts val="342"/>
+              </a:spcAft>
+            </a:pPr>
+            <a:r>
+              <a:rPr sz="1600" i="0" b="0">
+                <a:solidFill>
+                  <a:srgbClr val="D4D4D4"/>
+                </a:solidFill>
+                <a:latin typeface="Consolas"/>
+              </a:rPr>
+              <a:t>    </a:t>
+            </a:r>
+            <a:r>
+              <a:rPr sz="1600" i="0" b="0">
+                <a:solidFill>
+                  <a:srgbClr val="569CD6"/>
+                </a:solidFill>
+                <a:latin typeface="Consolas"/>
+              </a:rPr>
+              <a:t>return</a:t>
+            </a:r>
+            <a:r>
+              <a:rPr sz="1600" i="0" b="0">
+                <a:solidFill>
+                  <a:srgbClr val="D4D4D4"/>
+                </a:solidFill>
+                <a:latin typeface="Consolas"/>
+              </a:rPr>
+              <a:t>;</a:t>
+            </a:r>
+          </a:p>
+          <a:p>
+            <a:pPr>
+              <a:spcAft>
+                <a:spcPts val="342"/>
+              </a:spcAft>
+            </a:pPr>
+            <a:r>
+              <a:rPr sz="1600" i="0" b="0">
+                <a:solidFill>
+                  <a:srgbClr val="D4D4D4"/>
+                </a:solidFill>
+                <a:latin typeface="Consolas"/>
+              </a:rPr>
+              <a:t>}</a:t>
+            </a:r>
+          </a:p>
+          <a:p>
+            <a:pPr>
+              <a:spcAft>
+                <a:spcPts val="342"/>
+              </a:spcAft>
+            </a:pPr>
+            <a:r>
+              <a:rPr sz="1600" i="0" b="0">
+                <a:solidFill>
+                  <a:srgbClr val="DCDCAA"/>
+                </a:solidFill>
+                <a:latin typeface="Consolas"/>
+              </a:rPr>
+              <a:t>lblResultado.setText</a:t>
+            </a:r>
+            <a:r>
+              <a:rPr sz="1600" i="0" b="0">
+                <a:solidFill>
+                  <a:srgbClr val="D4D4D4"/>
+                </a:solidFill>
+                <a:latin typeface="Consolas"/>
+              </a:rPr>
+              <a:t>(</a:t>
+            </a:r>
+            <a:r>
+              <a:rPr sz="1600" i="0" b="0">
+                <a:solidFill>
+                  <a:srgbClr val="CE9178"/>
+                </a:solidFill>
+                <a:latin typeface="Consolas"/>
+              </a:rPr>
+              <a:t>"&lt;html&gt;&lt;b&gt;"</a:t>
+            </a:r>
+            <a:r>
+              <a:rPr sz="1600" i="0" b="0">
+                <a:solidFill>
+                  <a:srgbClr val="D4D4D4"/>
+                </a:solidFill>
+                <a:latin typeface="Consolas"/>
+              </a:rPr>
+              <a:t> + </a:t>
+            </a:r>
+            <a:r>
+              <a:rPr sz="1600" i="0" b="0">
+                <a:solidFill>
+                  <a:srgbClr val="DCDCAA"/>
+                </a:solidFill>
+                <a:latin typeface="Consolas"/>
+              </a:rPr>
+              <a:t>e.getNombre</a:t>
+            </a:r>
+            <a:r>
+              <a:rPr sz="1600" i="0" b="0">
+                <a:solidFill>
+                  <a:srgbClr val="D4D4D4"/>
+                </a:solidFill>
+                <a:latin typeface="Consolas"/>
+              </a:rPr>
+              <a:t>() + </a:t>
+            </a:r>
+            <a:r>
+              <a:rPr sz="1600" i="0" b="0">
+                <a:solidFill>
+                  <a:srgbClr val="CE9178"/>
+                </a:solidFill>
+                <a:latin typeface="Consolas"/>
+              </a:rPr>
+              <a:t>"&lt;/b&gt; ("</a:t>
+            </a:r>
+            <a:r>
+              <a:rPr sz="1600" i="0" b="0">
+                <a:solidFill>
+                  <a:srgbClr val="D4D4D4"/>
+                </a:solidFill>
+                <a:latin typeface="Consolas"/>
+              </a:rPr>
+              <a:t> + </a:t>
+            </a:r>
+            <a:r>
+              <a:rPr sz="1600" i="0" b="0">
+                <a:solidFill>
+                  <a:srgbClr val="DCDCAA"/>
+                </a:solidFill>
+                <a:latin typeface="Consolas"/>
+              </a:rPr>
+              <a:t>e.getRaza</a:t>
+            </a:r>
+            <a:r>
+              <a:rPr sz="1600" i="0" b="0">
+                <a:solidFill>
+                  <a:srgbClr val="D4D4D4"/>
+                </a:solidFill>
+                <a:latin typeface="Consolas"/>
+              </a:rPr>
+              <a:t>() + </a:t>
+            </a:r>
+            <a:r>
+              <a:rPr sz="1600" i="0" b="0">
+                <a:solidFill>
+                  <a:srgbClr val="CE9178"/>
+                </a:solidFill>
+                <a:latin typeface="Consolas"/>
+              </a:rPr>
+              <a:t>")&lt;br&gt;"</a:t>
+            </a:r>
+          </a:p>
+          <a:p>
+            <a:pPr>
+              <a:spcAft>
+                <a:spcPts val="342"/>
+              </a:spcAft>
+            </a:pPr>
+            <a:r>
+              <a:rPr sz="1600" i="0" b="0">
+                <a:solidFill>
+                  <a:srgbClr val="D4D4D4"/>
+                </a:solidFill>
+                <a:latin typeface="Consolas"/>
+              </a:rPr>
+              <a:t>        + </a:t>
+            </a:r>
+            <a:r>
+              <a:rPr sz="1600" i="0" b="0">
+                <a:solidFill>
+                  <a:srgbClr val="CE9178"/>
+                </a:solidFill>
+                <a:latin typeface="Consolas"/>
+              </a:rPr>
+              <a:t>"Dueno: "</a:t>
+            </a:r>
+            <a:r>
+              <a:rPr sz="1600" i="0" b="0">
+                <a:solidFill>
+                  <a:srgbClr val="D4D4D4"/>
+                </a:solidFill>
+                <a:latin typeface="Consolas"/>
+              </a:rPr>
+              <a:t> + </a:t>
+            </a:r>
+            <a:r>
+              <a:rPr sz="1600" i="0" b="0">
+                <a:solidFill>
+                  <a:srgbClr val="DCDCAA"/>
+                </a:solidFill>
+                <a:latin typeface="Consolas"/>
+              </a:rPr>
+              <a:t>e.getDueno</a:t>
+            </a:r>
+            <a:r>
+              <a:rPr sz="1600" i="0" b="0">
+                <a:solidFill>
+                  <a:srgbClr val="D4D4D4"/>
+                </a:solidFill>
+                <a:latin typeface="Consolas"/>
+              </a:rPr>
+              <a:t>() + </a:t>
+            </a:r>
+            <a:r>
+              <a:rPr sz="1600" i="0" b="0">
+                <a:solidFill>
+                  <a:srgbClr val="CE9178"/>
+                </a:solidFill>
+                <a:latin typeface="Consolas"/>
+              </a:rPr>
+              <a:t>"&lt;br&gt;Nota clinica: "</a:t>
+            </a:r>
+            <a:r>
+              <a:rPr sz="1600" i="0" b="0">
+                <a:solidFill>
+                  <a:srgbClr val="D4D4D4"/>
+                </a:solidFill>
+                <a:latin typeface="Consolas"/>
+              </a:rPr>
+              <a:t> + </a:t>
+            </a:r>
+            <a:r>
+              <a:rPr sz="1600" i="0" b="0">
+                <a:solidFill>
+                  <a:srgbClr val="DCDCAA"/>
+                </a:solidFill>
+                <a:latin typeface="Consolas"/>
+              </a:rPr>
+              <a:t>e.getNota</a:t>
+            </a:r>
+            <a:r>
+              <a:rPr sz="1600" i="0" b="0">
+                <a:solidFill>
+                  <a:srgbClr val="D4D4D4"/>
+                </a:solidFill>
+                <a:latin typeface="Consolas"/>
+              </a:rPr>
+              <a:t>() + </a:t>
+            </a:r>
+            <a:r>
+              <a:rPr sz="1600" i="0" b="0">
+                <a:solidFill>
+                  <a:srgbClr val="CE9178"/>
+                </a:solidFill>
+                <a:latin typeface="Consolas"/>
+              </a:rPr>
+              <a:t>"&lt;/html&gt;"</a:t>
+            </a:r>
+            <a:r>
+              <a:rPr sz="1600" i="0" b="0">
+                <a:solidFill>
+                  <a:srgbClr val="D4D4D4"/>
+                </a:solidFill>
+                <a:latin typeface="Consolas"/>
+              </a:rPr>
+              <a:t>);</a:t>
+            </a:r>
+          </a:p>
+        </p:txBody>
+      </p:sp>
+      <p:sp>
+        <p:nvSpPr>
+          <p:cNvPr id="13" name="TextBox 12"/>
+          <p:cNvSpPr txBox="1"/>
+          <p:nvPr/>
+        </p:nvSpPr>
+        <p:spPr>
+          <a:xfrm>
+            <a:off x="457200" y="6035040"/>
+            <a:ext cx="11277295" cy="365760"/>
+          </a:xfrm>
+          <a:prstGeom prst="rect">
+            <a:avLst/>
+          </a:prstGeom>
+          <a:noFill/>
+        </p:spPr>
+        <p:txBody>
+          <a:bodyPr wrap="square">
+            <a:spAutoFit/>
+          </a:bodyPr>
+          <a:lstStyle/>
+          <a:p>
             <a:pPr algn="ctr"/>
             <a:r>
               <a:rPr sz="1300" b="0" i="1">
@@ -12300,7 +13096,7 @@
       </p:sp>
       <p:sp>
         <p:nvSpPr>
-          <p:cNvPr id="13" name="TextBox 12"/>
+          <p:cNvPr id="14" name="TextBox 13"/>
           <p:cNvSpPr txBox="1"/>
           <p:nvPr/>
         </p:nvSpPr>
@@ -15196,7 +15992,7 @@
         <p:spPr>
           <a:xfrm>
             <a:off x="457200" y="1261872"/>
-            <a:ext cx="11277295" cy="4530784"/>
+            <a:ext cx="11277295" cy="3600608"/>
           </a:xfrm>
           <a:prstGeom prst="roundRect">
             <a:avLst>
@@ -15445,8 +16241,8 @@
         </p:nvSpPr>
         <p:spPr>
           <a:xfrm>
-            <a:off x="1188720" y="1719072"/>
-            <a:ext cx="10271455" cy="3936424"/>
+            <a:off x="685800" y="1719072"/>
+            <a:ext cx="502920" cy="3006248"/>
           </a:xfrm>
           <a:prstGeom prst="rect">
             <a:avLst/>
@@ -15459,712 +16255,163 @@
           </a:bodyPr>
           <a:lstStyle/>
           <a:p>
-            <a:pPr>
+            <a:pPr algn="r">
               <a:spcAft>
-                <a:spcPts val="428"/>
+                <a:spcPts val="342"/>
               </a:spcAft>
             </a:pPr>
             <a:r>
-              <a:rPr sz="2000" i="0" b="0">
-                <a:solidFill>
-                  <a:srgbClr val="569CD6"/>
-                </a:solidFill>
-                <a:latin typeface="Consolas"/>
-              </a:rPr>
-              <a:t>private</a:t>
-            </a:r>
-            <a:r>
-              <a:rPr sz="2000" i="0" b="0">
-                <a:solidFill>
-                  <a:srgbClr val="D4D4D4"/>
-                </a:solidFill>
-                <a:latin typeface="Consolas"/>
-              </a:rPr>
-              <a:t> </a:t>
-            </a:r>
-            <a:r>
-              <a:rPr sz="2000" i="0" b="0">
-                <a:solidFill>
-                  <a:srgbClr val="569CD6"/>
-                </a:solidFill>
-                <a:latin typeface="Consolas"/>
-              </a:rPr>
-              <a:t>final</a:t>
-            </a:r>
-            <a:r>
-              <a:rPr sz="2000" i="0" b="0">
-                <a:solidFill>
-                  <a:srgbClr val="D4D4D4"/>
-                </a:solidFill>
-                <a:latin typeface="Consolas"/>
-              </a:rPr>
-              <a:t> </a:t>
-            </a:r>
-            <a:r>
-              <a:rPr sz="2000" i="0" b="0">
-                <a:solidFill>
-                  <a:srgbClr val="4EC9B0"/>
-                </a:solidFill>
-                <a:latin typeface="Consolas"/>
-              </a:rPr>
-              <a:t>String</a:t>
-            </a:r>
-            <a:r>
-              <a:rPr sz="2000" i="0" b="0">
-                <a:solidFill>
-                  <a:srgbClr val="D4D4D4"/>
-                </a:solidFill>
-                <a:latin typeface="Consolas"/>
-              </a:rPr>
-              <a:t> </a:t>
-            </a:r>
-            <a:r>
-              <a:rPr sz="2000" i="0" b="0">
-                <a:solidFill>
-                  <a:srgbClr val="D4D4D4"/>
-                </a:solidFill>
-                <a:latin typeface="Consolas"/>
-              </a:rPr>
-              <a:t>id</a:t>
-            </a:r>
-            <a:r>
-              <a:rPr sz="2000" i="0" b="0">
-                <a:solidFill>
-                  <a:srgbClr val="D4D4D4"/>
-                </a:solidFill>
-                <a:latin typeface="Consolas"/>
-              </a:rPr>
-              <a:t>;</a:t>
-            </a:r>
-          </a:p>
-          <a:p>
-            <a:pPr>
+              <a:rPr sz="1600" i="0" b="0">
+                <a:solidFill>
+                  <a:srgbClr val="858585"/>
+                </a:solidFill>
+                <a:latin typeface="Consolas"/>
+              </a:rPr>
+              <a:t>1</a:t>
+            </a:r>
+          </a:p>
+          <a:p>
+            <a:pPr algn="r">
               <a:spcAft>
-                <a:spcPts val="428"/>
+                <a:spcPts val="342"/>
               </a:spcAft>
             </a:pPr>
             <a:r>
-              <a:rPr sz="2000" i="0" b="0">
-                <a:solidFill>
-                  <a:srgbClr val="569CD6"/>
-                </a:solidFill>
-                <a:latin typeface="Consolas"/>
-              </a:rPr>
-              <a:t>private</a:t>
-            </a:r>
-            <a:r>
-              <a:rPr sz="2000" i="0" b="0">
-                <a:solidFill>
-                  <a:srgbClr val="D4D4D4"/>
-                </a:solidFill>
-                <a:latin typeface="Consolas"/>
-              </a:rPr>
-              <a:t> </a:t>
-            </a:r>
-            <a:r>
-              <a:rPr sz="2000" i="0" b="0">
-                <a:solidFill>
-                  <a:srgbClr val="569CD6"/>
-                </a:solidFill>
-                <a:latin typeface="Consolas"/>
-              </a:rPr>
-              <a:t>final</a:t>
-            </a:r>
-            <a:r>
-              <a:rPr sz="2000" i="0" b="0">
-                <a:solidFill>
-                  <a:srgbClr val="D4D4D4"/>
-                </a:solidFill>
-                <a:latin typeface="Consolas"/>
-              </a:rPr>
-              <a:t> </a:t>
-            </a:r>
-            <a:r>
-              <a:rPr sz="2000" i="0" b="0">
-                <a:solidFill>
-                  <a:srgbClr val="4EC9B0"/>
-                </a:solidFill>
-                <a:latin typeface="Consolas"/>
-              </a:rPr>
-              <a:t>String</a:t>
-            </a:r>
-            <a:r>
-              <a:rPr sz="2000" i="0" b="0">
-                <a:solidFill>
-                  <a:srgbClr val="D4D4D4"/>
-                </a:solidFill>
-                <a:latin typeface="Consolas"/>
-              </a:rPr>
-              <a:t> </a:t>
-            </a:r>
-            <a:r>
-              <a:rPr sz="2000" i="0" b="0">
-                <a:solidFill>
-                  <a:srgbClr val="D4D4D4"/>
-                </a:solidFill>
-                <a:latin typeface="Consolas"/>
-              </a:rPr>
-              <a:t>nombre</a:t>
-            </a:r>
-            <a:r>
-              <a:rPr sz="2000" i="0" b="0">
-                <a:solidFill>
-                  <a:srgbClr val="D4D4D4"/>
-                </a:solidFill>
-                <a:latin typeface="Consolas"/>
-              </a:rPr>
-              <a:t>;</a:t>
-            </a:r>
-          </a:p>
-          <a:p>
-            <a:pPr>
+              <a:rPr sz="1600" i="0" b="0">
+                <a:solidFill>
+                  <a:srgbClr val="858585"/>
+                </a:solidFill>
+                <a:latin typeface="Consolas"/>
+              </a:rPr>
+              <a:t>2</a:t>
+            </a:r>
+          </a:p>
+          <a:p>
+            <a:pPr algn="r">
               <a:spcAft>
-                <a:spcPts val="428"/>
+                <a:spcPts val="342"/>
               </a:spcAft>
             </a:pPr>
             <a:r>
-              <a:rPr sz="2000" i="0" b="0">
-                <a:solidFill>
-                  <a:srgbClr val="569CD6"/>
-                </a:solidFill>
-                <a:latin typeface="Consolas"/>
-              </a:rPr>
-              <a:t>private</a:t>
-            </a:r>
-            <a:r>
-              <a:rPr sz="2000" i="0" b="0">
-                <a:solidFill>
-                  <a:srgbClr val="D4D4D4"/>
-                </a:solidFill>
-                <a:latin typeface="Consolas"/>
-              </a:rPr>
-              <a:t> </a:t>
-            </a:r>
-            <a:r>
-              <a:rPr sz="2000" i="0" b="0">
-                <a:solidFill>
-                  <a:srgbClr val="569CD6"/>
-                </a:solidFill>
-                <a:latin typeface="Consolas"/>
-              </a:rPr>
-              <a:t>final</a:t>
-            </a:r>
-            <a:r>
-              <a:rPr sz="2000" i="0" b="0">
-                <a:solidFill>
-                  <a:srgbClr val="D4D4D4"/>
-                </a:solidFill>
-                <a:latin typeface="Consolas"/>
-              </a:rPr>
-              <a:t> </a:t>
-            </a:r>
-            <a:r>
-              <a:rPr sz="2000" i="0" b="0">
-                <a:solidFill>
-                  <a:srgbClr val="4EC9B0"/>
-                </a:solidFill>
-                <a:latin typeface="Consolas"/>
-              </a:rPr>
-              <a:t>String</a:t>
-            </a:r>
-            <a:r>
-              <a:rPr sz="2000" i="0" b="0">
-                <a:solidFill>
-                  <a:srgbClr val="D4D4D4"/>
-                </a:solidFill>
-                <a:latin typeface="Consolas"/>
-              </a:rPr>
-              <a:t> </a:t>
-            </a:r>
-            <a:r>
-              <a:rPr sz="2000" i="0" b="0">
-                <a:solidFill>
-                  <a:srgbClr val="D4D4D4"/>
-                </a:solidFill>
-                <a:latin typeface="Consolas"/>
-              </a:rPr>
-              <a:t>raza</a:t>
-            </a:r>
-            <a:r>
-              <a:rPr sz="2000" i="0" b="0">
-                <a:solidFill>
-                  <a:srgbClr val="D4D4D4"/>
-                </a:solidFill>
-                <a:latin typeface="Consolas"/>
-              </a:rPr>
-              <a:t>;</a:t>
-            </a:r>
-          </a:p>
-          <a:p>
-            <a:pPr>
+              <a:rPr sz="1600" i="0" b="0">
+                <a:solidFill>
+                  <a:srgbClr val="858585"/>
+                </a:solidFill>
+                <a:latin typeface="Consolas"/>
+              </a:rPr>
+              <a:t>3</a:t>
+            </a:r>
+          </a:p>
+          <a:p>
+            <a:pPr algn="r">
               <a:spcAft>
-                <a:spcPts val="428"/>
+                <a:spcPts val="342"/>
               </a:spcAft>
             </a:pPr>
             <a:r>
-              <a:rPr sz="2000" i="0" b="0">
-                <a:solidFill>
-                  <a:srgbClr val="569CD6"/>
-                </a:solidFill>
-                <a:latin typeface="Consolas"/>
-              </a:rPr>
-              <a:t>private</a:t>
-            </a:r>
-            <a:r>
-              <a:rPr sz="2000" i="0" b="0">
-                <a:solidFill>
-                  <a:srgbClr val="D4D4D4"/>
-                </a:solidFill>
-                <a:latin typeface="Consolas"/>
-              </a:rPr>
-              <a:t> </a:t>
-            </a:r>
-            <a:r>
-              <a:rPr sz="2000" i="0" b="0">
-                <a:solidFill>
-                  <a:srgbClr val="569CD6"/>
-                </a:solidFill>
-                <a:latin typeface="Consolas"/>
-              </a:rPr>
-              <a:t>final</a:t>
-            </a:r>
-            <a:r>
-              <a:rPr sz="2000" i="0" b="0">
-                <a:solidFill>
-                  <a:srgbClr val="D4D4D4"/>
-                </a:solidFill>
-                <a:latin typeface="Consolas"/>
-              </a:rPr>
-              <a:t> </a:t>
-            </a:r>
-            <a:r>
-              <a:rPr sz="2000" i="0" b="0">
-                <a:solidFill>
-                  <a:srgbClr val="4EC9B0"/>
-                </a:solidFill>
-                <a:latin typeface="Consolas"/>
-              </a:rPr>
-              <a:t>String</a:t>
-            </a:r>
-            <a:r>
-              <a:rPr sz="2000" i="0" b="0">
-                <a:solidFill>
-                  <a:srgbClr val="D4D4D4"/>
-                </a:solidFill>
-                <a:latin typeface="Consolas"/>
-              </a:rPr>
-              <a:t> </a:t>
-            </a:r>
-            <a:r>
-              <a:rPr sz="2000" i="0" b="0">
-                <a:solidFill>
-                  <a:srgbClr val="D4D4D4"/>
-                </a:solidFill>
-                <a:latin typeface="Consolas"/>
-              </a:rPr>
-              <a:t>dueno</a:t>
-            </a:r>
-            <a:r>
-              <a:rPr sz="2000" i="0" b="0">
-                <a:solidFill>
-                  <a:srgbClr val="D4D4D4"/>
-                </a:solidFill>
-                <a:latin typeface="Consolas"/>
-              </a:rPr>
-              <a:t>;</a:t>
-            </a:r>
-          </a:p>
-          <a:p>
-            <a:pPr>
+              <a:rPr sz="1600" i="0" b="0">
+                <a:solidFill>
+                  <a:srgbClr val="858585"/>
+                </a:solidFill>
+                <a:latin typeface="Consolas"/>
+              </a:rPr>
+              <a:t>4</a:t>
+            </a:r>
+          </a:p>
+          <a:p>
+            <a:pPr algn="r">
               <a:spcAft>
-                <a:spcPts val="428"/>
+                <a:spcPts val="342"/>
               </a:spcAft>
             </a:pPr>
             <a:r>
-              <a:rPr sz="2000" i="0" b="0">
-                <a:solidFill>
-                  <a:srgbClr val="569CD6"/>
-                </a:solidFill>
-                <a:latin typeface="Consolas"/>
-              </a:rPr>
-              <a:t>private</a:t>
-            </a:r>
-            <a:r>
-              <a:rPr sz="2000" i="0" b="0">
-                <a:solidFill>
-                  <a:srgbClr val="D4D4D4"/>
-                </a:solidFill>
-                <a:latin typeface="Consolas"/>
-              </a:rPr>
-              <a:t> </a:t>
-            </a:r>
-            <a:r>
-              <a:rPr sz="2000" i="0" b="0">
-                <a:solidFill>
-                  <a:srgbClr val="569CD6"/>
-                </a:solidFill>
-                <a:latin typeface="Consolas"/>
-              </a:rPr>
-              <a:t>final</a:t>
-            </a:r>
-            <a:r>
-              <a:rPr sz="2000" i="0" b="0">
-                <a:solidFill>
-                  <a:srgbClr val="D4D4D4"/>
-                </a:solidFill>
-                <a:latin typeface="Consolas"/>
-              </a:rPr>
-              <a:t> </a:t>
-            </a:r>
-            <a:r>
-              <a:rPr sz="2000" i="0" b="0">
-                <a:solidFill>
-                  <a:srgbClr val="4EC9B0"/>
-                </a:solidFill>
-                <a:latin typeface="Consolas"/>
-              </a:rPr>
-              <a:t>String</a:t>
-            </a:r>
-            <a:r>
-              <a:rPr sz="2000" i="0" b="0">
-                <a:solidFill>
-                  <a:srgbClr val="D4D4D4"/>
-                </a:solidFill>
-                <a:latin typeface="Consolas"/>
-              </a:rPr>
-              <a:t> </a:t>
-            </a:r>
-            <a:r>
-              <a:rPr sz="2000" i="0" b="0">
-                <a:solidFill>
-                  <a:srgbClr val="D4D4D4"/>
-                </a:solidFill>
-                <a:latin typeface="Consolas"/>
-              </a:rPr>
-              <a:t>nota</a:t>
-            </a:r>
-            <a:r>
-              <a:rPr sz="2000" i="0" b="0">
-                <a:solidFill>
-                  <a:srgbClr val="D4D4D4"/>
-                </a:solidFill>
-                <a:latin typeface="Consolas"/>
-              </a:rPr>
-              <a:t>;</a:t>
-            </a:r>
-          </a:p>
-          <a:p>
-            <a:pPr>
+              <a:rPr sz="1600" i="0" b="0">
+                <a:solidFill>
+                  <a:srgbClr val="858585"/>
+                </a:solidFill>
+                <a:latin typeface="Consolas"/>
+              </a:rPr>
+              <a:t>5</a:t>
+            </a:r>
+          </a:p>
+          <a:p>
+            <a:pPr algn="r">
               <a:spcAft>
-                <a:spcPts val="428"/>
+                <a:spcPts val="342"/>
               </a:spcAft>
             </a:pPr>
             <a:r>
-              <a:rPr sz="2000" i="0" b="0">
-                <a:solidFill>
-                  <a:srgbClr val="D4D4D4"/>
-                </a:solidFill>
-                <a:latin typeface="Consolas"/>
-              </a:rPr>
-              <a:t/>
-            </a:r>
-          </a:p>
-          <a:p>
-            <a:pPr>
+              <a:rPr sz="1600" i="0" b="0">
+                <a:solidFill>
+                  <a:srgbClr val="858585"/>
+                </a:solidFill>
+                <a:latin typeface="Consolas"/>
+              </a:rPr>
+              <a:t>6</a:t>
+            </a:r>
+          </a:p>
+          <a:p>
+            <a:pPr algn="r">
               <a:spcAft>
-                <a:spcPts val="428"/>
+                <a:spcPts val="342"/>
               </a:spcAft>
             </a:pPr>
             <a:r>
-              <a:rPr sz="2000" i="0" b="0">
-                <a:solidFill>
-                  <a:srgbClr val="D4D4D4"/>
-                </a:solidFill>
-                <a:latin typeface="Consolas"/>
-              </a:rPr>
-              <a:t>@</a:t>
-            </a:r>
-            <a:r>
-              <a:rPr sz="2000" i="0" b="0">
-                <a:solidFill>
-                  <a:srgbClr val="D4D4D4"/>
-                </a:solidFill>
-                <a:latin typeface="Consolas"/>
-              </a:rPr>
-              <a:t>Override</a:t>
-            </a:r>
-          </a:p>
-          <a:p>
-            <a:pPr>
+              <a:rPr sz="1600" i="0" b="0">
+                <a:solidFill>
+                  <a:srgbClr val="858585"/>
+                </a:solidFill>
+                <a:latin typeface="Consolas"/>
+              </a:rPr>
+              <a:t>7</a:t>
+            </a:r>
+          </a:p>
+          <a:p>
+            <a:pPr algn="r">
               <a:spcAft>
-                <a:spcPts val="428"/>
+                <a:spcPts val="342"/>
               </a:spcAft>
             </a:pPr>
             <a:r>
-              <a:rPr sz="2000" i="0" b="0">
-                <a:solidFill>
-                  <a:srgbClr val="569CD6"/>
-                </a:solidFill>
-                <a:latin typeface="Consolas"/>
-              </a:rPr>
-              <a:t>public</a:t>
-            </a:r>
-            <a:r>
-              <a:rPr sz="2000" i="0" b="0">
-                <a:solidFill>
-                  <a:srgbClr val="D4D4D4"/>
-                </a:solidFill>
-                <a:latin typeface="Consolas"/>
-              </a:rPr>
-              <a:t> </a:t>
-            </a:r>
-            <a:r>
-              <a:rPr sz="2000" i="0" b="0">
-                <a:solidFill>
-                  <a:srgbClr val="4EC9B0"/>
-                </a:solidFill>
-                <a:latin typeface="Consolas"/>
-              </a:rPr>
-              <a:t>String</a:t>
-            </a:r>
-            <a:r>
-              <a:rPr sz="2000" i="0" b="0">
-                <a:solidFill>
-                  <a:srgbClr val="D4D4D4"/>
-                </a:solidFill>
-                <a:latin typeface="Consolas"/>
-              </a:rPr>
-              <a:t> </a:t>
-            </a:r>
-            <a:r>
-              <a:rPr sz="2000" i="0" b="0">
-                <a:solidFill>
-                  <a:srgbClr val="DCDCAA"/>
-                </a:solidFill>
-                <a:latin typeface="Consolas"/>
-              </a:rPr>
-              <a:t>toString</a:t>
-            </a:r>
-            <a:r>
-              <a:rPr sz="2000" i="0" b="0">
-                <a:solidFill>
-                  <a:srgbClr val="D4D4D4"/>
-                </a:solidFill>
-                <a:latin typeface="Consolas"/>
-              </a:rPr>
-              <a:t>() {</a:t>
-            </a:r>
-          </a:p>
-          <a:p>
-            <a:pPr>
+              <a:rPr sz="1600" i="0" b="0">
+                <a:solidFill>
+                  <a:srgbClr val="858585"/>
+                </a:solidFill>
+                <a:latin typeface="Consolas"/>
+              </a:rPr>
+              <a:t>8</a:t>
+            </a:r>
+          </a:p>
+          <a:p>
+            <a:pPr algn="r">
               <a:spcAft>
-                <a:spcPts val="428"/>
+                <a:spcPts val="342"/>
               </a:spcAft>
             </a:pPr>
             <a:r>
-              <a:rPr sz="2000" i="0" b="0">
-                <a:solidFill>
-                  <a:srgbClr val="D4D4D4"/>
-                </a:solidFill>
-                <a:latin typeface="Consolas"/>
-              </a:rPr>
-              <a:t>    </a:t>
-            </a:r>
-            <a:r>
-              <a:rPr sz="2000" i="0" b="0">
-                <a:solidFill>
-                  <a:srgbClr val="569CD6"/>
-                </a:solidFill>
-                <a:latin typeface="Consolas"/>
-              </a:rPr>
-              <a:t>return</a:t>
-            </a:r>
-            <a:r>
-              <a:rPr sz="2000" i="0" b="0">
-                <a:solidFill>
-                  <a:srgbClr val="D4D4D4"/>
-                </a:solidFill>
-                <a:latin typeface="Consolas"/>
-              </a:rPr>
-              <a:t> </a:t>
-            </a:r>
-            <a:r>
-              <a:rPr sz="2000" i="0" b="0">
-                <a:solidFill>
-                  <a:srgbClr val="D4D4D4"/>
-                </a:solidFill>
-                <a:latin typeface="Consolas"/>
-              </a:rPr>
-              <a:t>id</a:t>
-            </a:r>
-            <a:r>
-              <a:rPr sz="2000" i="0" b="0">
-                <a:solidFill>
-                  <a:srgbClr val="D4D4D4"/>
-                </a:solidFill>
-                <a:latin typeface="Consolas"/>
-              </a:rPr>
-              <a:t> + </a:t>
-            </a:r>
-            <a:r>
-              <a:rPr sz="2000" i="0" b="0">
-                <a:solidFill>
-                  <a:srgbClr val="CE9178"/>
-                </a:solidFill>
-                <a:latin typeface="Consolas"/>
-              </a:rPr>
-              <a:t>" | "</a:t>
-            </a:r>
-            <a:r>
-              <a:rPr sz="2000" i="0" b="0">
-                <a:solidFill>
-                  <a:srgbClr val="D4D4D4"/>
-                </a:solidFill>
-                <a:latin typeface="Consolas"/>
-              </a:rPr>
-              <a:t> + </a:t>
-            </a:r>
-            <a:r>
-              <a:rPr sz="2000" i="0" b="0">
-                <a:solidFill>
-                  <a:srgbClr val="D4D4D4"/>
-                </a:solidFill>
-                <a:latin typeface="Consolas"/>
-              </a:rPr>
-              <a:t>nombre</a:t>
-            </a:r>
-            <a:r>
-              <a:rPr sz="2000" i="0" b="0">
-                <a:solidFill>
-                  <a:srgbClr val="D4D4D4"/>
-                </a:solidFill>
-                <a:latin typeface="Consolas"/>
-              </a:rPr>
-              <a:t> + </a:t>
-            </a:r>
-            <a:r>
-              <a:rPr sz="2000" i="0" b="0">
-                <a:solidFill>
-                  <a:srgbClr val="CE9178"/>
-                </a:solidFill>
-                <a:latin typeface="Consolas"/>
-              </a:rPr>
-              <a:t>" ("</a:t>
-            </a:r>
-            <a:r>
-              <a:rPr sz="2000" i="0" b="0">
-                <a:solidFill>
-                  <a:srgbClr val="D4D4D4"/>
-                </a:solidFill>
-                <a:latin typeface="Consolas"/>
-              </a:rPr>
-              <a:t> + </a:t>
-            </a:r>
-            <a:r>
-              <a:rPr sz="2000" i="0" b="0">
-                <a:solidFill>
-                  <a:srgbClr val="D4D4D4"/>
-                </a:solidFill>
-                <a:latin typeface="Consolas"/>
-              </a:rPr>
-              <a:t>raza</a:t>
-            </a:r>
-            <a:r>
-              <a:rPr sz="2000" i="0" b="0">
-                <a:solidFill>
-                  <a:srgbClr val="D4D4D4"/>
-                </a:solidFill>
-                <a:latin typeface="Consolas"/>
-              </a:rPr>
-              <a:t> + </a:t>
-            </a:r>
-            <a:r>
-              <a:rPr sz="2000" i="0" b="0">
-                <a:solidFill>
-                  <a:srgbClr val="CE9178"/>
-                </a:solidFill>
-                <a:latin typeface="Consolas"/>
-              </a:rPr>
-              <a:t>") - dueno: "</a:t>
-            </a:r>
-            <a:r>
-              <a:rPr sz="2000" i="0" b="0">
-                <a:solidFill>
-                  <a:srgbClr val="D4D4D4"/>
-                </a:solidFill>
-                <a:latin typeface="Consolas"/>
-              </a:rPr>
-              <a:t> + </a:t>
-            </a:r>
-            <a:r>
-              <a:rPr sz="2000" i="0" b="0">
-                <a:solidFill>
-                  <a:srgbClr val="D4D4D4"/>
-                </a:solidFill>
-                <a:latin typeface="Consolas"/>
-              </a:rPr>
-              <a:t>dueno</a:t>
-            </a:r>
-            <a:r>
-              <a:rPr sz="2000" i="0" b="0">
-                <a:solidFill>
-                  <a:srgbClr val="D4D4D4"/>
-                </a:solidFill>
-                <a:latin typeface="Consolas"/>
-              </a:rPr>
-              <a:t> + </a:t>
-            </a:r>
-            <a:r>
-              <a:rPr sz="2000" i="0" b="0">
-                <a:solidFill>
-                  <a:srgbClr val="CE9178"/>
-                </a:solidFill>
-                <a:latin typeface="Consolas"/>
-              </a:rPr>
-              <a:t>" - "</a:t>
-            </a:r>
-            <a:r>
-              <a:rPr sz="2000" i="0" b="0">
-                <a:solidFill>
-                  <a:srgbClr val="D4D4D4"/>
-                </a:solidFill>
-                <a:latin typeface="Consolas"/>
-              </a:rPr>
-              <a:t> + </a:t>
-            </a:r>
-            <a:r>
-              <a:rPr sz="2000" i="0" b="0">
-                <a:solidFill>
-                  <a:srgbClr val="D4D4D4"/>
-                </a:solidFill>
-                <a:latin typeface="Consolas"/>
-              </a:rPr>
-              <a:t>nota</a:t>
-            </a:r>
-            <a:r>
-              <a:rPr sz="2000" i="0" b="0">
-                <a:solidFill>
-                  <a:srgbClr val="D4D4D4"/>
-                </a:solidFill>
-                <a:latin typeface="Consolas"/>
-              </a:rPr>
-              <a:t>;</a:t>
-            </a:r>
-          </a:p>
-          <a:p>
-            <a:pPr>
+              <a:rPr sz="1600" i="0" b="0">
+                <a:solidFill>
+                  <a:srgbClr val="858585"/>
+                </a:solidFill>
+                <a:latin typeface="Consolas"/>
+              </a:rPr>
+              <a:t>9</a:t>
+            </a:r>
+          </a:p>
+          <a:p>
+            <a:pPr algn="r">
               <a:spcAft>
-                <a:spcPts val="428"/>
+                <a:spcPts val="342"/>
               </a:spcAft>
             </a:pPr>
             <a:r>
-              <a:rPr sz="2000" i="0" b="0">
-                <a:solidFill>
-                  <a:srgbClr val="D4D4D4"/>
-                </a:solidFill>
-                <a:latin typeface="Consolas"/>
-              </a:rPr>
-              <a:t>}</a:t>
+              <a:rPr sz="1600" i="0" b="0">
+                <a:solidFill>
+                  <a:srgbClr val="858585"/>
+                </a:solidFill>
+                <a:latin typeface="Consolas"/>
+              </a:rPr>
+              <a:t>10</a:t>
             </a:r>
           </a:p>
         </p:txBody>
@@ -16177,8 +16424,8 @@
         </p:nvSpPr>
         <p:spPr>
           <a:xfrm>
-            <a:off x="457200" y="6035040"/>
-            <a:ext cx="11277295" cy="365760"/>
+            <a:off x="1188720" y="1719072"/>
+            <a:ext cx="10271455" cy="3006248"/>
           </a:xfrm>
           <a:prstGeom prst="rect">
             <a:avLst/>
@@ -16191,6 +16438,738 @@
           </a:bodyPr>
           <a:lstStyle/>
           <a:p>
+            <a:pPr>
+              <a:spcAft>
+                <a:spcPts val="342"/>
+              </a:spcAft>
+            </a:pPr>
+            <a:r>
+              <a:rPr sz="1600" i="0" b="0">
+                <a:solidFill>
+                  <a:srgbClr val="569CD6"/>
+                </a:solidFill>
+                <a:latin typeface="Consolas"/>
+              </a:rPr>
+              <a:t>private</a:t>
+            </a:r>
+            <a:r>
+              <a:rPr sz="1600" i="0" b="0">
+                <a:solidFill>
+                  <a:srgbClr val="D4D4D4"/>
+                </a:solidFill>
+                <a:latin typeface="Consolas"/>
+              </a:rPr>
+              <a:t> </a:t>
+            </a:r>
+            <a:r>
+              <a:rPr sz="1600" i="0" b="0">
+                <a:solidFill>
+                  <a:srgbClr val="569CD6"/>
+                </a:solidFill>
+                <a:latin typeface="Consolas"/>
+              </a:rPr>
+              <a:t>final</a:t>
+            </a:r>
+            <a:r>
+              <a:rPr sz="1600" i="0" b="0">
+                <a:solidFill>
+                  <a:srgbClr val="D4D4D4"/>
+                </a:solidFill>
+                <a:latin typeface="Consolas"/>
+              </a:rPr>
+              <a:t> </a:t>
+            </a:r>
+            <a:r>
+              <a:rPr sz="1600" i="0" b="0">
+                <a:solidFill>
+                  <a:srgbClr val="4EC9B0"/>
+                </a:solidFill>
+                <a:latin typeface="Consolas"/>
+              </a:rPr>
+              <a:t>String</a:t>
+            </a:r>
+            <a:r>
+              <a:rPr sz="1600" i="0" b="0">
+                <a:solidFill>
+                  <a:srgbClr val="D4D4D4"/>
+                </a:solidFill>
+                <a:latin typeface="Consolas"/>
+              </a:rPr>
+              <a:t> </a:t>
+            </a:r>
+            <a:r>
+              <a:rPr sz="1600" i="0" b="0">
+                <a:solidFill>
+                  <a:srgbClr val="D4D4D4"/>
+                </a:solidFill>
+                <a:latin typeface="Consolas"/>
+              </a:rPr>
+              <a:t>id</a:t>
+            </a:r>
+            <a:r>
+              <a:rPr sz="1600" i="0" b="0">
+                <a:solidFill>
+                  <a:srgbClr val="D4D4D4"/>
+                </a:solidFill>
+                <a:latin typeface="Consolas"/>
+              </a:rPr>
+              <a:t>;</a:t>
+            </a:r>
+          </a:p>
+          <a:p>
+            <a:pPr>
+              <a:spcAft>
+                <a:spcPts val="342"/>
+              </a:spcAft>
+            </a:pPr>
+            <a:r>
+              <a:rPr sz="1600" i="0" b="0">
+                <a:solidFill>
+                  <a:srgbClr val="569CD6"/>
+                </a:solidFill>
+                <a:latin typeface="Consolas"/>
+              </a:rPr>
+              <a:t>private</a:t>
+            </a:r>
+            <a:r>
+              <a:rPr sz="1600" i="0" b="0">
+                <a:solidFill>
+                  <a:srgbClr val="D4D4D4"/>
+                </a:solidFill>
+                <a:latin typeface="Consolas"/>
+              </a:rPr>
+              <a:t> </a:t>
+            </a:r>
+            <a:r>
+              <a:rPr sz="1600" i="0" b="0">
+                <a:solidFill>
+                  <a:srgbClr val="569CD6"/>
+                </a:solidFill>
+                <a:latin typeface="Consolas"/>
+              </a:rPr>
+              <a:t>final</a:t>
+            </a:r>
+            <a:r>
+              <a:rPr sz="1600" i="0" b="0">
+                <a:solidFill>
+                  <a:srgbClr val="D4D4D4"/>
+                </a:solidFill>
+                <a:latin typeface="Consolas"/>
+              </a:rPr>
+              <a:t> </a:t>
+            </a:r>
+            <a:r>
+              <a:rPr sz="1600" i="0" b="0">
+                <a:solidFill>
+                  <a:srgbClr val="4EC9B0"/>
+                </a:solidFill>
+                <a:latin typeface="Consolas"/>
+              </a:rPr>
+              <a:t>String</a:t>
+            </a:r>
+            <a:r>
+              <a:rPr sz="1600" i="0" b="0">
+                <a:solidFill>
+                  <a:srgbClr val="D4D4D4"/>
+                </a:solidFill>
+                <a:latin typeface="Consolas"/>
+              </a:rPr>
+              <a:t> </a:t>
+            </a:r>
+            <a:r>
+              <a:rPr sz="1600" i="0" b="0">
+                <a:solidFill>
+                  <a:srgbClr val="D4D4D4"/>
+                </a:solidFill>
+                <a:latin typeface="Consolas"/>
+              </a:rPr>
+              <a:t>nombre</a:t>
+            </a:r>
+            <a:r>
+              <a:rPr sz="1600" i="0" b="0">
+                <a:solidFill>
+                  <a:srgbClr val="D4D4D4"/>
+                </a:solidFill>
+                <a:latin typeface="Consolas"/>
+              </a:rPr>
+              <a:t>;</a:t>
+            </a:r>
+          </a:p>
+          <a:p>
+            <a:pPr>
+              <a:spcAft>
+                <a:spcPts val="342"/>
+              </a:spcAft>
+            </a:pPr>
+            <a:r>
+              <a:rPr sz="1600" i="0" b="0">
+                <a:solidFill>
+                  <a:srgbClr val="569CD6"/>
+                </a:solidFill>
+                <a:latin typeface="Consolas"/>
+              </a:rPr>
+              <a:t>private</a:t>
+            </a:r>
+            <a:r>
+              <a:rPr sz="1600" i="0" b="0">
+                <a:solidFill>
+                  <a:srgbClr val="D4D4D4"/>
+                </a:solidFill>
+                <a:latin typeface="Consolas"/>
+              </a:rPr>
+              <a:t> </a:t>
+            </a:r>
+            <a:r>
+              <a:rPr sz="1600" i="0" b="0">
+                <a:solidFill>
+                  <a:srgbClr val="569CD6"/>
+                </a:solidFill>
+                <a:latin typeface="Consolas"/>
+              </a:rPr>
+              <a:t>final</a:t>
+            </a:r>
+            <a:r>
+              <a:rPr sz="1600" i="0" b="0">
+                <a:solidFill>
+                  <a:srgbClr val="D4D4D4"/>
+                </a:solidFill>
+                <a:latin typeface="Consolas"/>
+              </a:rPr>
+              <a:t> </a:t>
+            </a:r>
+            <a:r>
+              <a:rPr sz="1600" i="0" b="0">
+                <a:solidFill>
+                  <a:srgbClr val="4EC9B0"/>
+                </a:solidFill>
+                <a:latin typeface="Consolas"/>
+              </a:rPr>
+              <a:t>String</a:t>
+            </a:r>
+            <a:r>
+              <a:rPr sz="1600" i="0" b="0">
+                <a:solidFill>
+                  <a:srgbClr val="D4D4D4"/>
+                </a:solidFill>
+                <a:latin typeface="Consolas"/>
+              </a:rPr>
+              <a:t> </a:t>
+            </a:r>
+            <a:r>
+              <a:rPr sz="1600" i="0" b="0">
+                <a:solidFill>
+                  <a:srgbClr val="D4D4D4"/>
+                </a:solidFill>
+                <a:latin typeface="Consolas"/>
+              </a:rPr>
+              <a:t>raza</a:t>
+            </a:r>
+            <a:r>
+              <a:rPr sz="1600" i="0" b="0">
+                <a:solidFill>
+                  <a:srgbClr val="D4D4D4"/>
+                </a:solidFill>
+                <a:latin typeface="Consolas"/>
+              </a:rPr>
+              <a:t>;</a:t>
+            </a:r>
+          </a:p>
+          <a:p>
+            <a:pPr>
+              <a:spcAft>
+                <a:spcPts val="342"/>
+              </a:spcAft>
+            </a:pPr>
+            <a:r>
+              <a:rPr sz="1600" i="0" b="0">
+                <a:solidFill>
+                  <a:srgbClr val="569CD6"/>
+                </a:solidFill>
+                <a:latin typeface="Consolas"/>
+              </a:rPr>
+              <a:t>private</a:t>
+            </a:r>
+            <a:r>
+              <a:rPr sz="1600" i="0" b="0">
+                <a:solidFill>
+                  <a:srgbClr val="D4D4D4"/>
+                </a:solidFill>
+                <a:latin typeface="Consolas"/>
+              </a:rPr>
+              <a:t> </a:t>
+            </a:r>
+            <a:r>
+              <a:rPr sz="1600" i="0" b="0">
+                <a:solidFill>
+                  <a:srgbClr val="569CD6"/>
+                </a:solidFill>
+                <a:latin typeface="Consolas"/>
+              </a:rPr>
+              <a:t>final</a:t>
+            </a:r>
+            <a:r>
+              <a:rPr sz="1600" i="0" b="0">
+                <a:solidFill>
+                  <a:srgbClr val="D4D4D4"/>
+                </a:solidFill>
+                <a:latin typeface="Consolas"/>
+              </a:rPr>
+              <a:t> </a:t>
+            </a:r>
+            <a:r>
+              <a:rPr sz="1600" i="0" b="0">
+                <a:solidFill>
+                  <a:srgbClr val="4EC9B0"/>
+                </a:solidFill>
+                <a:latin typeface="Consolas"/>
+              </a:rPr>
+              <a:t>String</a:t>
+            </a:r>
+            <a:r>
+              <a:rPr sz="1600" i="0" b="0">
+                <a:solidFill>
+                  <a:srgbClr val="D4D4D4"/>
+                </a:solidFill>
+                <a:latin typeface="Consolas"/>
+              </a:rPr>
+              <a:t> </a:t>
+            </a:r>
+            <a:r>
+              <a:rPr sz="1600" i="0" b="0">
+                <a:solidFill>
+                  <a:srgbClr val="D4D4D4"/>
+                </a:solidFill>
+                <a:latin typeface="Consolas"/>
+              </a:rPr>
+              <a:t>dueno</a:t>
+            </a:r>
+            <a:r>
+              <a:rPr sz="1600" i="0" b="0">
+                <a:solidFill>
+                  <a:srgbClr val="D4D4D4"/>
+                </a:solidFill>
+                <a:latin typeface="Consolas"/>
+              </a:rPr>
+              <a:t>;</a:t>
+            </a:r>
+          </a:p>
+          <a:p>
+            <a:pPr>
+              <a:spcAft>
+                <a:spcPts val="342"/>
+              </a:spcAft>
+            </a:pPr>
+            <a:r>
+              <a:rPr sz="1600" i="0" b="0">
+                <a:solidFill>
+                  <a:srgbClr val="569CD6"/>
+                </a:solidFill>
+                <a:latin typeface="Consolas"/>
+              </a:rPr>
+              <a:t>private</a:t>
+            </a:r>
+            <a:r>
+              <a:rPr sz="1600" i="0" b="0">
+                <a:solidFill>
+                  <a:srgbClr val="D4D4D4"/>
+                </a:solidFill>
+                <a:latin typeface="Consolas"/>
+              </a:rPr>
+              <a:t> </a:t>
+            </a:r>
+            <a:r>
+              <a:rPr sz="1600" i="0" b="0">
+                <a:solidFill>
+                  <a:srgbClr val="569CD6"/>
+                </a:solidFill>
+                <a:latin typeface="Consolas"/>
+              </a:rPr>
+              <a:t>final</a:t>
+            </a:r>
+            <a:r>
+              <a:rPr sz="1600" i="0" b="0">
+                <a:solidFill>
+                  <a:srgbClr val="D4D4D4"/>
+                </a:solidFill>
+                <a:latin typeface="Consolas"/>
+              </a:rPr>
+              <a:t> </a:t>
+            </a:r>
+            <a:r>
+              <a:rPr sz="1600" i="0" b="0">
+                <a:solidFill>
+                  <a:srgbClr val="4EC9B0"/>
+                </a:solidFill>
+                <a:latin typeface="Consolas"/>
+              </a:rPr>
+              <a:t>String</a:t>
+            </a:r>
+            <a:r>
+              <a:rPr sz="1600" i="0" b="0">
+                <a:solidFill>
+                  <a:srgbClr val="D4D4D4"/>
+                </a:solidFill>
+                <a:latin typeface="Consolas"/>
+              </a:rPr>
+              <a:t> </a:t>
+            </a:r>
+            <a:r>
+              <a:rPr sz="1600" i="0" b="0">
+                <a:solidFill>
+                  <a:srgbClr val="D4D4D4"/>
+                </a:solidFill>
+                <a:latin typeface="Consolas"/>
+              </a:rPr>
+              <a:t>nota</a:t>
+            </a:r>
+            <a:r>
+              <a:rPr sz="1600" i="0" b="0">
+                <a:solidFill>
+                  <a:srgbClr val="D4D4D4"/>
+                </a:solidFill>
+                <a:latin typeface="Consolas"/>
+              </a:rPr>
+              <a:t>;</a:t>
+            </a:r>
+          </a:p>
+          <a:p>
+            <a:pPr>
+              <a:spcAft>
+                <a:spcPts val="342"/>
+              </a:spcAft>
+            </a:pPr>
+            <a:r>
+              <a:rPr sz="1600" i="0" b="0">
+                <a:solidFill>
+                  <a:srgbClr val="D4D4D4"/>
+                </a:solidFill>
+                <a:latin typeface="Consolas"/>
+              </a:rPr>
+              <a:t/>
+            </a:r>
+          </a:p>
+          <a:p>
+            <a:pPr>
+              <a:spcAft>
+                <a:spcPts val="342"/>
+              </a:spcAft>
+            </a:pPr>
+            <a:r>
+              <a:rPr sz="1600" i="0" b="0">
+                <a:solidFill>
+                  <a:srgbClr val="D4D4D4"/>
+                </a:solidFill>
+                <a:latin typeface="Consolas"/>
+              </a:rPr>
+              <a:t>@</a:t>
+            </a:r>
+            <a:r>
+              <a:rPr sz="1600" i="0" b="0">
+                <a:solidFill>
+                  <a:srgbClr val="D4D4D4"/>
+                </a:solidFill>
+                <a:latin typeface="Consolas"/>
+              </a:rPr>
+              <a:t>Override</a:t>
+            </a:r>
+          </a:p>
+          <a:p>
+            <a:pPr>
+              <a:spcAft>
+                <a:spcPts val="342"/>
+              </a:spcAft>
+            </a:pPr>
+            <a:r>
+              <a:rPr sz="1600" i="0" b="0">
+                <a:solidFill>
+                  <a:srgbClr val="569CD6"/>
+                </a:solidFill>
+                <a:latin typeface="Consolas"/>
+              </a:rPr>
+              <a:t>public</a:t>
+            </a:r>
+            <a:r>
+              <a:rPr sz="1600" i="0" b="0">
+                <a:solidFill>
+                  <a:srgbClr val="D4D4D4"/>
+                </a:solidFill>
+                <a:latin typeface="Consolas"/>
+              </a:rPr>
+              <a:t> </a:t>
+            </a:r>
+            <a:r>
+              <a:rPr sz="1600" i="0" b="0">
+                <a:solidFill>
+                  <a:srgbClr val="4EC9B0"/>
+                </a:solidFill>
+                <a:latin typeface="Consolas"/>
+              </a:rPr>
+              <a:t>String</a:t>
+            </a:r>
+            <a:r>
+              <a:rPr sz="1600" i="0" b="0">
+                <a:solidFill>
+                  <a:srgbClr val="D4D4D4"/>
+                </a:solidFill>
+                <a:latin typeface="Consolas"/>
+              </a:rPr>
+              <a:t> </a:t>
+            </a:r>
+            <a:r>
+              <a:rPr sz="1600" i="0" b="0">
+                <a:solidFill>
+                  <a:srgbClr val="DCDCAA"/>
+                </a:solidFill>
+                <a:latin typeface="Consolas"/>
+              </a:rPr>
+              <a:t>toString</a:t>
+            </a:r>
+            <a:r>
+              <a:rPr sz="1600" i="0" b="0">
+                <a:solidFill>
+                  <a:srgbClr val="D4D4D4"/>
+                </a:solidFill>
+                <a:latin typeface="Consolas"/>
+              </a:rPr>
+              <a:t>() {</a:t>
+            </a:r>
+          </a:p>
+          <a:p>
+            <a:pPr>
+              <a:spcAft>
+                <a:spcPts val="342"/>
+              </a:spcAft>
+            </a:pPr>
+            <a:r>
+              <a:rPr sz="1600" i="0" b="0">
+                <a:solidFill>
+                  <a:srgbClr val="D4D4D4"/>
+                </a:solidFill>
+                <a:latin typeface="Consolas"/>
+              </a:rPr>
+              <a:t>    </a:t>
+            </a:r>
+            <a:r>
+              <a:rPr sz="1600" i="0" b="0">
+                <a:solidFill>
+                  <a:srgbClr val="569CD6"/>
+                </a:solidFill>
+                <a:latin typeface="Consolas"/>
+              </a:rPr>
+              <a:t>return</a:t>
+            </a:r>
+            <a:r>
+              <a:rPr sz="1600" i="0" b="0">
+                <a:solidFill>
+                  <a:srgbClr val="D4D4D4"/>
+                </a:solidFill>
+                <a:latin typeface="Consolas"/>
+              </a:rPr>
+              <a:t> </a:t>
+            </a:r>
+            <a:r>
+              <a:rPr sz="1600" i="0" b="0">
+                <a:solidFill>
+                  <a:srgbClr val="D4D4D4"/>
+                </a:solidFill>
+                <a:latin typeface="Consolas"/>
+              </a:rPr>
+              <a:t>id</a:t>
+            </a:r>
+            <a:r>
+              <a:rPr sz="1600" i="0" b="0">
+                <a:solidFill>
+                  <a:srgbClr val="D4D4D4"/>
+                </a:solidFill>
+                <a:latin typeface="Consolas"/>
+              </a:rPr>
+              <a:t> + </a:t>
+            </a:r>
+            <a:r>
+              <a:rPr sz="1600" i="0" b="0">
+                <a:solidFill>
+                  <a:srgbClr val="CE9178"/>
+                </a:solidFill>
+                <a:latin typeface="Consolas"/>
+              </a:rPr>
+              <a:t>" | "</a:t>
+            </a:r>
+            <a:r>
+              <a:rPr sz="1600" i="0" b="0">
+                <a:solidFill>
+                  <a:srgbClr val="D4D4D4"/>
+                </a:solidFill>
+                <a:latin typeface="Consolas"/>
+              </a:rPr>
+              <a:t> + </a:t>
+            </a:r>
+            <a:r>
+              <a:rPr sz="1600" i="0" b="0">
+                <a:solidFill>
+                  <a:srgbClr val="D4D4D4"/>
+                </a:solidFill>
+                <a:latin typeface="Consolas"/>
+              </a:rPr>
+              <a:t>nombre</a:t>
+            </a:r>
+            <a:r>
+              <a:rPr sz="1600" i="0" b="0">
+                <a:solidFill>
+                  <a:srgbClr val="D4D4D4"/>
+                </a:solidFill>
+                <a:latin typeface="Consolas"/>
+              </a:rPr>
+              <a:t> + </a:t>
+            </a:r>
+            <a:r>
+              <a:rPr sz="1600" i="0" b="0">
+                <a:solidFill>
+                  <a:srgbClr val="CE9178"/>
+                </a:solidFill>
+                <a:latin typeface="Consolas"/>
+              </a:rPr>
+              <a:t>" ("</a:t>
+            </a:r>
+            <a:r>
+              <a:rPr sz="1600" i="0" b="0">
+                <a:solidFill>
+                  <a:srgbClr val="D4D4D4"/>
+                </a:solidFill>
+                <a:latin typeface="Consolas"/>
+              </a:rPr>
+              <a:t> + </a:t>
+            </a:r>
+            <a:r>
+              <a:rPr sz="1600" i="0" b="0">
+                <a:solidFill>
+                  <a:srgbClr val="D4D4D4"/>
+                </a:solidFill>
+                <a:latin typeface="Consolas"/>
+              </a:rPr>
+              <a:t>raza</a:t>
+            </a:r>
+            <a:r>
+              <a:rPr sz="1600" i="0" b="0">
+                <a:solidFill>
+                  <a:srgbClr val="D4D4D4"/>
+                </a:solidFill>
+                <a:latin typeface="Consolas"/>
+              </a:rPr>
+              <a:t> + </a:t>
+            </a:r>
+            <a:r>
+              <a:rPr sz="1600" i="0" b="0">
+                <a:solidFill>
+                  <a:srgbClr val="CE9178"/>
+                </a:solidFill>
+                <a:latin typeface="Consolas"/>
+              </a:rPr>
+              <a:t>") - dueno: "</a:t>
+            </a:r>
+            <a:r>
+              <a:rPr sz="1600" i="0" b="0">
+                <a:solidFill>
+                  <a:srgbClr val="D4D4D4"/>
+                </a:solidFill>
+                <a:latin typeface="Consolas"/>
+              </a:rPr>
+              <a:t> + </a:t>
+            </a:r>
+            <a:r>
+              <a:rPr sz="1600" i="0" b="0">
+                <a:solidFill>
+                  <a:srgbClr val="D4D4D4"/>
+                </a:solidFill>
+                <a:latin typeface="Consolas"/>
+              </a:rPr>
+              <a:t>dueno</a:t>
+            </a:r>
+            <a:r>
+              <a:rPr sz="1600" i="0" b="0">
+                <a:solidFill>
+                  <a:srgbClr val="D4D4D4"/>
+                </a:solidFill>
+                <a:latin typeface="Consolas"/>
+              </a:rPr>
+              <a:t> + </a:t>
+            </a:r>
+            <a:r>
+              <a:rPr sz="1600" i="0" b="0">
+                <a:solidFill>
+                  <a:srgbClr val="CE9178"/>
+                </a:solidFill>
+                <a:latin typeface="Consolas"/>
+              </a:rPr>
+              <a:t>" - "</a:t>
+            </a:r>
+            <a:r>
+              <a:rPr sz="1600" i="0" b="0">
+                <a:solidFill>
+                  <a:srgbClr val="D4D4D4"/>
+                </a:solidFill>
+                <a:latin typeface="Consolas"/>
+              </a:rPr>
+              <a:t> + </a:t>
+            </a:r>
+            <a:r>
+              <a:rPr sz="1600" i="0" b="0">
+                <a:solidFill>
+                  <a:srgbClr val="D4D4D4"/>
+                </a:solidFill>
+                <a:latin typeface="Consolas"/>
+              </a:rPr>
+              <a:t>nota</a:t>
+            </a:r>
+            <a:r>
+              <a:rPr sz="1600" i="0" b="0">
+                <a:solidFill>
+                  <a:srgbClr val="D4D4D4"/>
+                </a:solidFill>
+                <a:latin typeface="Consolas"/>
+              </a:rPr>
+              <a:t>;</a:t>
+            </a:r>
+          </a:p>
+          <a:p>
+            <a:pPr>
+              <a:spcAft>
+                <a:spcPts val="342"/>
+              </a:spcAft>
+            </a:pPr>
+            <a:r>
+              <a:rPr sz="1600" i="0" b="0">
+                <a:solidFill>
+                  <a:srgbClr val="D4D4D4"/>
+                </a:solidFill>
+                <a:latin typeface="Consolas"/>
+              </a:rPr>
+              <a:t>}</a:t>
+            </a:r>
+          </a:p>
+        </p:txBody>
+      </p:sp>
+      <p:sp>
+        <p:nvSpPr>
+          <p:cNvPr id="13" name="TextBox 12"/>
+          <p:cNvSpPr txBox="1"/>
+          <p:nvPr/>
+        </p:nvSpPr>
+        <p:spPr>
+          <a:xfrm>
+            <a:off x="457200" y="6035040"/>
+            <a:ext cx="11277295" cy="365760"/>
+          </a:xfrm>
+          <a:prstGeom prst="rect">
+            <a:avLst/>
+          </a:prstGeom>
+          <a:noFill/>
+        </p:spPr>
+        <p:txBody>
+          <a:bodyPr wrap="square">
+            <a:spAutoFit/>
+          </a:bodyPr>
+          <a:lstStyle/>
+          <a:p>
             <a:pPr algn="ctr"/>
             <a:r>
               <a:rPr sz="1300" b="0" i="1">
@@ -16206,7 +17185,7 @@
       </p:sp>
       <p:sp>
         <p:nvSpPr>
-          <p:cNvPr id="13" name="TextBox 12"/>
+          <p:cNvPr id="14" name="TextBox 13"/>
           <p:cNvSpPr txBox="1"/>
           <p:nvPr/>
         </p:nvSpPr>
@@ -16394,7 +17373,7 @@
         <p:spPr>
           <a:xfrm>
             <a:off x="457200" y="1261872"/>
-            <a:ext cx="11277295" cy="3872567"/>
+            <a:ext cx="11277295" cy="3733040"/>
           </a:xfrm>
           <a:prstGeom prst="roundRect">
             <a:avLst>
@@ -16644,7 +17623,7 @@
         <p:spPr>
           <a:xfrm>
             <a:off x="685800" y="1719072"/>
-            <a:ext cx="502920" cy="3278207"/>
+            <a:ext cx="502920" cy="3138680"/>
           </a:xfrm>
           <a:prstGeom prst="rect">
             <a:avLst/>
@@ -16659,11 +17638,11 @@
           <a:p>
             <a:pPr algn="r">
               <a:spcAft>
-                <a:spcPts val="428"/>
+                <a:spcPts val="407"/>
               </a:spcAft>
             </a:pPr>
             <a:r>
-              <a:rPr sz="2000" i="0" b="0">
+              <a:rPr sz="1900" i="0" b="0">
                 <a:solidFill>
                   <a:srgbClr val="858585"/>
                 </a:solidFill>
@@ -16675,11 +17654,11 @@
           <a:p>
             <a:pPr algn="r">
               <a:spcAft>
-                <a:spcPts val="428"/>
+                <a:spcPts val="407"/>
               </a:spcAft>
             </a:pPr>
             <a:r>
-              <a:rPr sz="2000" i="0" b="0">
+              <a:rPr sz="1900" i="0" b="0">
                 <a:solidFill>
                   <a:srgbClr val="858585"/>
                 </a:solidFill>
@@ -16691,11 +17670,11 @@
           <a:p>
             <a:pPr algn="r">
               <a:spcAft>
-                <a:spcPts val="428"/>
+                <a:spcPts val="407"/>
               </a:spcAft>
             </a:pPr>
             <a:r>
-              <a:rPr sz="2000" i="0" b="0">
+              <a:rPr sz="1900" i="0" b="0">
                 <a:solidFill>
                   <a:srgbClr val="858585"/>
                 </a:solidFill>
@@ -16707,11 +17686,11 @@
           <a:p>
             <a:pPr algn="r">
               <a:spcAft>
-                <a:spcPts val="428"/>
+                <a:spcPts val="407"/>
               </a:spcAft>
             </a:pPr>
             <a:r>
-              <a:rPr sz="2000" i="0" b="0">
+              <a:rPr sz="1900" i="0" b="0">
                 <a:solidFill>
                   <a:srgbClr val="858585"/>
                 </a:solidFill>
@@ -16723,11 +17702,11 @@
           <a:p>
             <a:pPr algn="r">
               <a:spcAft>
-                <a:spcPts val="428"/>
+                <a:spcPts val="407"/>
               </a:spcAft>
             </a:pPr>
             <a:r>
-              <a:rPr sz="2000" i="0" b="0">
+              <a:rPr sz="1900" i="0" b="0">
                 <a:solidFill>
                   <a:srgbClr val="858585"/>
                 </a:solidFill>
@@ -16739,11 +17718,11 @@
           <a:p>
             <a:pPr algn="r">
               <a:spcAft>
-                <a:spcPts val="428"/>
+                <a:spcPts val="407"/>
               </a:spcAft>
             </a:pPr>
             <a:r>
-              <a:rPr sz="2000" i="0" b="0">
+              <a:rPr sz="1900" i="0" b="0">
                 <a:solidFill>
                   <a:srgbClr val="858585"/>
                 </a:solidFill>
@@ -16755,11 +17734,11 @@
           <a:p>
             <a:pPr algn="r">
               <a:spcAft>
-                <a:spcPts val="428"/>
+                <a:spcPts val="407"/>
               </a:spcAft>
             </a:pPr>
             <a:r>
-              <a:rPr sz="2000" i="0" b="0">
+              <a:rPr sz="1900" i="0" b="0">
                 <a:solidFill>
                   <a:srgbClr val="858585"/>
                 </a:solidFill>
@@ -16771,11 +17750,11 @@
           <a:p>
             <a:pPr algn="r">
               <a:spcAft>
-                <a:spcPts val="428"/>
+                <a:spcPts val="407"/>
               </a:spcAft>
             </a:pPr>
             <a:r>
-              <a:rPr sz="2000" i="0" b="0">
+              <a:rPr sz="1900" i="0" b="0">
                 <a:solidFill>
                   <a:srgbClr val="858585"/>
                 </a:solidFill>
@@ -16787,11 +17766,11 @@
           <a:p>
             <a:pPr algn="r">
               <a:spcAft>
-                <a:spcPts val="428"/>
+                <a:spcPts val="407"/>
               </a:spcAft>
             </a:pPr>
             <a:r>
-              <a:rPr sz="2000" i="0" b="0">
+              <a:rPr sz="1900" i="0" b="0">
                 <a:solidFill>
                   <a:srgbClr val="858585"/>
                 </a:solidFill>
@@ -16811,7 +17790,7 @@
         <p:spPr>
           <a:xfrm>
             <a:off x="1188720" y="1719072"/>
-            <a:ext cx="10271455" cy="3278207"/>
+            <a:ext cx="10271455" cy="3138680"/>
           </a:xfrm>
           <a:prstGeom prst="rect">
             <a:avLst/>
@@ -16826,11 +17805,11 @@
           <a:p>
             <a:pPr>
               <a:spcAft>
-                <a:spcPts val="428"/>
+                <a:spcPts val="407"/>
               </a:spcAft>
             </a:pPr>
             <a:r>
-              <a:rPr sz="2000" i="0" b="0">
+              <a:rPr sz="1900" i="0" b="0">
                 <a:solidFill>
                   <a:srgbClr val="4EC9B0"/>
                 </a:solidFill>
@@ -16839,7 +17818,7 @@
               <a:t>List</a:t>
             </a:r>
             <a:r>
-              <a:rPr sz="2000" i="0" b="0">
+              <a:rPr sz="1900" i="0" b="0">
                 <a:solidFill>
                   <a:srgbClr val="D4D4D4"/>
                 </a:solidFill>
@@ -16848,7 +17827,7 @@
               <a:t>&lt;</a:t>
             </a:r>
             <a:r>
-              <a:rPr sz="2000" i="0" b="0">
+              <a:rPr sz="1900" i="0" b="0">
                 <a:solidFill>
                   <a:srgbClr val="D4D4D4"/>
                 </a:solidFill>
@@ -16857,7 +17836,7 @@
               <a:t>Expediente</a:t>
             </a:r>
             <a:r>
-              <a:rPr sz="2000" i="0" b="0">
+              <a:rPr sz="1900" i="0" b="0">
                 <a:solidFill>
                   <a:srgbClr val="D4D4D4"/>
                 </a:solidFill>
@@ -16866,7 +17845,7 @@
               <a:t>&gt; </a:t>
             </a:r>
             <a:r>
-              <a:rPr sz="2000" i="0" b="0">
+              <a:rPr sz="1900" i="0" b="0">
                 <a:solidFill>
                   <a:srgbClr val="D4D4D4"/>
                 </a:solidFill>
@@ -16875,7 +17854,7 @@
               <a:t>archivoHistorico</a:t>
             </a:r>
             <a:r>
-              <a:rPr sz="2000" i="0" b="0">
+              <a:rPr sz="1900" i="0" b="0">
                 <a:solidFill>
                   <a:srgbClr val="D4D4D4"/>
                 </a:solidFill>
@@ -16884,7 +17863,7 @@
               <a:t> = </a:t>
             </a:r>
             <a:r>
-              <a:rPr sz="2000" i="0" b="0">
+              <a:rPr sz="1900" i="0" b="0">
                 <a:solidFill>
                   <a:srgbClr val="569CD6"/>
                 </a:solidFill>
@@ -16893,7 +17872,7 @@
               <a:t>new</a:t>
             </a:r>
             <a:r>
-              <a:rPr sz="2000" i="0" b="0">
+              <a:rPr sz="1900" i="0" b="0">
                 <a:solidFill>
                   <a:srgbClr val="D4D4D4"/>
                 </a:solidFill>
@@ -16902,7 +17881,7 @@
               <a:t> </a:t>
             </a:r>
             <a:r>
-              <a:rPr sz="2000" i="0" b="0">
+              <a:rPr sz="1900" i="0" b="0">
                 <a:solidFill>
                   <a:srgbClr val="4EC9B0"/>
                 </a:solidFill>
@@ -16911,7 +17890,7 @@
               <a:t>ArrayList</a:t>
             </a:r>
             <a:r>
-              <a:rPr sz="2000" i="0" b="0">
+              <a:rPr sz="1900" i="0" b="0">
                 <a:solidFill>
                   <a:srgbClr val="D4D4D4"/>
                 </a:solidFill>
@@ -16923,11 +17902,11 @@
           <a:p>
             <a:pPr>
               <a:spcAft>
-                <a:spcPts val="428"/>
+                <a:spcPts val="407"/>
               </a:spcAft>
             </a:pPr>
             <a:r>
-              <a:rPr sz="2000" i="0" b="0">
+              <a:rPr sz="1900" i="0" b="0">
                 <a:solidFill>
                   <a:srgbClr val="4EC9B0"/>
                 </a:solidFill>
@@ -16936,7 +17915,7 @@
               <a:t>Map</a:t>
             </a:r>
             <a:r>
-              <a:rPr sz="2000" i="0" b="0">
+              <a:rPr sz="1900" i="0" b="0">
                 <a:solidFill>
                   <a:srgbClr val="D4D4D4"/>
                 </a:solidFill>
@@ -16945,7 +17924,7 @@
               <a:t>&lt;</a:t>
             </a:r>
             <a:r>
-              <a:rPr sz="2000" i="0" b="0">
+              <a:rPr sz="1900" i="0" b="0">
                 <a:solidFill>
                   <a:srgbClr val="4EC9B0"/>
                 </a:solidFill>
@@ -16954,7 +17933,7 @@
               <a:t>String</a:t>
             </a:r>
             <a:r>
-              <a:rPr sz="2000" i="0" b="0">
+              <a:rPr sz="1900" i="0" b="0">
                 <a:solidFill>
                   <a:srgbClr val="D4D4D4"/>
                 </a:solidFill>
@@ -16963,7 +17942,7 @@
               <a:t>, </a:t>
             </a:r>
             <a:r>
-              <a:rPr sz="2000" i="0" b="0">
+              <a:rPr sz="1900" i="0" b="0">
                 <a:solidFill>
                   <a:srgbClr val="D4D4D4"/>
                 </a:solidFill>
@@ -16972,7 +17951,7 @@
               <a:t>Expediente</a:t>
             </a:r>
             <a:r>
-              <a:rPr sz="2000" i="0" b="0">
+              <a:rPr sz="1900" i="0" b="0">
                 <a:solidFill>
                   <a:srgbClr val="D4D4D4"/>
                 </a:solidFill>
@@ -16981,7 +17960,7 @@
               <a:t>&gt; </a:t>
             </a:r>
             <a:r>
-              <a:rPr sz="2000" i="0" b="0">
+              <a:rPr sz="1900" i="0" b="0">
                 <a:solidFill>
                   <a:srgbClr val="D4D4D4"/>
                 </a:solidFill>
@@ -16990,7 +17969,7 @@
               <a:t>indice</a:t>
             </a:r>
             <a:r>
-              <a:rPr sz="2000" i="0" b="0">
+              <a:rPr sz="1900" i="0" b="0">
                 <a:solidFill>
                   <a:srgbClr val="D4D4D4"/>
                 </a:solidFill>
@@ -16999,7 +17978,7 @@
               <a:t> = </a:t>
             </a:r>
             <a:r>
-              <a:rPr sz="2000" i="0" b="0">
+              <a:rPr sz="1900" i="0" b="0">
                 <a:solidFill>
                   <a:srgbClr val="569CD6"/>
                 </a:solidFill>
@@ -17008,7 +17987,7 @@
               <a:t>new</a:t>
             </a:r>
             <a:r>
-              <a:rPr sz="2000" i="0" b="0">
+              <a:rPr sz="1900" i="0" b="0">
                 <a:solidFill>
                   <a:srgbClr val="D4D4D4"/>
                 </a:solidFill>
@@ -17017,7 +17996,7 @@
               <a:t> </a:t>
             </a:r>
             <a:r>
-              <a:rPr sz="2000" i="0" b="0">
+              <a:rPr sz="1900" i="0" b="0">
                 <a:solidFill>
                   <a:srgbClr val="4EC9B0"/>
                 </a:solidFill>
@@ -17026,7 +18005,7 @@
               <a:t>HashMap</a:t>
             </a:r>
             <a:r>
-              <a:rPr sz="2000" i="0" b="0">
+              <a:rPr sz="1900" i="0" b="0">
                 <a:solidFill>
                   <a:srgbClr val="D4D4D4"/>
                 </a:solidFill>
@@ -17038,11 +18017,11 @@
           <a:p>
             <a:pPr>
               <a:spcAft>
-                <a:spcPts val="428"/>
+                <a:spcPts val="407"/>
               </a:spcAft>
             </a:pPr>
             <a:r>
-              <a:rPr sz="2000" i="0" b="0">
+              <a:rPr sz="1900" i="0" b="0">
                 <a:solidFill>
                   <a:srgbClr val="569CD6"/>
                 </a:solidFill>
@@ -17051,7 +18030,7 @@
               <a:t>for</a:t>
             </a:r>
             <a:r>
-              <a:rPr sz="2000" i="0" b="0">
+              <a:rPr sz="1900" i="0" b="0">
                 <a:solidFill>
                   <a:srgbClr val="D4D4D4"/>
                 </a:solidFill>
@@ -17060,7 +18039,7 @@
               <a:t> (</a:t>
             </a:r>
             <a:r>
-              <a:rPr sz="2000" i="0" b="0">
+              <a:rPr sz="1900" i="0" b="0">
                 <a:solidFill>
                   <a:srgbClr val="4EC9B0"/>
                 </a:solidFill>
@@ -17069,7 +18048,7 @@
               <a:t>int</a:t>
             </a:r>
             <a:r>
-              <a:rPr sz="2000" i="0" b="0">
+              <a:rPr sz="1900" i="0" b="0">
                 <a:solidFill>
                   <a:srgbClr val="D4D4D4"/>
                 </a:solidFill>
@@ -17078,7 +18057,7 @@
               <a:t> </a:t>
             </a:r>
             <a:r>
-              <a:rPr sz="2000" i="0" b="0">
+              <a:rPr sz="1900" i="0" b="0">
                 <a:solidFill>
                   <a:srgbClr val="D4D4D4"/>
                 </a:solidFill>
@@ -17087,7 +18066,7 @@
               <a:t>i</a:t>
             </a:r>
             <a:r>
-              <a:rPr sz="2000" i="0" b="0">
+              <a:rPr sz="1900" i="0" b="0">
                 <a:solidFill>
                   <a:srgbClr val="D4D4D4"/>
                 </a:solidFill>
@@ -17096,7 +18075,7 @@
               <a:t> = </a:t>
             </a:r>
             <a:r>
-              <a:rPr sz="2000" i="0" b="0">
+              <a:rPr sz="1900" i="0" b="0">
                 <a:solidFill>
                   <a:srgbClr val="B5CEA8"/>
                 </a:solidFill>
@@ -17105,7 +18084,7 @@
               <a:t>1</a:t>
             </a:r>
             <a:r>
-              <a:rPr sz="2000" i="0" b="0">
+              <a:rPr sz="1900" i="0" b="0">
                 <a:solidFill>
                   <a:srgbClr val="D4D4D4"/>
                 </a:solidFill>
@@ -17114,7 +18093,7 @@
               <a:t>; </a:t>
             </a:r>
             <a:r>
-              <a:rPr sz="2000" i="0" b="0">
+              <a:rPr sz="1900" i="0" b="0">
                 <a:solidFill>
                   <a:srgbClr val="D4D4D4"/>
                 </a:solidFill>
@@ -17123,7 +18102,7 @@
               <a:t>i</a:t>
             </a:r>
             <a:r>
-              <a:rPr sz="2000" i="0" b="0">
+              <a:rPr sz="1900" i="0" b="0">
                 <a:solidFill>
                   <a:srgbClr val="D4D4D4"/>
                 </a:solidFill>
@@ -17132,7 +18111,7 @@
               <a:t> &lt;= </a:t>
             </a:r>
             <a:r>
-              <a:rPr sz="2000" i="0" b="0">
+              <a:rPr sz="1900" i="0" b="0">
                 <a:solidFill>
                   <a:srgbClr val="B5CEA8"/>
                 </a:solidFill>
@@ -17141,7 +18120,7 @@
               <a:t>5000</a:t>
             </a:r>
             <a:r>
-              <a:rPr sz="2000" i="0" b="0">
+              <a:rPr sz="1900" i="0" b="0">
                 <a:solidFill>
                   <a:srgbClr val="D4D4D4"/>
                 </a:solidFill>
@@ -17150,7 +18129,7 @@
               <a:t>; </a:t>
             </a:r>
             <a:r>
-              <a:rPr sz="2000" i="0" b="0">
+              <a:rPr sz="1900" i="0" b="0">
                 <a:solidFill>
                   <a:srgbClr val="D4D4D4"/>
                 </a:solidFill>
@@ -17159,7 +18138,7 @@
               <a:t>i</a:t>
             </a:r>
             <a:r>
-              <a:rPr sz="2000" i="0" b="0">
+              <a:rPr sz="1900" i="0" b="0">
                 <a:solidFill>
                   <a:srgbClr val="D4D4D4"/>
                 </a:solidFill>
@@ -17171,11 +18150,11 @@
           <a:p>
             <a:pPr>
               <a:spcAft>
-                <a:spcPts val="428"/>
+                <a:spcPts val="407"/>
               </a:spcAft>
             </a:pPr>
             <a:r>
-              <a:rPr sz="2000" i="0" b="0">
+              <a:rPr sz="1900" i="0" b="0">
                 <a:solidFill>
                   <a:srgbClr val="D4D4D4"/>
                 </a:solidFill>
@@ -17184,7 +18163,7 @@
               <a:t>    </a:t>
             </a:r>
             <a:r>
-              <a:rPr sz="2000" i="0" b="0">
+              <a:rPr sz="1900" i="0" b="0">
                 <a:solidFill>
                   <a:srgbClr val="D4D4D4"/>
                 </a:solidFill>
@@ -17193,7 +18172,7 @@
               <a:t>Expediente</a:t>
             </a:r>
             <a:r>
-              <a:rPr sz="2000" i="0" b="0">
+              <a:rPr sz="1900" i="0" b="0">
                 <a:solidFill>
                   <a:srgbClr val="D4D4D4"/>
                 </a:solidFill>
@@ -17202,7 +18181,7 @@
               <a:t> </a:t>
             </a:r>
             <a:r>
-              <a:rPr sz="2000" i="0" b="0">
+              <a:rPr sz="1900" i="0" b="0">
                 <a:solidFill>
                   <a:srgbClr val="D4D4D4"/>
                 </a:solidFill>
@@ -17211,7 +18190,7 @@
               <a:t>e</a:t>
             </a:r>
             <a:r>
-              <a:rPr sz="2000" i="0" b="0">
+              <a:rPr sz="1900" i="0" b="0">
                 <a:solidFill>
                   <a:srgbClr val="D4D4D4"/>
                 </a:solidFill>
@@ -17220,7 +18199,7 @@
               <a:t> = </a:t>
             </a:r>
             <a:r>
-              <a:rPr sz="2000" i="0" b="0">
+              <a:rPr sz="1900" i="0" b="0">
                 <a:solidFill>
                   <a:srgbClr val="569CD6"/>
                 </a:solidFill>
@@ -17229,7 +18208,7 @@
               <a:t>new</a:t>
             </a:r>
             <a:r>
-              <a:rPr sz="2000" i="0" b="0">
+              <a:rPr sz="1900" i="0" b="0">
                 <a:solidFill>
                   <a:srgbClr val="D4D4D4"/>
                 </a:solidFill>
@@ -17238,7 +18217,7 @@
               <a:t> </a:t>
             </a:r>
             <a:r>
-              <a:rPr sz="2000" i="0" b="0">
+              <a:rPr sz="1900" i="0" b="0">
                 <a:solidFill>
                   <a:srgbClr val="4EC9B0"/>
                 </a:solidFill>
@@ -17247,7 +18226,7 @@
               <a:t>Expediente</a:t>
             </a:r>
             <a:r>
-              <a:rPr sz="2000" i="0" b="0">
+              <a:rPr sz="1900" i="0" b="0">
                 <a:solidFill>
                   <a:srgbClr val="D4D4D4"/>
                 </a:solidFill>
@@ -17256,7 +18235,7 @@
               <a:t>(</a:t>
             </a:r>
             <a:r>
-              <a:rPr sz="2000" i="0" b="0">
+              <a:rPr sz="1900" i="0" b="0">
                 <a:solidFill>
                   <a:srgbClr val="CE9178"/>
                 </a:solidFill>
@@ -17265,7 +18244,7 @@
               <a:t>"H-"</a:t>
             </a:r>
             <a:r>
-              <a:rPr sz="2000" i="0" b="0">
+              <a:rPr sz="1900" i="0" b="0">
                 <a:solidFill>
                   <a:srgbClr val="D4D4D4"/>
                 </a:solidFill>
@@ -17274,7 +18253,7 @@
               <a:t> + </a:t>
             </a:r>
             <a:r>
-              <a:rPr sz="2000" i="0" b="0">
+              <a:rPr sz="1900" i="0" b="0">
                 <a:solidFill>
                   <a:srgbClr val="D4D4D4"/>
                 </a:solidFill>
@@ -17283,7 +18262,7 @@
               <a:t>i</a:t>
             </a:r>
             <a:r>
-              <a:rPr sz="2000" i="0" b="0">
+              <a:rPr sz="1900" i="0" b="0">
                 <a:solidFill>
                   <a:srgbClr val="D4D4D4"/>
                 </a:solidFill>
@@ -17292,7 +18271,7 @@
               <a:t>, </a:t>
             </a:r>
             <a:r>
-              <a:rPr sz="2000" i="0" b="0">
+              <a:rPr sz="1900" i="0" b="0">
                 <a:solidFill>
                   <a:srgbClr val="CE9178"/>
                 </a:solidFill>
@@ -17301,7 +18280,7 @@
               <a:t>"Paciente "</a:t>
             </a:r>
             <a:r>
-              <a:rPr sz="2000" i="0" b="0">
+              <a:rPr sz="1900" i="0" b="0">
                 <a:solidFill>
                   <a:srgbClr val="D4D4D4"/>
                 </a:solidFill>
@@ -17310,7 +18289,7 @@
               <a:t> + </a:t>
             </a:r>
             <a:r>
-              <a:rPr sz="2000" i="0" b="0">
+              <a:rPr sz="1900" i="0" b="0">
                 <a:solidFill>
                   <a:srgbClr val="D4D4D4"/>
                 </a:solidFill>
@@ -17319,7 +18298,7 @@
               <a:t>i</a:t>
             </a:r>
             <a:r>
-              <a:rPr sz="2000" i="0" b="0">
+              <a:rPr sz="1900" i="0" b="0">
                 <a:solidFill>
                   <a:srgbClr val="D4D4D4"/>
                 </a:solidFill>
@@ -17328,7 +18307,7 @@
               <a:t>, </a:t>
             </a:r>
             <a:r>
-              <a:rPr sz="2000" i="0" b="0">
+              <a:rPr sz="1900" i="0" b="0">
                 <a:solidFill>
                   <a:srgbClr val="CE9178"/>
                 </a:solidFill>
@@ -17337,7 +18316,7 @@
               <a:t>"Criollo"</a:t>
             </a:r>
             <a:r>
-              <a:rPr sz="2000" i="0" b="0">
+              <a:rPr sz="1900" i="0" b="0">
                 <a:solidFill>
                   <a:srgbClr val="D4D4D4"/>
                 </a:solidFill>
@@ -17349,11 +18328,11 @@
           <a:p>
             <a:pPr>
               <a:spcAft>
-                <a:spcPts val="428"/>
+                <a:spcPts val="407"/>
               </a:spcAft>
             </a:pPr>
             <a:r>
-              <a:rPr sz="2000" i="0" b="0">
+              <a:rPr sz="1900" i="0" b="0">
                 <a:solidFill>
                   <a:srgbClr val="D4D4D4"/>
                 </a:solidFill>
@@ -17362,7 +18341,7 @@
               <a:t>            </a:t>
             </a:r>
             <a:r>
-              <a:rPr sz="2000" i="0" b="0">
+              <a:rPr sz="1900" i="0" b="0">
                 <a:solidFill>
                   <a:srgbClr val="CE9178"/>
                 </a:solidFill>
@@ -17371,7 +18350,7 @@
               <a:t>"Dueno "</a:t>
             </a:r>
             <a:r>
-              <a:rPr sz="2000" i="0" b="0">
+              <a:rPr sz="1900" i="0" b="0">
                 <a:solidFill>
                   <a:srgbClr val="D4D4D4"/>
                 </a:solidFill>
@@ -17380,7 +18359,7 @@
               <a:t> + </a:t>
             </a:r>
             <a:r>
-              <a:rPr sz="2000" i="0" b="0">
+              <a:rPr sz="1900" i="0" b="0">
                 <a:solidFill>
                   <a:srgbClr val="D4D4D4"/>
                 </a:solidFill>
@@ -17389,7 +18368,7 @@
               <a:t>i</a:t>
             </a:r>
             <a:r>
-              <a:rPr sz="2000" i="0" b="0">
+              <a:rPr sz="1900" i="0" b="0">
                 <a:solidFill>
                   <a:srgbClr val="D4D4D4"/>
                 </a:solidFill>
@@ -17398,7 +18377,7 @@
               <a:t>, </a:t>
             </a:r>
             <a:r>
-              <a:rPr sz="2000" i="0" b="0">
+              <a:rPr sz="1900" i="0" b="0">
                 <a:solidFill>
                   <a:srgbClr val="CE9178"/>
                 </a:solidFill>
@@ -17407,7 +18386,7 @@
               <a:t>"Archivo historico"</a:t>
             </a:r>
             <a:r>
-              <a:rPr sz="2000" i="0" b="0">
+              <a:rPr sz="1900" i="0" b="0">
                 <a:solidFill>
                   <a:srgbClr val="D4D4D4"/>
                 </a:solidFill>
@@ -17419,11 +18398,11 @@
           <a:p>
             <a:pPr>
               <a:spcAft>
-                <a:spcPts val="428"/>
+                <a:spcPts val="407"/>
               </a:spcAft>
             </a:pPr>
             <a:r>
-              <a:rPr sz="2000" i="0" b="0">
+              <a:rPr sz="1900" i="0" b="0">
                 <a:solidFill>
                   <a:srgbClr val="D4D4D4"/>
                 </a:solidFill>
@@ -17432,7 +18411,7 @@
               <a:t>    </a:t>
             </a:r>
             <a:r>
-              <a:rPr sz="2000" i="0" b="0">
+              <a:rPr sz="1900" i="0" b="0">
                 <a:solidFill>
                   <a:srgbClr val="DCDCAA"/>
                 </a:solidFill>
@@ -17441,7 +18420,7 @@
               <a:t>archivoHistorico.add</a:t>
             </a:r>
             <a:r>
-              <a:rPr sz="2000" i="0" b="0">
+              <a:rPr sz="1900" i="0" b="0">
                 <a:solidFill>
                   <a:srgbClr val="D4D4D4"/>
                 </a:solidFill>
@@ -17450,7 +18429,7 @@
               <a:t>(</a:t>
             </a:r>
             <a:r>
-              <a:rPr sz="2000" i="0" b="0">
+              <a:rPr sz="1900" i="0" b="0">
                 <a:solidFill>
                   <a:srgbClr val="D4D4D4"/>
                 </a:solidFill>
@@ -17459,7 +18438,7 @@
               <a:t>e</a:t>
             </a:r>
             <a:r>
-              <a:rPr sz="2000" i="0" b="0">
+              <a:rPr sz="1900" i="0" b="0">
                 <a:solidFill>
                   <a:srgbClr val="D4D4D4"/>
                 </a:solidFill>
@@ -17471,11 +18450,11 @@
           <a:p>
             <a:pPr>
               <a:spcAft>
-                <a:spcPts val="428"/>
+                <a:spcPts val="407"/>
               </a:spcAft>
             </a:pPr>
             <a:r>
-              <a:rPr sz="2000" i="0" b="0">
+              <a:rPr sz="1900" i="0" b="0">
                 <a:solidFill>
                   <a:srgbClr val="D4D4D4"/>
                 </a:solidFill>
@@ -17484,7 +18463,7 @@
               <a:t>    </a:t>
             </a:r>
             <a:r>
-              <a:rPr sz="2000" i="0" b="0">
+              <a:rPr sz="1900" i="0" b="0">
                 <a:solidFill>
                   <a:srgbClr val="DCDCAA"/>
                 </a:solidFill>
@@ -17493,7 +18472,7 @@
               <a:t>indice.put</a:t>
             </a:r>
             <a:r>
-              <a:rPr sz="2000" i="0" b="0">
+              <a:rPr sz="1900" i="0" b="0">
                 <a:solidFill>
                   <a:srgbClr val="D4D4D4"/>
                 </a:solidFill>
@@ -17502,7 +18481,7 @@
               <a:t>(</a:t>
             </a:r>
             <a:r>
-              <a:rPr sz="2000" i="0" b="0">
+              <a:rPr sz="1900" i="0" b="0">
                 <a:solidFill>
                   <a:srgbClr val="DCDCAA"/>
                 </a:solidFill>
@@ -17511,7 +18490,7 @@
               <a:t>e.getId</a:t>
             </a:r>
             <a:r>
-              <a:rPr sz="2000" i="0" b="0">
+              <a:rPr sz="1900" i="0" b="0">
                 <a:solidFill>
                   <a:srgbClr val="D4D4D4"/>
                 </a:solidFill>
@@ -17520,7 +18499,7 @@
               <a:t>(), </a:t>
             </a:r>
             <a:r>
-              <a:rPr sz="2000" i="0" b="0">
+              <a:rPr sz="1900" i="0" b="0">
                 <a:solidFill>
                   <a:srgbClr val="D4D4D4"/>
                 </a:solidFill>
@@ -17529,7 +18508,7 @@
               <a:t>e</a:t>
             </a:r>
             <a:r>
-              <a:rPr sz="2000" i="0" b="0">
+              <a:rPr sz="1900" i="0" b="0">
                 <a:solidFill>
                   <a:srgbClr val="D4D4D4"/>
                 </a:solidFill>
@@ -17541,11 +18520,11 @@
           <a:p>
             <a:pPr>
               <a:spcAft>
-                <a:spcPts val="428"/>
+                <a:spcPts val="407"/>
               </a:spcAft>
             </a:pPr>
             <a:r>
-              <a:rPr sz="2000" i="0" b="0">
+              <a:rPr sz="1900" i="0" b="0">
                 <a:solidFill>
                   <a:srgbClr val="D4D4D4"/>
                 </a:solidFill>
@@ -17557,11 +18536,11 @@
           <a:p>
             <a:pPr>
               <a:spcAft>
-                <a:spcPts val="428"/>
+                <a:spcPts val="407"/>
               </a:spcAft>
             </a:pPr>
             <a:r>
-              <a:rPr sz="2000" i="0" b="0">
+              <a:rPr sz="1900" i="0" b="0">
                 <a:solidFill>
                   <a:srgbClr val="4EC9B0"/>
                 </a:solidFill>
@@ -17570,7 +18549,7 @@
               <a:t>String</a:t>
             </a:r>
             <a:r>
-              <a:rPr sz="2000" i="0" b="0">
+              <a:rPr sz="1900" i="0" b="0">
                 <a:solidFill>
                   <a:srgbClr val="D4D4D4"/>
                 </a:solidFill>
@@ -17579,7 +18558,7 @@
               <a:t> </a:t>
             </a:r>
             <a:r>
-              <a:rPr sz="2000" i="0" b="0">
+              <a:rPr sz="1900" i="0" b="0">
                 <a:solidFill>
                   <a:srgbClr val="D4D4D4"/>
                 </a:solidFill>
@@ -17588,7 +18567,7 @@
               <a:t>buscado</a:t>
             </a:r>
             <a:r>
-              <a:rPr sz="2000" i="0" b="0">
+              <a:rPr sz="1900" i="0" b="0">
                 <a:solidFill>
                   <a:srgbClr val="D4D4D4"/>
                 </a:solidFill>
@@ -17597,7 +18576,7 @@
               <a:t> = </a:t>
             </a:r>
             <a:r>
-              <a:rPr sz="2000" i="0" b="0">
+              <a:rPr sz="1900" i="0" b="0">
                 <a:solidFill>
                   <a:srgbClr val="CE9178"/>
                 </a:solidFill>
@@ -17606,7 +18585,7 @@
               <a:t>"H-5000"</a:t>
             </a:r>
             <a:r>
-              <a:rPr sz="2000" i="0" b="0">
+              <a:rPr sz="1900" i="0" b="0">
                 <a:solidFill>
                   <a:srgbClr val="D4D4D4"/>
                 </a:solidFill>
@@ -17615,7 +18594,7 @@
               <a:t>; </a:t>
             </a:r>
             <a:r>
-              <a:rPr sz="2000" i="1" b="0">
+              <a:rPr sz="1900" i="1" b="0">
                 <a:solidFill>
                   <a:srgbClr val="6A9955"/>
                 </a:solidFill>
